--- a/slides/datasets-in-10-minutes-ocnli.pptx
+++ b/slides/datasets-in-10-minutes-ocnli.pptx
@@ -34,8 +34,8 @@
     <p:sldId id="282" r:id="rId32"/>
     <p:sldId id="283" r:id="rId33"/>
     <p:sldId id="284" r:id="rId34"/>
-    <p:sldId id="285" r:id="rId35"/>
     <p:sldId id="286" r:id="rId36"/>
+    <p:sldId id="306" r:id="rId56"/>
     <p:sldId id="287" r:id="rId37"/>
     <p:sldId id="288" r:id="rId38"/>
     <p:sldId id="289" r:id="rId39"/>
@@ -50,14 +50,8 @@
     <p:sldId id="298" r:id="rId48"/>
     <p:sldId id="299" r:id="rId49"/>
     <p:sldId id="300" r:id="rId50"/>
-    <p:sldId id="301" r:id="rId51"/>
+    <p:sldId id="308" r:id="rId58"/>
     <p:sldId id="302" r:id="rId52"/>
-    <p:sldId id="303" r:id="rId53"/>
-    <p:sldId id="304" r:id="rId54"/>
-    <p:sldId id="305" r:id="rId55"/>
-    <p:sldId id="306" r:id="rId56"/>
-    <p:sldId id="307" r:id="rId57"/>
-    <p:sldId id="308" r:id="rId58"/>
     <p:sldId id="309" r:id="rId59"/>
     <p:sldId id="310" r:id="rId60"/>
     <p:sldId id="311" r:id="rId61"/>
@@ -7192,11 +7186,11 @@
         <p:spPr>
           <a:xfrm>
             <a:off x="548640" y="2647277"/>
-            <a:ext cx="8046720" cy="989965"/>
+            <a:ext cx="8046720" cy="1091565"/>
           </a:xfrm>
         </p:spPr>
         <p:txBody>
-          <a:bodyPr lIns="0" rIns="0" tIns="0" bIns="0">
+          <a:bodyPr lIns="0" rIns="0" tIns="0" bIns="101600">
             <a:noAutofit/>
           </a:bodyPr>
           <a:lstStyle/>
@@ -7245,15 +7239,15 @@
               </a:defRPr>
             </a:pPr>
             <a:r>
-              <a:rPr sz="2500" b="0" lang="ja-JP" altLang="en-US">
-                <a:solidFill>
-                  <a:srgbClr val="303437"/>
-                </a:solidFill>
-                <a:latin typeface="Noto Sans"/>
-                <a:ea typeface="Noto Sans CJK JP"/>
-                <a:cs typeface="Noto Sans"/>
-              </a:rPr>
-              <a:t>原生中国語で、前提から仮説を判断する</a:t>
+              <a:rPr sz="2200" b="0" lang="ja-JP" altLang="en-US">
+                <a:solidFill>
+                  <a:srgbClr val="303437"/>
+                </a:solidFill>
+                <a:latin typeface="Noto Sans"/>
+                <a:ea typeface="Noto Sans CJK JP"/>
+                <a:cs typeface="Noto Sans"/>
+              </a:rPr>
+              <a:t>中国語の前提から、仮説が成り立つかを判断する</a:t>
             </a:r>
           </a:p>
         </p:txBody>
@@ -7415,7 +7409,7 @@
                 <a:ea typeface="Noto Sans CJK JP"/>
                 <a:cs typeface="Noto Sans"/>
               </a:rPr>
-              <a:t>配布正解は、注釈者の多数決で決まる</a:t>
+              <a:t>開発用の正解は、5人の多数決で決まる</a:t>
             </a:r>
           </a:p>
         </p:txBody>
@@ -7468,7 +7462,7 @@
                 <a:ea typeface="Noto Sans CJK JP"/>
                 <a:cs typeface="Noto Sans"/>
               </a:rPr>
-              <a:t>座り方が食い違う。配布正解はcontradictionだが、5人の内訳は矛盾3・中立2で、全員一致ではない。</a:t>
+              <a:t>座り方が食い違う。正解はcontradictionだが、5人の内訳は矛盾3・中立2で、全員一致ではない。</a:t>
             </a:r>
           </a:p>
           <a:p>
@@ -7498,7 +7492,7 @@
                 <a:ea typeface="Noto Sans CJK JP"/>
                 <a:cs typeface="Noto Sans"/>
               </a:rPr>
-              <a:t>5人中3人以上が同じラベルを選んだ場合、その多数決ラベルを正解とする。</a:t>
+              <a:t>再注釈では、作成者のラベルに4人の独立した判断を加える。5人中3人以上が同じラベルを選ぶと、その多数決ラベルを正解とする。</a:t>
             </a:r>
           </a:p>
           <a:p>
@@ -7528,7 +7522,7 @@
                 <a:ea typeface="Noto Sans CJK JP"/>
                 <a:cs typeface="Noto Sans"/>
               </a:rPr>
-              <a:t>作成者のラベルに4人の独立した判断を加える。多数決が成立しない例は「-」として残し、通常の学習・評価から除く。</a:t>
+              <a:t>所定の3ラベルで多数決が成立しない例には「-」を付け、通常の学習・評価では除く。</a:t>
             </a:r>
           </a:p>
         </p:txBody>
@@ -8263,7 +8257,7 @@
                 <a:ea typeface="Noto Sans CJK JP"/>
                 <a:cs typeface="Noto Sans"/>
               </a:rPr>
-              <a:t>配布正解：中立（neutral）</a:t>
+              <a:t>正解：中立（neutral）</a:t>
             </a:r>
           </a:p>
         </p:txBody>
@@ -8317,22 +8311,19 @@
                 <a:ea typeface="Noto Sans CJK JP"/>
                 <a:cs typeface="Noto Sans"/>
               </a:rPr>
-              <a:t>[1] Hu et al. OCNLI公開dev、CC BY-NC 2.0。前提の出所は各文体資料。 dev row 1060 / id 1060 / news</a:t>
-            </a:r>
-          </a:p>
-          <a:p>
-            <a:pPr>
-              <a:lnSpc>
-                <a:spcPts val="940"/>
-              </a:lnSpc>
-              <a:buNone/>
-              <a:defRPr sz="810" b="0">
-                <a:solidFill>
-                  <a:srgbClr val="303437"/>
-                </a:solidFill>
-                <a:latin typeface="Noto Sans"/>
-              </a:defRPr>
-            </a:pPr>
+              <a:t>[1] Hu et al. (n.d.). OCNLI public development data. CC BY-NC 2.0.</a:t>
+            </a:r>
+            <a:r>
+              <a:rPr sz="810" b="0" lang="ja-JP" altLang="en-US">
+                <a:solidFill>
+                  <a:srgbClr val="626669"/>
+                </a:solidFill>
+                <a:latin typeface="Noto Sans"/>
+                <a:ea typeface="Noto Sans CJK JP"/>
+                <a:cs typeface="Noto Sans"/>
+              </a:rPr>
+              <a:t>  </a:t>
+            </a:r>
             <a:r>
               <a:rPr sz="810" b="0" lang="ja-JP" altLang="en-US">
                 <a:solidFill>
@@ -8409,7 +8400,7 @@
                 <a:ea typeface="Noto Sans CJK JP"/>
                 <a:cs typeface="Noto Sans"/>
               </a:rPr>
-              <a:t>中立は、前提だけで予定を確定できない</a:t>
+              <a:t>当初の予定日は、前提だけでは分からない</a:t>
             </a:r>
           </a:p>
         </p:txBody>
@@ -8713,7 +8704,7 @@
                 <a:ea typeface="Noto Sans CJK JP"/>
                 <a:cs typeface="Noto Sans"/>
               </a:rPr>
-              <a:t>原生中国語での収集と検証</a:t>
+              <a:t>中国語での作成と検証</a:t>
             </a:r>
           </a:p>
         </p:txBody>
@@ -8761,7 +8752,7 @@
                 <a:ea typeface="Noto Sans CJK JP"/>
                 <a:cs typeface="Noto Sans"/>
               </a:rPr>
-              <a:t>2. 原生中国語での収集と検証</a:t>
+              <a:t>2. 中国語での作成と検証</a:t>
             </a:r>
           </a:p>
         </p:txBody>
@@ -8910,7 +8901,7 @@
                 <a:ea typeface="Noto Sans CJK JP"/>
                 <a:cs typeface="Noto Sans"/>
               </a:rPr>
-              <a:t>XNLIは英語の推論問題を多言語へ翻訳した資源。OCNLIでは、翻訳調の表現や元の文化的背景への偏りを避けるため、中国語の素材と母語話者を使う。</a:t>
+              <a:t>XNLIは英語の推論問題を多言語へ翻訳した資源。一方、OCNLIは、中国語の素材から前提を集め、母語話者に仮説を書いてもらう。</a:t>
             </a:r>
           </a:p>
           <a:p>
@@ -8940,7 +8931,7 @@
                 <a:ea typeface="Noto Sans CJK JP"/>
                 <a:cs typeface="Noto Sans"/>
               </a:rPr>
-              <a:t>翻訳の品質と、注釈者が自然に使う語や推論の手掛かりは、それぞれ検討の対象になる。</a:t>
+              <a:t>翻訳調の表現や英語圏の文化的背景への偏りを避け、中国語を自然に使うときの推論を評価することを狙った。</a:t>
             </a:r>
           </a:p>
         </p:txBody>
@@ -8988,7 +8979,7 @@
                 <a:ea typeface="Noto Sans CJK JP"/>
                 <a:cs typeface="Noto Sans"/>
               </a:rPr>
-              <a:t>2. 原生中国語での収集と検証</a:t>
+              <a:t>2. 中国語での作成と検証</a:t>
             </a:r>
           </a:p>
         </p:txBody>
@@ -9230,7 +9221,7 @@
                 <a:ea typeface="Noto Sans CJK JP"/>
                 <a:cs typeface="Noto Sans"/>
               </a:rPr>
-              <a:t>2. 原生中国語での収集と検証</a:t>
+              <a:t>2. 中国語での作成と検証</a:t>
             </a:r>
           </a:p>
         </p:txBody>
@@ -10086,7 +10077,7 @@
                 <a:ea typeface="Noto Sans CJK JP"/>
                 <a:cs typeface="Noto Sans"/>
               </a:rPr>
-              <a:t>前提は8〜50文字の文から選ぶ。電話会話の転記記号を取り除く。素材の文を、仮説の言い換えで作り直す方式ではない。</a:t>
+              <a:t>前提は8〜50文字の文から選ぶ。電話会話では、転記に使われた記号を取り除く。</a:t>
             </a:r>
           </a:p>
           <a:p>
@@ -10194,7 +10185,7 @@
                 <a:ea typeface="Noto Sans CJK JP"/>
                 <a:cs typeface="Noto Sans"/>
               </a:rPr>
-              <a:t>2. 原生中国語での収集と検証</a:t>
+              <a:t>2. 中国語での作成と検証</a:t>
             </a:r>
           </a:p>
         </p:txBody>
@@ -10498,7 +10489,7 @@
                 <a:ea typeface="Noto Sans CJK JP"/>
                 <a:cs typeface="Noto Sans"/>
               </a:rPr>
-              <a:t>2. 原生中国語での収集と検証</a:t>
+              <a:t>2. 中国語での作成と検証</a:t>
             </a:r>
           </a:p>
         </p:txBody>
@@ -10641,7 +10632,7 @@
                 <a:ea typeface="Noto Sans CJK JP"/>
                 <a:cs typeface="Noto Sans"/>
               </a:rPr>
-              <a:t>言語を学ぶ母語話者が書き、別の人が確かめる</a:t>
+              <a:t>母語話者が仮説を書き、別の人が確かめる</a:t>
             </a:r>
           </a:p>
         </p:txBody>
@@ -10694,7 +10685,7 @@
                 <a:ea typeface="Noto Sans CJK JP"/>
                 <a:cs typeface="Noto Sans"/>
               </a:rPr>
-              <a:t>中国語または他言語を専攻する、中国語母語話者の大学生・大学院生145人が仮説を作成した。作成は1ペア約0.3元、再注釈は約0.2元。</a:t>
+              <a:t>中国語または他言語を専攻する、中国語母語話者の大学生・大学院生145人が仮説を作成した。</a:t>
             </a:r>
           </a:p>
           <a:p>
@@ -10802,7 +10793,7 @@
                 <a:ea typeface="Noto Sans CJK JP"/>
                 <a:cs typeface="Noto Sans"/>
               </a:rPr>
-              <a:t>2. 原生中国語での収集と検証</a:t>
+              <a:t>2. 中国語での作成と検証</a:t>
             </a:r>
           </a:p>
         </p:txBody>
@@ -10945,7 +10936,7 @@
                 <a:ea typeface="Noto Sans CJK JP"/>
                 <a:cs typeface="Noto Sans"/>
               </a:rPr>
-              <a:t>公開50k版の行数と、有効な正解ラベル</a:t>
+              <a:t>50k版の学習用と開発用には、正解が付いている</a:t>
             </a:r>
           </a:p>
         </p:txBody>
@@ -10993,7 +10984,7 @@
                 <a:ea typeface="Noto Sans CJK JP"/>
                 <a:cs typeface="Noto Sans"/>
               </a:rPr>
-              <a:t>2. 原生中国語での収集と検証</a:t>
+              <a:t>2. 中国語での作成と検証</a:t>
             </a:r>
           </a:p>
         </p:txBody>
@@ -11104,7 +11095,7 @@
                           <a:ea typeface="Noto Sans CJK JP"/>
                           <a:cs typeface="Noto Sans"/>
                         </a:rPr>
-                        <a:t>全行数</a:t>
+                        <a:t>文ペア数</a:t>
                       </a:r>
                     </a:p>
                   </a:txBody>
@@ -11160,7 +11151,7 @@
                           <a:ea typeface="Noto Sans CJK JP"/>
                           <a:cs typeface="Noto Sans"/>
                         </a:rPr>
-                        <a:t>3ラベルがある行</a:t>
+                        <a:t>正解付き</a:t>
                       </a:r>
                     </a:p>
                   </a:txBody>
@@ -11716,7 +11707,7 @@
                 <a:ea typeface="Noto Sans CJK JP"/>
                 <a:cs typeface="Noto Sans"/>
               </a:rPr>
-              <a:t>全行数は56,486組。trainの49組、devの50組は「-」。testは入力のみを公開し、正解は含まない。</a:t>
+              <a:t>計56,486組。学習用49組、開発用50組の「-」は評価から除く。テストは入力のみを公開し、正解は非公開。</a:t>
             </a:r>
           </a:p>
         </p:txBody>
@@ -11770,7 +11761,7 @@
                 <a:ea typeface="Noto Sans CJK JP"/>
                 <a:cs typeface="Noto Sans"/>
               </a:rPr>
-              <a:t>[1] Hu et al. OCNLI公式リポジトリ。固定版b53efdee1725、2026-10-18取得。</a:t>
+              <a:t>[1] Hu et al. (n.d.). OCNLI official repository.</a:t>
             </a:r>
             <a:r>
               <a:rPr sz="810" b="0" lang="ja-JP" altLang="en-US">
@@ -11859,7 +11850,7 @@
                 <a:ea typeface="Noto Sans CJK JP"/>
                 <a:cs typeface="Noto Sans"/>
               </a:rPr>
-              <a:t>公式リポジトリ</a:t>
+              <a:t>OCNLIを公開する公式リポジトリ</a:t>
             </a:r>
           </a:p>
         </p:txBody>
@@ -11908,83 +11899,6 @@
                 <a:cs typeface="Noto Sans"/>
               </a:rPr>
               <a:t>OCNLI</a:t>
-            </a:r>
-          </a:p>
-        </p:txBody>
-      </p:sp>
-      <p:sp>
-        <p:nvSpPr>
-          <p:cNvPr id="5" name="sources"/>
-          <p:cNvSpPr txBox="1"/>
-          <p:nvPr/>
-        </p:nvSpPr>
-        <p:spPr>
-          <a:xfrm>
-            <a:off x="502920" y="4700016"/>
-            <a:ext cx="8183879" cy="530352"/>
-          </a:xfrm>
-          <a:prstGeom prst="rect">
-            <a:avLst/>
-          </a:prstGeom>
-          <a:noFill/>
-        </p:spPr>
-        <p:txBody>
-          <a:bodyPr wrap="square" lIns="0" rIns="0" tIns="0" bIns="0">
-            <a:noAutofit/>
-          </a:bodyPr>
-          <a:lstStyle/>
-          <a:p>
-            <a:pPr algn="l">
-              <a:lnSpc>
-                <a:spcPts val="940"/>
-              </a:lnSpc>
-              <a:spcBef>
-                <a:spcPts val="0"/>
-              </a:spcBef>
-              <a:spcAft>
-                <a:spcPts val="140"/>
-              </a:spcAft>
-              <a:buNone/>
-              <a:defRPr sz="810" b="0">
-                <a:solidFill>
-                  <a:srgbClr val="303437"/>
-                </a:solidFill>
-                <a:latin typeface="Noto Sans"/>
-              </a:defRPr>
-            </a:pPr>
-            <a:r>
-              <a:rPr sz="810" b="0" lang="ja-JP" altLang="en-US">
-                <a:solidFill>
-                  <a:srgbClr val="626669"/>
-                </a:solidFill>
-                <a:latin typeface="Noto Sans"/>
-                <a:ea typeface="Noto Sans CJK JP"/>
-                <a:cs typeface="Noto Sans"/>
-              </a:rPr>
-              <a:t>[1] Hu et al. OCNLI公式リポジトリ。固定版b53efdee1725、2026-10-18取得。</a:t>
-            </a:r>
-            <a:r>
-              <a:rPr sz="810" b="0" lang="ja-JP" altLang="en-US">
-                <a:solidFill>
-                  <a:srgbClr val="626669"/>
-                </a:solidFill>
-                <a:latin typeface="Noto Sans"/>
-                <a:ea typeface="Noto Sans CJK JP"/>
-                <a:cs typeface="Noto Sans"/>
-              </a:rPr>
-              <a:t>  </a:t>
-            </a:r>
-            <a:r>
-              <a:rPr sz="810" b="0" lang="ja-JP" altLang="en-US">
-                <a:solidFill>
-                  <a:srgbClr val="626669"/>
-                </a:solidFill>
-                <a:latin typeface="Noto Sans"/>
-                <a:ea typeface="Noto Sans CJK JP"/>
-                <a:cs typeface="Noto Sans"/>
-                <a:hlinkClick r:id="rId3"/>
-              </a:rPr>
-              <a:t>https://github.com/CLUEbenchmark/OCNLI</a:t>
             </a:r>
           </a:p>
         </p:txBody>
@@ -12013,6 +11927,83 @@
           </a:prstGeom>
         </p:spPr>
       </p:pic>
+      <p:sp>
+        <p:nvSpPr>
+          <p:cNvPr id="7" name="sources"/>
+          <p:cNvSpPr txBox="1"/>
+          <p:nvPr/>
+        </p:nvSpPr>
+        <p:spPr>
+          <a:xfrm>
+            <a:off x="502920" y="4700016"/>
+            <a:ext cx="8183879" cy="530352"/>
+          </a:xfrm>
+          <a:prstGeom prst="rect">
+            <a:avLst/>
+          </a:prstGeom>
+          <a:noFill/>
+        </p:spPr>
+        <p:txBody>
+          <a:bodyPr wrap="square" lIns="0" rIns="0" tIns="0" bIns="0">
+            <a:noAutofit/>
+          </a:bodyPr>
+          <a:lstStyle/>
+          <a:p>
+            <a:pPr algn="l">
+              <a:lnSpc>
+                <a:spcPts val="940"/>
+              </a:lnSpc>
+              <a:spcBef>
+                <a:spcPts val="0"/>
+              </a:spcBef>
+              <a:spcAft>
+                <a:spcPts val="140"/>
+              </a:spcAft>
+              <a:buNone/>
+              <a:defRPr sz="810" b="0">
+                <a:solidFill>
+                  <a:srgbClr val="303437"/>
+                </a:solidFill>
+                <a:latin typeface="Noto Sans"/>
+              </a:defRPr>
+            </a:pPr>
+            <a:r>
+              <a:rPr sz="810" b="0" lang="ja-JP" altLang="en-US">
+                <a:solidFill>
+                  <a:srgbClr val="626669"/>
+                </a:solidFill>
+                <a:latin typeface="Noto Sans"/>
+                <a:ea typeface="Noto Sans CJK JP"/>
+                <a:cs typeface="Noto Sans"/>
+              </a:rPr>
+              <a:t>[1] Hu et al. (n.d.). OCNLI official repository.</a:t>
+            </a:r>
+            <a:r>
+              <a:rPr sz="810" b="0" lang="ja-JP" altLang="en-US">
+                <a:solidFill>
+                  <a:srgbClr val="626669"/>
+                </a:solidFill>
+                <a:latin typeface="Noto Sans"/>
+                <a:ea typeface="Noto Sans CJK JP"/>
+                <a:cs typeface="Noto Sans"/>
+              </a:rPr>
+              <a:t>  </a:t>
+            </a:r>
+            <a:r>
+              <a:rPr sz="810" b="0" lang="ja-JP" altLang="en-US">
+                <a:solidFill>
+                  <a:srgbClr val="626669"/>
+                </a:solidFill>
+                <a:latin typeface="Noto Sans"/>
+                <a:ea typeface="Noto Sans CJK JP"/>
+                <a:cs typeface="Noto Sans"/>
+                <a:hlinkClick r:id="rId3"/>
+              </a:rPr>
+              <a:t>https://github.com/CLUEbenchmark/OCNLI</a:t>
+            </a:r>
+          </a:p>
+        </p:txBody>
+      </p:sp>
     </p:spTree>
   </p:cSld>
   <p:clrMapOvr>
@@ -12074,7 +12065,7 @@
                 <a:ea typeface="Noto Sans CJK JP"/>
                 <a:cs typeface="Noto Sans"/>
               </a:rPr>
-              <a:t>50k版は、前提を共有して異なる仮説を評価する</a:t>
+              <a:t>前提が重なる50k版と、重ならない30k版</a:t>
             </a:r>
           </a:p>
         </p:txBody>
@@ -12127,7 +12118,7 @@
                 <a:ea typeface="Noto Sans CJK JP"/>
                 <a:cs typeface="Noto Sans"/>
               </a:rPr>
-              <a:t>公開50k学習集合とdevでは、同じ前提文が複数の分割に現れる。</a:t>
+              <a:t>50k版では、学習用と開発用に同じ前提文が現れる。ただし、組み合わせる仮説は異なる。</a:t>
             </a:r>
           </a:p>
           <a:p>
@@ -12157,7 +12148,7 @@
                 <a:ea typeface="Noto Sans CJK JP"/>
                 <a:cs typeface="Noto Sans"/>
               </a:rPr>
-              <a:t>固定公開版では、train.50kとdevが共有する前提文は2,184種類。同じ前提・仮説の完全一致ペアは0組だった。</a:t>
+              <a:t>前提が重ならない条件で評価するために、30k版の学習用データも提供されている。開発用・テスト用は50k版と共通である。</a:t>
             </a:r>
           </a:p>
           <a:p>
@@ -12187,7 +12178,7 @@
                 <a:ea typeface="Noto Sans CJK JP"/>
                 <a:cs typeface="Noto Sans"/>
               </a:rPr>
-              <a:t>前提の重複を除く学習用のtrain.30kも提供される。実測30,286組で、devと同じ前提文は0種類。10k・3k版も同じdev・testを使う。</a:t>
+              <a:t>10k・3k版もあり、学習データを少なくしたときの成績を調べられる。</a:t>
             </a:r>
           </a:p>
         </p:txBody>
@@ -12235,7 +12226,7 @@
                 <a:ea typeface="Noto Sans CJK JP"/>
                 <a:cs typeface="Noto Sans"/>
               </a:rPr>
-              <a:t>2. 原生中国語での収集と検証</a:t>
+              <a:t>2. 中国語での作成と検証</a:t>
             </a:r>
           </a:p>
         </p:txBody>
@@ -12289,7 +12280,7 @@
                 <a:ea typeface="Noto Sans CJK JP"/>
                 <a:cs typeface="Noto Sans"/>
               </a:rPr>
-              <a:t>[1] Hu et al. OCNLI公式リポジトリ。固定版b53efdee1725、2026-10-18取得。</a:t>
+              <a:t>[1] Hu et al. (n.d.). OCNLI official repository.</a:t>
             </a:r>
             <a:r>
               <a:rPr sz="810" b="0" lang="ja-JP" altLang="en-US">
@@ -12492,7 +12483,7 @@
                 <a:ea typeface="Noto Sans CJK JP"/>
                 <a:cs typeface="Noto Sans"/>
               </a:rPr>
-              <a:t>正解率は、ラベルが一致したペアの割合</a:t>
+              <a:t>予測ラベルが、正解と一致した割合で評価する</a:t>
             </a:r>
           </a:p>
         </p:txBody>
@@ -12545,7 +12536,7 @@
                 <a:ea typeface="Noto Sans CJK JP"/>
                 <a:cs typeface="Noto Sans"/>
               </a:rPr>
-              <a:t>多数決が成立しない「-」を除き、配布正解と予測ラベルが一致する割合を正解率とする。</a:t>
+              <a:t>正答率（Accuracy）は、正解と予測のラベルが一致した文ペアの割合。「-」を除いて評価する。</a:t>
             </a:r>
           </a:p>
           <a:p>
@@ -12575,7 +12566,7 @@
                 <a:ea typeface="Noto Sans CJK JP"/>
                 <a:cs typeface="Noto Sans"/>
               </a:rPr>
-              <a:t>公開devなら2,950組で評価できる。常にneutralと答える基準は、1,103 ÷ 2,950 = 37.39%。公式評価関数と公開原票から再計算した。</a:t>
+              <a:t>公開されている開発用なら2,950組で評価できる。全てにneutralと答えるだけでも、1,103 ÷ 2,950 = 37.39%になる。</a:t>
             </a:r>
           </a:p>
           <a:p>
@@ -12605,7 +12596,7 @@
                 <a:ea typeface="Noto Sans CJK JP"/>
                 <a:cs typeface="Noto Sans"/>
               </a:rPr>
-              <a:t>2020年のモデル成績は、学習集合で訓練・微調整したモデルを非公開ラベルのtestで評価した値。5回の学習試行の平均と標準偏差を報告する。</a:t>
+              <a:t>2020年のモデル成績は、学習用データで訓練・微調整し、非公開ラベルのテストで評価した値。5回の学習試行の平均と標準偏差を報告する。</a:t>
             </a:r>
           </a:p>
         </p:txBody>
@@ -12758,7 +12749,7 @@
                 <a:ea typeface="Noto Sans CJK JP"/>
                 <a:cs typeface="Noto Sans"/>
               </a:rPr>
-              <a:t>[2] Hu et al. OCNLI公式baseline評価コード、evaluate_classifier。</a:t>
+              <a:t>[2] Hu et al. (n.d.). OCNLI official baseline evaluation code.</a:t>
             </a:r>
             <a:r>
               <a:rPr sz="810" b="0" lang="ja-JP" altLang="en-US">
@@ -12847,7 +12838,7 @@
                 <a:ea typeface="Noto Sans CJK JP"/>
                 <a:cs typeface="Noto Sans"/>
               </a:rPr>
-              <a:t>2020年：50k版で学習したモデルのtest正解率</a:t>
+              <a:t>2020年：50k版で学習したモデルのテスト正答率</a:t>
             </a:r>
           </a:p>
         </p:txBody>
@@ -13005,7 +12996,7 @@
                           <a:ea typeface="Noto Sans CJK JP"/>
                           <a:cs typeface="Noto Sans"/>
                         </a:rPr>
-                        <a:t>正解率（%）</a:t>
+                        <a:t>正答率（%）</a:t>
                       </a:r>
                     </a:p>
                   </a:txBody>
@@ -13800,7 +13791,7 @@
                 <a:ea typeface="Noto Sans CJK JP"/>
                 <a:cs typeface="Noto Sans"/>
               </a:rPr>
-              <a:t>人手評価は、別の300組を5人で判定した</a:t>
+              <a:t>人による評価は、テスト300組で正答率90.3%</a:t>
             </a:r>
           </a:p>
         </p:txBody>
@@ -13853,7 +13844,7 @@
                 <a:ea typeface="Noto Sans CJK JP"/>
                 <a:cs typeface="Noto Sans"/>
               </a:rPr>
-              <a:t>収集・検証に参加していない中国語母語話者の学生5人へ、20例で練習した後、testから無作為に選んだ300組を提示した。</a:t>
+              <a:t>収集・検証に参加していない中国語母語話者の学生5人が、20例で練習した後、テストから無作為に選んだ300組を判定した。</a:t>
             </a:r>
           </a:p>
           <a:p>
@@ -13883,7 +13874,7 @@
                 <a:ea typeface="Noto Sans CJK JP"/>
                 <a:cs typeface="Noto Sans"/>
               </a:rPr>
-              <a:t>5人の多数決を配布正解と比較し、90.3%の正解率を得た。多数決が成立しない2組には、testで最多のneutralを割り当てた。</a:t>
+              <a:t>5人の多数決を正解ラベルと比較し、正答率90.3%を得た。多数決が成立しない2組には、テストで最も多いneutralを割り当てた。</a:t>
             </a:r>
           </a:p>
           <a:p>
@@ -13913,7 +13904,7 @@
                 <a:ea typeface="Noto Sans CJK JP"/>
                 <a:cs typeface="Noto Sans"/>
               </a:rPr>
-              <a:t>2020年のRoBERTa 78.2%との差は約12.1ポイント。人手は300組、モデルは有効なtest全体という、異なる評価範囲を記した比較である。</a:t>
+              <a:t>2020年のRoBERTaは78.2%だった。人の成績は300組、モデルの成績は有効なテスト全体に対する値である。</a:t>
             </a:r>
           </a:p>
         </p:txBody>
@@ -15170,7 +15161,7 @@
                 <a:ea typeface="Noto Sans CJK JP"/>
                 <a:cs typeface="Noto Sans"/>
               </a:rPr>
-              <a:t>CLEVAでの採用と現在の配布</a:t>
+              <a:t>入手方法とCLEVAでの利用</a:t>
             </a:r>
           </a:p>
         </p:txBody>
@@ -15218,7 +15209,7 @@
                 <a:ea typeface="Noto Sans CJK JP"/>
                 <a:cs typeface="Noto Sans"/>
               </a:rPr>
-              <a:t>4. CLEVAでの採用と現在の配布</a:t>
+              <a:t>4. 入手方法とCLEVAでの利用</a:t>
             </a:r>
           </a:p>
         </p:txBody>
@@ -15337,7 +15328,7 @@
                 <a:ea typeface="Noto Sans CJK JP"/>
                 <a:cs typeface="Noto Sans"/>
               </a:rPr>
-              <a:t>2023年のCLEVAは、commonsense_reasoningのtextual_entailmentでOCNLIから標本を選び、多肢選択形式にして正解率を測る。</a:t>
+              <a:t>2023年のCLEVAは、OCNLIの文ペアを多肢選択形式にして、自然言語推論を正答率で評価する。</a:t>
             </a:r>
           </a:p>
           <a:p>
@@ -15367,7 +15358,7 @@
                 <a:ea typeface="Noto Sans CJK JP"/>
                 <a:cs typeface="Noto Sans"/>
               </a:rPr>
-              <a:t>公開論文の「篮子嘛,一块钱…」と「这个篮子是可以卖的。」は、OCNLI devのid1162に全文一致し、配布ラベルもentailmentだった。</a:t>
+              <a:t>公開論文には、本編の実例1と同じ「篮子嘛,一块钱…」と「这个篮子是可以卖的。」を使った設問が掲載されている。</a:t>
             </a:r>
           </a:p>
           <a:p>
@@ -15397,7 +15388,7 @@
                 <a:ea typeface="Noto Sans CJK JP"/>
                 <a:cs typeface="Noto Sans"/>
               </a:rPr>
-              <a:t>CLEVAが選んだOCNLIの全原票・分割・テンプレート本文は、今回の取得範囲では確認できなかった。</a:t>
+              <a:t>CLEVAで使われた全問題や抽出範囲は、公開説明からは確認できない。</a:t>
             </a:r>
           </a:p>
         </p:txBody>
@@ -15445,7 +15436,7 @@
                 <a:ea typeface="Noto Sans CJK JP"/>
                 <a:cs typeface="Noto Sans"/>
               </a:rPr>
-              <a:t>4. CLEVAでの採用と現在の配布</a:t>
+              <a:t>4. 入手方法とCLEVAでの利用</a:t>
             </a:r>
           </a:p>
         </p:txBody>
@@ -15550,7 +15541,7 @@
                 <a:ea typeface="Noto Sans CJK JP"/>
                 <a:cs typeface="Noto Sans"/>
               </a:rPr>
-              <a:t>[2] Stanford CRFM. HELM v0.4.0 CLEVAScenario / CLEVACommonsenseReasoningScenario.</a:t>
+              <a:t>[2] Stanford CRFM (n.d.). CLEVACommonsenseReasoningScenario. HELM.</a:t>
             </a:r>
           </a:p>
           <a:p>
@@ -15690,7 +15681,7 @@
                 <a:ea typeface="Noto Sans CJK JP"/>
                 <a:cs typeface="Noto Sans"/>
               </a:rPr>
-              <a:t>4. CLEVAでの採用と現在の配布</a:t>
+              <a:t>4. 入手方法とCLEVAでの利用</a:t>
             </a:r>
           </a:p>
         </p:txBody>
@@ -16302,22 +16293,19 @@
                 <a:ea typeface="Noto Sans CJK JP"/>
                 <a:cs typeface="Noto Sans"/>
               </a:rPr>
-              <a:t>[1] Li et al. (2023). CLEVA: Chinese Language Models EVAluation Platform. EMNLP System Demonstrations. OCNLI dev id1162との照合。</a:t>
-            </a:r>
-          </a:p>
-          <a:p>
-            <a:pPr>
-              <a:lnSpc>
-                <a:spcPts val="940"/>
-              </a:lnSpc>
-              <a:buNone/>
-              <a:defRPr sz="810" b="0">
-                <a:solidFill>
-                  <a:srgbClr val="303437"/>
-                </a:solidFill>
-                <a:latin typeface="Noto Sans"/>
-              </a:defRPr>
-            </a:pPr>
+              <a:t>[1] Li et al. (2023). CLEVA: Chinese Language Models EVAluation Platform. EMNLP System Demonstrations.</a:t>
+            </a:r>
+            <a:r>
+              <a:rPr sz="810" b="0" lang="ja-JP" altLang="en-US">
+                <a:solidFill>
+                  <a:srgbClr val="626669"/>
+                </a:solidFill>
+                <a:latin typeface="Noto Sans"/>
+                <a:ea typeface="Noto Sans CJK JP"/>
+                <a:cs typeface="Noto Sans"/>
+              </a:rPr>
+              <a:t>  </a:t>
+            </a:r>
             <a:r>
               <a:rPr sz="810" b="0" lang="ja-JP" altLang="en-US">
                 <a:solidFill>
@@ -16477,7 +16465,7 @@
                 <a:ea typeface="Noto Sans CJK JP"/>
                 <a:cs typeface="Noto Sans"/>
               </a:rPr>
-              <a:t>原生中国語での収集と検証</a:t>
+              <a:t>中国語での作成と検証</a:t>
             </a:r>
           </a:p>
           <a:p>
@@ -16537,7 +16525,7 @@
                 <a:ea typeface="Noto Sans CJK JP"/>
                 <a:cs typeface="Noto Sans"/>
               </a:rPr>
-              <a:t>CLEVAでの採用と現在の配布</a:t>
+              <a:t>入手方法とCLEVAでの利用</a:t>
             </a:r>
           </a:p>
         </p:txBody>
@@ -16651,7 +16639,7 @@
                 <a:ea typeface="Noto Sans CJK JP"/>
                 <a:cs typeface="Noto Sans"/>
               </a:rPr>
-              <a:t>HELMには実装と設定があり、公開実行は0件</a:t>
+              <a:t>現在の入手先と、引用文の利用条件</a:t>
             </a:r>
           </a:p>
         </p:txBody>
@@ -16680,91 +16668,91 @@
           <a:p>
             <a:pPr marL="457200" indent="-355600">
               <a:lnSpc>
-                <a:spcPts val="2320"/>
+                <a:spcPts val="2379"/>
               </a:lnSpc>
               <a:spcAft>
                 <a:spcPts val="700"/>
               </a:spcAft>
-              <a:buSzPct val="68205"/>
+              <a:buSzPct val="66500"/>
               <a:buFont typeface="Noto Sans CJK JP"/>
               <a:buChar char="●"/>
-              <a:defRPr sz="1950" b="0">
-                <a:solidFill>
-                  <a:srgbClr val="303437"/>
-                </a:solidFill>
-                <a:latin typeface="Noto Sans"/>
-              </a:defRPr>
-            </a:pPr>
-            <a:r>
-              <a:rPr sz="1950" b="0" lang="ja-JP" altLang="en-US">
-                <a:solidFill>
-                  <a:srgbClr val="303437"/>
-                </a:solidFill>
-                <a:latin typeface="Noto Sans"/>
-                <a:ea typeface="Noto Sans CJK JP"/>
-                <a:cs typeface="Noto Sans"/>
-              </a:rPr>
-              <a:t>HELM Classic v0.4.0は、CLEVAのversion・subtask・prompt_idを受け取り、prompts.jsonで入力と選択肢を変換する。textual_entailmentの設定はprompt_id 0〜5の6種類。</a:t>
+              <a:defRPr sz="2000" b="0">
+                <a:solidFill>
+                  <a:srgbClr val="303437"/>
+                </a:solidFill>
+                <a:latin typeface="Noto Sans"/>
+              </a:defRPr>
+            </a:pPr>
+            <a:r>
+              <a:rPr sz="2000" b="0" lang="ja-JP" altLang="en-US">
+                <a:solidFill>
+                  <a:srgbClr val="303437"/>
+                </a:solidFill>
+                <a:latin typeface="Noto Sans"/>
+                <a:ea typeface="Noto Sans CJK JP"/>
+                <a:cs typeface="Noto Sans"/>
+              </a:rPr>
+              <a:t>公式リポジトリは50k・30k・10k・3kの学習用データと、共通の開発用・正解非公開のテスト用データを公開する。CLUEの公開ZIPは50k版を収録する。</a:t>
             </a:r>
           </a:p>
           <a:p>
             <a:pPr marL="457200" indent="-355600">
               <a:lnSpc>
-                <a:spcPts val="2320"/>
+                <a:spcPts val="2379"/>
               </a:lnSpc>
               <a:spcAft>
                 <a:spcPts val="700"/>
               </a:spcAft>
-              <a:buSzPct val="68205"/>
+              <a:buSzPct val="66500"/>
               <a:buFont typeface="Noto Sans CJK JP"/>
               <a:buChar char="●"/>
-              <a:defRPr sz="1950" b="0">
-                <a:solidFill>
-                  <a:srgbClr val="303437"/>
-                </a:solidFill>
-                <a:latin typeface="Noto Sans"/>
-              </a:defRPr>
-            </a:pPr>
-            <a:r>
-              <a:rPr sz="1950" b="0" lang="ja-JP" altLang="en-US">
-                <a:solidFill>
-                  <a:srgbClr val="303437"/>
-                </a:solidFill>
-                <a:latin typeface="Noto Sans"/>
-                <a:ea typeface="Noto Sans CJK JP"/>
-                <a:cs typeface="Noto Sans"/>
-              </a:rPr>
-              <a:t>2023-11-17の固定公開版に含まれる8,526実行を調べると、CLEVAの実行は0件。OCNLIの公開HELM成績や実要求出力は、この版からは得られない。</a:t>
+              <a:defRPr sz="2000" b="0">
+                <a:solidFill>
+                  <a:srgbClr val="303437"/>
+                </a:solidFill>
+                <a:latin typeface="Noto Sans"/>
+              </a:defRPr>
+            </a:pPr>
+            <a:r>
+              <a:rPr sz="2000" b="0" lang="ja-JP" altLang="en-US">
+                <a:solidFill>
+                  <a:srgbClr val="303437"/>
+                </a:solidFill>
+                <a:latin typeface="Noto Sans"/>
+                <a:ea typeface="Noto Sans CJK JP"/>
+                <a:cs typeface="Noto Sans"/>
+              </a:rPr>
+              <a:t>OCNLIはCC BY-NC 2.0を掲示する。帰属を示し、非商用の条件を守る。ニュースの前提はLCMCからELRAの許可を得て採用したと記される。</a:t>
             </a:r>
           </a:p>
           <a:p>
             <a:pPr marL="457200" indent="-355600">
               <a:lnSpc>
-                <a:spcPts val="2320"/>
-              </a:lnSpc>
-              <a:spcAft>
-                <a:spcPts val="0"/>
-              </a:spcAft>
-              <a:buSzPct val="68205"/>
+                <a:spcPts val="2379"/>
+              </a:lnSpc>
+              <a:spcAft>
+                <a:spcPts val="0"/>
+              </a:spcAft>
+              <a:buSzPct val="66500"/>
               <a:buFont typeface="Noto Sans CJK JP"/>
               <a:buChar char="●"/>
-              <a:defRPr sz="1950" b="0">
-                <a:solidFill>
-                  <a:srgbClr val="303437"/>
-                </a:solidFill>
-                <a:latin typeface="Noto Sans"/>
-              </a:defRPr>
-            </a:pPr>
-            <a:r>
-              <a:rPr sz="1950" b="0" lang="ja-JP" altLang="en-US">
-                <a:solidFill>
-                  <a:srgbClr val="303437"/>
-                </a:solidFill>
-                <a:latin typeface="Noto Sans"/>
-                <a:ea typeface="Noto Sans CJK JP"/>
-                <a:cs typeface="Noto Sans"/>
-              </a:rPr>
-              <a:t>実装先のCLEVA配布URLは今回も取得できなかった。元OCNLIの50k学習・dev・testを、CLEVAの抽出・提示例数と同一の条件には置き換えない。</a:t>
+              <a:defRPr sz="2000" b="0">
+                <a:solidFill>
+                  <a:srgbClr val="303437"/>
+                </a:solidFill>
+                <a:latin typeface="Noto Sans"/>
+              </a:defRPr>
+            </a:pPr>
+            <a:r>
+              <a:rPr sz="2000" b="0" lang="ja-JP" altLang="en-US">
+                <a:solidFill>
+                  <a:srgbClr val="303437"/>
+                </a:solidFill>
+                <a:latin typeface="Noto Sans"/>
+                <a:ea typeface="Noto Sans CJK JP"/>
+                <a:cs typeface="Noto Sans"/>
+              </a:rPr>
+              <a:t>前提には政府報告、ニュース、小説、番組・電話会話が含まれる。引用には、データセットと原資料それぞれの出所も関わる。</a:t>
             </a:r>
           </a:p>
         </p:txBody>
@@ -16812,7 +16800,7 @@
                 <a:ea typeface="Noto Sans CJK JP"/>
                 <a:cs typeface="Noto Sans"/>
               </a:rPr>
-              <a:t>4. CLEVAでの採用と現在の配布</a:t>
+              <a:t>4. 入手方法とCLEVAでの利用</a:t>
             </a:r>
           </a:p>
         </p:txBody>
@@ -16866,22 +16854,8 @@
                 <a:ea typeface="Noto Sans CJK JP"/>
                 <a:cs typeface="Noto Sans"/>
               </a:rPr>
-              <a:t>[1] Stanford CRFM. HELM v0.4.0、CLEVA v1の課題・prompt_id設定。</a:t>
-            </a:r>
-          </a:p>
-          <a:p>
-            <a:pPr>
-              <a:lnSpc>
-                <a:spcPts val="940"/>
-              </a:lnSpc>
-              <a:buNone/>
-              <a:defRPr sz="810" b="0">
-                <a:solidFill>
-                  <a:srgbClr val="303437"/>
-                </a:solidFill>
-                <a:latin typeface="Noto Sans"/>
-              </a:defRPr>
-            </a:pPr>
+              <a:t>[1] Hu et al. (n.d.). OCNLI official repository.</a:t>
+            </a:r>
             <a:r>
               <a:rPr sz="810" b="0" lang="ja-JP" altLang="en-US">
                 <a:solidFill>
@@ -16890,9 +16864,20 @@
                 <a:latin typeface="Noto Sans"/>
                 <a:ea typeface="Noto Sans CJK JP"/>
                 <a:cs typeface="Noto Sans"/>
-                <a:hlinkClick r:id="rId3"/>
-              </a:rPr>
-              <a:t>https://github.com/stanford-crfm/helm/blob/v0.4.0/src/helm/benchmark/presentation/run_specs_cleva_v1.conf</a:t>
+              </a:rPr>
+              <a:t>  </a:t>
+            </a:r>
+            <a:r>
+              <a:rPr sz="810" b="0" lang="ja-JP" altLang="en-US">
+                <a:solidFill>
+                  <a:srgbClr val="626669"/>
+                </a:solidFill>
+                <a:latin typeface="Noto Sans"/>
+                <a:ea typeface="Noto Sans CJK JP"/>
+                <a:cs typeface="Noto Sans"/>
+                <a:hlinkClick r:id="rId2"/>
+              </a:rPr>
+              <a:t>https://github.com/CLUEbenchmark/OCNLI</a:t>
             </a:r>
           </a:p>
         </p:txBody>
@@ -16958,127 +16943,14 @@
                 <a:ea typeface="Noto Sans CJK JP"/>
                 <a:cs typeface="Noto Sans"/>
               </a:rPr>
-              <a:t>現在の入手先と、引用文の利用条件</a:t>
+              <a:t>JSONから、前提・仮説・ラベルを読む</a:t>
             </a:r>
           </a:p>
         </p:txBody>
       </p:sp>
       <p:sp>
         <p:nvSpPr>
-          <p:cNvPr id="3" name="Text Placeholder 2"/>
-          <p:cNvSpPr>
-            <a:spLocks noGrp="1"/>
-          </p:cNvSpPr>
-          <p:nvPr>
-            <p:ph type="body" idx="1"/>
-          </p:nvPr>
-        </p:nvSpPr>
-        <p:spPr>
-          <a:xfrm>
-            <a:off x="594360" y="1463040"/>
-            <a:ext cx="7955279" cy="3044952"/>
-          </a:xfrm>
-        </p:spPr>
-        <p:txBody>
-          <a:bodyPr wrap="square" tIns="91440" bIns="91440">
-            <a:noAutofit/>
-          </a:bodyPr>
-          <a:lstStyle/>
-          <a:p>
-            <a:pPr marL="457200" indent="-355600">
-              <a:lnSpc>
-                <a:spcPts val="2379"/>
-              </a:lnSpc>
-              <a:spcAft>
-                <a:spcPts val="700"/>
-              </a:spcAft>
-              <a:buSzPct val="66500"/>
-              <a:buFont typeface="Noto Sans CJK JP"/>
-              <a:buChar char="●"/>
-              <a:defRPr sz="2000" b="0">
-                <a:solidFill>
-                  <a:srgbClr val="303437"/>
-                </a:solidFill>
-                <a:latin typeface="Noto Sans"/>
-              </a:defRPr>
-            </a:pPr>
-            <a:r>
-              <a:rPr sz="2000" b="0" lang="ja-JP" altLang="en-US">
-                <a:solidFill>
-                  <a:srgbClr val="303437"/>
-                </a:solidFill>
-                <a:latin typeface="Noto Sans"/>
-                <a:ea typeface="Noto Sans CJK JP"/>
-                <a:cs typeface="Noto Sans"/>
-              </a:rPr>
-              <a:t>公式リポジトリは50k・30k・10k・3kの学習集合と、共通のdev・ラベル非公開testを公開する。CLUEの公開ZIPは50k・dev・testを収録する。</a:t>
-            </a:r>
-          </a:p>
-          <a:p>
-            <a:pPr marL="457200" indent="-355600">
-              <a:lnSpc>
-                <a:spcPts val="2379"/>
-              </a:lnSpc>
-              <a:spcAft>
-                <a:spcPts val="700"/>
-              </a:spcAft>
-              <a:buSzPct val="66500"/>
-              <a:buFont typeface="Noto Sans CJK JP"/>
-              <a:buChar char="●"/>
-              <a:defRPr sz="2000" b="0">
-                <a:solidFill>
-                  <a:srgbClr val="303437"/>
-                </a:solidFill>
-                <a:latin typeface="Noto Sans"/>
-              </a:defRPr>
-            </a:pPr>
-            <a:r>
-              <a:rPr sz="2000" b="0" lang="ja-JP" altLang="en-US">
-                <a:solidFill>
-                  <a:srgbClr val="303437"/>
-                </a:solidFill>
-                <a:latin typeface="Noto Sans"/>
-                <a:ea typeface="Noto Sans CJK JP"/>
-                <a:cs typeface="Noto Sans"/>
-              </a:rPr>
-              <a:t>OCNLIはCC BY-NC 2.0を掲示する。帰属を示し、非商用の条件を守る。newsの前提はLCMCからELRAの許可を得て採用したと記される。</a:t>
-            </a:r>
-          </a:p>
-          <a:p>
-            <a:pPr marL="457200" indent="-355600">
-              <a:lnSpc>
-                <a:spcPts val="2379"/>
-              </a:lnSpc>
-              <a:spcAft>
-                <a:spcPts val="0"/>
-              </a:spcAft>
-              <a:buSzPct val="66500"/>
-              <a:buFont typeface="Noto Sans CJK JP"/>
-              <a:buChar char="●"/>
-              <a:defRPr sz="2000" b="0">
-                <a:solidFill>
-                  <a:srgbClr val="303437"/>
-                </a:solidFill>
-                <a:latin typeface="Noto Sans"/>
-              </a:defRPr>
-            </a:pPr>
-            <a:r>
-              <a:rPr sz="2000" b="0" lang="ja-JP" altLang="en-US">
-                <a:solidFill>
-                  <a:srgbClr val="303437"/>
-                </a:solidFill>
-                <a:latin typeface="Noto Sans"/>
-                <a:ea typeface="Noto Sans CJK JP"/>
-                <a:cs typeface="Noto Sans"/>
-              </a:rPr>
-              <a:t>前提には政府報告、ニュース、小説、番組・電話会話が含まれる。原資料の出所と、データセットの作成者・ライセンスを区別して利用する。</a:t>
-            </a:r>
-          </a:p>
-        </p:txBody>
-      </p:sp>
-      <p:sp>
-        <p:nvSpPr>
-          <p:cNvPr id="4" name="Title 3"/>
+          <p:cNvPr id="3" name="Title 2"/>
           <p:cNvSpPr>
             <a:spLocks noGrp="1"/>
           </p:cNvSpPr>
@@ -17119,14 +16991,295 @@
                 <a:ea typeface="Noto Sans CJK JP"/>
                 <a:cs typeface="Noto Sans"/>
               </a:rPr>
-              <a:t>4. CLEVAでの採用と現在の配布</a:t>
+              <a:t>4. 入手方法とCLEVAでの利用</a:t>
             </a:r>
           </a:p>
         </p:txBody>
       </p:sp>
       <p:sp>
         <p:nvSpPr>
-          <p:cNvPr id="5" name="sources"/>
+          <p:cNvPr id="4" name="code-frame"/>
+          <p:cNvSpPr/>
+          <p:nvPr/>
+        </p:nvSpPr>
+        <p:spPr>
+          <a:xfrm>
+            <a:off x="548640" y="1508760"/>
+            <a:ext cx="8046720" cy="1600199"/>
+          </a:xfrm>
+          <a:prstGeom prst="rect">
+            <a:avLst/>
+          </a:prstGeom>
+          <a:solidFill>
+            <a:srgbClr val="EBEDEB"/>
+          </a:solidFill>
+          <a:ln>
+            <a:noFill/>
+          </a:ln>
+          <a:effectLst/>
+        </p:spPr>
+        <p:style>
+          <a:lnRef idx="1">
+            <a:schemeClr val="accent1"/>
+          </a:lnRef>
+          <a:fillRef idx="3">
+            <a:schemeClr val="accent1"/>
+          </a:fillRef>
+          <a:effectRef idx="0">
+            <a:schemeClr val="accent1"/>
+          </a:effectRef>
+          <a:fontRef idx="minor">
+            <a:schemeClr val="lt1"/>
+          </a:fontRef>
+        </p:style>
+        <p:txBody>
+          <a:bodyPr rtlCol="0" anchor="t" wrap="none" lIns="152400" rIns="152400" tIns="45296" bIns="127000"/>
+          <a:lstStyle/>
+          <a:p>
+            <a:pPr algn="l">
+              <a:lnSpc>
+                <a:spcPts val="1904"/>
+              </a:lnSpc>
+              <a:spcBef>
+                <a:spcPts val="0"/>
+              </a:spcBef>
+              <a:spcAft>
+                <a:spcPts val="0"/>
+              </a:spcAft>
+              <a:buNone/>
+              <a:defRPr sz="1700" b="0">
+                <a:solidFill>
+                  <a:srgbClr val="303437"/>
+                </a:solidFill>
+                <a:latin typeface="Noto Sans"/>
+              </a:defRPr>
+            </a:pPr>
+            <a:r>
+              <a:rPr sz="1600" b="0" lang="ja-JP" altLang="en-US">
+                <a:solidFill>
+                  <a:srgbClr val="303437"/>
+                </a:solidFill>
+                <a:latin typeface="Liberation Mono"/>
+                <a:ea typeface="Noto Sans CJK JP"/>
+                <a:cs typeface="Liberation Mono"/>
+              </a:rPr>
+              <a:t>import json</a:t>
+            </a:r>
+          </a:p>
+          <a:p>
+            <a:pPr algn="l">
+              <a:lnSpc>
+                <a:spcPts val="1904"/>
+              </a:lnSpc>
+              <a:spcBef>
+                <a:spcPts val="0"/>
+              </a:spcBef>
+              <a:spcAft>
+                <a:spcPts val="0"/>
+              </a:spcAft>
+              <a:buNone/>
+              <a:defRPr sz="1700" b="0">
+                <a:solidFill>
+                  <a:srgbClr val="303437"/>
+                </a:solidFill>
+                <a:latin typeface="Noto Sans"/>
+              </a:defRPr>
+            </a:pPr>
+            <a:r>
+              <a:rPr sz="1600" b="0" lang="ja-JP" altLang="en-US">
+                <a:solidFill>
+                  <a:srgbClr val="303437"/>
+                </a:solidFill>
+                <a:latin typeface="Liberation Mono"/>
+                <a:ea typeface="Noto Sans CJK JP"/>
+                <a:cs typeface="Liberation Mono"/>
+              </a:rPr>
+              <a:t>with open('dev.json', encoding='utf-8') as f:</a:t>
+            </a:r>
+          </a:p>
+          <a:p>
+            <a:pPr algn="l">
+              <a:lnSpc>
+                <a:spcPts val="1904"/>
+              </a:lnSpc>
+              <a:spcBef>
+                <a:spcPts val="0"/>
+              </a:spcBef>
+              <a:spcAft>
+                <a:spcPts val="0"/>
+              </a:spcAft>
+              <a:buNone/>
+              <a:defRPr sz="1700" b="0">
+                <a:solidFill>
+                  <a:srgbClr val="303437"/>
+                </a:solidFill>
+                <a:latin typeface="Noto Sans"/>
+              </a:defRPr>
+            </a:pPr>
+            <a:r>
+              <a:rPr sz="1600" b="0" lang="ja-JP" altLang="en-US">
+                <a:solidFill>
+                  <a:srgbClr val="303437"/>
+                </a:solidFill>
+                <a:latin typeface="Liberation Mono"/>
+                <a:ea typeface="Noto Sans CJK JP"/>
+                <a:cs typeface="Liberation Mono"/>
+              </a:rPr>
+              <a:t>    pair = json.loads(next(f))</a:t>
+            </a:r>
+          </a:p>
+          <a:p>
+            <a:pPr algn="l">
+              <a:lnSpc>
+                <a:spcPts val="1904"/>
+              </a:lnSpc>
+              <a:spcBef>
+                <a:spcPts val="0"/>
+              </a:spcBef>
+              <a:spcAft>
+                <a:spcPts val="0"/>
+              </a:spcAft>
+              <a:buNone/>
+              <a:defRPr sz="1700" b="0">
+                <a:solidFill>
+                  <a:srgbClr val="303437"/>
+                </a:solidFill>
+                <a:latin typeface="Noto Sans"/>
+              </a:defRPr>
+            </a:pPr>
+            <a:r>
+              <a:rPr sz="1600" b="0" lang="ja-JP" altLang="en-US">
+                <a:solidFill>
+                  <a:srgbClr val="303437"/>
+                </a:solidFill>
+                <a:latin typeface="Liberation Mono"/>
+                <a:ea typeface="Noto Sans CJK JP"/>
+                <a:cs typeface="Liberation Mono"/>
+              </a:rPr>
+              <a:t>print(pair['sentence1'])</a:t>
+            </a:r>
+          </a:p>
+          <a:p>
+            <a:pPr algn="l">
+              <a:lnSpc>
+                <a:spcPts val="1904"/>
+              </a:lnSpc>
+              <a:spcBef>
+                <a:spcPts val="0"/>
+              </a:spcBef>
+              <a:spcAft>
+                <a:spcPts val="0"/>
+              </a:spcAft>
+              <a:buNone/>
+              <a:defRPr sz="1700" b="0">
+                <a:solidFill>
+                  <a:srgbClr val="303437"/>
+                </a:solidFill>
+                <a:latin typeface="Noto Sans"/>
+              </a:defRPr>
+            </a:pPr>
+            <a:r>
+              <a:rPr sz="1600" b="0" lang="ja-JP" altLang="en-US">
+                <a:solidFill>
+                  <a:srgbClr val="303437"/>
+                </a:solidFill>
+                <a:latin typeface="Liberation Mono"/>
+                <a:ea typeface="Noto Sans CJK JP"/>
+                <a:cs typeface="Liberation Mono"/>
+              </a:rPr>
+              <a:t>print(pair['sentence2'])</a:t>
+            </a:r>
+          </a:p>
+          <a:p>
+            <a:pPr algn="l">
+              <a:lnSpc>
+                <a:spcPts val="1904"/>
+              </a:lnSpc>
+              <a:spcBef>
+                <a:spcPts val="0"/>
+              </a:spcBef>
+              <a:spcAft>
+                <a:spcPts val="0"/>
+              </a:spcAft>
+              <a:buNone/>
+              <a:defRPr sz="1700" b="0">
+                <a:solidFill>
+                  <a:srgbClr val="303437"/>
+                </a:solidFill>
+                <a:latin typeface="Noto Sans"/>
+              </a:defRPr>
+            </a:pPr>
+            <a:r>
+              <a:rPr sz="1600" b="0" lang="ja-JP" altLang="en-US">
+                <a:solidFill>
+                  <a:srgbClr val="303437"/>
+                </a:solidFill>
+                <a:latin typeface="Liberation Mono"/>
+                <a:ea typeface="Noto Sans CJK JP"/>
+                <a:cs typeface="Liberation Mono"/>
+              </a:rPr>
+              <a:t>print(pair['label'])</a:t>
+            </a:r>
+          </a:p>
+        </p:txBody>
+      </p:sp>
+      <p:sp>
+        <p:nvSpPr>
+          <p:cNvPr id="5" name="TextBox 4"/>
+          <p:cNvSpPr txBox="1"/>
+          <p:nvPr/>
+        </p:nvSpPr>
+        <p:spPr>
+          <a:xfrm>
+            <a:off x="594360" y="3261361"/>
+            <a:ext cx="7955279" cy="546100"/>
+          </a:xfrm>
+          <a:prstGeom prst="rect">
+            <a:avLst/>
+          </a:prstGeom>
+          <a:noFill/>
+        </p:spPr>
+        <p:txBody>
+          <a:bodyPr wrap="square" lIns="0" rIns="0" tIns="0" bIns="0">
+            <a:noAutofit/>
+          </a:bodyPr>
+          <a:lstStyle/>
+          <a:p>
+            <a:pPr algn="l">
+              <a:lnSpc>
+                <a:spcPts val="1989"/>
+              </a:lnSpc>
+              <a:spcBef>
+                <a:spcPts val="0"/>
+              </a:spcBef>
+              <a:spcAft>
+                <a:spcPts val="0"/>
+              </a:spcAft>
+              <a:buNone/>
+              <a:defRPr sz="1900" b="0">
+                <a:solidFill>
+                  <a:srgbClr val="303437"/>
+                </a:solidFill>
+                <a:latin typeface="Noto Sans"/>
+              </a:defRPr>
+            </a:pPr>
+            <a:r>
+              <a:rPr sz="1700" b="0" lang="ja-JP" altLang="en-US">
+                <a:solidFill>
+                  <a:srgbClr val="303437"/>
+                </a:solidFill>
+                <a:latin typeface="Noto Sans"/>
+                <a:ea typeface="Noto Sans CJK JP"/>
+                <a:cs typeface="Noto Sans"/>
+              </a:rPr>
+              <a:t>1行が1組の文ペア。sentence1が前提、sentence2が仮説、labelが正解を表す。</a:t>
+            </a:r>
+          </a:p>
+        </p:txBody>
+      </p:sp>
+      <p:sp>
+        <p:nvSpPr>
+          <p:cNvPr id="6" name="sources"/>
           <p:cNvSpPr txBox="1"/>
           <p:nvPr/>
         </p:nvSpPr>
@@ -17173,7 +17326,7 @@
                 <a:ea typeface="Noto Sans CJK JP"/>
                 <a:cs typeface="Noto Sans"/>
               </a:rPr>
-              <a:t>[1] Hu et al. OCNLI公式リポジトリ。固定版b53efdee1725、2026-10-18取得。</a:t>
+              <a:t>[1] Hu et al. (n.d.). OCNLI public development data. CC BY-NC 2.0.</a:t>
             </a:r>
             <a:r>
               <a:rPr sz="810" b="0" lang="ja-JP" altLang="en-US">
@@ -17194,9 +17347,9 @@
                 <a:latin typeface="Noto Sans"/>
                 <a:ea typeface="Noto Sans CJK JP"/>
                 <a:cs typeface="Noto Sans"/>
-                <a:hlinkClick r:id="rId2"/>
-              </a:rPr>
-              <a:t>https://github.com/CLUEbenchmark/OCNLI</a:t>
+                <a:hlinkClick r:id="rId3"/>
+              </a:rPr>
+              <a:t>https://github.com/CLUEbenchmark/OCNLI/blob/main/data/ocnli/dev.json</a:t>
             </a:r>
           </a:p>
         </p:txBody>
@@ -17262,7 +17415,7 @@
                 <a:ea typeface="Noto Sans CJK JP"/>
                 <a:cs typeface="Noto Sans"/>
               </a:rPr>
-              <a:t>中国語の推論を、作成法と分割を含めて捉える</a:t>
+              <a:t>中国語の文と、そこから分かることを結び付ける</a:t>
             </a:r>
           </a:p>
         </p:txBody>
@@ -17315,7 +17468,7 @@
                 <a:ea typeface="Noto Sans CJK JP"/>
                 <a:cs typeface="Noto Sans"/>
               </a:rPr>
-              <a:t>OCNLIは、原生中国語の5文体の前提と、人が書いた仮説を含意・矛盾・中立で結ぶ。複数仮説と否定語への制約で、多様な推論を引き出した。</a:t>
+              <a:t>OCNLIは、中国語の5文体から集めた前提と、人が書いた仮説の関係を、含意・矛盾・中立で判定する。</a:t>
             </a:r>
           </a:p>
           <a:p>
@@ -17345,7 +17498,7 @@
                 <a:ea typeface="Noto Sans CJK JP"/>
                 <a:cs typeface="Noto Sans"/>
               </a:rPr>
-              <a:t>公開版は56,486組で、学習・開発には多数決不成立の例が残る。50k版の前提共有と、30k版の前提非共有は、評価条件の違いになる。</a:t>
+              <a:t>複数の仮説を書かせ、否定語の使用に制約を設けることで、単純な言い換え以外の推論も引き出した。</a:t>
             </a:r>
           </a:p>
           <a:p>
@@ -17375,7 +17528,7 @@
                 <a:ea typeface="Noto Sans CJK JP"/>
                 <a:cs typeface="Noto Sans"/>
               </a:rPr>
-              <a:t>2020年の教師あり評価、仮説のみの分析、CLEVAの多肢選択化は、それぞれ入力・分母・学習の仕方を確認して解釈する。</a:t>
+              <a:t>正解付きの学習用・開発用データを使って学習・評価できる。前提を共有する50k版と、前提が重ならない30k版が提供されている。</a:t>
             </a:r>
           </a:p>
         </p:txBody>
@@ -17423,7 +17576,7 @@
                 <a:ea typeface="Noto Sans CJK JP"/>
                 <a:cs typeface="Noto Sans"/>
               </a:rPr>
-              <a:t>4. CLEVAでの採用と現在の配布</a:t>
+              <a:t>4. 入手方法とCLEVAでの利用</a:t>
             </a:r>
           </a:p>
         </p:txBody>
@@ -17536,11 +17689,11 @@
         <p:spPr>
           <a:xfrm>
             <a:off x="548640" y="2484835"/>
-            <a:ext cx="8046720" cy="585216"/>
+            <a:ext cx="8046720" cy="686816"/>
           </a:xfrm>
         </p:spPr>
         <p:txBody>
-          <a:bodyPr wrap="square" lIns="0" rIns="0" tIns="0" bIns="0" anchor="ctr">
+          <a:bodyPr wrap="square" lIns="0" rIns="0" tIns="0" bIns="101600" anchor="ctr">
             <a:noAutofit/>
           </a:bodyPr>
           <a:lstStyle/>
@@ -17763,37 +17916,7 @@
                 <a:ea typeface="Noto Sans CJK JP"/>
                 <a:cs typeface="Noto Sans"/>
               </a:rPr>
-              <a:t>分割・注釈・実装の補足</a:t>
-            </a:r>
-          </a:p>
-          <a:p>
-            <a:pPr marL="457200" indent="-457200">
-              <a:lnSpc>
-                <a:spcPts val="3660"/>
-              </a:lnSpc>
-              <a:spcAft>
-                <a:spcPts val="0"/>
-              </a:spcAft>
-              <a:buSzPct val="100000"/>
-              <a:buFont typeface="Noto Sans CJK JP"/>
-              <a:buAutoNum type="arabicPeriod" startAt="3"/>
-              <a:defRPr sz="3000" b="1">
-                <a:solidFill>
-                  <a:srgbClr val="303437"/>
-                </a:solidFill>
-                <a:latin typeface="Noto Sans"/>
-              </a:defRPr>
-            </a:pPr>
-            <a:r>
-              <a:rPr sz="3000" b="1" lang="ja-JP" altLang="en-US">
-                <a:solidFill>
-                  <a:srgbClr val="303437"/>
-                </a:solidFill>
-                <a:latin typeface="Noto Sans"/>
-                <a:ea typeface="Noto Sans CJK JP"/>
-                <a:cs typeface="Noto Sans"/>
-              </a:rPr>
-              <a:t>研究と参考文献</a:t>
+              <a:t>学習データと参考文献</a:t>
             </a:r>
           </a:p>
         </p:txBody>
@@ -18565,7 +18688,7 @@
                 <a:ea typeface="Noto Sans CJK JP"/>
                 <a:cs typeface="Noto Sans"/>
               </a:rPr>
-              <a:t>配布正解：含意（entailment）</a:t>
+              <a:t>正解：含意（entailment）</a:t>
             </a:r>
           </a:p>
         </p:txBody>
@@ -18619,22 +18742,19 @@
                 <a:ea typeface="Noto Sans CJK JP"/>
                 <a:cs typeface="Noto Sans"/>
               </a:rPr>
-              <a:t>[1] Hu et al. OCNLI公開dev、CC BY-NC 2.0。前提の出所は各文体資料。 dev row 0 / id 0 / lit</a:t>
-            </a:r>
-          </a:p>
-          <a:p>
-            <a:pPr>
-              <a:lnSpc>
-                <a:spcPts val="940"/>
-              </a:lnSpc>
-              <a:buNone/>
-              <a:defRPr sz="810" b="0">
-                <a:solidFill>
-                  <a:srgbClr val="303437"/>
-                </a:solidFill>
-                <a:latin typeface="Noto Sans"/>
-              </a:defRPr>
-            </a:pPr>
+              <a:t>[1] Hu et al. (n.d.). OCNLI public development data. CC BY-NC 2.0.</a:t>
+            </a:r>
+            <a:r>
+              <a:rPr sz="810" b="0" lang="ja-JP" altLang="en-US">
+                <a:solidFill>
+                  <a:srgbClr val="626669"/>
+                </a:solidFill>
+                <a:latin typeface="Noto Sans"/>
+                <a:ea typeface="Noto Sans CJK JP"/>
+                <a:cs typeface="Noto Sans"/>
+              </a:rPr>
+              <a:t>  </a:t>
+            </a:r>
             <a:r>
               <a:rPr sz="810" b="0" lang="ja-JP" altLang="en-US">
                 <a:solidFill>
@@ -19255,7 +19375,7 @@
                 <a:ea typeface="Noto Sans CJK JP"/>
                 <a:cs typeface="Noto Sans"/>
               </a:rPr>
-              <a:t>配布正解：含意（entailment）</a:t>
+              <a:t>正解：含意（entailment）</a:t>
             </a:r>
           </a:p>
         </p:txBody>
@@ -19309,22 +19429,19 @@
                 <a:ea typeface="Noto Sans CJK JP"/>
                 <a:cs typeface="Noto Sans"/>
               </a:rPr>
-              <a:t>[1] Hu et al. OCNLI公開dev、CC BY-NC 2.0。前提の出所は各文体資料。 dev row 4 / id 4 / phone</a:t>
-            </a:r>
-          </a:p>
-          <a:p>
-            <a:pPr>
-              <a:lnSpc>
-                <a:spcPts val="940"/>
-              </a:lnSpc>
-              <a:buNone/>
-              <a:defRPr sz="810" b="0">
-                <a:solidFill>
-                  <a:srgbClr val="303437"/>
-                </a:solidFill>
-                <a:latin typeface="Noto Sans"/>
-              </a:defRPr>
-            </a:pPr>
+              <a:t>[1] Hu et al. (n.d.). OCNLI public development data. CC BY-NC 2.0.</a:t>
+            </a:r>
+            <a:r>
+              <a:rPr sz="810" b="0" lang="ja-JP" altLang="en-US">
+                <a:solidFill>
+                  <a:srgbClr val="626669"/>
+                </a:solidFill>
+                <a:latin typeface="Noto Sans"/>
+                <a:ea typeface="Noto Sans CJK JP"/>
+                <a:cs typeface="Noto Sans"/>
+              </a:rPr>
+              <a:t>  </a:t>
+            </a:r>
             <a:r>
               <a:rPr sz="810" b="0" lang="ja-JP" altLang="en-US">
                 <a:solidFill>
@@ -19945,7 +20062,7 @@
                 <a:ea typeface="Noto Sans CJK JP"/>
                 <a:cs typeface="Noto Sans"/>
               </a:rPr>
-              <a:t>配布正解：矛盾（contradiction）</a:t>
+              <a:t>正解：矛盾（contradiction）</a:t>
             </a:r>
           </a:p>
         </p:txBody>
@@ -19999,22 +20116,19 @@
                 <a:ea typeface="Noto Sans CJK JP"/>
                 <a:cs typeface="Noto Sans"/>
               </a:rPr>
-              <a:t>[1] Hu et al. OCNLI公開dev、CC BY-NC 2.0。前提の出所は各文体資料。 dev row 12 / id 12 / news</a:t>
-            </a:r>
-          </a:p>
-          <a:p>
-            <a:pPr>
-              <a:lnSpc>
-                <a:spcPts val="940"/>
-              </a:lnSpc>
-              <a:buNone/>
-              <a:defRPr sz="810" b="0">
-                <a:solidFill>
-                  <a:srgbClr val="303437"/>
-                </a:solidFill>
-                <a:latin typeface="Noto Sans"/>
-              </a:defRPr>
-            </a:pPr>
+              <a:t>[1] Hu et al. (n.d.). OCNLI public development data. CC BY-NC 2.0.</a:t>
+            </a:r>
+            <a:r>
+              <a:rPr sz="810" b="0" lang="ja-JP" altLang="en-US">
+                <a:solidFill>
+                  <a:srgbClr val="626669"/>
+                </a:solidFill>
+                <a:latin typeface="Noto Sans"/>
+                <a:ea typeface="Noto Sans CJK JP"/>
+                <a:cs typeface="Noto Sans"/>
+              </a:rPr>
+              <a:t>  </a:t>
+            </a:r>
             <a:r>
               <a:rPr sz="810" b="0" lang="ja-JP" altLang="en-US">
                 <a:solidFill>
@@ -20635,7 +20749,7 @@
                 <a:ea typeface="Noto Sans CJK JP"/>
                 <a:cs typeface="Noto Sans"/>
               </a:rPr>
-              <a:t>配布正解：含意（entailment）</a:t>
+              <a:t>正解：含意（entailment）</a:t>
             </a:r>
           </a:p>
         </p:txBody>
@@ -20689,22 +20803,19 @@
                 <a:ea typeface="Noto Sans CJK JP"/>
                 <a:cs typeface="Noto Sans"/>
               </a:rPr>
-              <a:t>[1] Hu et al. OCNLI公開dev、CC BY-NC 2.0。前提の出所は各文体資料。 dev row 15 / id 15 / lit</a:t>
-            </a:r>
-          </a:p>
-          <a:p>
-            <a:pPr>
-              <a:lnSpc>
-                <a:spcPts val="940"/>
-              </a:lnSpc>
-              <a:buNone/>
-              <a:defRPr sz="810" b="0">
-                <a:solidFill>
-                  <a:srgbClr val="303437"/>
-                </a:solidFill>
-                <a:latin typeface="Noto Sans"/>
-              </a:defRPr>
-            </a:pPr>
+              <a:t>[1] Hu et al. (n.d.). OCNLI public development data. CC BY-NC 2.0.</a:t>
+            </a:r>
+            <a:r>
+              <a:rPr sz="810" b="0" lang="ja-JP" altLang="en-US">
+                <a:solidFill>
+                  <a:srgbClr val="626669"/>
+                </a:solidFill>
+                <a:latin typeface="Noto Sans"/>
+                <a:ea typeface="Noto Sans CJK JP"/>
+                <a:cs typeface="Noto Sans"/>
+              </a:rPr>
+              <a:t>  </a:t>
+            </a:r>
             <a:r>
               <a:rPr sz="810" b="0" lang="ja-JP" altLang="en-US">
                 <a:solidFill>
@@ -21232,7 +21343,7 @@
         <p:spPr>
           <a:xfrm>
             <a:off x="4709160" y="1691640"/>
-            <a:ext cx="3886200" cy="2260600"/>
+            <a:ext cx="3886200" cy="2524760"/>
           </a:xfrm>
           <a:prstGeom prst="rect">
             <a:avLst/>
@@ -21323,7 +21434,7 @@
                 <a:ea typeface="Noto Sans CJK JP"/>
                 <a:cs typeface="Noto Sans"/>
               </a:rPr>
-              <a:t>今は思うんだ。社会に触れに出かけないでいると、山の中ではたった7日でも、世間ではもう千年が過ぎている、ということがある。</a:t>
+              <a:t>今は思うんだ。ずっと外へ出ず、社会と関わらずにいると、山の中ではたった7日でも、世間ではもう千年が過ぎている、ということがある。</a:t>
             </a:r>
           </a:p>
           <a:p>
@@ -21385,7 +21496,7 @@
                 <a:ea typeface="Noto Sans CJK JP"/>
                 <a:cs typeface="Noto Sans"/>
               </a:rPr>
-              <a:t>社会にもっと出て触れなければ、時代についていけない。</a:t>
+              <a:t>社会ともっと関わらなければ、時代についていけない。</a:t>
             </a:r>
           </a:p>
         </p:txBody>
@@ -21398,7 +21509,7 @@
         </p:nvSpPr>
         <p:spPr>
           <a:xfrm>
-            <a:off x="548640" y="4041140"/>
+            <a:off x="548640" y="4254500"/>
             <a:ext cx="8046720" cy="384048"/>
           </a:xfrm>
           <a:prstGeom prst="rect">
@@ -21439,7 +21550,7 @@
                 <a:ea typeface="Noto Sans CJK JP"/>
                 <a:cs typeface="Noto Sans"/>
               </a:rPr>
-              <a:t>配布正解：含意（entailment）</a:t>
+              <a:t>正解：含意（entailment）</a:t>
             </a:r>
           </a:p>
         </p:txBody>
@@ -21493,22 +21604,19 @@
                 <a:ea typeface="Noto Sans CJK JP"/>
                 <a:cs typeface="Noto Sans"/>
               </a:rPr>
-              <a:t>[1] Hu et al. OCNLI公開dev、CC BY-NC 2.0。前提の出所は各文体資料。 dev row 26 / id 26 / tv</a:t>
-            </a:r>
-          </a:p>
-          <a:p>
-            <a:pPr>
-              <a:lnSpc>
-                <a:spcPts val="940"/>
-              </a:lnSpc>
-              <a:buNone/>
-              <a:defRPr sz="810" b="0">
-                <a:solidFill>
-                  <a:srgbClr val="303437"/>
-                </a:solidFill>
-                <a:latin typeface="Noto Sans"/>
-              </a:defRPr>
-            </a:pPr>
+              <a:t>[1] Hu et al. (n.d.). OCNLI public development data. CC BY-NC 2.0.</a:t>
+            </a:r>
+            <a:r>
+              <a:rPr sz="810" b="0" lang="ja-JP" altLang="en-US">
+                <a:solidFill>
+                  <a:srgbClr val="626669"/>
+                </a:solidFill>
+                <a:latin typeface="Noto Sans"/>
+                <a:ea typeface="Noto Sans CJK JP"/>
+                <a:cs typeface="Noto Sans"/>
+              </a:rPr>
+              <a:t>  </a:t>
+            </a:r>
             <a:r>
               <a:rPr sz="810" b="0" lang="ja-JP" altLang="en-US">
                 <a:solidFill>
@@ -22129,7 +22237,7 @@
                 <a:ea typeface="Noto Sans CJK JP"/>
                 <a:cs typeface="Noto Sans"/>
               </a:rPr>
-              <a:t>配布正解：矛盾（contradiction）</a:t>
+              <a:t>正解：矛盾（contradiction）</a:t>
             </a:r>
           </a:p>
         </p:txBody>
@@ -22183,22 +22291,19 @@
                 <a:ea typeface="Noto Sans CJK JP"/>
                 <a:cs typeface="Noto Sans"/>
               </a:rPr>
-              <a:t>[1] Hu et al. OCNLI公開dev、CC BY-NC 2.0。前提の出所は各文体資料。 dev row 35 / id 35 / tv</a:t>
-            </a:r>
-          </a:p>
-          <a:p>
-            <a:pPr>
-              <a:lnSpc>
-                <a:spcPts val="940"/>
-              </a:lnSpc>
-              <a:buNone/>
-              <a:defRPr sz="810" b="0">
-                <a:solidFill>
-                  <a:srgbClr val="303437"/>
-                </a:solidFill>
-                <a:latin typeface="Noto Sans"/>
-              </a:defRPr>
-            </a:pPr>
+              <a:t>[1] Hu et al. (n.d.). OCNLI public development data. CC BY-NC 2.0.</a:t>
+            </a:r>
+            <a:r>
+              <a:rPr sz="810" b="0" lang="ja-JP" altLang="en-US">
+                <a:solidFill>
+                  <a:srgbClr val="626669"/>
+                </a:solidFill>
+                <a:latin typeface="Noto Sans"/>
+                <a:ea typeface="Noto Sans CJK JP"/>
+                <a:cs typeface="Noto Sans"/>
+              </a:rPr>
+              <a:t>  </a:t>
+            </a:r>
             <a:r>
               <a:rPr sz="810" b="0" lang="ja-JP" altLang="en-US">
                 <a:solidFill>
@@ -22819,7 +22924,7 @@
                 <a:ea typeface="Noto Sans CJK JP"/>
                 <a:cs typeface="Noto Sans"/>
               </a:rPr>
-              <a:t>配布正解：含意（entailment）</a:t>
+              <a:t>正解：含意（entailment）</a:t>
             </a:r>
           </a:p>
         </p:txBody>
@@ -22873,22 +22978,19 @@
                 <a:ea typeface="Noto Sans CJK JP"/>
                 <a:cs typeface="Noto Sans"/>
               </a:rPr>
-              <a:t>[1] Hu et al. OCNLI公開dev、CC BY-NC 2.0。前提の出所は各文体資料。 dev row 36 / id 36 / lit</a:t>
-            </a:r>
-          </a:p>
-          <a:p>
-            <a:pPr>
-              <a:lnSpc>
-                <a:spcPts val="940"/>
-              </a:lnSpc>
-              <a:buNone/>
-              <a:defRPr sz="810" b="0">
-                <a:solidFill>
-                  <a:srgbClr val="303437"/>
-                </a:solidFill>
-                <a:latin typeface="Noto Sans"/>
-              </a:defRPr>
-            </a:pPr>
+              <a:t>[1] Hu et al. (n.d.). OCNLI public development data. CC BY-NC 2.0.</a:t>
+            </a:r>
+            <a:r>
+              <a:rPr sz="810" b="0" lang="ja-JP" altLang="en-US">
+                <a:solidFill>
+                  <a:srgbClr val="626669"/>
+                </a:solidFill>
+                <a:latin typeface="Noto Sans"/>
+                <a:ea typeface="Noto Sans CJK JP"/>
+                <a:cs typeface="Noto Sans"/>
+              </a:rPr>
+              <a:t>  </a:t>
+            </a:r>
             <a:r>
               <a:rPr sz="810" b="0" lang="ja-JP" altLang="en-US">
                 <a:solidFill>
@@ -23509,7 +23611,7 @@
                 <a:ea typeface="Noto Sans CJK JP"/>
                 <a:cs typeface="Noto Sans"/>
               </a:rPr>
-              <a:t>配布正解：中立（neutral）</a:t>
+              <a:t>正解：中立（neutral）</a:t>
             </a:r>
           </a:p>
         </p:txBody>
@@ -23563,22 +23665,19 @@
                 <a:ea typeface="Noto Sans CJK JP"/>
                 <a:cs typeface="Noto Sans"/>
               </a:rPr>
-              <a:t>[1] Hu et al. OCNLI公開dev、CC BY-NC 2.0。前提の出所は各文体資料。 dev row 937 / id 937 / gov</a:t>
-            </a:r>
-          </a:p>
-          <a:p>
-            <a:pPr>
-              <a:lnSpc>
-                <a:spcPts val="940"/>
-              </a:lnSpc>
-              <a:buNone/>
-              <a:defRPr sz="810" b="0">
-                <a:solidFill>
-                  <a:srgbClr val="303437"/>
-                </a:solidFill>
-                <a:latin typeface="Noto Sans"/>
-              </a:defRPr>
-            </a:pPr>
+              <a:t>[1] Hu et al. (n.d.). OCNLI public development data. CC BY-NC 2.0.</a:t>
+            </a:r>
+            <a:r>
+              <a:rPr sz="810" b="0" lang="ja-JP" altLang="en-US">
+                <a:solidFill>
+                  <a:srgbClr val="626669"/>
+                </a:solidFill>
+                <a:latin typeface="Noto Sans"/>
+                <a:ea typeface="Noto Sans CJK JP"/>
+                <a:cs typeface="Noto Sans"/>
+              </a:rPr>
+              <a:t>  </a:t>
+            </a:r>
             <a:r>
               <a:rPr sz="810" b="0" lang="ja-JP" altLang="en-US">
                 <a:solidFill>
@@ -24199,7 +24298,7 @@
                 <a:ea typeface="Noto Sans CJK JP"/>
                 <a:cs typeface="Noto Sans"/>
               </a:rPr>
-              <a:t>配布正解：中立（neutral）</a:t>
+              <a:t>正解：中立（neutral）</a:t>
             </a:r>
           </a:p>
         </p:txBody>
@@ -24253,22 +24352,19 @@
                 <a:ea typeface="Noto Sans CJK JP"/>
                 <a:cs typeface="Noto Sans"/>
               </a:rPr>
-              <a:t>[1] Hu et al. OCNLI公開dev、CC BY-NC 2.0。前提の出所は各文体資料。 dev row 227 / id 227 / phone</a:t>
-            </a:r>
-          </a:p>
-          <a:p>
-            <a:pPr>
-              <a:lnSpc>
-                <a:spcPts val="940"/>
-              </a:lnSpc>
-              <a:buNone/>
-              <a:defRPr sz="810" b="0">
-                <a:solidFill>
-                  <a:srgbClr val="303437"/>
-                </a:solidFill>
-                <a:latin typeface="Noto Sans"/>
-              </a:defRPr>
-            </a:pPr>
+              <a:t>[1] Hu et al. (n.d.). OCNLI public development data. CC BY-NC 2.0.</a:t>
+            </a:r>
+            <a:r>
+              <a:rPr sz="810" b="0" lang="ja-JP" altLang="en-US">
+                <a:solidFill>
+                  <a:srgbClr val="626669"/>
+                </a:solidFill>
+                <a:latin typeface="Noto Sans"/>
+                <a:ea typeface="Noto Sans CJK JP"/>
+                <a:cs typeface="Noto Sans"/>
+              </a:rPr>
+              <a:t>  </a:t>
+            </a:r>
             <a:r>
               <a:rPr sz="810" b="0" lang="ja-JP" altLang="en-US">
                 <a:solidFill>
@@ -24889,7 +24985,7 @@
                 <a:ea typeface="Noto Sans CJK JP"/>
                 <a:cs typeface="Noto Sans"/>
               </a:rPr>
-              <a:t>配布正解：矛盾（contradiction）</a:t>
+              <a:t>正解：矛盾（contradiction）</a:t>
             </a:r>
           </a:p>
         </p:txBody>
@@ -24943,22 +25039,19 @@
                 <a:ea typeface="Noto Sans CJK JP"/>
                 <a:cs typeface="Noto Sans"/>
               </a:rPr>
-              <a:t>[1] Hu et al. OCNLI公開dev、CC BY-NC 2.0。前提の出所は各文体資料。 dev row 34 / id 34 / gov</a:t>
-            </a:r>
-          </a:p>
-          <a:p>
-            <a:pPr>
-              <a:lnSpc>
-                <a:spcPts val="940"/>
-              </a:lnSpc>
-              <a:buNone/>
-              <a:defRPr sz="810" b="0">
-                <a:solidFill>
-                  <a:srgbClr val="303437"/>
-                </a:solidFill>
-                <a:latin typeface="Noto Sans"/>
-              </a:defRPr>
-            </a:pPr>
+              <a:t>[1] Hu et al. (n.d.). OCNLI public development data. CC BY-NC 2.0.</a:t>
+            </a:r>
+            <a:r>
+              <a:rPr sz="810" b="0" lang="ja-JP" altLang="en-US">
+                <a:solidFill>
+                  <a:srgbClr val="626669"/>
+                </a:solidFill>
+                <a:latin typeface="Noto Sans"/>
+                <a:ea typeface="Noto Sans CJK JP"/>
+                <a:cs typeface="Noto Sans"/>
+              </a:rPr>
+              <a:t>  </a:t>
+            </a:r>
             <a:r>
               <a:rPr sz="810" b="0" lang="ja-JP" altLang="en-US">
                 <a:solidFill>
@@ -25035,7 +25128,7 @@
                 <a:ea typeface="Noto Sans CJK JP"/>
                 <a:cs typeface="Noto Sans"/>
               </a:rPr>
-              <a:t>分割・注釈・実装の補足</a:t>
+              <a:t>学習データと参考文献</a:t>
             </a:r>
           </a:p>
         </p:txBody>
@@ -25083,7 +25176,7 @@
                 <a:ea typeface="Noto Sans CJK JP"/>
                 <a:cs typeface="Noto Sans"/>
               </a:rPr>
-              <a:t>Appendix: 2. 分割・注釈・実装の補足</a:t>
+              <a:t>Appendix: 2. 学習データと参考文献</a:t>
             </a:r>
           </a:p>
         </p:txBody>
@@ -25149,7 +25242,7 @@
                 <a:ea typeface="Noto Sans CJK JP"/>
                 <a:cs typeface="Noto Sans"/>
               </a:rPr>
-              <a:t>四つの学習用配布：行数と有効ラベル</a:t>
+              <a:t>学習用は、50k・30k・10k・3kの4規模</a:t>
             </a:r>
           </a:p>
         </p:txBody>
@@ -25197,7 +25290,7 @@
                 <a:ea typeface="Noto Sans CJK JP"/>
                 <a:cs typeface="Noto Sans"/>
               </a:rPr>
-              <a:t>Appendix: 2. 分割・注釈・実装の補足</a:t>
+              <a:t>Appendix: 2. 学習データと参考文献</a:t>
             </a:r>
           </a:p>
         </p:txBody>
@@ -25308,7 +25401,7 @@
                           <a:ea typeface="Noto Sans CJK JP"/>
                           <a:cs typeface="Noto Sans"/>
                         </a:rPr>
-                        <a:t>全行数</a:t>
+                        <a:t>文ペア数</a:t>
                       </a:r>
                     </a:p>
                   </a:txBody>
@@ -25364,7 +25457,7 @@
                           <a:ea typeface="Noto Sans CJK JP"/>
                           <a:cs typeface="Noto Sans"/>
                         </a:rPr>
-                        <a:t>有効ラベル</a:t>
+                        <a:t>正解付き</a:t>
                       </a:r>
                     </a:p>
                   </a:txBody>
@@ -26072,7 +26165,7 @@
                 <a:ea typeface="Noto Sans CJK JP"/>
                 <a:cs typeface="Noto Sans"/>
               </a:rPr>
-              <a:t>30k・10k・3kは50kの部分集合。各配布名のkは概数で、有効ラベルの件数とは分けて数えた。</a:t>
+              <a:t>30k・10k・3kは50kの部分集合。開発用・テスト用は共通。ラベルが「-」の文ペアは学習・評価から除く。</a:t>
             </a:r>
           </a:p>
         </p:txBody>
@@ -26126,7 +26219,7 @@
                 <a:ea typeface="Noto Sans CJK JP"/>
                 <a:cs typeface="Noto Sans"/>
               </a:rPr>
-              <a:t>[1] Hu et al. OCNLI公式リポジトリ。固定版b53efdee1725、2026-10-18取得。</a:t>
+              <a:t>[1] Hu et al. (n.d.). OCNLI official repository.</a:t>
             </a:r>
             <a:r>
               <a:rPr sz="810" b="0" lang="ja-JP" altLang="en-US">
@@ -26215,14 +26308,127 @@
                 <a:ea typeface="Noto Sans CJK JP"/>
                 <a:cs typeface="Noto Sans"/>
               </a:rPr>
-              <a:t>公開50kとdevの、文体別ペア数</a:t>
+              <a:t>言語・論理・評価を結び付けた共同研究</a:t>
             </a:r>
           </a:p>
         </p:txBody>
       </p:sp>
       <p:sp>
         <p:nvSpPr>
-          <p:cNvPr id="3" name="Title 2"/>
+          <p:cNvPr id="3" name="Text Placeholder 2"/>
+          <p:cNvSpPr>
+            <a:spLocks noGrp="1"/>
+          </p:cNvSpPr>
+          <p:nvPr>
+            <p:ph type="body" idx="1"/>
+          </p:nvPr>
+        </p:nvSpPr>
+        <p:spPr>
+          <a:xfrm>
+            <a:off x="594360" y="1463040"/>
+            <a:ext cx="7955279" cy="3044952"/>
+          </a:xfrm>
+        </p:spPr>
+        <p:txBody>
+          <a:bodyPr wrap="square" tIns="91440" bIns="91440">
+            <a:noAutofit/>
+          </a:bodyPr>
+          <a:lstStyle/>
+          <a:p>
+            <a:pPr marL="457200" indent="-355600">
+              <a:lnSpc>
+                <a:spcPts val="2618"/>
+              </a:lnSpc>
+              <a:spcAft>
+                <a:spcPts val="700"/>
+              </a:spcAft>
+              <a:buSzPct val="60455"/>
+              <a:buFont typeface="Noto Sans CJK JP"/>
+              <a:buChar char="●"/>
+              <a:defRPr sz="2200" b="0">
+                <a:solidFill>
+                  <a:srgbClr val="303437"/>
+                </a:solidFill>
+                <a:latin typeface="Noto Sans"/>
+              </a:defRPr>
+            </a:pPr>
+            <a:r>
+              <a:rPr sz="2200" b="0" lang="ja-JP" altLang="en-US">
+                <a:solidFill>
+                  <a:srgbClr val="303437"/>
+                </a:solidFill>
+                <a:latin typeface="Noto Sans"/>
+                <a:ea typeface="Noto Sans CJK JP"/>
+                <a:cs typeface="Noto Sans"/>
+              </a:rPr>
+              <a:t>Hai Hu、Kyle Richardson、Liang Xu、Lu Li、Sandra Kübler、Lawrence S. Mossによる、Indiana University・Allen Institute for AI・CLUEの共同研究。</a:t>
+            </a:r>
+          </a:p>
+          <a:p>
+            <a:pPr marL="457200" indent="-355600">
+              <a:lnSpc>
+                <a:spcPts val="2618"/>
+              </a:lnSpc>
+              <a:spcAft>
+                <a:spcPts val="700"/>
+              </a:spcAft>
+              <a:buSzPct val="60455"/>
+              <a:buFont typeface="Noto Sans CJK JP"/>
+              <a:buChar char="●"/>
+              <a:defRPr sz="2200" b="0">
+                <a:solidFill>
+                  <a:srgbClr val="303437"/>
+                </a:solidFill>
+                <a:latin typeface="Noto Sans"/>
+              </a:defRPr>
+            </a:pPr>
+            <a:r>
+              <a:rPr sz="2200" b="0" lang="ja-JP" altLang="en-US">
+                <a:solidFill>
+                  <a:srgbClr val="303437"/>
+                </a:solidFill>
+                <a:latin typeface="Noto Sans"/>
+                <a:ea typeface="Noto Sans CJK JP"/>
+                <a:cs typeface="Noto Sans"/>
+              </a:rPr>
+              <a:t>Findings of EMNLP 2020で発表された。翻訳へ依存せず、母語話者の推論と再注釈を中国語の基準として整備した。</a:t>
+            </a:r>
+          </a:p>
+          <a:p>
+            <a:pPr marL="457200" indent="-355600">
+              <a:lnSpc>
+                <a:spcPts val="2618"/>
+              </a:lnSpc>
+              <a:spcAft>
+                <a:spcPts val="0"/>
+              </a:spcAft>
+              <a:buSzPct val="60455"/>
+              <a:buFont typeface="Noto Sans CJK JP"/>
+              <a:buChar char="●"/>
+              <a:defRPr sz="2200" b="0">
+                <a:solidFill>
+                  <a:srgbClr val="303437"/>
+                </a:solidFill>
+                <a:latin typeface="Noto Sans"/>
+              </a:defRPr>
+            </a:pPr>
+            <a:r>
+              <a:rPr sz="2200" b="0" lang="ja-JP" altLang="en-US">
+                <a:solidFill>
+                  <a:srgbClr val="303437"/>
+                </a:solidFill>
+                <a:latin typeface="Noto Sans"/>
+                <a:ea typeface="Noto Sans CJK JP"/>
+                <a:cs typeface="Noto Sans"/>
+              </a:rPr>
+              <a:t>教師ありモデルの成績だけでなく、仮説のみの語彙的な手掛かりや、翻訳学習データからの転移を分析した。</a:t>
+            </a:r>
+          </a:p>
+        </p:txBody>
+      </p:sp>
+      <p:sp>
+        <p:nvSpPr>
+          <p:cNvPr id="4" name="Title 3"/>
           <p:cNvSpPr>
             <a:spLocks noGrp="1"/>
           </p:cNvSpPr>
@@ -26263,1136 +26469,11 @@
                 <a:ea typeface="Noto Sans CJK JP"/>
                 <a:cs typeface="Noto Sans"/>
               </a:rPr>
-              <a:t>Appendix: 2. 分割・注釈・実装の補足</a:t>
+              <a:t>Appendix: 2. 学習データと参考文献</a:t>
             </a:r>
           </a:p>
         </p:txBody>
       </p:sp>
-      <p:graphicFrame>
-        <p:nvGraphicFramePr>
-          <p:cNvPr id="4" name="Table 3"/>
-          <p:cNvGraphicFramePr>
-            <a:graphicFrameLocks noGrp="1"/>
-          </p:cNvGraphicFramePr>
-          <p:nvPr/>
-        </p:nvGraphicFramePr>
-        <p:xfrm>
-          <a:off x="548640" y="1508760"/>
-          <a:ext cx="8046720" cy="2640330"/>
-        </p:xfrm>
-        <a:graphic>
-          <a:graphicData uri="http://schemas.openxmlformats.org/drawingml/2006/table">
-            <a:tbl>
-              <a:tblPr firstRow="0" bandRow="0"/>
-              <a:tblGrid>
-                <a:gridCol w="2194560"/>
-                <a:gridCol w="2926080"/>
-                <a:gridCol w="2926080"/>
-              </a:tblGrid>
-              <a:tr h="377190">
-                <a:tc>
-                  <a:txBody>
-                    <a:bodyPr wrap="square">
-                      <a:noAutofit/>
-                    </a:bodyPr>
-                    <a:lstStyle/>
-                    <a:p>
-                      <a:pPr algn="l">
-                        <a:lnSpc>
-                          <a:spcPts val="2070"/>
-                        </a:lnSpc>
-                        <a:buNone/>
-                        <a:defRPr sz="1800" b="0">
-                          <a:solidFill>
-                            <a:srgbClr val="303437"/>
-                          </a:solidFill>
-                          <a:latin typeface="Noto Sans"/>
-                        </a:defRPr>
-                      </a:pPr>
-                      <a:r>
-                        <a:rPr sz="1800" b="0" lang="ja-JP" altLang="en-US">
-                          <a:solidFill>
-                            <a:srgbClr val="303437"/>
-                          </a:solidFill>
-                          <a:latin typeface="Noto Sans"/>
-                          <a:ea typeface="Noto Sans CJK JP"/>
-                          <a:cs typeface="Noto Sans"/>
-                        </a:rPr>
-                        <a:t>文体</a:t>
-                      </a:r>
-                    </a:p>
-                  </a:txBody>
-                  <a:tcPr marL="63500" marR="63500" marT="38100" marB="38100" anchor="ctr">
-                    <a:lnL w="7620">
-                      <a:noFill/>
-                    </a:lnL>
-                    <a:lnR w="7620">
-                      <a:noFill/>
-                    </a:lnR>
-                    <a:lnT w="15240">
-                      <a:solidFill>
-                        <a:srgbClr val="626669"/>
-                      </a:solidFill>
-                      <a:prstDash val="solid"/>
-                    </a:lnT>
-                    <a:lnB w="7620">
-                      <a:solidFill>
-                        <a:srgbClr val="626669"/>
-                      </a:solidFill>
-                      <a:prstDash val="solid"/>
-                    </a:lnB>
-                    <a:solidFill>
-                      <a:srgbClr val="FFFEF8"/>
-                    </a:solidFill>
-                  </a:tcPr>
-                </a:tc>
-                <a:tc>
-                  <a:txBody>
-                    <a:bodyPr wrap="square">
-                      <a:noAutofit/>
-                    </a:bodyPr>
-                    <a:lstStyle/>
-                    <a:p>
-                      <a:pPr algn="r">
-                        <a:lnSpc>
-                          <a:spcPts val="2070"/>
-                        </a:lnSpc>
-                        <a:buNone/>
-                        <a:defRPr sz="1800" b="0">
-                          <a:solidFill>
-                            <a:srgbClr val="303437"/>
-                          </a:solidFill>
-                          <a:latin typeface="Noto Sans"/>
-                        </a:defRPr>
-                      </a:pPr>
-                      <a:r>
-                        <a:rPr sz="1800" b="0" lang="ja-JP" altLang="en-US">
-                          <a:solidFill>
-                            <a:srgbClr val="303437"/>
-                          </a:solidFill>
-                          <a:latin typeface="Noto Sans"/>
-                          <a:ea typeface="Noto Sans CJK JP"/>
-                          <a:cs typeface="Noto Sans"/>
-                        </a:rPr>
-                        <a:t>train.50k</a:t>
-                      </a:r>
-                    </a:p>
-                  </a:txBody>
-                  <a:tcPr marL="63500" marR="63500" marT="38100" marB="38100" anchor="ctr">
-                    <a:lnL w="7620">
-                      <a:noFill/>
-                    </a:lnL>
-                    <a:lnR w="7620">
-                      <a:noFill/>
-                    </a:lnR>
-                    <a:lnT w="15240">
-                      <a:solidFill>
-                        <a:srgbClr val="626669"/>
-                      </a:solidFill>
-                      <a:prstDash val="solid"/>
-                    </a:lnT>
-                    <a:lnB w="7620">
-                      <a:solidFill>
-                        <a:srgbClr val="626669"/>
-                      </a:solidFill>
-                      <a:prstDash val="solid"/>
-                    </a:lnB>
-                    <a:solidFill>
-                      <a:srgbClr val="FFFEF8"/>
-                    </a:solidFill>
-                  </a:tcPr>
-                </a:tc>
-                <a:tc>
-                  <a:txBody>
-                    <a:bodyPr wrap="square">
-                      <a:noAutofit/>
-                    </a:bodyPr>
-                    <a:lstStyle/>
-                    <a:p>
-                      <a:pPr algn="r">
-                        <a:lnSpc>
-                          <a:spcPts val="2070"/>
-                        </a:lnSpc>
-                        <a:buNone/>
-                        <a:defRPr sz="1800" b="0">
-                          <a:solidFill>
-                            <a:srgbClr val="303437"/>
-                          </a:solidFill>
-                          <a:latin typeface="Noto Sans"/>
-                        </a:defRPr>
-                      </a:pPr>
-                      <a:r>
-                        <a:rPr sz="1800" b="0" lang="ja-JP" altLang="en-US">
-                          <a:solidFill>
-                            <a:srgbClr val="303437"/>
-                          </a:solidFill>
-                          <a:latin typeface="Noto Sans"/>
-                          <a:ea typeface="Noto Sans CJK JP"/>
-                          <a:cs typeface="Noto Sans"/>
-                        </a:rPr>
-                        <a:t>dev</a:t>
-                      </a:r>
-                    </a:p>
-                  </a:txBody>
-                  <a:tcPr marL="63500" marR="63500" marT="38100" marB="38100" anchor="ctr">
-                    <a:lnL w="7620">
-                      <a:noFill/>
-                    </a:lnL>
-                    <a:lnR w="7620">
-                      <a:noFill/>
-                    </a:lnR>
-                    <a:lnT w="15240">
-                      <a:solidFill>
-                        <a:srgbClr val="626669"/>
-                      </a:solidFill>
-                      <a:prstDash val="solid"/>
-                    </a:lnT>
-                    <a:lnB w="7620">
-                      <a:solidFill>
-                        <a:srgbClr val="626669"/>
-                      </a:solidFill>
-                      <a:prstDash val="solid"/>
-                    </a:lnB>
-                    <a:solidFill>
-                      <a:srgbClr val="FFFEF8"/>
-                    </a:solidFill>
-                  </a:tcPr>
-                </a:tc>
-              </a:tr>
-              <a:tr h="377190">
-                <a:tc>
-                  <a:txBody>
-                    <a:bodyPr wrap="square">
-                      <a:noAutofit/>
-                    </a:bodyPr>
-                    <a:lstStyle/>
-                    <a:p>
-                      <a:pPr algn="l">
-                        <a:lnSpc>
-                          <a:spcPts val="2070"/>
-                        </a:lnSpc>
-                        <a:buNone/>
-                        <a:defRPr sz="1800" b="0">
-                          <a:solidFill>
-                            <a:srgbClr val="303437"/>
-                          </a:solidFill>
-                          <a:latin typeface="Noto Sans"/>
-                        </a:defRPr>
-                      </a:pPr>
-                      <a:r>
-                        <a:rPr sz="1800" b="0" lang="ja-JP" altLang="en-US">
-                          <a:solidFill>
-                            <a:srgbClr val="303437"/>
-                          </a:solidFill>
-                          <a:latin typeface="Noto Sans"/>
-                          <a:ea typeface="Noto Sans CJK JP"/>
-                          <a:cs typeface="Noto Sans"/>
-                        </a:rPr>
-                        <a:t>gov</a:t>
-                      </a:r>
-                    </a:p>
-                  </a:txBody>
-                  <a:tcPr marL="63500" marR="63500" marT="38100" marB="38100" anchor="ctr">
-                    <a:lnL w="7620">
-                      <a:noFill/>
-                    </a:lnL>
-                    <a:lnR w="7620">
-                      <a:noFill/>
-                    </a:lnR>
-                    <a:lnT w="7620">
-                      <a:solidFill>
-                        <a:srgbClr val="626669"/>
-                      </a:solidFill>
-                      <a:prstDash val="solid"/>
-                    </a:lnT>
-                    <a:lnB w="7620">
-                      <a:noFill/>
-                    </a:lnB>
-                    <a:solidFill>
-                      <a:srgbClr val="FFFEF8"/>
-                    </a:solidFill>
-                  </a:tcPr>
-                </a:tc>
-                <a:tc>
-                  <a:txBody>
-                    <a:bodyPr wrap="square">
-                      <a:noAutofit/>
-                    </a:bodyPr>
-                    <a:lstStyle/>
-                    <a:p>
-                      <a:pPr algn="r">
-                        <a:lnSpc>
-                          <a:spcPts val="2070"/>
-                        </a:lnSpc>
-                        <a:buNone/>
-                        <a:defRPr sz="1800" b="0">
-                          <a:solidFill>
-                            <a:srgbClr val="303437"/>
-                          </a:solidFill>
-                          <a:latin typeface="Noto Sans"/>
-                        </a:defRPr>
-                      </a:pPr>
-                      <a:r>
-                        <a:rPr sz="1800" b="0" lang="ja-JP" altLang="en-US">
-                          <a:solidFill>
-                            <a:srgbClr val="303437"/>
-                          </a:solidFill>
-                          <a:latin typeface="Noto Sans"/>
-                          <a:ea typeface="Noto Sans CJK JP"/>
-                          <a:cs typeface="Noto Sans"/>
-                        </a:rPr>
-                        <a:t>10,402</a:t>
-                      </a:r>
-                    </a:p>
-                  </a:txBody>
-                  <a:tcPr marL="63500" marR="63500" marT="38100" marB="38100" anchor="ctr">
-                    <a:lnL w="7620">
-                      <a:noFill/>
-                    </a:lnL>
-                    <a:lnR w="7620">
-                      <a:noFill/>
-                    </a:lnR>
-                    <a:lnT w="7620">
-                      <a:solidFill>
-                        <a:srgbClr val="626669"/>
-                      </a:solidFill>
-                      <a:prstDash val="solid"/>
-                    </a:lnT>
-                    <a:lnB w="7620">
-                      <a:noFill/>
-                    </a:lnB>
-                    <a:solidFill>
-                      <a:srgbClr val="FFFEF8"/>
-                    </a:solidFill>
-                  </a:tcPr>
-                </a:tc>
-                <a:tc>
-                  <a:txBody>
-                    <a:bodyPr wrap="square">
-                      <a:noAutofit/>
-                    </a:bodyPr>
-                    <a:lstStyle/>
-                    <a:p>
-                      <a:pPr algn="r">
-                        <a:lnSpc>
-                          <a:spcPts val="2070"/>
-                        </a:lnSpc>
-                        <a:buNone/>
-                        <a:defRPr sz="1800" b="0">
-                          <a:solidFill>
-                            <a:srgbClr val="303437"/>
-                          </a:solidFill>
-                          <a:latin typeface="Noto Sans"/>
-                        </a:defRPr>
-                      </a:pPr>
-                      <a:r>
-                        <a:rPr sz="1800" b="0" lang="ja-JP" altLang="en-US">
-                          <a:solidFill>
-                            <a:srgbClr val="303437"/>
-                          </a:solidFill>
-                          <a:latin typeface="Noto Sans"/>
-                          <a:ea typeface="Noto Sans CJK JP"/>
-                          <a:cs typeface="Noto Sans"/>
-                        </a:rPr>
-                        <a:t>622</a:t>
-                      </a:r>
-                    </a:p>
-                  </a:txBody>
-                  <a:tcPr marL="63500" marR="63500" marT="38100" marB="38100" anchor="ctr">
-                    <a:lnL w="7620">
-                      <a:noFill/>
-                    </a:lnL>
-                    <a:lnR w="7620">
-                      <a:noFill/>
-                    </a:lnR>
-                    <a:lnT w="7620">
-                      <a:solidFill>
-                        <a:srgbClr val="626669"/>
-                      </a:solidFill>
-                      <a:prstDash val="solid"/>
-                    </a:lnT>
-                    <a:lnB w="7620">
-                      <a:noFill/>
-                    </a:lnB>
-                    <a:solidFill>
-                      <a:srgbClr val="FFFEF8"/>
-                    </a:solidFill>
-                  </a:tcPr>
-                </a:tc>
-              </a:tr>
-              <a:tr h="377190">
-                <a:tc>
-                  <a:txBody>
-                    <a:bodyPr wrap="square">
-                      <a:noAutofit/>
-                    </a:bodyPr>
-                    <a:lstStyle/>
-                    <a:p>
-                      <a:pPr algn="l">
-                        <a:lnSpc>
-                          <a:spcPts val="2070"/>
-                        </a:lnSpc>
-                        <a:buNone/>
-                        <a:defRPr sz="1800" b="0">
-                          <a:solidFill>
-                            <a:srgbClr val="303437"/>
-                          </a:solidFill>
-                          <a:latin typeface="Noto Sans"/>
-                        </a:defRPr>
-                      </a:pPr>
-                      <a:r>
-                        <a:rPr sz="1800" b="0" lang="ja-JP" altLang="en-US">
-                          <a:solidFill>
-                            <a:srgbClr val="303437"/>
-                          </a:solidFill>
-                          <a:latin typeface="Noto Sans"/>
-                          <a:ea typeface="Noto Sans CJK JP"/>
-                          <a:cs typeface="Noto Sans"/>
-                        </a:rPr>
-                        <a:t>news</a:t>
-                      </a:r>
-                    </a:p>
-                  </a:txBody>
-                  <a:tcPr marL="63500" marR="63500" marT="38100" marB="38100" anchor="ctr">
-                    <a:lnL w="7620">
-                      <a:noFill/>
-                    </a:lnL>
-                    <a:lnR w="7620">
-                      <a:noFill/>
-                    </a:lnR>
-                    <a:lnT w="7620">
-                      <a:noFill/>
-                    </a:lnT>
-                    <a:lnB w="7620">
-                      <a:noFill/>
-                    </a:lnB>
-                    <a:solidFill>
-                      <a:srgbClr val="FFFEF8"/>
-                    </a:solidFill>
-                  </a:tcPr>
-                </a:tc>
-                <a:tc>
-                  <a:txBody>
-                    <a:bodyPr wrap="square">
-                      <a:noAutofit/>
-                    </a:bodyPr>
-                    <a:lstStyle/>
-                    <a:p>
-                      <a:pPr algn="r">
-                        <a:lnSpc>
-                          <a:spcPts val="2070"/>
-                        </a:lnSpc>
-                        <a:buNone/>
-                        <a:defRPr sz="1800" b="0">
-                          <a:solidFill>
-                            <a:srgbClr val="303437"/>
-                          </a:solidFill>
-                          <a:latin typeface="Noto Sans"/>
-                        </a:defRPr>
-                      </a:pPr>
-                      <a:r>
-                        <a:rPr sz="1800" b="0" lang="ja-JP" altLang="en-US">
-                          <a:solidFill>
-                            <a:srgbClr val="303437"/>
-                          </a:solidFill>
-                          <a:latin typeface="Noto Sans"/>
-                          <a:ea typeface="Noto Sans CJK JP"/>
-                          <a:cs typeface="Noto Sans"/>
-                        </a:rPr>
-                        <a:t>10,680</a:t>
-                      </a:r>
-                    </a:p>
-                  </a:txBody>
-                  <a:tcPr marL="63500" marR="63500" marT="38100" marB="38100" anchor="ctr">
-                    <a:lnL w="7620">
-                      <a:noFill/>
-                    </a:lnL>
-                    <a:lnR w="7620">
-                      <a:noFill/>
-                    </a:lnR>
-                    <a:lnT w="7620">
-                      <a:noFill/>
-                    </a:lnT>
-                    <a:lnB w="7620">
-                      <a:noFill/>
-                    </a:lnB>
-                    <a:solidFill>
-                      <a:srgbClr val="FFFEF8"/>
-                    </a:solidFill>
-                  </a:tcPr>
-                </a:tc>
-                <a:tc>
-                  <a:txBody>
-                    <a:bodyPr wrap="square">
-                      <a:noAutofit/>
-                    </a:bodyPr>
-                    <a:lstStyle/>
-                    <a:p>
-                      <a:pPr algn="r">
-                        <a:lnSpc>
-                          <a:spcPts val="2070"/>
-                        </a:lnSpc>
-                        <a:buNone/>
-                        <a:defRPr sz="1800" b="0">
-                          <a:solidFill>
-                            <a:srgbClr val="303437"/>
-                          </a:solidFill>
-                          <a:latin typeface="Noto Sans"/>
-                        </a:defRPr>
-                      </a:pPr>
-                      <a:r>
-                        <a:rPr sz="1800" b="0" lang="ja-JP" altLang="en-US">
-                          <a:solidFill>
-                            <a:srgbClr val="303437"/>
-                          </a:solidFill>
-                          <a:latin typeface="Noto Sans"/>
-                          <a:ea typeface="Noto Sans CJK JP"/>
-                          <a:cs typeface="Noto Sans"/>
-                        </a:rPr>
-                        <a:t>662</a:t>
-                      </a:r>
-                    </a:p>
-                  </a:txBody>
-                  <a:tcPr marL="63500" marR="63500" marT="38100" marB="38100" anchor="ctr">
-                    <a:lnL w="7620">
-                      <a:noFill/>
-                    </a:lnL>
-                    <a:lnR w="7620">
-                      <a:noFill/>
-                    </a:lnR>
-                    <a:lnT w="7620">
-                      <a:noFill/>
-                    </a:lnT>
-                    <a:lnB w="7620">
-                      <a:noFill/>
-                    </a:lnB>
-                    <a:solidFill>
-                      <a:srgbClr val="FFFEF8"/>
-                    </a:solidFill>
-                  </a:tcPr>
-                </a:tc>
-              </a:tr>
-              <a:tr h="377190">
-                <a:tc>
-                  <a:txBody>
-                    <a:bodyPr wrap="square">
-                      <a:noAutofit/>
-                    </a:bodyPr>
-                    <a:lstStyle/>
-                    <a:p>
-                      <a:pPr algn="l">
-                        <a:lnSpc>
-                          <a:spcPts val="2070"/>
-                        </a:lnSpc>
-                        <a:buNone/>
-                        <a:defRPr sz="1800" b="0">
-                          <a:solidFill>
-                            <a:srgbClr val="303437"/>
-                          </a:solidFill>
-                          <a:latin typeface="Noto Sans"/>
-                        </a:defRPr>
-                      </a:pPr>
-                      <a:r>
-                        <a:rPr sz="1800" b="0" lang="ja-JP" altLang="en-US">
-                          <a:solidFill>
-                            <a:srgbClr val="303437"/>
-                          </a:solidFill>
-                          <a:latin typeface="Noto Sans"/>
-                          <a:ea typeface="Noto Sans CJK JP"/>
-                          <a:cs typeface="Noto Sans"/>
-                        </a:rPr>
-                        <a:t>lit</a:t>
-                      </a:r>
-                    </a:p>
-                  </a:txBody>
-                  <a:tcPr marL="63500" marR="63500" marT="38100" marB="38100" anchor="ctr">
-                    <a:lnL w="7620">
-                      <a:noFill/>
-                    </a:lnL>
-                    <a:lnR w="7620">
-                      <a:noFill/>
-                    </a:lnR>
-                    <a:lnT w="7620">
-                      <a:noFill/>
-                    </a:lnT>
-                    <a:lnB w="7620">
-                      <a:noFill/>
-                    </a:lnB>
-                    <a:solidFill>
-                      <a:srgbClr val="FFFEF8"/>
-                    </a:solidFill>
-                  </a:tcPr>
-                </a:tc>
-                <a:tc>
-                  <a:txBody>
-                    <a:bodyPr wrap="square">
-                      <a:noAutofit/>
-                    </a:bodyPr>
-                    <a:lstStyle/>
-                    <a:p>
-                      <a:pPr algn="r">
-                        <a:lnSpc>
-                          <a:spcPts val="2070"/>
-                        </a:lnSpc>
-                        <a:buNone/>
-                        <a:defRPr sz="1800" b="0">
-                          <a:solidFill>
-                            <a:srgbClr val="303437"/>
-                          </a:solidFill>
-                          <a:latin typeface="Noto Sans"/>
-                        </a:defRPr>
-                      </a:pPr>
-                      <a:r>
-                        <a:rPr sz="1800" b="0" lang="ja-JP" altLang="en-US">
-                          <a:solidFill>
-                            <a:srgbClr val="303437"/>
-                          </a:solidFill>
-                          <a:latin typeface="Noto Sans"/>
-                          <a:ea typeface="Noto Sans CJK JP"/>
-                          <a:cs typeface="Noto Sans"/>
-                        </a:rPr>
-                        <a:t>10,606</a:t>
-                      </a:r>
-                    </a:p>
-                  </a:txBody>
-                  <a:tcPr marL="63500" marR="63500" marT="38100" marB="38100" anchor="ctr">
-                    <a:lnL w="7620">
-                      <a:noFill/>
-                    </a:lnL>
-                    <a:lnR w="7620">
-                      <a:noFill/>
-                    </a:lnR>
-                    <a:lnT w="7620">
-                      <a:noFill/>
-                    </a:lnT>
-                    <a:lnB w="7620">
-                      <a:noFill/>
-                    </a:lnB>
-                    <a:solidFill>
-                      <a:srgbClr val="FFFEF8"/>
-                    </a:solidFill>
-                  </a:tcPr>
-                </a:tc>
-                <a:tc>
-                  <a:txBody>
-                    <a:bodyPr wrap="square">
-                      <a:noAutofit/>
-                    </a:bodyPr>
-                    <a:lstStyle/>
-                    <a:p>
-                      <a:pPr algn="r">
-                        <a:lnSpc>
-                          <a:spcPts val="2070"/>
-                        </a:lnSpc>
-                        <a:buNone/>
-                        <a:defRPr sz="1800" b="0">
-                          <a:solidFill>
-                            <a:srgbClr val="303437"/>
-                          </a:solidFill>
-                          <a:latin typeface="Noto Sans"/>
-                        </a:defRPr>
-                      </a:pPr>
-                      <a:r>
-                        <a:rPr sz="1800" b="0" lang="ja-JP" altLang="en-US">
-                          <a:solidFill>
-                            <a:srgbClr val="303437"/>
-                          </a:solidFill>
-                          <a:latin typeface="Noto Sans"/>
-                          <a:ea typeface="Noto Sans CJK JP"/>
-                          <a:cs typeface="Noto Sans"/>
-                        </a:rPr>
-                        <a:t>609</a:t>
-                      </a:r>
-                    </a:p>
-                  </a:txBody>
-                  <a:tcPr marL="63500" marR="63500" marT="38100" marB="38100" anchor="ctr">
-                    <a:lnL w="7620">
-                      <a:noFill/>
-                    </a:lnL>
-                    <a:lnR w="7620">
-                      <a:noFill/>
-                    </a:lnR>
-                    <a:lnT w="7620">
-                      <a:noFill/>
-                    </a:lnT>
-                    <a:lnB w="7620">
-                      <a:noFill/>
-                    </a:lnB>
-                    <a:solidFill>
-                      <a:srgbClr val="FFFEF8"/>
-                    </a:solidFill>
-                  </a:tcPr>
-                </a:tc>
-              </a:tr>
-              <a:tr h="377190">
-                <a:tc>
-                  <a:txBody>
-                    <a:bodyPr wrap="square">
-                      <a:noAutofit/>
-                    </a:bodyPr>
-                    <a:lstStyle/>
-                    <a:p>
-                      <a:pPr algn="l">
-                        <a:lnSpc>
-                          <a:spcPts val="2070"/>
-                        </a:lnSpc>
-                        <a:buNone/>
-                        <a:defRPr sz="1800" b="0">
-                          <a:solidFill>
-                            <a:srgbClr val="303437"/>
-                          </a:solidFill>
-                          <a:latin typeface="Noto Sans"/>
-                        </a:defRPr>
-                      </a:pPr>
-                      <a:r>
-                        <a:rPr sz="1800" b="0" lang="ja-JP" altLang="en-US">
-                          <a:solidFill>
-                            <a:srgbClr val="303437"/>
-                          </a:solidFill>
-                          <a:latin typeface="Noto Sans"/>
-                          <a:ea typeface="Noto Sans CJK JP"/>
-                          <a:cs typeface="Noto Sans"/>
-                        </a:rPr>
-                        <a:t>tv</a:t>
-                      </a:r>
-                    </a:p>
-                  </a:txBody>
-                  <a:tcPr marL="63500" marR="63500" marT="38100" marB="38100" anchor="ctr">
-                    <a:lnL w="7620">
-                      <a:noFill/>
-                    </a:lnL>
-                    <a:lnR w="7620">
-                      <a:noFill/>
-                    </a:lnR>
-                    <a:lnT w="7620">
-                      <a:noFill/>
-                    </a:lnT>
-                    <a:lnB w="7620">
-                      <a:noFill/>
-                    </a:lnB>
-                    <a:solidFill>
-                      <a:srgbClr val="FFFEF8"/>
-                    </a:solidFill>
-                  </a:tcPr>
-                </a:tc>
-                <a:tc>
-                  <a:txBody>
-                    <a:bodyPr wrap="square">
-                      <a:noAutofit/>
-                    </a:bodyPr>
-                    <a:lstStyle/>
-                    <a:p>
-                      <a:pPr algn="r">
-                        <a:lnSpc>
-                          <a:spcPts val="2070"/>
-                        </a:lnSpc>
-                        <a:buNone/>
-                        <a:defRPr sz="1800" b="0">
-                          <a:solidFill>
-                            <a:srgbClr val="303437"/>
-                          </a:solidFill>
-                          <a:latin typeface="Noto Sans"/>
-                        </a:defRPr>
-                      </a:pPr>
-                      <a:r>
-                        <a:rPr sz="1800" b="0" lang="ja-JP" altLang="en-US">
-                          <a:solidFill>
-                            <a:srgbClr val="303437"/>
-                          </a:solidFill>
-                          <a:latin typeface="Noto Sans"/>
-                          <a:ea typeface="Noto Sans CJK JP"/>
-                          <a:cs typeface="Noto Sans"/>
-                        </a:rPr>
-                        <a:t>9,803</a:t>
-                      </a:r>
-                    </a:p>
-                  </a:txBody>
-                  <a:tcPr marL="63500" marR="63500" marT="38100" marB="38100" anchor="ctr">
-                    <a:lnL w="7620">
-                      <a:noFill/>
-                    </a:lnL>
-                    <a:lnR w="7620">
-                      <a:noFill/>
-                    </a:lnR>
-                    <a:lnT w="7620">
-                      <a:noFill/>
-                    </a:lnT>
-                    <a:lnB w="7620">
-                      <a:noFill/>
-                    </a:lnB>
-                    <a:solidFill>
-                      <a:srgbClr val="FFFEF8"/>
-                    </a:solidFill>
-                  </a:tcPr>
-                </a:tc>
-                <a:tc>
-                  <a:txBody>
-                    <a:bodyPr wrap="square">
-                      <a:noAutofit/>
-                    </a:bodyPr>
-                    <a:lstStyle/>
-                    <a:p>
-                      <a:pPr algn="r">
-                        <a:lnSpc>
-                          <a:spcPts val="2070"/>
-                        </a:lnSpc>
-                        <a:buNone/>
-                        <a:defRPr sz="1800" b="0">
-                          <a:solidFill>
-                            <a:srgbClr val="303437"/>
-                          </a:solidFill>
-                          <a:latin typeface="Noto Sans"/>
-                        </a:defRPr>
-                      </a:pPr>
-                      <a:r>
-                        <a:rPr sz="1800" b="0" lang="ja-JP" altLang="en-US">
-                          <a:solidFill>
-                            <a:srgbClr val="303437"/>
-                          </a:solidFill>
-                          <a:latin typeface="Noto Sans"/>
-                          <a:ea typeface="Noto Sans CJK JP"/>
-                          <a:cs typeface="Noto Sans"/>
-                        </a:rPr>
-                        <a:t>615</a:t>
-                      </a:r>
-                    </a:p>
-                  </a:txBody>
-                  <a:tcPr marL="63500" marR="63500" marT="38100" marB="38100" anchor="ctr">
-                    <a:lnL w="7620">
-                      <a:noFill/>
-                    </a:lnL>
-                    <a:lnR w="7620">
-                      <a:noFill/>
-                    </a:lnR>
-                    <a:lnT w="7620">
-                      <a:noFill/>
-                    </a:lnT>
-                    <a:lnB w="7620">
-                      <a:noFill/>
-                    </a:lnB>
-                    <a:solidFill>
-                      <a:srgbClr val="FFFEF8"/>
-                    </a:solidFill>
-                  </a:tcPr>
-                </a:tc>
-              </a:tr>
-              <a:tr h="377190">
-                <a:tc>
-                  <a:txBody>
-                    <a:bodyPr wrap="square">
-                      <a:noAutofit/>
-                    </a:bodyPr>
-                    <a:lstStyle/>
-                    <a:p>
-                      <a:pPr algn="l">
-                        <a:lnSpc>
-                          <a:spcPts val="2070"/>
-                        </a:lnSpc>
-                        <a:buNone/>
-                        <a:defRPr sz="1800" b="0">
-                          <a:solidFill>
-                            <a:srgbClr val="303437"/>
-                          </a:solidFill>
-                          <a:latin typeface="Noto Sans"/>
-                        </a:defRPr>
-                      </a:pPr>
-                      <a:r>
-                        <a:rPr sz="1800" b="0" lang="ja-JP" altLang="en-US">
-                          <a:solidFill>
-                            <a:srgbClr val="303437"/>
-                          </a:solidFill>
-                          <a:latin typeface="Noto Sans"/>
-                          <a:ea typeface="Noto Sans CJK JP"/>
-                          <a:cs typeface="Noto Sans"/>
-                        </a:rPr>
-                        <a:t>phone</a:t>
-                      </a:r>
-                    </a:p>
-                  </a:txBody>
-                  <a:tcPr marL="63500" marR="63500" marT="38100" marB="38100" anchor="ctr">
-                    <a:lnL w="7620">
-                      <a:noFill/>
-                    </a:lnL>
-                    <a:lnR w="7620">
-                      <a:noFill/>
-                    </a:lnR>
-                    <a:lnT w="7620">
-                      <a:noFill/>
-                    </a:lnT>
-                    <a:lnB w="7620">
-                      <a:noFill/>
-                    </a:lnB>
-                    <a:solidFill>
-                      <a:srgbClr val="FFFEF8"/>
-                    </a:solidFill>
-                  </a:tcPr>
-                </a:tc>
-                <a:tc>
-                  <a:txBody>
-                    <a:bodyPr wrap="square">
-                      <a:noAutofit/>
-                    </a:bodyPr>
-                    <a:lstStyle/>
-                    <a:p>
-                      <a:pPr algn="r">
-                        <a:lnSpc>
-                          <a:spcPts val="2070"/>
-                        </a:lnSpc>
-                        <a:buNone/>
-                        <a:defRPr sz="1800" b="0">
-                          <a:solidFill>
-                            <a:srgbClr val="303437"/>
-                          </a:solidFill>
-                          <a:latin typeface="Noto Sans"/>
-                        </a:defRPr>
-                      </a:pPr>
-                      <a:r>
-                        <a:rPr sz="1800" b="0" lang="ja-JP" altLang="en-US">
-                          <a:solidFill>
-                            <a:srgbClr val="303437"/>
-                          </a:solidFill>
-                          <a:latin typeface="Noto Sans"/>
-                          <a:ea typeface="Noto Sans CJK JP"/>
-                          <a:cs typeface="Noto Sans"/>
-                        </a:rPr>
-                        <a:t>8,992</a:t>
-                      </a:r>
-                    </a:p>
-                  </a:txBody>
-                  <a:tcPr marL="63500" marR="63500" marT="38100" marB="38100" anchor="ctr">
-                    <a:lnL w="7620">
-                      <a:noFill/>
-                    </a:lnL>
-                    <a:lnR w="7620">
-                      <a:noFill/>
-                    </a:lnR>
-                    <a:lnT w="7620">
-                      <a:noFill/>
-                    </a:lnT>
-                    <a:lnB w="7620">
-                      <a:noFill/>
-                    </a:lnB>
-                    <a:solidFill>
-                      <a:srgbClr val="FFFEF8"/>
-                    </a:solidFill>
-                  </a:tcPr>
-                </a:tc>
-                <a:tc>
-                  <a:txBody>
-                    <a:bodyPr wrap="square">
-                      <a:noAutofit/>
-                    </a:bodyPr>
-                    <a:lstStyle/>
-                    <a:p>
-                      <a:pPr algn="r">
-                        <a:lnSpc>
-                          <a:spcPts val="2070"/>
-                        </a:lnSpc>
-                        <a:buNone/>
-                        <a:defRPr sz="1800" b="0">
-                          <a:solidFill>
-                            <a:srgbClr val="303437"/>
-                          </a:solidFill>
-                          <a:latin typeface="Noto Sans"/>
-                        </a:defRPr>
-                      </a:pPr>
-                      <a:r>
-                        <a:rPr sz="1800" b="0" lang="ja-JP" altLang="en-US">
-                          <a:solidFill>
-                            <a:srgbClr val="303437"/>
-                          </a:solidFill>
-                          <a:latin typeface="Noto Sans"/>
-                          <a:ea typeface="Noto Sans CJK JP"/>
-                          <a:cs typeface="Noto Sans"/>
-                        </a:rPr>
-                        <a:t>492</a:t>
-                      </a:r>
-                    </a:p>
-                  </a:txBody>
-                  <a:tcPr marL="63500" marR="63500" marT="38100" marB="38100" anchor="ctr">
-                    <a:lnL w="7620">
-                      <a:noFill/>
-                    </a:lnL>
-                    <a:lnR w="7620">
-                      <a:noFill/>
-                    </a:lnR>
-                    <a:lnT w="7620">
-                      <a:noFill/>
-                    </a:lnT>
-                    <a:lnB w="7620">
-                      <a:noFill/>
-                    </a:lnB>
-                    <a:solidFill>
-                      <a:srgbClr val="FFFEF8"/>
-                    </a:solidFill>
-                  </a:tcPr>
-                </a:tc>
-              </a:tr>
-              <a:tr h="377190">
-                <a:tc>
-                  <a:txBody>
-                    <a:bodyPr wrap="square">
-                      <a:noAutofit/>
-                    </a:bodyPr>
-                    <a:lstStyle/>
-                    <a:p>
-                      <a:pPr algn="l">
-                        <a:lnSpc>
-                          <a:spcPts val="2070"/>
-                        </a:lnSpc>
-                        <a:buNone/>
-                        <a:defRPr sz="1800" b="0">
-                          <a:solidFill>
-                            <a:srgbClr val="303437"/>
-                          </a:solidFill>
-                          <a:latin typeface="Noto Sans"/>
-                        </a:defRPr>
-                      </a:pPr>
-                      <a:r>
-                        <a:rPr sz="1800" b="0" lang="ja-JP" altLang="en-US">
-                          <a:solidFill>
-                            <a:srgbClr val="303437"/>
-                          </a:solidFill>
-                          <a:latin typeface="Noto Sans"/>
-                          <a:ea typeface="Noto Sans CJK JP"/>
-                          <a:cs typeface="Noto Sans"/>
-                        </a:rPr>
-                        <a:t>genre欠測</a:t>
-                      </a:r>
-                    </a:p>
-                  </a:txBody>
-                  <a:tcPr marL="63500" marR="63500" marT="38100" marB="38100" anchor="ctr">
-                    <a:lnL w="7620">
-                      <a:noFill/>
-                    </a:lnL>
-                    <a:lnR w="7620">
-                      <a:noFill/>
-                    </a:lnR>
-                    <a:lnT w="7620">
-                      <a:noFill/>
-                    </a:lnT>
-                    <a:lnB w="15240">
-                      <a:solidFill>
-                        <a:srgbClr val="626669"/>
-                      </a:solidFill>
-                      <a:prstDash val="solid"/>
-                    </a:lnB>
-                    <a:solidFill>
-                      <a:srgbClr val="FFFEF8"/>
-                    </a:solidFill>
-                  </a:tcPr>
-                </a:tc>
-                <a:tc>
-                  <a:txBody>
-                    <a:bodyPr wrap="square">
-                      <a:noAutofit/>
-                    </a:bodyPr>
-                    <a:lstStyle/>
-                    <a:p>
-                      <a:pPr algn="r">
-                        <a:lnSpc>
-                          <a:spcPts val="2070"/>
-                        </a:lnSpc>
-                        <a:buNone/>
-                        <a:defRPr sz="1800" b="0">
-                          <a:solidFill>
-                            <a:srgbClr val="303437"/>
-                          </a:solidFill>
-                          <a:latin typeface="Noto Sans"/>
-                        </a:defRPr>
-                      </a:pPr>
-                      <a:r>
-                        <a:rPr sz="1800" b="0" lang="ja-JP" altLang="en-US">
-                          <a:solidFill>
-                            <a:srgbClr val="303437"/>
-                          </a:solidFill>
-                          <a:latin typeface="Noto Sans"/>
-                          <a:ea typeface="Noto Sans CJK JP"/>
-                          <a:cs typeface="Noto Sans"/>
-                        </a:rPr>
-                        <a:t>3</a:t>
-                      </a:r>
-                    </a:p>
-                  </a:txBody>
-                  <a:tcPr marL="63500" marR="63500" marT="38100" marB="38100" anchor="ctr">
-                    <a:lnL w="7620">
-                      <a:noFill/>
-                    </a:lnL>
-                    <a:lnR w="7620">
-                      <a:noFill/>
-                    </a:lnR>
-                    <a:lnT w="7620">
-                      <a:noFill/>
-                    </a:lnT>
-                    <a:lnB w="15240">
-                      <a:solidFill>
-                        <a:srgbClr val="626669"/>
-                      </a:solidFill>
-                      <a:prstDash val="solid"/>
-                    </a:lnB>
-                    <a:solidFill>
-                      <a:srgbClr val="FFFEF8"/>
-                    </a:solidFill>
-                  </a:tcPr>
-                </a:tc>
-                <a:tc>
-                  <a:txBody>
-                    <a:bodyPr wrap="square">
-                      <a:noAutofit/>
-                    </a:bodyPr>
-                    <a:lstStyle/>
-                    <a:p>
-                      <a:pPr algn="r">
-                        <a:lnSpc>
-                          <a:spcPts val="2070"/>
-                        </a:lnSpc>
-                        <a:buNone/>
-                        <a:defRPr sz="1800" b="0">
-                          <a:solidFill>
-                            <a:srgbClr val="303437"/>
-                          </a:solidFill>
-                          <a:latin typeface="Noto Sans"/>
-                        </a:defRPr>
-                      </a:pPr>
-                      <a:r>
-                        <a:rPr sz="1800" b="0" lang="ja-JP" altLang="en-US">
-                          <a:solidFill>
-                            <a:srgbClr val="303437"/>
-                          </a:solidFill>
-                          <a:latin typeface="Noto Sans"/>
-                          <a:ea typeface="Noto Sans CJK JP"/>
-                          <a:cs typeface="Noto Sans"/>
-                        </a:rPr>
-                        <a:t>0</a:t>
-                      </a:r>
-                    </a:p>
-                  </a:txBody>
-                  <a:tcPr marL="63500" marR="63500" marT="38100" marB="38100" anchor="ctr">
-                    <a:lnL w="7620">
-                      <a:noFill/>
-                    </a:lnL>
-                    <a:lnR w="7620">
-                      <a:noFill/>
-                    </a:lnR>
-                    <a:lnT w="7620">
-                      <a:noFill/>
-                    </a:lnT>
-                    <a:lnB w="15240">
-                      <a:solidFill>
-                        <a:srgbClr val="626669"/>
-                      </a:solidFill>
-                      <a:prstDash val="solid"/>
-                    </a:lnB>
-                    <a:solidFill>
-                      <a:srgbClr val="FFFEF8"/>
-                    </a:solidFill>
-                  </a:tcPr>
-                </a:tc>
-              </a:tr>
-            </a:tbl>
-          </a:graphicData>
-        </a:graphic>
-      </p:graphicFrame>
       <p:sp>
         <p:nvSpPr>
           <p:cNvPr id="5" name="sources"/>
@@ -27442,7 +26523,7 @@
                 <a:ea typeface="Noto Sans CJK JP"/>
                 <a:cs typeface="Noto Sans"/>
               </a:rPr>
-              <a:t>[1] Hu et al. OCNLI公式リポジトリ。固定版b53efdee1725、2026-10-18取得。</a:t>
+              <a:t>[1] Hu et al. (2020). OCNLI: Original Chinese Natural Language Inference. Findings of EMNLP.</a:t>
             </a:r>
             <a:r>
               <a:rPr sz="810" b="0" lang="ja-JP" altLang="en-US">
@@ -27465,7 +26546,7 @@
                 <a:cs typeface="Noto Sans"/>
                 <a:hlinkClick r:id="rId2"/>
               </a:rPr>
-              <a:t>https://github.com/CLUEbenchmark/OCNLI</a:t>
+              <a:t>https://aclanthology.org/2020.findings-emnlp.314/</a:t>
             </a:r>
           </a:p>
         </p:txBody>
@@ -27531,7 +26612,7 @@
                 <a:ea typeface="Noto Sans CJK JP"/>
                 <a:cs typeface="Noto Sans"/>
               </a:rPr>
-              <a:t>devのラベルを、全行で数える</a:t>
+              <a:t>参考文献</a:t>
             </a:r>
           </a:p>
         </p:txBody>
@@ -27579,842 +26660,21 @@
                 <a:ea typeface="Noto Sans CJK JP"/>
                 <a:cs typeface="Noto Sans"/>
               </a:rPr>
-              <a:t>Appendix: 2. 分割・注釈・実装の補足</a:t>
+              <a:t>Appendix: 2. 学習データと参考文献</a:t>
             </a:r>
           </a:p>
         </p:txBody>
       </p:sp>
-      <p:graphicFrame>
-        <p:nvGraphicFramePr>
-          <p:cNvPr id="4" name="Table 3"/>
-          <p:cNvGraphicFramePr>
-            <a:graphicFrameLocks noGrp="1"/>
-          </p:cNvGraphicFramePr>
-          <p:nvPr/>
-        </p:nvGraphicFramePr>
-        <p:xfrm>
-          <a:off x="548640" y="1508760"/>
-          <a:ext cx="8046720" cy="2286000"/>
-        </p:xfrm>
-        <a:graphic>
-          <a:graphicData uri="http://schemas.openxmlformats.org/drawingml/2006/table">
-            <a:tbl>
-              <a:tblPr firstRow="0" bandRow="0"/>
-              <a:tblGrid>
-                <a:gridCol w="3017520"/>
-                <a:gridCol w="1920240"/>
-                <a:gridCol w="3108960"/>
-              </a:tblGrid>
-              <a:tr h="457200">
-                <a:tc>
-                  <a:txBody>
-                    <a:bodyPr wrap="square">
-                      <a:noAutofit/>
-                    </a:bodyPr>
-                    <a:lstStyle/>
-                    <a:p>
-                      <a:pPr algn="l">
-                        <a:lnSpc>
-                          <a:spcPts val="2300"/>
-                        </a:lnSpc>
-                        <a:buNone/>
-                        <a:defRPr sz="2000" b="0">
-                          <a:solidFill>
-                            <a:srgbClr val="303437"/>
-                          </a:solidFill>
-                          <a:latin typeface="Noto Sans"/>
-                        </a:defRPr>
-                      </a:pPr>
-                      <a:r>
-                        <a:rPr sz="2000" b="0" lang="ja-JP" altLang="en-US">
-                          <a:solidFill>
-                            <a:srgbClr val="303437"/>
-                          </a:solidFill>
-                          <a:latin typeface="Noto Sans"/>
-                          <a:ea typeface="Noto Sans CJK JP"/>
-                          <a:cs typeface="Noto Sans"/>
-                        </a:rPr>
-                        <a:t>配布ラベル</a:t>
-                      </a:r>
-                    </a:p>
-                  </a:txBody>
-                  <a:tcPr marL="63500" marR="63500" marT="38100" marB="38100" anchor="ctr">
-                    <a:lnL w="7620">
-                      <a:noFill/>
-                    </a:lnL>
-                    <a:lnR w="7620">
-                      <a:noFill/>
-                    </a:lnR>
-                    <a:lnT w="15240">
-                      <a:solidFill>
-                        <a:srgbClr val="626669"/>
-                      </a:solidFill>
-                      <a:prstDash val="solid"/>
-                    </a:lnT>
-                    <a:lnB w="7620">
-                      <a:solidFill>
-                        <a:srgbClr val="626669"/>
-                      </a:solidFill>
-                      <a:prstDash val="solid"/>
-                    </a:lnB>
-                    <a:solidFill>
-                      <a:srgbClr val="FFFEF8"/>
-                    </a:solidFill>
-                  </a:tcPr>
-                </a:tc>
-                <a:tc>
-                  <a:txBody>
-                    <a:bodyPr wrap="square">
-                      <a:noAutofit/>
-                    </a:bodyPr>
-                    <a:lstStyle/>
-                    <a:p>
-                      <a:pPr algn="r">
-                        <a:lnSpc>
-                          <a:spcPts val="2300"/>
-                        </a:lnSpc>
-                        <a:buNone/>
-                        <a:defRPr sz="2000" b="0">
-                          <a:solidFill>
-                            <a:srgbClr val="303437"/>
-                          </a:solidFill>
-                          <a:latin typeface="Noto Sans"/>
-                        </a:defRPr>
-                      </a:pPr>
-                      <a:r>
-                        <a:rPr sz="2000" b="0" lang="ja-JP" altLang="en-US">
-                          <a:solidFill>
-                            <a:srgbClr val="303437"/>
-                          </a:solidFill>
-                          <a:latin typeface="Noto Sans"/>
-                          <a:ea typeface="Noto Sans CJK JP"/>
-                          <a:cs typeface="Noto Sans"/>
-                        </a:rPr>
-                        <a:t>件数</a:t>
-                      </a:r>
-                    </a:p>
-                  </a:txBody>
-                  <a:tcPr marL="63500" marR="63500" marT="38100" marB="38100" anchor="ctr">
-                    <a:lnL w="7620">
-                      <a:noFill/>
-                    </a:lnL>
-                    <a:lnR w="7620">
-                      <a:noFill/>
-                    </a:lnR>
-                    <a:lnT w="15240">
-                      <a:solidFill>
-                        <a:srgbClr val="626669"/>
-                      </a:solidFill>
-                      <a:prstDash val="solid"/>
-                    </a:lnT>
-                    <a:lnB w="7620">
-                      <a:solidFill>
-                        <a:srgbClr val="626669"/>
-                      </a:solidFill>
-                      <a:prstDash val="solid"/>
-                    </a:lnB>
-                    <a:solidFill>
-                      <a:srgbClr val="FFFEF8"/>
-                    </a:solidFill>
-                  </a:tcPr>
-                </a:tc>
-                <a:tc>
-                  <a:txBody>
-                    <a:bodyPr wrap="square">
-                      <a:noAutofit/>
-                    </a:bodyPr>
-                    <a:lstStyle/>
-                    <a:p>
-                      <a:pPr algn="r">
-                        <a:lnSpc>
-                          <a:spcPts val="2300"/>
-                        </a:lnSpc>
-                        <a:buNone/>
-                        <a:defRPr sz="2000" b="0">
-                          <a:solidFill>
-                            <a:srgbClr val="303437"/>
-                          </a:solidFill>
-                          <a:latin typeface="Noto Sans"/>
-                        </a:defRPr>
-                      </a:pPr>
-                      <a:r>
-                        <a:rPr sz="2000" b="0" lang="ja-JP" altLang="en-US">
-                          <a:solidFill>
-                            <a:srgbClr val="303437"/>
-                          </a:solidFill>
-                          <a:latin typeface="Noto Sans"/>
-                          <a:ea typeface="Noto Sans CJK JP"/>
-                          <a:cs typeface="Noto Sans"/>
-                        </a:rPr>
-                        <a:t>3ラベル中の割合</a:t>
-                      </a:r>
-                    </a:p>
-                  </a:txBody>
-                  <a:tcPr marL="63500" marR="63500" marT="38100" marB="38100" anchor="ctr">
-                    <a:lnL w="7620">
-                      <a:noFill/>
-                    </a:lnL>
-                    <a:lnR w="7620">
-                      <a:noFill/>
-                    </a:lnR>
-                    <a:lnT w="15240">
-                      <a:solidFill>
-                        <a:srgbClr val="626669"/>
-                      </a:solidFill>
-                      <a:prstDash val="solid"/>
-                    </a:lnT>
-                    <a:lnB w="7620">
-                      <a:solidFill>
-                        <a:srgbClr val="626669"/>
-                      </a:solidFill>
-                      <a:prstDash val="solid"/>
-                    </a:lnB>
-                    <a:solidFill>
-                      <a:srgbClr val="FFFEF8"/>
-                    </a:solidFill>
-                  </a:tcPr>
-                </a:tc>
-              </a:tr>
-              <a:tr h="457200">
-                <a:tc>
-                  <a:txBody>
-                    <a:bodyPr wrap="square">
-                      <a:noAutofit/>
-                    </a:bodyPr>
-                    <a:lstStyle/>
-                    <a:p>
-                      <a:pPr algn="l">
-                        <a:lnSpc>
-                          <a:spcPts val="2300"/>
-                        </a:lnSpc>
-                        <a:buNone/>
-                        <a:defRPr sz="2000" b="0">
-                          <a:solidFill>
-                            <a:srgbClr val="303437"/>
-                          </a:solidFill>
-                          <a:latin typeface="Noto Sans"/>
-                        </a:defRPr>
-                      </a:pPr>
-                      <a:r>
-                        <a:rPr sz="2000" b="0" lang="ja-JP" altLang="en-US">
-                          <a:solidFill>
-                            <a:srgbClr val="303437"/>
-                          </a:solidFill>
-                          <a:latin typeface="Noto Sans"/>
-                          <a:ea typeface="Noto Sans CJK JP"/>
-                          <a:cs typeface="Noto Sans"/>
-                        </a:rPr>
-                        <a:t>entailment</a:t>
-                      </a:r>
-                    </a:p>
-                  </a:txBody>
-                  <a:tcPr marL="63500" marR="63500" marT="38100" marB="38100" anchor="ctr">
-                    <a:lnL w="7620">
-                      <a:noFill/>
-                    </a:lnL>
-                    <a:lnR w="7620">
-                      <a:noFill/>
-                    </a:lnR>
-                    <a:lnT w="7620">
-                      <a:solidFill>
-                        <a:srgbClr val="626669"/>
-                      </a:solidFill>
-                      <a:prstDash val="solid"/>
-                    </a:lnT>
-                    <a:lnB w="7620">
-                      <a:noFill/>
-                    </a:lnB>
-                    <a:solidFill>
-                      <a:srgbClr val="FFFEF8"/>
-                    </a:solidFill>
-                  </a:tcPr>
-                </a:tc>
-                <a:tc>
-                  <a:txBody>
-                    <a:bodyPr wrap="square">
-                      <a:noAutofit/>
-                    </a:bodyPr>
-                    <a:lstStyle/>
-                    <a:p>
-                      <a:pPr algn="r">
-                        <a:lnSpc>
-                          <a:spcPts val="2300"/>
-                        </a:lnSpc>
-                        <a:buNone/>
-                        <a:defRPr sz="2000" b="0">
-                          <a:solidFill>
-                            <a:srgbClr val="303437"/>
-                          </a:solidFill>
-                          <a:latin typeface="Noto Sans"/>
-                        </a:defRPr>
-                      </a:pPr>
-                      <a:r>
-                        <a:rPr sz="2000" b="0" lang="ja-JP" altLang="en-US">
-                          <a:solidFill>
-                            <a:srgbClr val="303437"/>
-                          </a:solidFill>
-                          <a:latin typeface="Noto Sans"/>
-                          <a:ea typeface="Noto Sans CJK JP"/>
-                          <a:cs typeface="Noto Sans"/>
-                        </a:rPr>
-                        <a:t>947</a:t>
-                      </a:r>
-                    </a:p>
-                  </a:txBody>
-                  <a:tcPr marL="63500" marR="63500" marT="38100" marB="38100" anchor="ctr">
-                    <a:lnL w="7620">
-                      <a:noFill/>
-                    </a:lnL>
-                    <a:lnR w="7620">
-                      <a:noFill/>
-                    </a:lnR>
-                    <a:lnT w="7620">
-                      <a:solidFill>
-                        <a:srgbClr val="626669"/>
-                      </a:solidFill>
-                      <a:prstDash val="solid"/>
-                    </a:lnT>
-                    <a:lnB w="7620">
-                      <a:noFill/>
-                    </a:lnB>
-                    <a:solidFill>
-                      <a:srgbClr val="FFFEF8"/>
-                    </a:solidFill>
-                  </a:tcPr>
-                </a:tc>
-                <a:tc>
-                  <a:txBody>
-                    <a:bodyPr wrap="square">
-                      <a:noAutofit/>
-                    </a:bodyPr>
-                    <a:lstStyle/>
-                    <a:p>
-                      <a:pPr algn="r">
-                        <a:lnSpc>
-                          <a:spcPts val="2300"/>
-                        </a:lnSpc>
-                        <a:buNone/>
-                        <a:defRPr sz="2000" b="0">
-                          <a:solidFill>
-                            <a:srgbClr val="303437"/>
-                          </a:solidFill>
-                          <a:latin typeface="Noto Sans"/>
-                        </a:defRPr>
-                      </a:pPr>
-                      <a:r>
-                        <a:rPr sz="2000" b="0" lang="ja-JP" altLang="en-US">
-                          <a:solidFill>
-                            <a:srgbClr val="303437"/>
-                          </a:solidFill>
-                          <a:latin typeface="Noto Sans"/>
-                          <a:ea typeface="Noto Sans CJK JP"/>
-                          <a:cs typeface="Noto Sans"/>
-                        </a:rPr>
-                        <a:t>32.10%</a:t>
-                      </a:r>
-                    </a:p>
-                  </a:txBody>
-                  <a:tcPr marL="63500" marR="63500" marT="38100" marB="38100" anchor="ctr">
-                    <a:lnL w="7620">
-                      <a:noFill/>
-                    </a:lnL>
-                    <a:lnR w="7620">
-                      <a:noFill/>
-                    </a:lnR>
-                    <a:lnT w="7620">
-                      <a:solidFill>
-                        <a:srgbClr val="626669"/>
-                      </a:solidFill>
-                      <a:prstDash val="solid"/>
-                    </a:lnT>
-                    <a:lnB w="7620">
-                      <a:noFill/>
-                    </a:lnB>
-                    <a:solidFill>
-                      <a:srgbClr val="FFFEF8"/>
-                    </a:solidFill>
-                  </a:tcPr>
-                </a:tc>
-              </a:tr>
-              <a:tr h="457200">
-                <a:tc>
-                  <a:txBody>
-                    <a:bodyPr wrap="square">
-                      <a:noAutofit/>
-                    </a:bodyPr>
-                    <a:lstStyle/>
-                    <a:p>
-                      <a:pPr algn="l">
-                        <a:lnSpc>
-                          <a:spcPts val="2300"/>
-                        </a:lnSpc>
-                        <a:buNone/>
-                        <a:defRPr sz="2000" b="0">
-                          <a:solidFill>
-                            <a:srgbClr val="303437"/>
-                          </a:solidFill>
-                          <a:latin typeface="Noto Sans"/>
-                        </a:defRPr>
-                      </a:pPr>
-                      <a:r>
-                        <a:rPr sz="2000" b="0" lang="ja-JP" altLang="en-US">
-                          <a:solidFill>
-                            <a:srgbClr val="303437"/>
-                          </a:solidFill>
-                          <a:latin typeface="Noto Sans"/>
-                          <a:ea typeface="Noto Sans CJK JP"/>
-                          <a:cs typeface="Noto Sans"/>
-                        </a:rPr>
-                        <a:t>neutral</a:t>
-                      </a:r>
-                    </a:p>
-                  </a:txBody>
-                  <a:tcPr marL="63500" marR="63500" marT="38100" marB="38100" anchor="ctr">
-                    <a:lnL w="7620">
-                      <a:noFill/>
-                    </a:lnL>
-                    <a:lnR w="7620">
-                      <a:noFill/>
-                    </a:lnR>
-                    <a:lnT w="7620">
-                      <a:noFill/>
-                    </a:lnT>
-                    <a:lnB w="7620">
-                      <a:noFill/>
-                    </a:lnB>
-                    <a:solidFill>
-                      <a:srgbClr val="FFFEF8"/>
-                    </a:solidFill>
-                  </a:tcPr>
-                </a:tc>
-                <a:tc>
-                  <a:txBody>
-                    <a:bodyPr wrap="square">
-                      <a:noAutofit/>
-                    </a:bodyPr>
-                    <a:lstStyle/>
-                    <a:p>
-                      <a:pPr algn="r">
-                        <a:lnSpc>
-                          <a:spcPts val="2300"/>
-                        </a:lnSpc>
-                        <a:buNone/>
-                        <a:defRPr sz="2000" b="0">
-                          <a:solidFill>
-                            <a:srgbClr val="303437"/>
-                          </a:solidFill>
-                          <a:latin typeface="Noto Sans"/>
-                        </a:defRPr>
-                      </a:pPr>
-                      <a:r>
-                        <a:rPr sz="2000" b="0" lang="ja-JP" altLang="en-US">
-                          <a:solidFill>
-                            <a:srgbClr val="303437"/>
-                          </a:solidFill>
-                          <a:latin typeface="Noto Sans"/>
-                          <a:ea typeface="Noto Sans CJK JP"/>
-                          <a:cs typeface="Noto Sans"/>
-                        </a:rPr>
-                        <a:t>1,103</a:t>
-                      </a:r>
-                    </a:p>
-                  </a:txBody>
-                  <a:tcPr marL="63500" marR="63500" marT="38100" marB="38100" anchor="ctr">
-                    <a:lnL w="7620">
-                      <a:noFill/>
-                    </a:lnL>
-                    <a:lnR w="7620">
-                      <a:noFill/>
-                    </a:lnR>
-                    <a:lnT w="7620">
-                      <a:noFill/>
-                    </a:lnT>
-                    <a:lnB w="7620">
-                      <a:noFill/>
-                    </a:lnB>
-                    <a:solidFill>
-                      <a:srgbClr val="FFFEF8"/>
-                    </a:solidFill>
-                  </a:tcPr>
-                </a:tc>
-                <a:tc>
-                  <a:txBody>
-                    <a:bodyPr wrap="square">
-                      <a:noAutofit/>
-                    </a:bodyPr>
-                    <a:lstStyle/>
-                    <a:p>
-                      <a:pPr algn="r">
-                        <a:lnSpc>
-                          <a:spcPts val="2300"/>
-                        </a:lnSpc>
-                        <a:buNone/>
-                        <a:defRPr sz="2000" b="0">
-                          <a:solidFill>
-                            <a:srgbClr val="303437"/>
-                          </a:solidFill>
-                          <a:latin typeface="Noto Sans"/>
-                        </a:defRPr>
-                      </a:pPr>
-                      <a:r>
-                        <a:rPr sz="2000" b="0" lang="ja-JP" altLang="en-US">
-                          <a:solidFill>
-                            <a:srgbClr val="303437"/>
-                          </a:solidFill>
-                          <a:latin typeface="Noto Sans"/>
-                          <a:ea typeface="Noto Sans CJK JP"/>
-                          <a:cs typeface="Noto Sans"/>
-                        </a:rPr>
-                        <a:t>37.39%</a:t>
-                      </a:r>
-                    </a:p>
-                  </a:txBody>
-                  <a:tcPr marL="63500" marR="63500" marT="38100" marB="38100" anchor="ctr">
-                    <a:lnL w="7620">
-                      <a:noFill/>
-                    </a:lnL>
-                    <a:lnR w="7620">
-                      <a:noFill/>
-                    </a:lnR>
-                    <a:lnT w="7620">
-                      <a:noFill/>
-                    </a:lnT>
-                    <a:lnB w="7620">
-                      <a:noFill/>
-                    </a:lnB>
-                    <a:solidFill>
-                      <a:srgbClr val="FFFEF8"/>
-                    </a:solidFill>
-                  </a:tcPr>
-                </a:tc>
-              </a:tr>
-              <a:tr h="457200">
-                <a:tc>
-                  <a:txBody>
-                    <a:bodyPr wrap="square">
-                      <a:noAutofit/>
-                    </a:bodyPr>
-                    <a:lstStyle/>
-                    <a:p>
-                      <a:pPr algn="l">
-                        <a:lnSpc>
-                          <a:spcPts val="2300"/>
-                        </a:lnSpc>
-                        <a:buNone/>
-                        <a:defRPr sz="2000" b="0">
-                          <a:solidFill>
-                            <a:srgbClr val="303437"/>
-                          </a:solidFill>
-                          <a:latin typeface="Noto Sans"/>
-                        </a:defRPr>
-                      </a:pPr>
-                      <a:r>
-                        <a:rPr sz="2000" b="0" lang="ja-JP" altLang="en-US">
-                          <a:solidFill>
-                            <a:srgbClr val="303437"/>
-                          </a:solidFill>
-                          <a:latin typeface="Noto Sans"/>
-                          <a:ea typeface="Noto Sans CJK JP"/>
-                          <a:cs typeface="Noto Sans"/>
-                        </a:rPr>
-                        <a:t>contradiction</a:t>
-                      </a:r>
-                    </a:p>
-                  </a:txBody>
-                  <a:tcPr marL="63500" marR="63500" marT="38100" marB="38100" anchor="ctr">
-                    <a:lnL w="7620">
-                      <a:noFill/>
-                    </a:lnL>
-                    <a:lnR w="7620">
-                      <a:noFill/>
-                    </a:lnR>
-                    <a:lnT w="7620">
-                      <a:noFill/>
-                    </a:lnT>
-                    <a:lnB w="7620">
-                      <a:noFill/>
-                    </a:lnB>
-                    <a:solidFill>
-                      <a:srgbClr val="FFFEF8"/>
-                    </a:solidFill>
-                  </a:tcPr>
-                </a:tc>
-                <a:tc>
-                  <a:txBody>
-                    <a:bodyPr wrap="square">
-                      <a:noAutofit/>
-                    </a:bodyPr>
-                    <a:lstStyle/>
-                    <a:p>
-                      <a:pPr algn="r">
-                        <a:lnSpc>
-                          <a:spcPts val="2300"/>
-                        </a:lnSpc>
-                        <a:buNone/>
-                        <a:defRPr sz="2000" b="0">
-                          <a:solidFill>
-                            <a:srgbClr val="303437"/>
-                          </a:solidFill>
-                          <a:latin typeface="Noto Sans"/>
-                        </a:defRPr>
-                      </a:pPr>
-                      <a:r>
-                        <a:rPr sz="2000" b="0" lang="ja-JP" altLang="en-US">
-                          <a:solidFill>
-                            <a:srgbClr val="303437"/>
-                          </a:solidFill>
-                          <a:latin typeface="Noto Sans"/>
-                          <a:ea typeface="Noto Sans CJK JP"/>
-                          <a:cs typeface="Noto Sans"/>
-                        </a:rPr>
-                        <a:t>900</a:t>
-                      </a:r>
-                    </a:p>
-                  </a:txBody>
-                  <a:tcPr marL="63500" marR="63500" marT="38100" marB="38100" anchor="ctr">
-                    <a:lnL w="7620">
-                      <a:noFill/>
-                    </a:lnL>
-                    <a:lnR w="7620">
-                      <a:noFill/>
-                    </a:lnR>
-                    <a:lnT w="7620">
-                      <a:noFill/>
-                    </a:lnT>
-                    <a:lnB w="7620">
-                      <a:noFill/>
-                    </a:lnB>
-                    <a:solidFill>
-                      <a:srgbClr val="FFFEF8"/>
-                    </a:solidFill>
-                  </a:tcPr>
-                </a:tc>
-                <a:tc>
-                  <a:txBody>
-                    <a:bodyPr wrap="square">
-                      <a:noAutofit/>
-                    </a:bodyPr>
-                    <a:lstStyle/>
-                    <a:p>
-                      <a:pPr algn="r">
-                        <a:lnSpc>
-                          <a:spcPts val="2300"/>
-                        </a:lnSpc>
-                        <a:buNone/>
-                        <a:defRPr sz="2000" b="0">
-                          <a:solidFill>
-                            <a:srgbClr val="303437"/>
-                          </a:solidFill>
-                          <a:latin typeface="Noto Sans"/>
-                        </a:defRPr>
-                      </a:pPr>
-                      <a:r>
-                        <a:rPr sz="2000" b="0" lang="ja-JP" altLang="en-US">
-                          <a:solidFill>
-                            <a:srgbClr val="303437"/>
-                          </a:solidFill>
-                          <a:latin typeface="Noto Sans"/>
-                          <a:ea typeface="Noto Sans CJK JP"/>
-                          <a:cs typeface="Noto Sans"/>
-                        </a:rPr>
-                        <a:t>30.51%</a:t>
-                      </a:r>
-                    </a:p>
-                  </a:txBody>
-                  <a:tcPr marL="63500" marR="63500" marT="38100" marB="38100" anchor="ctr">
-                    <a:lnL w="7620">
-                      <a:noFill/>
-                    </a:lnL>
-                    <a:lnR w="7620">
-                      <a:noFill/>
-                    </a:lnR>
-                    <a:lnT w="7620">
-                      <a:noFill/>
-                    </a:lnT>
-                    <a:lnB w="7620">
-                      <a:noFill/>
-                    </a:lnB>
-                    <a:solidFill>
-                      <a:srgbClr val="FFFEF8"/>
-                    </a:solidFill>
-                  </a:tcPr>
-                </a:tc>
-              </a:tr>
-              <a:tr h="457200">
-                <a:tc>
-                  <a:txBody>
-                    <a:bodyPr wrap="square">
-                      <a:noAutofit/>
-                    </a:bodyPr>
-                    <a:lstStyle/>
-                    <a:p>
-                      <a:pPr algn="l">
-                        <a:lnSpc>
-                          <a:spcPts val="2300"/>
-                        </a:lnSpc>
-                        <a:buNone/>
-                        <a:defRPr sz="2000" b="0">
-                          <a:solidFill>
-                            <a:srgbClr val="303437"/>
-                          </a:solidFill>
-                          <a:latin typeface="Noto Sans"/>
-                        </a:defRPr>
-                      </a:pPr>
-                      <a:r>
-                        <a:rPr sz="2000" b="0" lang="ja-JP" altLang="en-US">
-                          <a:solidFill>
-                            <a:srgbClr val="303437"/>
-                          </a:solidFill>
-                          <a:latin typeface="Noto Sans"/>
-                          <a:ea typeface="Noto Sans CJK JP"/>
-                          <a:cs typeface="Noto Sans"/>
-                        </a:rPr>
-                        <a:t>-</a:t>
-                      </a:r>
-                    </a:p>
-                  </a:txBody>
-                  <a:tcPr marL="63500" marR="63500" marT="38100" marB="38100" anchor="ctr">
-                    <a:lnL w="7620">
-                      <a:noFill/>
-                    </a:lnL>
-                    <a:lnR w="7620">
-                      <a:noFill/>
-                    </a:lnR>
-                    <a:lnT w="7620">
-                      <a:noFill/>
-                    </a:lnT>
-                    <a:lnB w="15240">
-                      <a:solidFill>
-                        <a:srgbClr val="626669"/>
-                      </a:solidFill>
-                      <a:prstDash val="solid"/>
-                    </a:lnB>
-                    <a:solidFill>
-                      <a:srgbClr val="FFFEF8"/>
-                    </a:solidFill>
-                  </a:tcPr>
-                </a:tc>
-                <a:tc>
-                  <a:txBody>
-                    <a:bodyPr wrap="square">
-                      <a:noAutofit/>
-                    </a:bodyPr>
-                    <a:lstStyle/>
-                    <a:p>
-                      <a:pPr algn="r">
-                        <a:lnSpc>
-                          <a:spcPts val="2300"/>
-                        </a:lnSpc>
-                        <a:buNone/>
-                        <a:defRPr sz="2000" b="0">
-                          <a:solidFill>
-                            <a:srgbClr val="303437"/>
-                          </a:solidFill>
-                          <a:latin typeface="Noto Sans"/>
-                        </a:defRPr>
-                      </a:pPr>
-                      <a:r>
-                        <a:rPr sz="2000" b="0" lang="ja-JP" altLang="en-US">
-                          <a:solidFill>
-                            <a:srgbClr val="303437"/>
-                          </a:solidFill>
-                          <a:latin typeface="Noto Sans"/>
-                          <a:ea typeface="Noto Sans CJK JP"/>
-                          <a:cs typeface="Noto Sans"/>
-                        </a:rPr>
-                        <a:t>50</a:t>
-                      </a:r>
-                    </a:p>
-                  </a:txBody>
-                  <a:tcPr marL="63500" marR="63500" marT="38100" marB="38100" anchor="ctr">
-                    <a:lnL w="7620">
-                      <a:noFill/>
-                    </a:lnL>
-                    <a:lnR w="7620">
-                      <a:noFill/>
-                    </a:lnR>
-                    <a:lnT w="7620">
-                      <a:noFill/>
-                    </a:lnT>
-                    <a:lnB w="15240">
-                      <a:solidFill>
-                        <a:srgbClr val="626669"/>
-                      </a:solidFill>
-                      <a:prstDash val="solid"/>
-                    </a:lnB>
-                    <a:solidFill>
-                      <a:srgbClr val="FFFEF8"/>
-                    </a:solidFill>
-                  </a:tcPr>
-                </a:tc>
-                <a:tc>
-                  <a:txBody>
-                    <a:bodyPr wrap="square">
-                      <a:noAutofit/>
-                    </a:bodyPr>
-                    <a:lstStyle/>
-                    <a:p>
-                      <a:pPr algn="r">
-                        <a:lnSpc>
-                          <a:spcPts val="2300"/>
-                        </a:lnSpc>
-                        <a:buNone/>
-                        <a:defRPr sz="2000" b="0">
-                          <a:solidFill>
-                            <a:srgbClr val="303437"/>
-                          </a:solidFill>
-                          <a:latin typeface="Noto Sans"/>
-                        </a:defRPr>
-                      </a:pPr>
-                      <a:r>
-                        <a:rPr sz="2000" b="0" lang="ja-JP" altLang="en-US">
-                          <a:solidFill>
-                            <a:srgbClr val="303437"/>
-                          </a:solidFill>
-                          <a:latin typeface="Noto Sans"/>
-                          <a:ea typeface="Noto Sans CJK JP"/>
-                          <a:cs typeface="Noto Sans"/>
-                        </a:rPr>
-                        <a:t>分母から除く</a:t>
-                      </a:r>
-                    </a:p>
-                  </a:txBody>
-                  <a:tcPr marL="63500" marR="63500" marT="38100" marB="38100" anchor="ctr">
-                    <a:lnL w="7620">
-                      <a:noFill/>
-                    </a:lnL>
-                    <a:lnR w="7620">
-                      <a:noFill/>
-                    </a:lnR>
-                    <a:lnT w="7620">
-                      <a:noFill/>
-                    </a:lnT>
-                    <a:lnB w="15240">
-                      <a:solidFill>
-                        <a:srgbClr val="626669"/>
-                      </a:solidFill>
-                      <a:prstDash val="solid"/>
-                    </a:lnB>
-                    <a:solidFill>
-                      <a:srgbClr val="FFFEF8"/>
-                    </a:solidFill>
-                  </a:tcPr>
-                </a:tc>
-              </a:tr>
-            </a:tbl>
-          </a:graphicData>
-        </a:graphic>
-      </p:graphicFrame>
       <p:sp>
         <p:nvSpPr>
-          <p:cNvPr id="5" name="TextBox 4"/>
+          <p:cNvPr id="4" name="TextBox 3"/>
           <p:cNvSpPr txBox="1"/>
           <p:nvPr/>
         </p:nvSpPr>
         <p:spPr>
           <a:xfrm>
-            <a:off x="594360" y="3995928"/>
-            <a:ext cx="7955279" cy="658368"/>
+            <a:off x="548640" y="1389888"/>
+            <a:ext cx="8046720" cy="280797"/>
           </a:xfrm>
           <a:prstGeom prst="rect">
             <a:avLst/>
@@ -28429,7 +26689,7 @@
           <a:p>
             <a:pPr algn="l">
               <a:lnSpc>
-                <a:spcPts val="2047"/>
+                <a:spcPts val="1995"/>
               </a:lnSpc>
               <a:spcBef>
                 <a:spcPts val="0"/>
@@ -28446,29 +26706,29 @@
               </a:defRPr>
             </a:pPr>
             <a:r>
-              <a:rPr sz="1750" b="0" lang="ja-JP" altLang="en-US">
-                <a:solidFill>
-                  <a:srgbClr val="303437"/>
-                </a:solidFill>
-                <a:latin typeface="Noto Sans"/>
-                <a:ea typeface="Noto Sans CJK JP"/>
-                <a:cs typeface="Noto Sans"/>
-              </a:rPr>
-              <a:t>5票のうち既定の3ラベルの票を照合。dev id2092にはunrelatedの票が3つあり、配布正解は「-」のまま保持した。</a:t>
+              <a:rPr sz="1750" b="1" lang="ja-JP" altLang="en-US">
+                <a:solidFill>
+                  <a:srgbClr val="303437"/>
+                </a:solidFill>
+                <a:latin typeface="Noto Sans"/>
+                <a:ea typeface="Noto Sans CJK JP"/>
+                <a:cs typeface="Noto Sans"/>
+              </a:rPr>
+              <a:t>OCNLI: Original Chinese Natural Language Inference</a:t>
             </a:r>
           </a:p>
         </p:txBody>
       </p:sp>
       <p:sp>
         <p:nvSpPr>
-          <p:cNvPr id="6" name="sources"/>
+          <p:cNvPr id="5" name="TextBox 4"/>
           <p:cNvSpPr txBox="1"/>
           <p:nvPr/>
         </p:nvSpPr>
         <p:spPr>
           <a:xfrm>
-            <a:off x="502920" y="4700016"/>
-            <a:ext cx="8183879" cy="530352"/>
+            <a:off x="548640" y="1708785"/>
+            <a:ext cx="8046720" cy="360426"/>
           </a:xfrm>
           <a:prstGeom prst="rect">
             <a:avLst/>
@@ -28483,24 +26743,24 @@
           <a:p>
             <a:pPr algn="l">
               <a:lnSpc>
-                <a:spcPts val="940"/>
-              </a:lnSpc>
-              <a:spcBef>
-                <a:spcPts val="0"/>
-              </a:spcBef>
-              <a:spcAft>
-                <a:spcPts val="140"/>
-              </a:spcAft>
-              <a:buNone/>
-              <a:defRPr sz="810" b="0">
-                <a:solidFill>
-                  <a:srgbClr val="303437"/>
-                </a:solidFill>
-                <a:latin typeface="Noto Sans"/>
-              </a:defRPr>
-            </a:pPr>
-            <a:r>
-              <a:rPr sz="810" b="0" lang="ja-JP" altLang="en-US">
+                <a:spcPts val="1311"/>
+              </a:lnSpc>
+              <a:spcBef>
+                <a:spcPts val="0"/>
+              </a:spcBef>
+              <a:spcAft>
+                <a:spcPts val="0"/>
+              </a:spcAft>
+              <a:buNone/>
+              <a:defRPr sz="1150" b="0">
+                <a:solidFill>
+                  <a:srgbClr val="303437"/>
+                </a:solidFill>
+                <a:latin typeface="Noto Sans"/>
+              </a:defRPr>
+            </a:pPr>
+            <a:r>
+              <a:rPr sz="1150" b="0" lang="ja-JP" altLang="en-US">
                 <a:solidFill>
                   <a:srgbClr val="626669"/>
                 </a:solidFill>
@@ -28508,28 +26768,331 @@
                 <a:ea typeface="Noto Sans CJK JP"/>
                 <a:cs typeface="Noto Sans"/>
               </a:rPr>
-              <a:t>[1] Hu et al. OCNLI公式リポジトリ。固定版b53efdee1725、2026-10-18取得。</a:t>
-            </a:r>
-            <a:r>
-              <a:rPr sz="810" b="0" lang="ja-JP" altLang="en-US">
+              <a:t>Hai Hu, Kyle Richardson, Liang Xu, Lu Li, Sandra Kübler, Lawrence S. Moss · 2020 · Findings of EMNLP, pp.3512–3526</a:t>
+            </a:r>
+          </a:p>
+        </p:txBody>
+      </p:sp>
+      <p:sp>
+        <p:nvSpPr>
+          <p:cNvPr id="6" name="TextBox 5"/>
+          <p:cNvSpPr txBox="1"/>
+          <p:nvPr/>
+        </p:nvSpPr>
+        <p:spPr>
+          <a:xfrm>
+            <a:off x="548640" y="2120011"/>
+            <a:ext cx="8046720" cy="490727"/>
+          </a:xfrm>
+          <a:prstGeom prst="rect">
+            <a:avLst/>
+          </a:prstGeom>
+          <a:noFill/>
+        </p:spPr>
+        <p:txBody>
+          <a:bodyPr wrap="square" lIns="0" rIns="0" tIns="0" bIns="0">
+            <a:noAutofit/>
+          </a:bodyPr>
+          <a:lstStyle/>
+          <a:p>
+            <a:pPr algn="l">
+              <a:lnSpc>
+                <a:spcPts val="1823"/>
+              </a:lnSpc>
+              <a:spcBef>
+                <a:spcPts val="0"/>
+              </a:spcBef>
+              <a:spcAft>
+                <a:spcPts val="0"/>
+              </a:spcAft>
+              <a:buNone/>
+              <a:defRPr sz="1600" b="0">
+                <a:solidFill>
+                  <a:srgbClr val="303437"/>
+                </a:solidFill>
+                <a:latin typeface="Noto Sans"/>
+              </a:defRPr>
+            </a:pPr>
+            <a:r>
+              <a:rPr sz="1600" b="0" lang="ja-JP" altLang="en-US">
+                <a:solidFill>
+                  <a:srgbClr val="303437"/>
+                </a:solidFill>
+                <a:latin typeface="Noto Sans"/>
+                <a:ea typeface="Noto Sans CJK JP"/>
+                <a:cs typeface="Noto Sans"/>
+              </a:rPr>
+              <a:t>中国語の前提と仮説を収集し、多数決による検証、モデル成績、注釈の手掛かりを分析する。</a:t>
+            </a:r>
+          </a:p>
+        </p:txBody>
+      </p:sp>
+      <p:sp>
+        <p:nvSpPr>
+          <p:cNvPr id="7" name="TextBox 6"/>
+          <p:cNvSpPr txBox="1"/>
+          <p:nvPr/>
+        </p:nvSpPr>
+        <p:spPr>
+          <a:xfrm>
+            <a:off x="548640" y="2661539"/>
+            <a:ext cx="8046720" cy="179450"/>
+          </a:xfrm>
+          <a:prstGeom prst="rect">
+            <a:avLst/>
+          </a:prstGeom>
+          <a:noFill/>
+        </p:spPr>
+        <p:txBody>
+          <a:bodyPr wrap="square" lIns="0" rIns="0" tIns="0" bIns="0">
+            <a:noAutofit/>
+          </a:bodyPr>
+          <a:lstStyle/>
+          <a:p>
+            <a:pPr algn="l">
+              <a:lnSpc>
+                <a:spcPts val="1197"/>
+              </a:lnSpc>
+              <a:spcBef>
+                <a:spcPts val="0"/>
+              </a:spcBef>
+              <a:spcAft>
+                <a:spcPts val="0"/>
+              </a:spcAft>
+              <a:buNone/>
+              <a:defRPr sz="1050" b="0">
+                <a:solidFill>
+                  <a:srgbClr val="303437"/>
+                </a:solidFill>
+                <a:latin typeface="Noto Sans"/>
+              </a:defRPr>
+            </a:pPr>
+            <a:r>
+              <a:rPr sz="1050" b="0" lang="ja-JP" altLang="en-US">
                 <a:solidFill>
                   <a:srgbClr val="626669"/>
                 </a:solidFill>
                 <a:latin typeface="Noto Sans"/>
                 <a:ea typeface="Noto Sans CJK JP"/>
                 <a:cs typeface="Noto Sans"/>
-              </a:rPr>
-              <a:t>  </a:t>
-            </a:r>
-            <a:r>
-              <a:rPr sz="810" b="0" lang="ja-JP" altLang="en-US">
+                <a:hlinkClick r:id="rId2"/>
+              </a:rPr>
+              <a:t>https://aclanthology.org/2020.findings-emnlp.314/</a:t>
+            </a:r>
+          </a:p>
+        </p:txBody>
+      </p:sp>
+      <p:sp>
+        <p:nvSpPr>
+          <p:cNvPr id="8" name="TextBox 7"/>
+          <p:cNvSpPr txBox="1"/>
+          <p:nvPr/>
+        </p:nvSpPr>
+        <p:spPr>
+          <a:xfrm>
+            <a:off x="548640" y="3060446"/>
+            <a:ext cx="8046720" cy="280797"/>
+          </a:xfrm>
+          <a:prstGeom prst="rect">
+            <a:avLst/>
+          </a:prstGeom>
+          <a:noFill/>
+        </p:spPr>
+        <p:txBody>
+          <a:bodyPr wrap="square" lIns="0" rIns="0" tIns="0" bIns="0">
+            <a:noAutofit/>
+          </a:bodyPr>
+          <a:lstStyle/>
+          <a:p>
+            <a:pPr algn="l">
+              <a:lnSpc>
+                <a:spcPts val="1995"/>
+              </a:lnSpc>
+              <a:spcBef>
+                <a:spcPts val="0"/>
+              </a:spcBef>
+              <a:spcAft>
+                <a:spcPts val="0"/>
+              </a:spcAft>
+              <a:buNone/>
+              <a:defRPr sz="1750" b="0">
+                <a:solidFill>
+                  <a:srgbClr val="303437"/>
+                </a:solidFill>
+                <a:latin typeface="Noto Sans"/>
+              </a:defRPr>
+            </a:pPr>
+            <a:r>
+              <a:rPr sz="1750" b="1" lang="ja-JP" altLang="en-US">
+                <a:solidFill>
+                  <a:srgbClr val="303437"/>
+                </a:solidFill>
+                <a:latin typeface="Noto Sans"/>
+                <a:ea typeface="Noto Sans CJK JP"/>
+                <a:cs typeface="Noto Sans"/>
+              </a:rPr>
+              <a:t>OCNLI — Original Chinese Natural Language Inference</a:t>
+            </a:r>
+          </a:p>
+        </p:txBody>
+      </p:sp>
+      <p:sp>
+        <p:nvSpPr>
+          <p:cNvPr id="9" name="TextBox 8"/>
+          <p:cNvSpPr txBox="1"/>
+          <p:nvPr/>
+        </p:nvSpPr>
+        <p:spPr>
+          <a:xfrm>
+            <a:off x="548640" y="3379343"/>
+            <a:ext cx="8046720" cy="193929"/>
+          </a:xfrm>
+          <a:prstGeom prst="rect">
+            <a:avLst/>
+          </a:prstGeom>
+          <a:noFill/>
+        </p:spPr>
+        <p:txBody>
+          <a:bodyPr wrap="square" lIns="0" rIns="0" tIns="0" bIns="0">
+            <a:noAutofit/>
+          </a:bodyPr>
+          <a:lstStyle/>
+          <a:p>
+            <a:pPr algn="l">
+              <a:lnSpc>
+                <a:spcPts val="1311"/>
+              </a:lnSpc>
+              <a:spcBef>
+                <a:spcPts val="0"/>
+              </a:spcBef>
+              <a:spcAft>
+                <a:spcPts val="0"/>
+              </a:spcAft>
+              <a:buNone/>
+              <a:defRPr sz="1150" b="0">
+                <a:solidFill>
+                  <a:srgbClr val="303437"/>
+                </a:solidFill>
+                <a:latin typeface="Noto Sans"/>
+              </a:defRPr>
+            </a:pPr>
+            <a:r>
+              <a:rPr sz="1150" b="0" lang="ja-JP" altLang="en-US">
                 <a:solidFill>
                   <a:srgbClr val="626669"/>
                 </a:solidFill>
                 <a:latin typeface="Noto Sans"/>
                 <a:ea typeface="Noto Sans CJK JP"/>
                 <a:cs typeface="Noto Sans"/>
-                <a:hlinkClick r:id="rId2"/>
+              </a:rPr>
+              <a:t>CLUEbenchmark / Hu et al. (n.d.). 公式リポジトリ。参照2026-10-19。</a:t>
+            </a:r>
+          </a:p>
+        </p:txBody>
+      </p:sp>
+      <p:sp>
+        <p:nvSpPr>
+          <p:cNvPr id="10" name="TextBox 9"/>
+          <p:cNvSpPr txBox="1"/>
+          <p:nvPr/>
+        </p:nvSpPr>
+        <p:spPr>
+          <a:xfrm>
+            <a:off x="548640" y="3624072"/>
+            <a:ext cx="8046720" cy="490727"/>
+          </a:xfrm>
+          <a:prstGeom prst="rect">
+            <a:avLst/>
+          </a:prstGeom>
+          <a:noFill/>
+        </p:spPr>
+        <p:txBody>
+          <a:bodyPr wrap="square" lIns="0" rIns="0" tIns="0" bIns="0">
+            <a:noAutofit/>
+          </a:bodyPr>
+          <a:lstStyle/>
+          <a:p>
+            <a:pPr algn="l">
+              <a:lnSpc>
+                <a:spcPts val="1823"/>
+              </a:lnSpc>
+              <a:spcBef>
+                <a:spcPts val="0"/>
+              </a:spcBef>
+              <a:spcAft>
+                <a:spcPts val="0"/>
+              </a:spcAft>
+              <a:buNone/>
+              <a:defRPr sz="1600" b="0">
+                <a:solidFill>
+                  <a:srgbClr val="303437"/>
+                </a:solidFill>
+                <a:latin typeface="Noto Sans"/>
+              </a:defRPr>
+            </a:pPr>
+            <a:r>
+              <a:rPr sz="1600" b="0" lang="ja-JP" altLang="en-US">
+                <a:solidFill>
+                  <a:srgbClr val="303437"/>
+                </a:solidFill>
+                <a:latin typeface="Noto Sans"/>
+                <a:ea typeface="Noto Sans CJK JP"/>
+                <a:cs typeface="Noto Sans"/>
+              </a:rPr>
+              <a:t>学習用4規模、共通dev・入力のみのtest、形式・baseline・CC BY-NC 2.0の条件を公開する。</a:t>
+            </a:r>
+          </a:p>
+        </p:txBody>
+      </p:sp>
+      <p:sp>
+        <p:nvSpPr>
+          <p:cNvPr id="11" name="TextBox 10"/>
+          <p:cNvSpPr txBox="1"/>
+          <p:nvPr/>
+        </p:nvSpPr>
+        <p:spPr>
+          <a:xfrm>
+            <a:off x="548640" y="4165600"/>
+            <a:ext cx="8046720" cy="179450"/>
+          </a:xfrm>
+          <a:prstGeom prst="rect">
+            <a:avLst/>
+          </a:prstGeom>
+          <a:noFill/>
+        </p:spPr>
+        <p:txBody>
+          <a:bodyPr wrap="square" lIns="0" rIns="0" tIns="0" bIns="0">
+            <a:noAutofit/>
+          </a:bodyPr>
+          <a:lstStyle/>
+          <a:p>
+            <a:pPr algn="l">
+              <a:lnSpc>
+                <a:spcPts val="1197"/>
+              </a:lnSpc>
+              <a:spcBef>
+                <a:spcPts val="0"/>
+              </a:spcBef>
+              <a:spcAft>
+                <a:spcPts val="0"/>
+              </a:spcAft>
+              <a:buNone/>
+              <a:defRPr sz="1050" b="0">
+                <a:solidFill>
+                  <a:srgbClr val="303437"/>
+                </a:solidFill>
+                <a:latin typeface="Noto Sans"/>
+              </a:defRPr>
+            </a:pPr>
+            <a:r>
+              <a:rPr sz="1050" b="0" lang="ja-JP" altLang="en-US">
+                <a:solidFill>
+                  <a:srgbClr val="626669"/>
+                </a:solidFill>
+                <a:latin typeface="Noto Sans"/>
+                <a:ea typeface="Noto Sans CJK JP"/>
+                <a:cs typeface="Noto Sans"/>
+                <a:hlinkClick r:id="rId3"/>
               </a:rPr>
               <a:t>https://github.com/CLUEbenchmark/OCNLI</a:t>
             </a:r>
@@ -28680,7 +27243,7 @@
                 <a:ea typeface="Noto Sans CJK JP"/>
                 <a:cs typeface="Noto Sans"/>
               </a:rPr>
-              <a:t>入力は前提と仮説の順序付きペア。前提を真としたときに仮説をどう判断するかを、含意・矛盾・中立の3種類で答える。</a:t>
+              <a:t>入力は前提と仮説のペア。前提を真としたときに仮説が成り立つかを、含意・矛盾・中立の3種類で答える。</a:t>
             </a:r>
           </a:p>
           <a:p>
@@ -28710,7 +27273,7 @@
                 <a:ea typeface="Noto Sans CJK JP"/>
                 <a:cs typeface="Noto Sans"/>
               </a:rPr>
-              <a:t>2020年に公開。英語の推論データを訳す方法ではなく、5文体の中国語から集めた前提と、人が書いた仮説を使う。</a:t>
+              <a:t>2020年に公開。英語の推論問題を翻訳する方法ではなく、5文体の中国語素材と、人が中国語で書いた仮説を使う。</a:t>
             </a:r>
           </a:p>
         </p:txBody>
@@ -28901,127 +27464,14 @@
                 <a:ea typeface="Noto Sans CJK JP"/>
                 <a:cs typeface="Noto Sans"/>
               </a:rPr>
-              <a:t>作成条件の内訳と、公開分割の総数に差がある</a:t>
+              <a:t>参考文献</a:t>
             </a:r>
           </a:p>
         </p:txBody>
       </p:sp>
       <p:sp>
         <p:nvSpPr>
-          <p:cNvPr id="3" name="Text Placeholder 2"/>
-          <p:cNvSpPr>
-            <a:spLocks noGrp="1"/>
-          </p:cNvSpPr>
-          <p:nvPr>
-            <p:ph type="body" idx="1"/>
-          </p:nvPr>
-        </p:nvSpPr>
-        <p:spPr>
-          <a:xfrm>
-            <a:off x="594360" y="1463040"/>
-            <a:ext cx="7955279" cy="3044952"/>
-          </a:xfrm>
-        </p:spPr>
-        <p:txBody>
-          <a:bodyPr wrap="square" tIns="91440" bIns="91440">
-            <a:noAutofit/>
-          </a:bodyPr>
-          <a:lstStyle/>
-          <a:p>
-            <a:pPr marL="457200" indent="-355600">
-              <a:lnSpc>
-                <a:spcPts val="2499"/>
-              </a:lnSpc>
-              <a:spcAft>
-                <a:spcPts val="700"/>
-              </a:spcAft>
-              <a:buSzPct val="63333"/>
-              <a:buFont typeface="Noto Sans CJK JP"/>
-              <a:buChar char="●"/>
-              <a:defRPr sz="2100" b="0">
-                <a:solidFill>
-                  <a:srgbClr val="303437"/>
-                </a:solidFill>
-                <a:latin typeface="Noto Sans"/>
-              </a:defRPr>
-            </a:pPr>
-            <a:r>
-              <a:rPr sz="2100" b="0" lang="ja-JP" altLang="en-US">
-                <a:solidFill>
-                  <a:srgbClr val="303437"/>
-                </a:solidFill>
-                <a:latin typeface="Noto Sans"/>
-                <a:ea typeface="Noto Sans CJK JP"/>
-                <a:cs typeface="Noto Sans"/>
-              </a:rPr>
-              <a:t>論文の4作成条件の件数は11,986、12,328、16,584、15,627で、合計56,525。表示された総数56,486および公開3分割の合計との差は39組ある。</a:t>
-            </a:r>
-          </a:p>
-          <a:p>
-            <a:pPr marL="457200" indent="-355600">
-              <a:lnSpc>
-                <a:spcPts val="2499"/>
-              </a:lnSpc>
-              <a:spcAft>
-                <a:spcPts val="700"/>
-              </a:spcAft>
-              <a:buSzPct val="63333"/>
-              <a:buFont typeface="Noto Sans CJK JP"/>
-              <a:buChar char="●"/>
-              <a:defRPr sz="2100" b="0">
-                <a:solidFill>
-                  <a:srgbClr val="303437"/>
-                </a:solidFill>
-                <a:latin typeface="Noto Sans"/>
-              </a:defRPr>
-            </a:pPr>
-            <a:r>
-              <a:rPr sz="2100" b="0" lang="ja-JP" altLang="en-US">
-                <a:solidFill>
-                  <a:srgbClr val="303437"/>
-                </a:solidFill>
-                <a:latin typeface="Noto Sans"/>
-                <a:ea typeface="Noto Sans CJK JP"/>
-                <a:cs typeface="Noto Sans"/>
-              </a:rPr>
-              <a:t>今回の全件集計は、公式公開版の50,486 + 3,000 + 3,000 = 56,486組を分母とした。表の内訳を推測で補正しない。</a:t>
-            </a:r>
-          </a:p>
-          <a:p>
-            <a:pPr marL="457200" indent="-355600">
-              <a:lnSpc>
-                <a:spcPts val="2499"/>
-              </a:lnSpc>
-              <a:spcAft>
-                <a:spcPts val="0"/>
-              </a:spcAft>
-              <a:buSzPct val="63333"/>
-              <a:buFont typeface="Noto Sans CJK JP"/>
-              <a:buChar char="●"/>
-              <a:defRPr sz="2100" b="0">
-                <a:solidFill>
-                  <a:srgbClr val="303437"/>
-                </a:solidFill>
-                <a:latin typeface="Noto Sans"/>
-              </a:defRPr>
-            </a:pPr>
-            <a:r>
-              <a:rPr sz="2100" b="0" lang="ja-JP" altLang="en-US">
-                <a:solidFill>
-                  <a:srgbClr val="303437"/>
-                </a:solidFill>
-                <a:latin typeface="Noto Sans"/>
-                <a:ea typeface="Noto Sans CJK JP"/>
-                <a:cs typeface="Noto Sans"/>
-              </a:rPr>
-              <a:t>公開30kとdevは同じ前提文0種類だが、prem_idは2種類共通する。識別子が同じでも文が異なる例があり、前提文そのものでも照合した。</a:t>
-            </a:r>
-          </a:p>
-        </p:txBody>
-      </p:sp>
-      <p:sp>
-        <p:nvSpPr>
-          <p:cNvPr id="4" name="Title 3"/>
+          <p:cNvPr id="3" name="Title 2"/>
           <p:cNvSpPr>
             <a:spLocks noGrp="1"/>
           </p:cNvSpPr>
@@ -29062,21 +27512,21 @@
                 <a:ea typeface="Noto Sans CJK JP"/>
                 <a:cs typeface="Noto Sans"/>
               </a:rPr>
-              <a:t>Appendix: 2. 分割・注釈・実装の補足</a:t>
+              <a:t>Appendix: 2. 学習データと参考文献</a:t>
             </a:r>
           </a:p>
         </p:txBody>
       </p:sp>
       <p:sp>
         <p:nvSpPr>
-          <p:cNvPr id="5" name="sources"/>
+          <p:cNvPr id="4" name="TextBox 3"/>
           <p:cNvSpPr txBox="1"/>
           <p:nvPr/>
         </p:nvSpPr>
         <p:spPr>
           <a:xfrm>
-            <a:off x="502920" y="4700016"/>
-            <a:ext cx="8183879" cy="530352"/>
+            <a:off x="548640" y="1389888"/>
+            <a:ext cx="8046720" cy="534162"/>
           </a:xfrm>
           <a:prstGeom prst="rect">
             <a:avLst/>
@@ -29091,24 +27541,78 @@
           <a:p>
             <a:pPr algn="l">
               <a:lnSpc>
-                <a:spcPts val="940"/>
-              </a:lnSpc>
-              <a:spcBef>
-                <a:spcPts val="0"/>
-              </a:spcBef>
-              <a:spcAft>
-                <a:spcPts val="140"/>
-              </a:spcAft>
-              <a:buNone/>
-              <a:defRPr sz="810" b="0">
-                <a:solidFill>
-                  <a:srgbClr val="303437"/>
-                </a:solidFill>
-                <a:latin typeface="Noto Sans"/>
-              </a:defRPr>
-            </a:pPr>
-            <a:r>
-              <a:rPr sz="810" b="0" lang="ja-JP" altLang="en-US">
+                <a:spcPts val="1995"/>
+              </a:lnSpc>
+              <a:spcBef>
+                <a:spcPts val="0"/>
+              </a:spcBef>
+              <a:spcAft>
+                <a:spcPts val="0"/>
+              </a:spcAft>
+              <a:buNone/>
+              <a:defRPr sz="1750" b="0">
+                <a:solidFill>
+                  <a:srgbClr val="303437"/>
+                </a:solidFill>
+                <a:latin typeface="Noto Sans"/>
+              </a:defRPr>
+            </a:pPr>
+            <a:r>
+              <a:rPr sz="1750" b="1" lang="ja-JP" altLang="en-US">
+                <a:solidFill>
+                  <a:srgbClr val="303437"/>
+                </a:solidFill>
+                <a:latin typeface="Noto Sans"/>
+                <a:ea typeface="Noto Sans CJK JP"/>
+                <a:cs typeface="Noto Sans"/>
+              </a:rPr>
+              <a:t>A Broad-Coverage Challenge Corpus for Sentence Understanding through Inference</a:t>
+            </a:r>
+          </a:p>
+        </p:txBody>
+      </p:sp>
+      <p:sp>
+        <p:nvSpPr>
+          <p:cNvPr id="5" name="TextBox 4"/>
+          <p:cNvSpPr txBox="1"/>
+          <p:nvPr/>
+        </p:nvSpPr>
+        <p:spPr>
+          <a:xfrm>
+            <a:off x="548640" y="1962150"/>
+            <a:ext cx="8046720" cy="193929"/>
+          </a:xfrm>
+          <a:prstGeom prst="rect">
+            <a:avLst/>
+          </a:prstGeom>
+          <a:noFill/>
+        </p:spPr>
+        <p:txBody>
+          <a:bodyPr wrap="square" lIns="0" rIns="0" tIns="0" bIns="0">
+            <a:noAutofit/>
+          </a:bodyPr>
+          <a:lstStyle/>
+          <a:p>
+            <a:pPr algn="l">
+              <a:lnSpc>
+                <a:spcPts val="1311"/>
+              </a:lnSpc>
+              <a:spcBef>
+                <a:spcPts val="0"/>
+              </a:spcBef>
+              <a:spcAft>
+                <a:spcPts val="0"/>
+              </a:spcAft>
+              <a:buNone/>
+              <a:defRPr sz="1150" b="0">
+                <a:solidFill>
+                  <a:srgbClr val="303437"/>
+                </a:solidFill>
+                <a:latin typeface="Noto Sans"/>
+              </a:defRPr>
+            </a:pPr>
+            <a:r>
+              <a:rPr sz="1150" b="0" lang="ja-JP" altLang="en-US">
                 <a:solidFill>
                   <a:srgbClr val="626669"/>
                 </a:solidFill>
@@ -29116,81 +27620,333 @@
                 <a:ea typeface="Noto Sans CJK JP"/>
                 <a:cs typeface="Noto Sans"/>
               </a:rPr>
-              <a:t>[1] Hu et al. (2020). OCNLI: Original Chinese Natural Language Inference. Findings of EMNLP.</a:t>
-            </a:r>
-            <a:r>
-              <a:rPr sz="810" b="0" lang="ja-JP" altLang="en-US">
+              <a:t>Adina Williams, Nikita Nangia, Samuel R. Bowman · 2018 · NAACL-HLT, pp.1112–1122</a:t>
+            </a:r>
+          </a:p>
+        </p:txBody>
+      </p:sp>
+      <p:sp>
+        <p:nvSpPr>
+          <p:cNvPr id="6" name="TextBox 5"/>
+          <p:cNvSpPr txBox="1"/>
+          <p:nvPr/>
+        </p:nvSpPr>
+        <p:spPr>
+          <a:xfrm>
+            <a:off x="548640" y="2206879"/>
+            <a:ext cx="8046720" cy="259080"/>
+          </a:xfrm>
+          <a:prstGeom prst="rect">
+            <a:avLst/>
+          </a:prstGeom>
+          <a:noFill/>
+        </p:spPr>
+        <p:txBody>
+          <a:bodyPr wrap="square" lIns="0" rIns="0" tIns="0" bIns="0">
+            <a:noAutofit/>
+          </a:bodyPr>
+          <a:lstStyle/>
+          <a:p>
+            <a:pPr algn="l">
+              <a:lnSpc>
+                <a:spcPts val="1823"/>
+              </a:lnSpc>
+              <a:spcBef>
+                <a:spcPts val="0"/>
+              </a:spcBef>
+              <a:spcAft>
+                <a:spcPts val="0"/>
+              </a:spcAft>
+              <a:buNone/>
+              <a:defRPr sz="1600" b="0">
+                <a:solidFill>
+                  <a:srgbClr val="303437"/>
+                </a:solidFill>
+                <a:latin typeface="Noto Sans"/>
+              </a:defRPr>
+            </a:pPr>
+            <a:r>
+              <a:rPr sz="1600" b="0" lang="ja-JP" altLang="en-US">
+                <a:solidFill>
+                  <a:srgbClr val="303437"/>
+                </a:solidFill>
+                <a:latin typeface="Noto Sans"/>
+                <a:ea typeface="Noto Sans CJK JP"/>
+                <a:cs typeface="Noto Sans"/>
+              </a:rPr>
+              <a:t>複数文体の英語を前提に、仮説の作成と再注釈で構築したMultiNLIを報告する。</a:t>
+            </a:r>
+          </a:p>
+        </p:txBody>
+      </p:sp>
+      <p:sp>
+        <p:nvSpPr>
+          <p:cNvPr id="7" name="TextBox 6"/>
+          <p:cNvSpPr txBox="1"/>
+          <p:nvPr/>
+        </p:nvSpPr>
+        <p:spPr>
+          <a:xfrm>
+            <a:off x="548640" y="2516759"/>
+            <a:ext cx="8046720" cy="179450"/>
+          </a:xfrm>
+          <a:prstGeom prst="rect">
+            <a:avLst/>
+          </a:prstGeom>
+          <a:noFill/>
+        </p:spPr>
+        <p:txBody>
+          <a:bodyPr wrap="square" lIns="0" rIns="0" tIns="0" bIns="0">
+            <a:noAutofit/>
+          </a:bodyPr>
+          <a:lstStyle/>
+          <a:p>
+            <a:pPr algn="l">
+              <a:lnSpc>
+                <a:spcPts val="1197"/>
+              </a:lnSpc>
+              <a:spcBef>
+                <a:spcPts val="0"/>
+              </a:spcBef>
+              <a:spcAft>
+                <a:spcPts val="0"/>
+              </a:spcAft>
+              <a:buNone/>
+              <a:defRPr sz="1050" b="0">
+                <a:solidFill>
+                  <a:srgbClr val="303437"/>
+                </a:solidFill>
+                <a:latin typeface="Noto Sans"/>
+              </a:defRPr>
+            </a:pPr>
+            <a:r>
+              <a:rPr sz="1050" b="0" lang="ja-JP" altLang="en-US">
                 <a:solidFill>
                   <a:srgbClr val="626669"/>
                 </a:solidFill>
                 <a:latin typeface="Noto Sans"/>
                 <a:ea typeface="Noto Sans CJK JP"/>
                 <a:cs typeface="Noto Sans"/>
-              </a:rPr>
-              <a:t>  </a:t>
-            </a:r>
-            <a:r>
-              <a:rPr sz="810" b="0" lang="ja-JP" altLang="en-US">
+                <a:hlinkClick r:id="rId2"/>
+              </a:rPr>
+              <a:t>https://aclanthology.org/N18-1101/</a:t>
+            </a:r>
+          </a:p>
+        </p:txBody>
+      </p:sp>
+      <p:sp>
+        <p:nvSpPr>
+          <p:cNvPr id="8" name="TextBox 7"/>
+          <p:cNvSpPr txBox="1"/>
+          <p:nvPr/>
+        </p:nvSpPr>
+        <p:spPr>
+          <a:xfrm>
+            <a:off x="548640" y="2915666"/>
+            <a:ext cx="8046720" cy="280797"/>
+          </a:xfrm>
+          <a:prstGeom prst="rect">
+            <a:avLst/>
+          </a:prstGeom>
+          <a:noFill/>
+        </p:spPr>
+        <p:txBody>
+          <a:bodyPr wrap="square" lIns="0" rIns="0" tIns="0" bIns="0">
+            <a:noAutofit/>
+          </a:bodyPr>
+          <a:lstStyle/>
+          <a:p>
+            <a:pPr algn="l">
+              <a:lnSpc>
+                <a:spcPts val="1995"/>
+              </a:lnSpc>
+              <a:spcBef>
+                <a:spcPts val="0"/>
+              </a:spcBef>
+              <a:spcAft>
+                <a:spcPts val="0"/>
+              </a:spcAft>
+              <a:buNone/>
+              <a:defRPr sz="1750" b="0">
+                <a:solidFill>
+                  <a:srgbClr val="303437"/>
+                </a:solidFill>
+                <a:latin typeface="Noto Sans"/>
+              </a:defRPr>
+            </a:pPr>
+            <a:r>
+              <a:rPr sz="1750" b="1" lang="ja-JP" altLang="en-US">
+                <a:solidFill>
+                  <a:srgbClr val="303437"/>
+                </a:solidFill>
+                <a:latin typeface="Noto Sans"/>
+                <a:ea typeface="Noto Sans CJK JP"/>
+                <a:cs typeface="Noto Sans"/>
+              </a:rPr>
+              <a:t>XNLI: Evaluating Cross-lingual Sentence Representations</a:t>
+            </a:r>
+          </a:p>
+        </p:txBody>
+      </p:sp>
+      <p:sp>
+        <p:nvSpPr>
+          <p:cNvPr id="9" name="TextBox 8"/>
+          <p:cNvSpPr txBox="1"/>
+          <p:nvPr/>
+        </p:nvSpPr>
+        <p:spPr>
+          <a:xfrm>
+            <a:off x="548640" y="3234563"/>
+            <a:ext cx="8046720" cy="360426"/>
+          </a:xfrm>
+          <a:prstGeom prst="rect">
+            <a:avLst/>
+          </a:prstGeom>
+          <a:noFill/>
+        </p:spPr>
+        <p:txBody>
+          <a:bodyPr wrap="square" lIns="0" rIns="0" tIns="0" bIns="0">
+            <a:noAutofit/>
+          </a:bodyPr>
+          <a:lstStyle/>
+          <a:p>
+            <a:pPr algn="l">
+              <a:lnSpc>
+                <a:spcPts val="1311"/>
+              </a:lnSpc>
+              <a:spcBef>
+                <a:spcPts val="0"/>
+              </a:spcBef>
+              <a:spcAft>
+                <a:spcPts val="0"/>
+              </a:spcAft>
+              <a:buNone/>
+              <a:defRPr sz="1150" b="0">
+                <a:solidFill>
+                  <a:srgbClr val="303437"/>
+                </a:solidFill>
+                <a:latin typeface="Noto Sans"/>
+              </a:defRPr>
+            </a:pPr>
+            <a:r>
+              <a:rPr sz="1150" b="0" lang="ja-JP" altLang="en-US">
                 <a:solidFill>
                   <a:srgbClr val="626669"/>
                 </a:solidFill>
                 <a:latin typeface="Noto Sans"/>
                 <a:ea typeface="Noto Sans CJK JP"/>
                 <a:cs typeface="Noto Sans"/>
-                <a:hlinkClick r:id="rId2"/>
-              </a:rPr>
-              <a:t>https://aclanthology.org/2020.findings-emnlp.314/</a:t>
-            </a:r>
-          </a:p>
-          <a:p>
-            <a:pPr>
-              <a:lnSpc>
-                <a:spcPts val="940"/>
-              </a:lnSpc>
-              <a:spcAft>
-                <a:spcPts val="140"/>
-              </a:spcAft>
-              <a:buNone/>
-              <a:defRPr sz="810" b="0">
-                <a:solidFill>
-                  <a:srgbClr val="303437"/>
-                </a:solidFill>
-                <a:latin typeface="Noto Sans"/>
-              </a:defRPr>
-            </a:pPr>
-            <a:r>
-              <a:rPr sz="810" b="0" lang="ja-JP" altLang="en-US">
+              </a:rPr>
+              <a:t>Alexis Conneau, Ruty Rinott, Guillaume Lample, Adina Williams, Samuel R. Bowman, Holger Schwenk, Veselin Stoyanov · 2018 · EMNLP, pp.2475–2485</a:t>
+            </a:r>
+          </a:p>
+        </p:txBody>
+      </p:sp>
+      <p:sp>
+        <p:nvSpPr>
+          <p:cNvPr id="10" name="TextBox 9"/>
+          <p:cNvSpPr txBox="1"/>
+          <p:nvPr/>
+        </p:nvSpPr>
+        <p:spPr>
+          <a:xfrm>
+            <a:off x="548640" y="3645789"/>
+            <a:ext cx="8046720" cy="259080"/>
+          </a:xfrm>
+          <a:prstGeom prst="rect">
+            <a:avLst/>
+          </a:prstGeom>
+          <a:noFill/>
+        </p:spPr>
+        <p:txBody>
+          <a:bodyPr wrap="square" lIns="0" rIns="0" tIns="0" bIns="0">
+            <a:noAutofit/>
+          </a:bodyPr>
+          <a:lstStyle/>
+          <a:p>
+            <a:pPr algn="l">
+              <a:lnSpc>
+                <a:spcPts val="1823"/>
+              </a:lnSpc>
+              <a:spcBef>
+                <a:spcPts val="0"/>
+              </a:spcBef>
+              <a:spcAft>
+                <a:spcPts val="0"/>
+              </a:spcAft>
+              <a:buNone/>
+              <a:defRPr sz="1600" b="0">
+                <a:solidFill>
+                  <a:srgbClr val="303437"/>
+                </a:solidFill>
+                <a:latin typeface="Noto Sans"/>
+              </a:defRPr>
+            </a:pPr>
+            <a:r>
+              <a:rPr sz="1600" b="0" lang="ja-JP" altLang="en-US">
+                <a:solidFill>
+                  <a:srgbClr val="303437"/>
+                </a:solidFill>
+                <a:latin typeface="Noto Sans"/>
+                <a:ea typeface="Noto Sans CJK JP"/>
+                <a:cs typeface="Noto Sans"/>
+              </a:rPr>
+              <a:t>英語の推論問題を15言語へ展開し、言語をまたぐ文表現の評価に用いる。</a:t>
+            </a:r>
+          </a:p>
+        </p:txBody>
+      </p:sp>
+      <p:sp>
+        <p:nvSpPr>
+          <p:cNvPr id="11" name="TextBox 10"/>
+          <p:cNvSpPr txBox="1"/>
+          <p:nvPr/>
+        </p:nvSpPr>
+        <p:spPr>
+          <a:xfrm>
+            <a:off x="548640" y="3955669"/>
+            <a:ext cx="8046720" cy="179450"/>
+          </a:xfrm>
+          <a:prstGeom prst="rect">
+            <a:avLst/>
+          </a:prstGeom>
+          <a:noFill/>
+        </p:spPr>
+        <p:txBody>
+          <a:bodyPr wrap="square" lIns="0" rIns="0" tIns="0" bIns="0">
+            <a:noAutofit/>
+          </a:bodyPr>
+          <a:lstStyle/>
+          <a:p>
+            <a:pPr algn="l">
+              <a:lnSpc>
+                <a:spcPts val="1197"/>
+              </a:lnSpc>
+              <a:spcBef>
+                <a:spcPts val="0"/>
+              </a:spcBef>
+              <a:spcAft>
+                <a:spcPts val="0"/>
+              </a:spcAft>
+              <a:buNone/>
+              <a:defRPr sz="1050" b="0">
+                <a:solidFill>
+                  <a:srgbClr val="303437"/>
+                </a:solidFill>
+                <a:latin typeface="Noto Sans"/>
+              </a:defRPr>
+            </a:pPr>
+            <a:r>
+              <a:rPr sz="1050" b="0" lang="ja-JP" altLang="en-US">
                 <a:solidFill>
                   <a:srgbClr val="626669"/>
                 </a:solidFill>
                 <a:latin typeface="Noto Sans"/>
                 <a:ea typeface="Noto Sans CJK JP"/>
                 <a:cs typeface="Noto Sans"/>
-              </a:rPr>
-              <a:t>[2] Hu et al. OCNLI公式リポジトリ。固定版b53efdee1725、2026-10-18取得。</a:t>
-            </a:r>
-            <a:r>
-              <a:rPr sz="810" b="0" lang="ja-JP" altLang="en-US">
-                <a:solidFill>
-                  <a:srgbClr val="626669"/>
-                </a:solidFill>
-                <a:latin typeface="Noto Sans"/>
-                <a:ea typeface="Noto Sans CJK JP"/>
-                <a:cs typeface="Noto Sans"/>
-              </a:rPr>
-              <a:t>  </a:t>
-            </a:r>
-            <a:r>
-              <a:rPr sz="810" b="0" lang="ja-JP" altLang="en-US">
-                <a:solidFill>
-                  <a:srgbClr val="626669"/>
-                </a:solidFill>
-                <a:latin typeface="Noto Sans"/>
-                <a:ea typeface="Noto Sans CJK JP"/>
-                <a:cs typeface="Noto Sans"/>
                 <a:hlinkClick r:id="rId3"/>
               </a:rPr>
-              <a:t>https://github.com/CLUEbenchmark/OCNLI</a:t>
+              <a:t>https://aclanthology.org/D18-1269/</a:t>
             </a:r>
           </a:p>
         </p:txBody>
@@ -29256,7 +28012,7 @@
                 <a:ea typeface="Noto Sans CJK JP"/>
                 <a:cs typeface="Noto Sans"/>
               </a:rPr>
-              <a:t>公開devで、常に中立と答える基準を再計算</a:t>
+              <a:t>参考文献</a:t>
             </a:r>
           </a:p>
         </p:txBody>
@@ -29304,1266 +28060,7 @@
                 <a:ea typeface="Noto Sans CJK JP"/>
                 <a:cs typeface="Noto Sans"/>
               </a:rPr>
-              <a:t>Appendix: 2. 分割・注釈・実装の補足</a:t>
-            </a:r>
-          </a:p>
-        </p:txBody>
-      </p:sp>
-      <p:sp>
-        <p:nvSpPr>
-          <p:cNvPr id="4" name="code-frame"/>
-          <p:cNvSpPr/>
-          <p:nvPr/>
-        </p:nvSpPr>
-        <p:spPr>
-          <a:xfrm>
-            <a:off x="548640" y="1508760"/>
-            <a:ext cx="8046720" cy="2040466"/>
-          </a:xfrm>
-          <a:prstGeom prst="rect">
-            <a:avLst/>
-          </a:prstGeom>
-          <a:solidFill>
-            <a:srgbClr val="EBEDEB"/>
-          </a:solidFill>
-          <a:ln>
-            <a:noFill/>
-          </a:ln>
-          <a:effectLst/>
-        </p:spPr>
-        <p:style>
-          <a:lnRef idx="1">
-            <a:schemeClr val="accent1"/>
-          </a:lnRef>
-          <a:fillRef idx="3">
-            <a:schemeClr val="accent1"/>
-          </a:fillRef>
-          <a:effectRef idx="0">
-            <a:schemeClr val="accent1"/>
-          </a:effectRef>
-          <a:fontRef idx="minor">
-            <a:schemeClr val="lt1"/>
-          </a:fontRef>
-        </p:style>
-        <p:txBody>
-          <a:bodyPr rtlCol="0" anchor="t" wrap="none" lIns="152400" rIns="152400" tIns="43603" bIns="127000"/>
-          <a:lstStyle/>
-          <a:p>
-            <a:pPr algn="l">
-              <a:lnSpc>
-                <a:spcPts val="1904"/>
-              </a:lnSpc>
-              <a:spcBef>
-                <a:spcPts val="0"/>
-              </a:spcBef>
-              <a:spcAft>
-                <a:spcPts val="0"/>
-              </a:spcAft>
-              <a:buNone/>
-              <a:defRPr sz="1700" b="0">
-                <a:solidFill>
-                  <a:srgbClr val="303437"/>
-                </a:solidFill>
-                <a:latin typeface="Noto Sans"/>
-              </a:defRPr>
-            </a:pPr>
-            <a:r>
-              <a:rPr sz="1600" b="0" lang="ja-JP" altLang="en-US">
-                <a:solidFill>
-                  <a:srgbClr val="303437"/>
-                </a:solidFill>
-                <a:latin typeface="Liberation Mono"/>
-                <a:ea typeface="Noto Sans CJK JP"/>
-                <a:cs typeface="Liberation Mono"/>
-              </a:rPr>
-              <a:t>import json</a:t>
-            </a:r>
-          </a:p>
-          <a:p>
-            <a:pPr algn="l">
-              <a:lnSpc>
-                <a:spcPts val="1904"/>
-              </a:lnSpc>
-              <a:spcBef>
-                <a:spcPts val="0"/>
-              </a:spcBef>
-              <a:spcAft>
-                <a:spcPts val="0"/>
-              </a:spcAft>
-              <a:buNone/>
-              <a:defRPr sz="1700" b="0">
-                <a:solidFill>
-                  <a:srgbClr val="303437"/>
-                </a:solidFill>
-                <a:latin typeface="Noto Sans"/>
-              </a:defRPr>
-            </a:pPr>
-            <a:r>
-              <a:rPr sz="1600" b="0" lang="ja-JP" altLang="en-US">
-                <a:solidFill>
-                  <a:srgbClr val="303437"/>
-                </a:solidFill>
-                <a:latin typeface="Liberation Mono"/>
-                <a:ea typeface="Noto Sans CJK JP"/>
-                <a:cs typeface="Liberation Mono"/>
-              </a:rPr>
-              <a:t>from pathlib import Path</a:t>
-            </a:r>
-          </a:p>
-          <a:p>
-            <a:pPr algn="l">
-              <a:lnSpc>
-                <a:spcPts val="1904"/>
-              </a:lnSpc>
-              <a:spcBef>
-                <a:spcPts val="0"/>
-              </a:spcBef>
-              <a:spcAft>
-                <a:spcPts val="0"/>
-              </a:spcAft>
-              <a:buNone/>
-              <a:defRPr sz="1700" b="0">
-                <a:solidFill>
-                  <a:srgbClr val="303437"/>
-                </a:solidFill>
-                <a:latin typeface="Noto Sans"/>
-              </a:defRPr>
-            </a:pPr>
-            <a:r>
-              <a:rPr sz="1600" b="0" lang="ja-JP" altLang="en-US">
-                <a:solidFill>
-                  <a:srgbClr val="303437"/>
-                </a:solidFill>
-                <a:latin typeface="Liberation Mono"/>
-                <a:ea typeface="Noto Sans CJK JP"/>
-                <a:cs typeface="Liberation Mono"/>
-              </a:rPr>
-              <a:t>rows = [json.loads(s) for s in</a:t>
-            </a:r>
-          </a:p>
-          <a:p>
-            <a:pPr algn="l">
-              <a:lnSpc>
-                <a:spcPts val="1904"/>
-              </a:lnSpc>
-              <a:spcBef>
-                <a:spcPts val="0"/>
-              </a:spcBef>
-              <a:spcAft>
-                <a:spcPts val="0"/>
-              </a:spcAft>
-              <a:buNone/>
-              <a:defRPr sz="1700" b="0">
-                <a:solidFill>
-                  <a:srgbClr val="303437"/>
-                </a:solidFill>
-                <a:latin typeface="Noto Sans"/>
-              </a:defRPr>
-            </a:pPr>
-            <a:r>
-              <a:rPr sz="1600" b="0" lang="ja-JP" altLang="en-US">
-                <a:solidFill>
-                  <a:srgbClr val="303437"/>
-                </a:solidFill>
-                <a:latin typeface="Liberation Mono"/>
-                <a:ea typeface="Noto Sans CJK JP"/>
-                <a:cs typeface="Liberation Mono"/>
-              </a:rPr>
-              <a:t>        Path('dev.json').read_text().splitlines()]</a:t>
-            </a:r>
-          </a:p>
-          <a:p>
-            <a:pPr algn="l">
-              <a:lnSpc>
-                <a:spcPts val="1904"/>
-              </a:lnSpc>
-              <a:spcBef>
-                <a:spcPts val="0"/>
-              </a:spcBef>
-              <a:spcAft>
-                <a:spcPts val="0"/>
-              </a:spcAft>
-              <a:buNone/>
-              <a:defRPr sz="1700" b="0">
-                <a:solidFill>
-                  <a:srgbClr val="303437"/>
-                </a:solidFill>
-                <a:latin typeface="Noto Sans"/>
-              </a:defRPr>
-            </a:pPr>
-            <a:r>
-              <a:rPr sz="1600" b="0" lang="ja-JP" altLang="en-US">
-                <a:solidFill>
-                  <a:srgbClr val="303437"/>
-                </a:solidFill>
-                <a:latin typeface="Liberation Mono"/>
-                <a:ea typeface="Noto Sans CJK JP"/>
-                <a:cs typeface="Liberation Mono"/>
-              </a:rPr>
-              <a:t>valid = [r for r in rows if r['label'] != '-']</a:t>
-            </a:r>
-          </a:p>
-          <a:p>
-            <a:pPr algn="l">
-              <a:lnSpc>
-                <a:spcPts val="1904"/>
-              </a:lnSpc>
-              <a:spcBef>
-                <a:spcPts val="0"/>
-              </a:spcBef>
-              <a:spcAft>
-                <a:spcPts val="0"/>
-              </a:spcAft>
-              <a:buNone/>
-              <a:defRPr sz="1700" b="0">
-                <a:solidFill>
-                  <a:srgbClr val="303437"/>
-                </a:solidFill>
-                <a:latin typeface="Noto Sans"/>
-              </a:defRPr>
-            </a:pPr>
-            <a:r>
-              <a:rPr sz="1600" b="0" lang="ja-JP" altLang="en-US">
-                <a:solidFill>
-                  <a:srgbClr val="303437"/>
-                </a:solidFill>
-                <a:latin typeface="Liberation Mono"/>
-                <a:ea typeface="Noto Sans CJK JP"/>
-                <a:cs typeface="Liberation Mono"/>
-              </a:rPr>
-              <a:t>correct = sum(r['label'] == 'neutral' for r in valid)</a:t>
-            </a:r>
-          </a:p>
-          <a:p>
-            <a:pPr algn="l">
-              <a:lnSpc>
-                <a:spcPts val="1904"/>
-              </a:lnSpc>
-              <a:spcBef>
-                <a:spcPts val="0"/>
-              </a:spcBef>
-              <a:spcAft>
-                <a:spcPts val="0"/>
-              </a:spcAft>
-              <a:buNone/>
-              <a:defRPr sz="1700" b="0">
-                <a:solidFill>
-                  <a:srgbClr val="303437"/>
-                </a:solidFill>
-                <a:latin typeface="Noto Sans"/>
-              </a:defRPr>
-            </a:pPr>
-            <a:r>
-              <a:rPr sz="1600" b="0" lang="ja-JP" altLang="en-US">
-                <a:solidFill>
-                  <a:srgbClr val="303437"/>
-                </a:solidFill>
-                <a:latin typeface="Liberation Mono"/>
-                <a:ea typeface="Noto Sans CJK JP"/>
-                <a:cs typeface="Liberation Mono"/>
-              </a:rPr>
-              <a:t>print(correct, len(valid), correct / len(valid))</a:t>
-            </a:r>
-          </a:p>
-          <a:p>
-            <a:pPr algn="l">
-              <a:lnSpc>
-                <a:spcPts val="1904"/>
-              </a:lnSpc>
-              <a:spcBef>
-                <a:spcPts val="0"/>
-              </a:spcBef>
-              <a:spcAft>
-                <a:spcPts val="0"/>
-              </a:spcAft>
-              <a:buNone/>
-              <a:defRPr sz="1700" b="0">
-                <a:solidFill>
-                  <a:srgbClr val="303437"/>
-                </a:solidFill>
-                <a:latin typeface="Noto Sans"/>
-              </a:defRPr>
-            </a:pPr>
-            <a:r>
-              <a:rPr sz="1600" b="0" lang="ja-JP" altLang="en-US">
-                <a:solidFill>
-                  <a:srgbClr val="303437"/>
-                </a:solidFill>
-                <a:latin typeface="Liberation Mono"/>
-                <a:ea typeface="Noto Sans CJK JP"/>
-                <a:cs typeface="Liberation Mono"/>
-              </a:rPr>
-              <a:t># 1103 2950 0.37389830508474575</a:t>
-            </a:r>
-          </a:p>
-        </p:txBody>
-      </p:sp>
-      <p:sp>
-        <p:nvSpPr>
-          <p:cNvPr id="5" name="TextBox 4"/>
-          <p:cNvSpPr txBox="1"/>
-          <p:nvPr/>
-        </p:nvSpPr>
-        <p:spPr>
-          <a:xfrm>
-            <a:off x="594360" y="3701627"/>
-            <a:ext cx="7955279" cy="546100"/>
-          </a:xfrm>
-          <a:prstGeom prst="rect">
-            <a:avLst/>
-          </a:prstGeom>
-          <a:noFill/>
-        </p:spPr>
-        <p:txBody>
-          <a:bodyPr wrap="square" lIns="0" rIns="0" tIns="0" bIns="0">
-            <a:noAutofit/>
-          </a:bodyPr>
-          <a:lstStyle/>
-          <a:p>
-            <a:pPr algn="l">
-              <a:lnSpc>
-                <a:spcPts val="1989"/>
-              </a:lnSpc>
-              <a:spcBef>
-                <a:spcPts val="0"/>
-              </a:spcBef>
-              <a:spcAft>
-                <a:spcPts val="0"/>
-              </a:spcAft>
-              <a:buNone/>
-              <a:defRPr sz="1900" b="0">
-                <a:solidFill>
-                  <a:srgbClr val="303437"/>
-                </a:solidFill>
-                <a:latin typeface="Noto Sans"/>
-              </a:defRPr>
-            </a:pPr>
-            <a:r>
-              <a:rPr sz="1700" b="0" lang="ja-JP" altLang="en-US">
-                <a:solidFill>
-                  <a:srgbClr val="303437"/>
-                </a:solidFill>
-                <a:latin typeface="Noto Sans"/>
-                <a:ea typeface="Noto Sans CJK JP"/>
-                <a:cs typeface="Noto Sans"/>
-              </a:rPr>
-              <a:t>正解率の定義と照合する短い再現コード。公式評価関数にも同じ固定予測を渡し、一致を確認した。</a:t>
-            </a:r>
-          </a:p>
-        </p:txBody>
-      </p:sp>
-      <p:sp>
-        <p:nvSpPr>
-          <p:cNvPr id="6" name="sources"/>
-          <p:cNvSpPr txBox="1"/>
-          <p:nvPr/>
-        </p:nvSpPr>
-        <p:spPr>
-          <a:xfrm>
-            <a:off x="502920" y="4700016"/>
-            <a:ext cx="8183879" cy="530352"/>
-          </a:xfrm>
-          <a:prstGeom prst="rect">
-            <a:avLst/>
-          </a:prstGeom>
-          <a:noFill/>
-        </p:spPr>
-        <p:txBody>
-          <a:bodyPr wrap="square" lIns="0" rIns="0" tIns="0" bIns="0">
-            <a:noAutofit/>
-          </a:bodyPr>
-          <a:lstStyle/>
-          <a:p>
-            <a:pPr algn="l">
-              <a:lnSpc>
-                <a:spcPts val="940"/>
-              </a:lnSpc>
-              <a:spcBef>
-                <a:spcPts val="0"/>
-              </a:spcBef>
-              <a:spcAft>
-                <a:spcPts val="140"/>
-              </a:spcAft>
-              <a:buNone/>
-              <a:defRPr sz="810" b="0">
-                <a:solidFill>
-                  <a:srgbClr val="303437"/>
-                </a:solidFill>
-                <a:latin typeface="Noto Sans"/>
-              </a:defRPr>
-            </a:pPr>
-            <a:r>
-              <a:rPr sz="810" b="0" lang="ja-JP" altLang="en-US">
-                <a:solidFill>
-                  <a:srgbClr val="626669"/>
-                </a:solidFill>
-                <a:latin typeface="Noto Sans"/>
-                <a:ea typeface="Noto Sans CJK JP"/>
-                <a:cs typeface="Noto Sans"/>
-              </a:rPr>
-              <a:t>[1] Hu et al. OCNLI公式baseline評価コード、evaluate_classifier。</a:t>
-            </a:r>
-            <a:r>
-              <a:rPr sz="810" b="0" lang="ja-JP" altLang="en-US">
-                <a:solidFill>
-                  <a:srgbClr val="626669"/>
-                </a:solidFill>
-                <a:latin typeface="Noto Sans"/>
-                <a:ea typeface="Noto Sans CJK JP"/>
-                <a:cs typeface="Noto Sans"/>
-              </a:rPr>
-              <a:t>  </a:t>
-            </a:r>
-            <a:r>
-              <a:rPr sz="810" b="0" lang="ja-JP" altLang="en-US">
-                <a:solidFill>
-                  <a:srgbClr val="626669"/>
-                </a:solidFill>
-                <a:latin typeface="Noto Sans"/>
-                <a:ea typeface="Noto Sans CJK JP"/>
-                <a:cs typeface="Noto Sans"/>
-                <a:hlinkClick r:id="rId2"/>
-              </a:rPr>
-              <a:t>https://github.com/CLUEbenchmark/OCNLI/blob/main/ocnli/mnli_code/util/evaluate.py</a:t>
-            </a:r>
-          </a:p>
-        </p:txBody>
-      </p:sp>
-    </p:spTree>
-  </p:cSld>
-  <p:clrMapOvr>
-    <a:masterClrMapping/>
-  </p:clrMapOvr>
-</p:sld>
-</file>
-
-<file path=ppt/slides/slide52.xml><?xml version="1.0" encoding="utf-8"?>
-<p:sld xmlns:a="http://schemas.openxmlformats.org/drawingml/2006/main" xmlns:p="http://schemas.openxmlformats.org/presentationml/2006/main" xmlns:r="http://schemas.openxmlformats.org/officeDocument/2006/relationships">
-  <p:cSld>
-    <p:spTree>
-      <p:nvGrpSpPr>
-        <p:cNvPr id="1" name=""/>
-        <p:cNvGrpSpPr/>
-        <p:nvPr/>
-      </p:nvGrpSpPr>
-      <p:grpSpPr/>
-      <p:sp>
-        <p:nvSpPr>
-          <p:cNvPr id="2" name="Title 1"/>
-          <p:cNvSpPr>
-            <a:spLocks noGrp="1"/>
-          </p:cNvSpPr>
-          <p:nvPr>
-            <p:ph type="title"/>
-          </p:nvPr>
-        </p:nvSpPr>
-        <p:spPr>
-          <a:xfrm>
-            <a:off x="468172" y="650138"/>
-            <a:ext cx="8206740" cy="616305"/>
-          </a:xfrm>
-        </p:spPr>
-        <p:txBody>
-          <a:bodyPr wrap="square" lIns="0" rIns="0" tIns="0" bIns="0">
-            <a:noAutofit/>
-          </a:bodyPr>
-          <a:lstStyle/>
-          <a:p>
-            <a:pPr algn="l">
-              <a:lnSpc>
-                <a:spcPct val="110000"/>
-              </a:lnSpc>
-              <a:buNone/>
-              <a:defRPr sz="2800" b="0">
-                <a:solidFill>
-                  <a:srgbClr val="303437"/>
-                </a:solidFill>
-                <a:latin typeface="Noto Sans"/>
-              </a:defRPr>
-            </a:pPr>
-            <a:r>
-              <a:rPr sz="2800" b="1" lang="ja-JP" altLang="en-US">
-                <a:solidFill>
-                  <a:srgbClr val="303437"/>
-                </a:solidFill>
-                <a:latin typeface="Noto Sans"/>
-                <a:ea typeface="Noto Sans CJK JP"/>
-                <a:cs typeface="Noto Sans"/>
-              </a:rPr>
-              <a:t>CLEVAのテンプレート設定と、確認できた範囲</a:t>
-            </a:r>
-          </a:p>
-        </p:txBody>
-      </p:sp>
-      <p:sp>
-        <p:nvSpPr>
-          <p:cNvPr id="3" name="Text Placeholder 2"/>
-          <p:cNvSpPr>
-            <a:spLocks noGrp="1"/>
-          </p:cNvSpPr>
-          <p:nvPr>
-            <p:ph type="body" idx="1"/>
-          </p:nvPr>
-        </p:nvSpPr>
-        <p:spPr>
-          <a:xfrm>
-            <a:off x="594360" y="1463040"/>
-            <a:ext cx="7955279" cy="3044952"/>
-          </a:xfrm>
-        </p:spPr>
-        <p:txBody>
-          <a:bodyPr wrap="square" tIns="91440" bIns="91440">
-            <a:noAutofit/>
-          </a:bodyPr>
-          <a:lstStyle/>
-          <a:p>
-            <a:pPr marL="457200" indent="-355600">
-              <a:lnSpc>
-                <a:spcPts val="2379"/>
-              </a:lnSpc>
-              <a:spcAft>
-                <a:spcPts val="700"/>
-              </a:spcAft>
-              <a:buSzPct val="66500"/>
-              <a:buFont typeface="Noto Sans CJK JP"/>
-              <a:buChar char="●"/>
-              <a:defRPr sz="2000" b="0">
-                <a:solidFill>
-                  <a:srgbClr val="303437"/>
-                </a:solidFill>
-                <a:latin typeface="Noto Sans"/>
-              </a:defRPr>
-            </a:pPr>
-            <a:r>
-              <a:rPr sz="2000" b="0" lang="ja-JP" altLang="en-US">
-                <a:solidFill>
-                  <a:srgbClr val="303437"/>
-                </a:solidFill>
-                <a:latin typeface="Noto Sans"/>
-                <a:ea typeface="Noto Sans CJK JP"/>
-                <a:cs typeface="Noto Sans"/>
-              </a:rPr>
-              <a:t>公開設定はcommonsense_reasoning / textual_entailment / v1で、prompt_id 0〜5。設定数は6で、6個の元コーパスを意味しない。</a:t>
-            </a:r>
-          </a:p>
-          <a:p>
-            <a:pPr marL="457200" indent="-355600">
-              <a:lnSpc>
-                <a:spcPts val="2379"/>
-              </a:lnSpc>
-              <a:spcAft>
-                <a:spcPts val="700"/>
-              </a:spcAft>
-              <a:buSzPct val="66500"/>
-              <a:buFont typeface="Noto Sans CJK JP"/>
-              <a:buChar char="●"/>
-              <a:defRPr sz="2000" b="0">
-                <a:solidFill>
-                  <a:srgbClr val="303437"/>
-                </a:solidFill>
-                <a:latin typeface="Noto Sans"/>
-              </a:defRPr>
-            </a:pPr>
-            <a:r>
-              <a:rPr sz="2000" b="0" lang="ja-JP" altLang="en-US">
-                <a:solidFill>
-                  <a:srgbClr val="303437"/>
-                </a:solidFill>
-                <a:latin typeface="Noto Sans"/>
-                <a:ea typeface="Noto Sans CJK JP"/>
-                <a:cs typeface="Noto Sans"/>
-              </a:rPr>
-              <a:t>HELMのConverterは、choicesの各項目をReferenceへ変換し、正解indexの項目へcorrectを付ける。元OCNLIのラベル文字列と、そのまま同じ表現ではない。</a:t>
-            </a:r>
-          </a:p>
-          <a:p>
-            <a:pPr marL="457200" indent="-355600">
-              <a:lnSpc>
-                <a:spcPts val="2379"/>
-              </a:lnSpc>
-              <a:spcAft>
-                <a:spcPts val="0"/>
-              </a:spcAft>
-              <a:buSzPct val="66500"/>
-              <a:buFont typeface="Noto Sans CJK JP"/>
-              <a:buChar char="●"/>
-              <a:defRPr sz="2000" b="0">
-                <a:solidFill>
-                  <a:srgbClr val="303437"/>
-                </a:solidFill>
-                <a:latin typeface="Noto Sans"/>
-              </a:defRPr>
-            </a:pPr>
-            <a:r>
-              <a:rPr sz="2000" b="0" lang="ja-JP" altLang="en-US">
-                <a:solidFill>
-                  <a:srgbClr val="303437"/>
-                </a:solidFill>
-                <a:latin typeface="Noto Sans"/>
-                <a:ea typeface="Noto Sans CJK JP"/>
-                <a:cs typeface="Noto Sans"/>
-              </a:rPr>
-              <a:t>公開論文例はA/B/C形式。コードの説明例は別の文で、正解C。完全なテンプレート本文と採用原票を取得できていないため、一律の選択肢順や全件数を断定しない。</a:t>
-            </a:r>
-          </a:p>
-        </p:txBody>
-      </p:sp>
-      <p:sp>
-        <p:nvSpPr>
-          <p:cNvPr id="4" name="Title 3"/>
-          <p:cNvSpPr>
-            <a:spLocks noGrp="1"/>
-          </p:cNvSpPr>
-          <p:nvPr>
-            <p:ph type="title" idx="2"/>
-          </p:nvPr>
-        </p:nvSpPr>
-        <p:spPr>
-          <a:xfrm>
-            <a:off x="75895" y="0"/>
-            <a:ext cx="8115300" cy="480060"/>
-          </a:xfrm>
-        </p:spPr>
-        <p:txBody>
-          <a:bodyPr wrap="square" lIns="0" rIns="0" tIns="0" bIns="0" anchor="ctr">
-            <a:noAutofit/>
-          </a:bodyPr>
-          <a:lstStyle/>
-          <a:p>
-            <a:pPr algn="l">
-              <a:lnSpc>
-                <a:spcPct val="110000"/>
-              </a:lnSpc>
-              <a:buNone/>
-              <a:defRPr sz="1400" b="0">
-                <a:solidFill>
-                  <a:srgbClr val="303437"/>
-                </a:solidFill>
-                <a:latin typeface="Noto Sans"/>
-              </a:defRPr>
-            </a:pPr>
-            <a:r>
-              <a:rPr sz="1400" b="1" lang="ja-JP" altLang="en-US">
-                <a:solidFill>
-                  <a:srgbClr val="FFFEF8"/>
-                </a:solidFill>
-                <a:latin typeface="Noto Sans"/>
-                <a:ea typeface="Noto Sans CJK JP"/>
-                <a:cs typeface="Noto Sans"/>
-              </a:rPr>
-              <a:t>Appendix: 2. 分割・注釈・実装の補足</a:t>
-            </a:r>
-          </a:p>
-        </p:txBody>
-      </p:sp>
-      <p:sp>
-        <p:nvSpPr>
-          <p:cNvPr id="5" name="sources"/>
-          <p:cNvSpPr txBox="1"/>
-          <p:nvPr/>
-        </p:nvSpPr>
-        <p:spPr>
-          <a:xfrm>
-            <a:off x="502920" y="4700016"/>
-            <a:ext cx="8183879" cy="530352"/>
-          </a:xfrm>
-          <a:prstGeom prst="rect">
-            <a:avLst/>
-          </a:prstGeom>
-          <a:noFill/>
-        </p:spPr>
-        <p:txBody>
-          <a:bodyPr wrap="square" lIns="0" rIns="0" tIns="0" bIns="0">
-            <a:noAutofit/>
-          </a:bodyPr>
-          <a:lstStyle/>
-          <a:p>
-            <a:pPr algn="l">
-              <a:lnSpc>
-                <a:spcPts val="940"/>
-              </a:lnSpc>
-              <a:spcBef>
-                <a:spcPts val="0"/>
-              </a:spcBef>
-              <a:spcAft>
-                <a:spcPts val="140"/>
-              </a:spcAft>
-              <a:buNone/>
-              <a:defRPr sz="810" b="0">
-                <a:solidFill>
-                  <a:srgbClr val="303437"/>
-                </a:solidFill>
-                <a:latin typeface="Noto Sans"/>
-              </a:defRPr>
-            </a:pPr>
-            <a:r>
-              <a:rPr sz="810" b="0" lang="ja-JP" altLang="en-US">
-                <a:solidFill>
-                  <a:srgbClr val="626669"/>
-                </a:solidFill>
-                <a:latin typeface="Noto Sans"/>
-                <a:ea typeface="Noto Sans CJK JP"/>
-                <a:cs typeface="Noto Sans"/>
-              </a:rPr>
-              <a:t>[1] Stanford CRFM. HELM v0.4.0、CLEVA v1の課題・prompt_id設定。</a:t>
-            </a:r>
-          </a:p>
-          <a:p>
-            <a:pPr>
-              <a:lnSpc>
-                <a:spcPts val="940"/>
-              </a:lnSpc>
-              <a:buNone/>
-              <a:defRPr sz="810" b="0">
-                <a:solidFill>
-                  <a:srgbClr val="303437"/>
-                </a:solidFill>
-                <a:latin typeface="Noto Sans"/>
-              </a:defRPr>
-            </a:pPr>
-            <a:r>
-              <a:rPr sz="810" b="0" lang="ja-JP" altLang="en-US">
-                <a:solidFill>
-                  <a:srgbClr val="626669"/>
-                </a:solidFill>
-                <a:latin typeface="Noto Sans"/>
-                <a:ea typeface="Noto Sans CJK JP"/>
-                <a:cs typeface="Noto Sans"/>
-                <a:hlinkClick r:id="rId3"/>
-              </a:rPr>
-              <a:t>https://github.com/stanford-crfm/helm/blob/v0.4.0/src/helm/benchmark/presentation/run_specs_cleva_v1.conf</a:t>
-            </a:r>
-          </a:p>
-        </p:txBody>
-      </p:sp>
-    </p:spTree>
-  </p:cSld>
-  <p:clrMapOvr>
-    <a:masterClrMapping/>
-  </p:clrMapOvr>
-</p:sld>
-</file>
-
-<file path=ppt/slides/slide53.xml><?xml version="1.0" encoding="utf-8"?>
-<p:sld xmlns:a="http://schemas.openxmlformats.org/drawingml/2006/main" xmlns:p="http://schemas.openxmlformats.org/presentationml/2006/main" xmlns:r="http://schemas.openxmlformats.org/officeDocument/2006/relationships">
-  <p:cSld>
-    <p:spTree>
-      <p:nvGrpSpPr>
-        <p:cNvPr id="1" name=""/>
-        <p:cNvGrpSpPr/>
-        <p:nvPr/>
-      </p:nvGrpSpPr>
-      <p:grpSpPr/>
-      <p:sp>
-        <p:nvSpPr>
-          <p:cNvPr id="2" name="Title 1"/>
-          <p:cNvSpPr>
-            <a:spLocks noGrp="1"/>
-          </p:cNvSpPr>
-          <p:nvPr>
-            <p:ph type="title"/>
-          </p:nvPr>
-        </p:nvSpPr>
-        <p:spPr>
-          <a:xfrm>
-            <a:off x="548640" y="2506875"/>
-            <a:ext cx="8046720" cy="585216"/>
-          </a:xfrm>
-        </p:spPr>
-        <p:txBody>
-          <a:bodyPr wrap="square" lIns="0" rIns="0" tIns="0" bIns="0" anchor="ctr">
-            <a:noAutofit/>
-          </a:bodyPr>
-          <a:lstStyle/>
-          <a:p>
-            <a:pPr algn="ctr">
-              <a:lnSpc>
-                <a:spcPct val="110000"/>
-              </a:lnSpc>
-              <a:buNone/>
-              <a:defRPr sz="3600" b="0">
-                <a:solidFill>
-                  <a:srgbClr val="303437"/>
-                </a:solidFill>
-                <a:latin typeface="Noto Sans"/>
-              </a:defRPr>
-            </a:pPr>
-            <a:r>
-              <a:rPr sz="3600" b="1" lang="ja-JP" altLang="en-US">
-                <a:solidFill>
-                  <a:srgbClr val="303437"/>
-                </a:solidFill>
-                <a:latin typeface="Noto Sans"/>
-                <a:ea typeface="Noto Sans CJK JP"/>
-                <a:cs typeface="Noto Sans"/>
-              </a:rPr>
-              <a:t>研究と参考文献</a:t>
-            </a:r>
-          </a:p>
-        </p:txBody>
-      </p:sp>
-      <p:sp>
-        <p:nvSpPr>
-          <p:cNvPr id="3" name="Title 2"/>
-          <p:cNvSpPr>
-            <a:spLocks noGrp="1"/>
-          </p:cNvSpPr>
-          <p:nvPr>
-            <p:ph type="title" idx="2"/>
-          </p:nvPr>
-        </p:nvSpPr>
-        <p:spPr>
-          <a:xfrm>
-            <a:off x="75895" y="0"/>
-            <a:ext cx="8115300" cy="480060"/>
-          </a:xfrm>
-        </p:spPr>
-        <p:txBody>
-          <a:bodyPr wrap="square" lIns="0" rIns="0" tIns="0" bIns="0" anchor="ctr">
-            <a:noAutofit/>
-          </a:bodyPr>
-          <a:lstStyle/>
-          <a:p>
-            <a:pPr algn="l">
-              <a:lnSpc>
-                <a:spcPct val="110000"/>
-              </a:lnSpc>
-              <a:buNone/>
-              <a:defRPr sz="1400" b="0">
-                <a:solidFill>
-                  <a:srgbClr val="303437"/>
-                </a:solidFill>
-                <a:latin typeface="Noto Sans"/>
-              </a:defRPr>
-            </a:pPr>
-            <a:r>
-              <a:rPr sz="1400" b="1" lang="ja-JP" altLang="en-US">
-                <a:solidFill>
-                  <a:srgbClr val="FFFEF8"/>
-                </a:solidFill>
-                <a:latin typeface="Noto Sans"/>
-                <a:ea typeface="Noto Sans CJK JP"/>
-                <a:cs typeface="Noto Sans"/>
-              </a:rPr>
-              <a:t>Appendix: 3. 研究と参考文献</a:t>
-            </a:r>
-          </a:p>
-        </p:txBody>
-      </p:sp>
-    </p:spTree>
-  </p:cSld>
-  <p:clrMapOvr>
-    <a:masterClrMapping/>
-  </p:clrMapOvr>
-</p:sld>
-</file>
-
-<file path=ppt/slides/slide54.xml><?xml version="1.0" encoding="utf-8"?>
-<p:sld xmlns:a="http://schemas.openxmlformats.org/drawingml/2006/main" xmlns:p="http://schemas.openxmlformats.org/presentationml/2006/main" xmlns:r="http://schemas.openxmlformats.org/officeDocument/2006/relationships">
-  <p:cSld>
-    <p:spTree>
-      <p:nvGrpSpPr>
-        <p:cNvPr id="1" name=""/>
-        <p:cNvGrpSpPr/>
-        <p:nvPr/>
-      </p:nvGrpSpPr>
-      <p:grpSpPr/>
-      <p:sp>
-        <p:nvSpPr>
-          <p:cNvPr id="2" name="Title 1"/>
-          <p:cNvSpPr>
-            <a:spLocks noGrp="1"/>
-          </p:cNvSpPr>
-          <p:nvPr>
-            <p:ph type="title"/>
-          </p:nvPr>
-        </p:nvSpPr>
-        <p:spPr>
-          <a:xfrm>
-            <a:off x="468172" y="650138"/>
-            <a:ext cx="8206740" cy="616305"/>
-          </a:xfrm>
-        </p:spPr>
-        <p:txBody>
-          <a:bodyPr wrap="square" lIns="0" rIns="0" tIns="0" bIns="0">
-            <a:noAutofit/>
-          </a:bodyPr>
-          <a:lstStyle/>
-          <a:p>
-            <a:pPr algn="l">
-              <a:lnSpc>
-                <a:spcPct val="110000"/>
-              </a:lnSpc>
-              <a:buNone/>
-              <a:defRPr sz="2800" b="0">
-                <a:solidFill>
-                  <a:srgbClr val="303437"/>
-                </a:solidFill>
-                <a:latin typeface="Noto Sans"/>
-              </a:defRPr>
-            </a:pPr>
-            <a:r>
-              <a:rPr sz="2800" b="1" lang="ja-JP" altLang="en-US">
-                <a:solidFill>
-                  <a:srgbClr val="303437"/>
-                </a:solidFill>
-                <a:latin typeface="Noto Sans"/>
-                <a:ea typeface="Noto Sans CJK JP"/>
-                <a:cs typeface="Noto Sans"/>
-              </a:rPr>
-              <a:t>言語・論理・評価を結び付けた共同研究</a:t>
-            </a:r>
-          </a:p>
-        </p:txBody>
-      </p:sp>
-      <p:sp>
-        <p:nvSpPr>
-          <p:cNvPr id="3" name="Text Placeholder 2"/>
-          <p:cNvSpPr>
-            <a:spLocks noGrp="1"/>
-          </p:cNvSpPr>
-          <p:nvPr>
-            <p:ph type="body" idx="1"/>
-          </p:nvPr>
-        </p:nvSpPr>
-        <p:spPr>
-          <a:xfrm>
-            <a:off x="594360" y="1463040"/>
-            <a:ext cx="7955279" cy="3044952"/>
-          </a:xfrm>
-        </p:spPr>
-        <p:txBody>
-          <a:bodyPr wrap="square" tIns="91440" bIns="91440">
-            <a:noAutofit/>
-          </a:bodyPr>
-          <a:lstStyle/>
-          <a:p>
-            <a:pPr marL="457200" indent="-355600">
-              <a:lnSpc>
-                <a:spcPts val="2618"/>
-              </a:lnSpc>
-              <a:spcAft>
-                <a:spcPts val="700"/>
-              </a:spcAft>
-              <a:buSzPct val="60455"/>
-              <a:buFont typeface="Noto Sans CJK JP"/>
-              <a:buChar char="●"/>
-              <a:defRPr sz="2200" b="0">
-                <a:solidFill>
-                  <a:srgbClr val="303437"/>
-                </a:solidFill>
-                <a:latin typeface="Noto Sans"/>
-              </a:defRPr>
-            </a:pPr>
-            <a:r>
-              <a:rPr sz="2200" b="0" lang="ja-JP" altLang="en-US">
-                <a:solidFill>
-                  <a:srgbClr val="303437"/>
-                </a:solidFill>
-                <a:latin typeface="Noto Sans"/>
-                <a:ea typeface="Noto Sans CJK JP"/>
-                <a:cs typeface="Noto Sans"/>
-              </a:rPr>
-              <a:t>Hai Hu、Kyle Richardson、Liang Xu、Lu Li、Sandra Kübler、Lawrence S. Mossによる、Indiana University・Allen Institute for AI・CLUEの共同研究。</a:t>
-            </a:r>
-          </a:p>
-          <a:p>
-            <a:pPr marL="457200" indent="-355600">
-              <a:lnSpc>
-                <a:spcPts val="2618"/>
-              </a:lnSpc>
-              <a:spcAft>
-                <a:spcPts val="700"/>
-              </a:spcAft>
-              <a:buSzPct val="60455"/>
-              <a:buFont typeface="Noto Sans CJK JP"/>
-              <a:buChar char="●"/>
-              <a:defRPr sz="2200" b="0">
-                <a:solidFill>
-                  <a:srgbClr val="303437"/>
-                </a:solidFill>
-                <a:latin typeface="Noto Sans"/>
-              </a:defRPr>
-            </a:pPr>
-            <a:r>
-              <a:rPr sz="2200" b="0" lang="ja-JP" altLang="en-US">
-                <a:solidFill>
-                  <a:srgbClr val="303437"/>
-                </a:solidFill>
-                <a:latin typeface="Noto Sans"/>
-                <a:ea typeface="Noto Sans CJK JP"/>
-                <a:cs typeface="Noto Sans"/>
-              </a:rPr>
-              <a:t>Findings of EMNLP 2020で発表された。翻訳へ依存せず、母語話者の推論と再注釈を中国語の基準として整備した。</a:t>
-            </a:r>
-          </a:p>
-          <a:p>
-            <a:pPr marL="457200" indent="-355600">
-              <a:lnSpc>
-                <a:spcPts val="2618"/>
-              </a:lnSpc>
-              <a:spcAft>
-                <a:spcPts val="0"/>
-              </a:spcAft>
-              <a:buSzPct val="60455"/>
-              <a:buFont typeface="Noto Sans CJK JP"/>
-              <a:buChar char="●"/>
-              <a:defRPr sz="2200" b="0">
-                <a:solidFill>
-                  <a:srgbClr val="303437"/>
-                </a:solidFill>
-                <a:latin typeface="Noto Sans"/>
-              </a:defRPr>
-            </a:pPr>
-            <a:r>
-              <a:rPr sz="2200" b="0" lang="ja-JP" altLang="en-US">
-                <a:solidFill>
-                  <a:srgbClr val="303437"/>
-                </a:solidFill>
-                <a:latin typeface="Noto Sans"/>
-                <a:ea typeface="Noto Sans CJK JP"/>
-                <a:cs typeface="Noto Sans"/>
-              </a:rPr>
-              <a:t>教師ありモデルの成績だけでなく、仮説のみの語彙的な手掛かりや、翻訳学習データからの転移を分析した。</a:t>
-            </a:r>
-          </a:p>
-        </p:txBody>
-      </p:sp>
-      <p:sp>
-        <p:nvSpPr>
-          <p:cNvPr id="4" name="Title 3"/>
-          <p:cNvSpPr>
-            <a:spLocks noGrp="1"/>
-          </p:cNvSpPr>
-          <p:nvPr>
-            <p:ph type="title" idx="2"/>
-          </p:nvPr>
-        </p:nvSpPr>
-        <p:spPr>
-          <a:xfrm>
-            <a:off x="75895" y="0"/>
-            <a:ext cx="8115300" cy="480060"/>
-          </a:xfrm>
-        </p:spPr>
-        <p:txBody>
-          <a:bodyPr wrap="square" lIns="0" rIns="0" tIns="0" bIns="0" anchor="ctr">
-            <a:noAutofit/>
-          </a:bodyPr>
-          <a:lstStyle/>
-          <a:p>
-            <a:pPr algn="l">
-              <a:lnSpc>
-                <a:spcPct val="110000"/>
-              </a:lnSpc>
-              <a:buNone/>
-              <a:defRPr sz="1400" b="0">
-                <a:solidFill>
-                  <a:srgbClr val="303437"/>
-                </a:solidFill>
-                <a:latin typeface="Noto Sans"/>
-              </a:defRPr>
-            </a:pPr>
-            <a:r>
-              <a:rPr sz="1400" b="1" lang="ja-JP" altLang="en-US">
-                <a:solidFill>
-                  <a:srgbClr val="FFFEF8"/>
-                </a:solidFill>
-                <a:latin typeface="Noto Sans"/>
-                <a:ea typeface="Noto Sans CJK JP"/>
-                <a:cs typeface="Noto Sans"/>
-              </a:rPr>
-              <a:t>Appendix: 3. 研究と参考文献</a:t>
-            </a:r>
-          </a:p>
-        </p:txBody>
-      </p:sp>
-      <p:sp>
-        <p:nvSpPr>
-          <p:cNvPr id="5" name="sources"/>
-          <p:cNvSpPr txBox="1"/>
-          <p:nvPr/>
-        </p:nvSpPr>
-        <p:spPr>
-          <a:xfrm>
-            <a:off x="502920" y="4700016"/>
-            <a:ext cx="8183879" cy="530352"/>
-          </a:xfrm>
-          <a:prstGeom prst="rect">
-            <a:avLst/>
-          </a:prstGeom>
-          <a:noFill/>
-        </p:spPr>
-        <p:txBody>
-          <a:bodyPr wrap="square" lIns="0" rIns="0" tIns="0" bIns="0">
-            <a:noAutofit/>
-          </a:bodyPr>
-          <a:lstStyle/>
-          <a:p>
-            <a:pPr algn="l">
-              <a:lnSpc>
-                <a:spcPts val="940"/>
-              </a:lnSpc>
-              <a:spcBef>
-                <a:spcPts val="0"/>
-              </a:spcBef>
-              <a:spcAft>
-                <a:spcPts val="140"/>
-              </a:spcAft>
-              <a:buNone/>
-              <a:defRPr sz="810" b="0">
-                <a:solidFill>
-                  <a:srgbClr val="303437"/>
-                </a:solidFill>
-                <a:latin typeface="Noto Sans"/>
-              </a:defRPr>
-            </a:pPr>
-            <a:r>
-              <a:rPr sz="810" b="0" lang="ja-JP" altLang="en-US">
-                <a:solidFill>
-                  <a:srgbClr val="626669"/>
-                </a:solidFill>
-                <a:latin typeface="Noto Sans"/>
-                <a:ea typeface="Noto Sans CJK JP"/>
-                <a:cs typeface="Noto Sans"/>
-              </a:rPr>
-              <a:t>[1] Hu et al. (2020). OCNLI: Original Chinese Natural Language Inference. Findings of EMNLP.</a:t>
-            </a:r>
-            <a:r>
-              <a:rPr sz="810" b="0" lang="ja-JP" altLang="en-US">
-                <a:solidFill>
-                  <a:srgbClr val="626669"/>
-                </a:solidFill>
-                <a:latin typeface="Noto Sans"/>
-                <a:ea typeface="Noto Sans CJK JP"/>
-                <a:cs typeface="Noto Sans"/>
-              </a:rPr>
-              <a:t>  </a:t>
-            </a:r>
-            <a:r>
-              <a:rPr sz="810" b="0" lang="ja-JP" altLang="en-US">
-                <a:solidFill>
-                  <a:srgbClr val="626669"/>
-                </a:solidFill>
-                <a:latin typeface="Noto Sans"/>
-                <a:ea typeface="Noto Sans CJK JP"/>
-                <a:cs typeface="Noto Sans"/>
-                <a:hlinkClick r:id="rId2"/>
-              </a:rPr>
-              <a:t>https://aclanthology.org/2020.findings-emnlp.314/</a:t>
-            </a:r>
-          </a:p>
-        </p:txBody>
-      </p:sp>
-    </p:spTree>
-  </p:cSld>
-  <p:clrMapOvr>
-    <a:masterClrMapping/>
-  </p:clrMapOvr>
-</p:sld>
-</file>
-
-<file path=ppt/slides/slide55.xml><?xml version="1.0" encoding="utf-8"?>
-<p:sld xmlns:a="http://schemas.openxmlformats.org/drawingml/2006/main" xmlns:p="http://schemas.openxmlformats.org/presentationml/2006/main" xmlns:r="http://schemas.openxmlformats.org/officeDocument/2006/relationships">
-  <p:cSld>
-    <p:spTree>
-      <p:nvGrpSpPr>
-        <p:cNvPr id="1" name=""/>
-        <p:cNvGrpSpPr/>
-        <p:nvPr/>
-      </p:nvGrpSpPr>
-      <p:grpSpPr/>
-      <p:sp>
-        <p:nvSpPr>
-          <p:cNvPr id="2" name="Title 1"/>
-          <p:cNvSpPr>
-            <a:spLocks noGrp="1"/>
-          </p:cNvSpPr>
-          <p:nvPr>
-            <p:ph type="title"/>
-          </p:nvPr>
-        </p:nvSpPr>
-        <p:spPr>
-          <a:xfrm>
-            <a:off x="468172" y="650138"/>
-            <a:ext cx="8206740" cy="616305"/>
-          </a:xfrm>
-        </p:spPr>
-        <p:txBody>
-          <a:bodyPr wrap="square" lIns="0" rIns="0" tIns="0" bIns="0">
-            <a:noAutofit/>
-          </a:bodyPr>
-          <a:lstStyle/>
-          <a:p>
-            <a:pPr algn="l">
-              <a:lnSpc>
-                <a:spcPct val="110000"/>
-              </a:lnSpc>
-              <a:buNone/>
-              <a:defRPr sz="2800" b="0">
-                <a:solidFill>
-                  <a:srgbClr val="303437"/>
-                </a:solidFill>
-                <a:latin typeface="Noto Sans"/>
-              </a:defRPr>
-            </a:pPr>
-            <a:r>
-              <a:rPr sz="2800" b="1" lang="ja-JP" altLang="en-US">
-                <a:solidFill>
-                  <a:srgbClr val="303437"/>
-                </a:solidFill>
-                <a:latin typeface="Noto Sans"/>
-                <a:ea typeface="Noto Sans CJK JP"/>
-                <a:cs typeface="Noto Sans"/>
-              </a:rPr>
-              <a:t>参考文献</a:t>
-            </a:r>
-          </a:p>
-        </p:txBody>
-      </p:sp>
-      <p:sp>
-        <p:nvSpPr>
-          <p:cNvPr id="3" name="Title 2"/>
-          <p:cNvSpPr>
-            <a:spLocks noGrp="1"/>
-          </p:cNvSpPr>
-          <p:nvPr>
-            <p:ph type="title" idx="2"/>
-          </p:nvPr>
-        </p:nvSpPr>
-        <p:spPr>
-          <a:xfrm>
-            <a:off x="75895" y="0"/>
-            <a:ext cx="8115300" cy="480060"/>
-          </a:xfrm>
-        </p:spPr>
-        <p:txBody>
-          <a:bodyPr wrap="square" lIns="0" rIns="0" tIns="0" bIns="0" anchor="ctr">
-            <a:noAutofit/>
-          </a:bodyPr>
-          <a:lstStyle/>
-          <a:p>
-            <a:pPr algn="l">
-              <a:lnSpc>
-                <a:spcPct val="110000"/>
-              </a:lnSpc>
-              <a:buNone/>
-              <a:defRPr sz="1400" b="0">
-                <a:solidFill>
-                  <a:srgbClr val="303437"/>
-                </a:solidFill>
-                <a:latin typeface="Noto Sans"/>
-              </a:defRPr>
-            </a:pPr>
-            <a:r>
-              <a:rPr sz="1400" b="1" lang="ja-JP" altLang="en-US">
-                <a:solidFill>
-                  <a:srgbClr val="FFFEF8"/>
-                </a:solidFill>
-                <a:latin typeface="Noto Sans"/>
-                <a:ea typeface="Noto Sans CJK JP"/>
-                <a:cs typeface="Noto Sans"/>
-              </a:rPr>
-              <a:t>Appendix: 3. 研究と参考文献</a:t>
+              <a:t>Appendix: 2. 学習データと参考文献</a:t>
             </a:r>
           </a:p>
         </p:txBody>
@@ -30617,7 +28114,7 @@
                 <a:ea typeface="Noto Sans CJK JP"/>
                 <a:cs typeface="Noto Sans"/>
               </a:rPr>
-              <a:t>OCNLI: Original Chinese Natural Language Inference</a:t>
+              <a:t>CLEVA: Chinese Language Models EVAluation Platform</a:t>
             </a:r>
           </a:p>
         </p:txBody>
@@ -30671,7 +28168,7 @@
                 <a:ea typeface="Noto Sans CJK JP"/>
                 <a:cs typeface="Noto Sans"/>
               </a:rPr>
-              <a:t>Hai Hu, Kyle Richardson, Liang Xu, Lu Li, Sandra Kübler, Lawrence S. Moss · 2020 · Findings of EMNLP, pp.3512–3526</a:t>
+              <a:t>Yanyang Li, Jianqiao Zhao, Duo Zheng, Zi-Yuan Hu, Zhi Chen, Xiaohui Su, Yongfeng Huang, Shijia Huang, Dahua Lin, Michael R. Lyu, Liwei Wang · 2023 · EMNLP System Demonstrations, pp.186–217</a:t>
             </a:r>
           </a:p>
         </p:txBody>
@@ -30725,7 +28222,7 @@
                 <a:ea typeface="Noto Sans CJK JP"/>
                 <a:cs typeface="Noto Sans"/>
               </a:rPr>
-              <a:t>原生中国語の前提と仮説を収集し、多数決による検証、モデル成績、注釈の手掛かりを分析する。</a:t>
+              <a:t>中国語モデルの31課題を統一評価し、OCNLI由来の自然言語推論を多肢選択として採用する。</a:t>
             </a:r>
           </a:p>
         </p:txBody>
@@ -30780,7 +28277,7 @@
                 <a:cs typeface="Noto Sans"/>
                 <a:hlinkClick r:id="rId2"/>
               </a:rPr>
-              <a:t>https://aclanthology.org/2020.findings-emnlp.314/</a:t>
+              <a:t>https://aclanthology.org/2023.emnlp-demo.17/</a:t>
             </a:r>
           </a:p>
         </p:txBody>
@@ -30834,7 +28331,7 @@
                 <a:ea typeface="Noto Sans CJK JP"/>
                 <a:cs typeface="Noto Sans"/>
               </a:rPr>
-              <a:t>OCNLI — Original Chinese Natural Language Inference</a:t>
+              <a:t>CLEVA Scenarios — HELM v0.4.0</a:t>
             </a:r>
           </a:p>
         </p:txBody>
@@ -30888,1103 +28385,7 @@
                 <a:ea typeface="Noto Sans CJK JP"/>
                 <a:cs typeface="Noto Sans"/>
               </a:rPr>
-              <a:t>CLUEbenchmark / Hu et al. · 公式リポジトリ · 固定版b53efdee1725</a:t>
-            </a:r>
-          </a:p>
-        </p:txBody>
-      </p:sp>
-      <p:sp>
-        <p:nvSpPr>
-          <p:cNvPr id="10" name="TextBox 9"/>
-          <p:cNvSpPr txBox="1"/>
-          <p:nvPr/>
-        </p:nvSpPr>
-        <p:spPr>
-          <a:xfrm>
-            <a:off x="548640" y="3624072"/>
-            <a:ext cx="8046720" cy="490727"/>
-          </a:xfrm>
-          <a:prstGeom prst="rect">
-            <a:avLst/>
-          </a:prstGeom>
-          <a:noFill/>
-        </p:spPr>
-        <p:txBody>
-          <a:bodyPr wrap="square" lIns="0" rIns="0" tIns="0" bIns="0">
-            <a:noAutofit/>
-          </a:bodyPr>
-          <a:lstStyle/>
-          <a:p>
-            <a:pPr algn="l">
-              <a:lnSpc>
-                <a:spcPts val="1823"/>
-              </a:lnSpc>
-              <a:spcBef>
-                <a:spcPts val="0"/>
-              </a:spcBef>
-              <a:spcAft>
-                <a:spcPts val="0"/>
-              </a:spcAft>
-              <a:buNone/>
-              <a:defRPr sz="1600" b="0">
-                <a:solidFill>
-                  <a:srgbClr val="303437"/>
-                </a:solidFill>
-                <a:latin typeface="Noto Sans"/>
-              </a:defRPr>
-            </a:pPr>
-            <a:r>
-              <a:rPr sz="1600" b="0" lang="ja-JP" altLang="en-US">
-                <a:solidFill>
-                  <a:srgbClr val="303437"/>
-                </a:solidFill>
-                <a:latin typeface="Noto Sans"/>
-                <a:ea typeface="Noto Sans CJK JP"/>
-                <a:cs typeface="Noto Sans"/>
-              </a:rPr>
-              <a:t>学習用4規模、共通dev・入力のみのtest、形式・baseline・CC BY-NC 2.0の条件を公開する。</a:t>
-            </a:r>
-          </a:p>
-        </p:txBody>
-      </p:sp>
-      <p:sp>
-        <p:nvSpPr>
-          <p:cNvPr id="11" name="TextBox 10"/>
-          <p:cNvSpPr txBox="1"/>
-          <p:nvPr/>
-        </p:nvSpPr>
-        <p:spPr>
-          <a:xfrm>
-            <a:off x="548640" y="4165600"/>
-            <a:ext cx="8046720" cy="179450"/>
-          </a:xfrm>
-          <a:prstGeom prst="rect">
-            <a:avLst/>
-          </a:prstGeom>
-          <a:noFill/>
-        </p:spPr>
-        <p:txBody>
-          <a:bodyPr wrap="square" lIns="0" rIns="0" tIns="0" bIns="0">
-            <a:noAutofit/>
-          </a:bodyPr>
-          <a:lstStyle/>
-          <a:p>
-            <a:pPr algn="l">
-              <a:lnSpc>
-                <a:spcPts val="1197"/>
-              </a:lnSpc>
-              <a:spcBef>
-                <a:spcPts val="0"/>
-              </a:spcBef>
-              <a:spcAft>
-                <a:spcPts val="0"/>
-              </a:spcAft>
-              <a:buNone/>
-              <a:defRPr sz="1050" b="0">
-                <a:solidFill>
-                  <a:srgbClr val="303437"/>
-                </a:solidFill>
-                <a:latin typeface="Noto Sans"/>
-              </a:defRPr>
-            </a:pPr>
-            <a:r>
-              <a:rPr sz="1050" b="0" lang="ja-JP" altLang="en-US">
-                <a:solidFill>
-                  <a:srgbClr val="626669"/>
-                </a:solidFill>
-                <a:latin typeface="Noto Sans"/>
-                <a:ea typeface="Noto Sans CJK JP"/>
-                <a:cs typeface="Noto Sans"/>
-                <a:hlinkClick r:id="rId3"/>
-              </a:rPr>
-              <a:t>https://github.com/CLUEbenchmark/OCNLI</a:t>
-            </a:r>
-          </a:p>
-        </p:txBody>
-      </p:sp>
-    </p:spTree>
-  </p:cSld>
-  <p:clrMapOvr>
-    <a:masterClrMapping/>
-  </p:clrMapOvr>
-</p:sld>
-</file>
-
-<file path=ppt/slides/slide56.xml><?xml version="1.0" encoding="utf-8"?>
-<p:sld xmlns:a="http://schemas.openxmlformats.org/drawingml/2006/main" xmlns:p="http://schemas.openxmlformats.org/presentationml/2006/main" xmlns:r="http://schemas.openxmlformats.org/officeDocument/2006/relationships">
-  <p:cSld>
-    <p:spTree>
-      <p:nvGrpSpPr>
-        <p:cNvPr id="1" name=""/>
-        <p:cNvGrpSpPr/>
-        <p:nvPr/>
-      </p:nvGrpSpPr>
-      <p:grpSpPr/>
-      <p:sp>
-        <p:nvSpPr>
-          <p:cNvPr id="2" name="Title 1"/>
-          <p:cNvSpPr>
-            <a:spLocks noGrp="1"/>
-          </p:cNvSpPr>
-          <p:nvPr>
-            <p:ph type="title"/>
-          </p:nvPr>
-        </p:nvSpPr>
-        <p:spPr>
-          <a:xfrm>
-            <a:off x="468172" y="650138"/>
-            <a:ext cx="8206740" cy="616305"/>
-          </a:xfrm>
-        </p:spPr>
-        <p:txBody>
-          <a:bodyPr wrap="square" lIns="0" rIns="0" tIns="0" bIns="0">
-            <a:noAutofit/>
-          </a:bodyPr>
-          <a:lstStyle/>
-          <a:p>
-            <a:pPr algn="l">
-              <a:lnSpc>
-                <a:spcPct val="110000"/>
-              </a:lnSpc>
-              <a:buNone/>
-              <a:defRPr sz="2800" b="0">
-                <a:solidFill>
-                  <a:srgbClr val="303437"/>
-                </a:solidFill>
-                <a:latin typeface="Noto Sans"/>
-              </a:defRPr>
-            </a:pPr>
-            <a:r>
-              <a:rPr sz="2800" b="1" lang="ja-JP" altLang="en-US">
-                <a:solidFill>
-                  <a:srgbClr val="303437"/>
-                </a:solidFill>
-                <a:latin typeface="Noto Sans"/>
-                <a:ea typeface="Noto Sans CJK JP"/>
-                <a:cs typeface="Noto Sans"/>
-              </a:rPr>
-              <a:t>参考文献</a:t>
-            </a:r>
-          </a:p>
-        </p:txBody>
-      </p:sp>
-      <p:sp>
-        <p:nvSpPr>
-          <p:cNvPr id="3" name="Title 2"/>
-          <p:cNvSpPr>
-            <a:spLocks noGrp="1"/>
-          </p:cNvSpPr>
-          <p:nvPr>
-            <p:ph type="title" idx="2"/>
-          </p:nvPr>
-        </p:nvSpPr>
-        <p:spPr>
-          <a:xfrm>
-            <a:off x="75895" y="0"/>
-            <a:ext cx="8115300" cy="480060"/>
-          </a:xfrm>
-        </p:spPr>
-        <p:txBody>
-          <a:bodyPr wrap="square" lIns="0" rIns="0" tIns="0" bIns="0" anchor="ctr">
-            <a:noAutofit/>
-          </a:bodyPr>
-          <a:lstStyle/>
-          <a:p>
-            <a:pPr algn="l">
-              <a:lnSpc>
-                <a:spcPct val="110000"/>
-              </a:lnSpc>
-              <a:buNone/>
-              <a:defRPr sz="1400" b="0">
-                <a:solidFill>
-                  <a:srgbClr val="303437"/>
-                </a:solidFill>
-                <a:latin typeface="Noto Sans"/>
-              </a:defRPr>
-            </a:pPr>
-            <a:r>
-              <a:rPr sz="1400" b="1" lang="ja-JP" altLang="en-US">
-                <a:solidFill>
-                  <a:srgbClr val="FFFEF8"/>
-                </a:solidFill>
-                <a:latin typeface="Noto Sans"/>
-                <a:ea typeface="Noto Sans CJK JP"/>
-                <a:cs typeface="Noto Sans"/>
-              </a:rPr>
-              <a:t>Appendix: 3. 研究と参考文献</a:t>
-            </a:r>
-          </a:p>
-        </p:txBody>
-      </p:sp>
-      <p:sp>
-        <p:nvSpPr>
-          <p:cNvPr id="4" name="TextBox 3"/>
-          <p:cNvSpPr txBox="1"/>
-          <p:nvPr/>
-        </p:nvSpPr>
-        <p:spPr>
-          <a:xfrm>
-            <a:off x="548640" y="1389888"/>
-            <a:ext cx="8046720" cy="534162"/>
-          </a:xfrm>
-          <a:prstGeom prst="rect">
-            <a:avLst/>
-          </a:prstGeom>
-          <a:noFill/>
-        </p:spPr>
-        <p:txBody>
-          <a:bodyPr wrap="square" lIns="0" rIns="0" tIns="0" bIns="0">
-            <a:noAutofit/>
-          </a:bodyPr>
-          <a:lstStyle/>
-          <a:p>
-            <a:pPr algn="l">
-              <a:lnSpc>
-                <a:spcPts val="1995"/>
-              </a:lnSpc>
-              <a:spcBef>
-                <a:spcPts val="0"/>
-              </a:spcBef>
-              <a:spcAft>
-                <a:spcPts val="0"/>
-              </a:spcAft>
-              <a:buNone/>
-              <a:defRPr sz="1750" b="0">
-                <a:solidFill>
-                  <a:srgbClr val="303437"/>
-                </a:solidFill>
-                <a:latin typeface="Noto Sans"/>
-              </a:defRPr>
-            </a:pPr>
-            <a:r>
-              <a:rPr sz="1750" b="1" lang="ja-JP" altLang="en-US">
-                <a:solidFill>
-                  <a:srgbClr val="303437"/>
-                </a:solidFill>
-                <a:latin typeface="Noto Sans"/>
-                <a:ea typeface="Noto Sans CJK JP"/>
-                <a:cs typeface="Noto Sans"/>
-              </a:rPr>
-              <a:t>A Broad-Coverage Challenge Corpus for Sentence Understanding through Inference</a:t>
-            </a:r>
-          </a:p>
-        </p:txBody>
-      </p:sp>
-      <p:sp>
-        <p:nvSpPr>
-          <p:cNvPr id="5" name="TextBox 4"/>
-          <p:cNvSpPr txBox="1"/>
-          <p:nvPr/>
-        </p:nvSpPr>
-        <p:spPr>
-          <a:xfrm>
-            <a:off x="548640" y="1962150"/>
-            <a:ext cx="8046720" cy="193929"/>
-          </a:xfrm>
-          <a:prstGeom prst="rect">
-            <a:avLst/>
-          </a:prstGeom>
-          <a:noFill/>
-        </p:spPr>
-        <p:txBody>
-          <a:bodyPr wrap="square" lIns="0" rIns="0" tIns="0" bIns="0">
-            <a:noAutofit/>
-          </a:bodyPr>
-          <a:lstStyle/>
-          <a:p>
-            <a:pPr algn="l">
-              <a:lnSpc>
-                <a:spcPts val="1311"/>
-              </a:lnSpc>
-              <a:spcBef>
-                <a:spcPts val="0"/>
-              </a:spcBef>
-              <a:spcAft>
-                <a:spcPts val="0"/>
-              </a:spcAft>
-              <a:buNone/>
-              <a:defRPr sz="1150" b="0">
-                <a:solidFill>
-                  <a:srgbClr val="303437"/>
-                </a:solidFill>
-                <a:latin typeface="Noto Sans"/>
-              </a:defRPr>
-            </a:pPr>
-            <a:r>
-              <a:rPr sz="1150" b="0" lang="ja-JP" altLang="en-US">
-                <a:solidFill>
-                  <a:srgbClr val="626669"/>
-                </a:solidFill>
-                <a:latin typeface="Noto Sans"/>
-                <a:ea typeface="Noto Sans CJK JP"/>
-                <a:cs typeface="Noto Sans"/>
-              </a:rPr>
-              <a:t>Adina Williams, Nikita Nangia, Samuel R. Bowman · 2018 · NAACL-HLT, pp.1112–1122</a:t>
-            </a:r>
-          </a:p>
-        </p:txBody>
-      </p:sp>
-      <p:sp>
-        <p:nvSpPr>
-          <p:cNvPr id="6" name="TextBox 5"/>
-          <p:cNvSpPr txBox="1"/>
-          <p:nvPr/>
-        </p:nvSpPr>
-        <p:spPr>
-          <a:xfrm>
-            <a:off x="548640" y="2206879"/>
-            <a:ext cx="8046720" cy="259080"/>
-          </a:xfrm>
-          <a:prstGeom prst="rect">
-            <a:avLst/>
-          </a:prstGeom>
-          <a:noFill/>
-        </p:spPr>
-        <p:txBody>
-          <a:bodyPr wrap="square" lIns="0" rIns="0" tIns="0" bIns="0">
-            <a:noAutofit/>
-          </a:bodyPr>
-          <a:lstStyle/>
-          <a:p>
-            <a:pPr algn="l">
-              <a:lnSpc>
-                <a:spcPts val="1823"/>
-              </a:lnSpc>
-              <a:spcBef>
-                <a:spcPts val="0"/>
-              </a:spcBef>
-              <a:spcAft>
-                <a:spcPts val="0"/>
-              </a:spcAft>
-              <a:buNone/>
-              <a:defRPr sz="1600" b="0">
-                <a:solidFill>
-                  <a:srgbClr val="303437"/>
-                </a:solidFill>
-                <a:latin typeface="Noto Sans"/>
-              </a:defRPr>
-            </a:pPr>
-            <a:r>
-              <a:rPr sz="1600" b="0" lang="ja-JP" altLang="en-US">
-                <a:solidFill>
-                  <a:srgbClr val="303437"/>
-                </a:solidFill>
-                <a:latin typeface="Noto Sans"/>
-                <a:ea typeface="Noto Sans CJK JP"/>
-                <a:cs typeface="Noto Sans"/>
-              </a:rPr>
-              <a:t>複数文体の英語を前提に、仮説の作成と再注釈で構築したMultiNLIを報告する。</a:t>
-            </a:r>
-          </a:p>
-        </p:txBody>
-      </p:sp>
-      <p:sp>
-        <p:nvSpPr>
-          <p:cNvPr id="7" name="TextBox 6"/>
-          <p:cNvSpPr txBox="1"/>
-          <p:nvPr/>
-        </p:nvSpPr>
-        <p:spPr>
-          <a:xfrm>
-            <a:off x="548640" y="2516759"/>
-            <a:ext cx="8046720" cy="179450"/>
-          </a:xfrm>
-          <a:prstGeom prst="rect">
-            <a:avLst/>
-          </a:prstGeom>
-          <a:noFill/>
-        </p:spPr>
-        <p:txBody>
-          <a:bodyPr wrap="square" lIns="0" rIns="0" tIns="0" bIns="0">
-            <a:noAutofit/>
-          </a:bodyPr>
-          <a:lstStyle/>
-          <a:p>
-            <a:pPr algn="l">
-              <a:lnSpc>
-                <a:spcPts val="1197"/>
-              </a:lnSpc>
-              <a:spcBef>
-                <a:spcPts val="0"/>
-              </a:spcBef>
-              <a:spcAft>
-                <a:spcPts val="0"/>
-              </a:spcAft>
-              <a:buNone/>
-              <a:defRPr sz="1050" b="0">
-                <a:solidFill>
-                  <a:srgbClr val="303437"/>
-                </a:solidFill>
-                <a:latin typeface="Noto Sans"/>
-              </a:defRPr>
-            </a:pPr>
-            <a:r>
-              <a:rPr sz="1050" b="0" lang="ja-JP" altLang="en-US">
-                <a:solidFill>
-                  <a:srgbClr val="626669"/>
-                </a:solidFill>
-                <a:latin typeface="Noto Sans"/>
-                <a:ea typeface="Noto Sans CJK JP"/>
-                <a:cs typeface="Noto Sans"/>
-                <a:hlinkClick r:id="rId2"/>
-              </a:rPr>
-              <a:t>https://aclanthology.org/N18-1101/</a:t>
-            </a:r>
-          </a:p>
-        </p:txBody>
-      </p:sp>
-      <p:sp>
-        <p:nvSpPr>
-          <p:cNvPr id="8" name="TextBox 7"/>
-          <p:cNvSpPr txBox="1"/>
-          <p:nvPr/>
-        </p:nvSpPr>
-        <p:spPr>
-          <a:xfrm>
-            <a:off x="548640" y="2915666"/>
-            <a:ext cx="8046720" cy="280797"/>
-          </a:xfrm>
-          <a:prstGeom prst="rect">
-            <a:avLst/>
-          </a:prstGeom>
-          <a:noFill/>
-        </p:spPr>
-        <p:txBody>
-          <a:bodyPr wrap="square" lIns="0" rIns="0" tIns="0" bIns="0">
-            <a:noAutofit/>
-          </a:bodyPr>
-          <a:lstStyle/>
-          <a:p>
-            <a:pPr algn="l">
-              <a:lnSpc>
-                <a:spcPts val="1995"/>
-              </a:lnSpc>
-              <a:spcBef>
-                <a:spcPts val="0"/>
-              </a:spcBef>
-              <a:spcAft>
-                <a:spcPts val="0"/>
-              </a:spcAft>
-              <a:buNone/>
-              <a:defRPr sz="1750" b="0">
-                <a:solidFill>
-                  <a:srgbClr val="303437"/>
-                </a:solidFill>
-                <a:latin typeface="Noto Sans"/>
-              </a:defRPr>
-            </a:pPr>
-            <a:r>
-              <a:rPr sz="1750" b="1" lang="ja-JP" altLang="en-US">
-                <a:solidFill>
-                  <a:srgbClr val="303437"/>
-                </a:solidFill>
-                <a:latin typeface="Noto Sans"/>
-                <a:ea typeface="Noto Sans CJK JP"/>
-                <a:cs typeface="Noto Sans"/>
-              </a:rPr>
-              <a:t>XNLI: Evaluating Cross-lingual Sentence Representations</a:t>
-            </a:r>
-          </a:p>
-        </p:txBody>
-      </p:sp>
-      <p:sp>
-        <p:nvSpPr>
-          <p:cNvPr id="9" name="TextBox 8"/>
-          <p:cNvSpPr txBox="1"/>
-          <p:nvPr/>
-        </p:nvSpPr>
-        <p:spPr>
-          <a:xfrm>
-            <a:off x="548640" y="3234563"/>
-            <a:ext cx="8046720" cy="360426"/>
-          </a:xfrm>
-          <a:prstGeom prst="rect">
-            <a:avLst/>
-          </a:prstGeom>
-          <a:noFill/>
-        </p:spPr>
-        <p:txBody>
-          <a:bodyPr wrap="square" lIns="0" rIns="0" tIns="0" bIns="0">
-            <a:noAutofit/>
-          </a:bodyPr>
-          <a:lstStyle/>
-          <a:p>
-            <a:pPr algn="l">
-              <a:lnSpc>
-                <a:spcPts val="1311"/>
-              </a:lnSpc>
-              <a:spcBef>
-                <a:spcPts val="0"/>
-              </a:spcBef>
-              <a:spcAft>
-                <a:spcPts val="0"/>
-              </a:spcAft>
-              <a:buNone/>
-              <a:defRPr sz="1150" b="0">
-                <a:solidFill>
-                  <a:srgbClr val="303437"/>
-                </a:solidFill>
-                <a:latin typeface="Noto Sans"/>
-              </a:defRPr>
-            </a:pPr>
-            <a:r>
-              <a:rPr sz="1150" b="0" lang="ja-JP" altLang="en-US">
-                <a:solidFill>
-                  <a:srgbClr val="626669"/>
-                </a:solidFill>
-                <a:latin typeface="Noto Sans"/>
-                <a:ea typeface="Noto Sans CJK JP"/>
-                <a:cs typeface="Noto Sans"/>
-              </a:rPr>
-              <a:t>Alexis Conneau, Ruty Rinott, Guillaume Lample, Adina Williams, Samuel R. Bowman, Holger Schwenk, Veselin Stoyanov · 2018 · EMNLP, pp.2475–2485</a:t>
-            </a:r>
-          </a:p>
-        </p:txBody>
-      </p:sp>
-      <p:sp>
-        <p:nvSpPr>
-          <p:cNvPr id="10" name="TextBox 9"/>
-          <p:cNvSpPr txBox="1"/>
-          <p:nvPr/>
-        </p:nvSpPr>
-        <p:spPr>
-          <a:xfrm>
-            <a:off x="548640" y="3645789"/>
-            <a:ext cx="8046720" cy="259080"/>
-          </a:xfrm>
-          <a:prstGeom prst="rect">
-            <a:avLst/>
-          </a:prstGeom>
-          <a:noFill/>
-        </p:spPr>
-        <p:txBody>
-          <a:bodyPr wrap="square" lIns="0" rIns="0" tIns="0" bIns="0">
-            <a:noAutofit/>
-          </a:bodyPr>
-          <a:lstStyle/>
-          <a:p>
-            <a:pPr algn="l">
-              <a:lnSpc>
-                <a:spcPts val="1823"/>
-              </a:lnSpc>
-              <a:spcBef>
-                <a:spcPts val="0"/>
-              </a:spcBef>
-              <a:spcAft>
-                <a:spcPts val="0"/>
-              </a:spcAft>
-              <a:buNone/>
-              <a:defRPr sz="1600" b="0">
-                <a:solidFill>
-                  <a:srgbClr val="303437"/>
-                </a:solidFill>
-                <a:latin typeface="Noto Sans"/>
-              </a:defRPr>
-            </a:pPr>
-            <a:r>
-              <a:rPr sz="1600" b="0" lang="ja-JP" altLang="en-US">
-                <a:solidFill>
-                  <a:srgbClr val="303437"/>
-                </a:solidFill>
-                <a:latin typeface="Noto Sans"/>
-                <a:ea typeface="Noto Sans CJK JP"/>
-                <a:cs typeface="Noto Sans"/>
-              </a:rPr>
-              <a:t>英語の推論問題を15言語へ展開し、言語をまたぐ文表現の評価に用いる。</a:t>
-            </a:r>
-          </a:p>
-        </p:txBody>
-      </p:sp>
-      <p:sp>
-        <p:nvSpPr>
-          <p:cNvPr id="11" name="TextBox 10"/>
-          <p:cNvSpPr txBox="1"/>
-          <p:nvPr/>
-        </p:nvSpPr>
-        <p:spPr>
-          <a:xfrm>
-            <a:off x="548640" y="3955669"/>
-            <a:ext cx="8046720" cy="179450"/>
-          </a:xfrm>
-          <a:prstGeom prst="rect">
-            <a:avLst/>
-          </a:prstGeom>
-          <a:noFill/>
-        </p:spPr>
-        <p:txBody>
-          <a:bodyPr wrap="square" lIns="0" rIns="0" tIns="0" bIns="0">
-            <a:noAutofit/>
-          </a:bodyPr>
-          <a:lstStyle/>
-          <a:p>
-            <a:pPr algn="l">
-              <a:lnSpc>
-                <a:spcPts val="1197"/>
-              </a:lnSpc>
-              <a:spcBef>
-                <a:spcPts val="0"/>
-              </a:spcBef>
-              <a:spcAft>
-                <a:spcPts val="0"/>
-              </a:spcAft>
-              <a:buNone/>
-              <a:defRPr sz="1050" b="0">
-                <a:solidFill>
-                  <a:srgbClr val="303437"/>
-                </a:solidFill>
-                <a:latin typeface="Noto Sans"/>
-              </a:defRPr>
-            </a:pPr>
-            <a:r>
-              <a:rPr sz="1050" b="0" lang="ja-JP" altLang="en-US">
-                <a:solidFill>
-                  <a:srgbClr val="626669"/>
-                </a:solidFill>
-                <a:latin typeface="Noto Sans"/>
-                <a:ea typeface="Noto Sans CJK JP"/>
-                <a:cs typeface="Noto Sans"/>
-                <a:hlinkClick r:id="rId3"/>
-              </a:rPr>
-              <a:t>https://aclanthology.org/D18-1269/</a:t>
-            </a:r>
-          </a:p>
-        </p:txBody>
-      </p:sp>
-    </p:spTree>
-  </p:cSld>
-  <p:clrMapOvr>
-    <a:masterClrMapping/>
-  </p:clrMapOvr>
-</p:sld>
-</file>
-
-<file path=ppt/slides/slide57.xml><?xml version="1.0" encoding="utf-8"?>
-<p:sld xmlns:a="http://schemas.openxmlformats.org/drawingml/2006/main" xmlns:p="http://schemas.openxmlformats.org/presentationml/2006/main" xmlns:r="http://schemas.openxmlformats.org/officeDocument/2006/relationships">
-  <p:cSld>
-    <p:spTree>
-      <p:nvGrpSpPr>
-        <p:cNvPr id="1" name=""/>
-        <p:cNvGrpSpPr/>
-        <p:nvPr/>
-      </p:nvGrpSpPr>
-      <p:grpSpPr/>
-      <p:sp>
-        <p:nvSpPr>
-          <p:cNvPr id="2" name="Title 1"/>
-          <p:cNvSpPr>
-            <a:spLocks noGrp="1"/>
-          </p:cNvSpPr>
-          <p:nvPr>
-            <p:ph type="title"/>
-          </p:nvPr>
-        </p:nvSpPr>
-        <p:spPr>
-          <a:xfrm>
-            <a:off x="468172" y="650138"/>
-            <a:ext cx="8206740" cy="616305"/>
-          </a:xfrm>
-        </p:spPr>
-        <p:txBody>
-          <a:bodyPr wrap="square" lIns="0" rIns="0" tIns="0" bIns="0">
-            <a:noAutofit/>
-          </a:bodyPr>
-          <a:lstStyle/>
-          <a:p>
-            <a:pPr algn="l">
-              <a:lnSpc>
-                <a:spcPct val="110000"/>
-              </a:lnSpc>
-              <a:buNone/>
-              <a:defRPr sz="2800" b="0">
-                <a:solidFill>
-                  <a:srgbClr val="303437"/>
-                </a:solidFill>
-                <a:latin typeface="Noto Sans"/>
-              </a:defRPr>
-            </a:pPr>
-            <a:r>
-              <a:rPr sz="2800" b="1" lang="ja-JP" altLang="en-US">
-                <a:solidFill>
-                  <a:srgbClr val="303437"/>
-                </a:solidFill>
-                <a:latin typeface="Noto Sans"/>
-                <a:ea typeface="Noto Sans CJK JP"/>
-                <a:cs typeface="Noto Sans"/>
-              </a:rPr>
-              <a:t>参考文献</a:t>
-            </a:r>
-          </a:p>
-        </p:txBody>
-      </p:sp>
-      <p:sp>
-        <p:nvSpPr>
-          <p:cNvPr id="3" name="Title 2"/>
-          <p:cNvSpPr>
-            <a:spLocks noGrp="1"/>
-          </p:cNvSpPr>
-          <p:nvPr>
-            <p:ph type="title" idx="2"/>
-          </p:nvPr>
-        </p:nvSpPr>
-        <p:spPr>
-          <a:xfrm>
-            <a:off x="75895" y="0"/>
-            <a:ext cx="8115300" cy="480060"/>
-          </a:xfrm>
-        </p:spPr>
-        <p:txBody>
-          <a:bodyPr wrap="square" lIns="0" rIns="0" tIns="0" bIns="0" anchor="ctr">
-            <a:noAutofit/>
-          </a:bodyPr>
-          <a:lstStyle/>
-          <a:p>
-            <a:pPr algn="l">
-              <a:lnSpc>
-                <a:spcPct val="110000"/>
-              </a:lnSpc>
-              <a:buNone/>
-              <a:defRPr sz="1400" b="0">
-                <a:solidFill>
-                  <a:srgbClr val="303437"/>
-                </a:solidFill>
-                <a:latin typeface="Noto Sans"/>
-              </a:defRPr>
-            </a:pPr>
-            <a:r>
-              <a:rPr sz="1400" b="1" lang="ja-JP" altLang="en-US">
-                <a:solidFill>
-                  <a:srgbClr val="FFFEF8"/>
-                </a:solidFill>
-                <a:latin typeface="Noto Sans"/>
-                <a:ea typeface="Noto Sans CJK JP"/>
-                <a:cs typeface="Noto Sans"/>
-              </a:rPr>
-              <a:t>Appendix: 3. 研究と参考文献</a:t>
-            </a:r>
-          </a:p>
-        </p:txBody>
-      </p:sp>
-      <p:sp>
-        <p:nvSpPr>
-          <p:cNvPr id="4" name="TextBox 3"/>
-          <p:cNvSpPr txBox="1"/>
-          <p:nvPr/>
-        </p:nvSpPr>
-        <p:spPr>
-          <a:xfrm>
-            <a:off x="548640" y="1389888"/>
-            <a:ext cx="8046720" cy="280797"/>
-          </a:xfrm>
-          <a:prstGeom prst="rect">
-            <a:avLst/>
-          </a:prstGeom>
-          <a:noFill/>
-        </p:spPr>
-        <p:txBody>
-          <a:bodyPr wrap="square" lIns="0" rIns="0" tIns="0" bIns="0">
-            <a:noAutofit/>
-          </a:bodyPr>
-          <a:lstStyle/>
-          <a:p>
-            <a:pPr algn="l">
-              <a:lnSpc>
-                <a:spcPts val="1995"/>
-              </a:lnSpc>
-              <a:spcBef>
-                <a:spcPts val="0"/>
-              </a:spcBef>
-              <a:spcAft>
-                <a:spcPts val="0"/>
-              </a:spcAft>
-              <a:buNone/>
-              <a:defRPr sz="1750" b="0">
-                <a:solidFill>
-                  <a:srgbClr val="303437"/>
-                </a:solidFill>
-                <a:latin typeface="Noto Sans"/>
-              </a:defRPr>
-            </a:pPr>
-            <a:r>
-              <a:rPr sz="1750" b="1" lang="ja-JP" altLang="en-US">
-                <a:solidFill>
-                  <a:srgbClr val="303437"/>
-                </a:solidFill>
-                <a:latin typeface="Noto Sans"/>
-                <a:ea typeface="Noto Sans CJK JP"/>
-                <a:cs typeface="Noto Sans"/>
-              </a:rPr>
-              <a:t>CLEVA: Chinese Language Models EVAluation Platform</a:t>
-            </a:r>
-          </a:p>
-        </p:txBody>
-      </p:sp>
-      <p:sp>
-        <p:nvSpPr>
-          <p:cNvPr id="5" name="TextBox 4"/>
-          <p:cNvSpPr txBox="1"/>
-          <p:nvPr/>
-        </p:nvSpPr>
-        <p:spPr>
-          <a:xfrm>
-            <a:off x="548640" y="1708785"/>
-            <a:ext cx="8046720" cy="360426"/>
-          </a:xfrm>
-          <a:prstGeom prst="rect">
-            <a:avLst/>
-          </a:prstGeom>
-          <a:noFill/>
-        </p:spPr>
-        <p:txBody>
-          <a:bodyPr wrap="square" lIns="0" rIns="0" tIns="0" bIns="0">
-            <a:noAutofit/>
-          </a:bodyPr>
-          <a:lstStyle/>
-          <a:p>
-            <a:pPr algn="l">
-              <a:lnSpc>
-                <a:spcPts val="1311"/>
-              </a:lnSpc>
-              <a:spcBef>
-                <a:spcPts val="0"/>
-              </a:spcBef>
-              <a:spcAft>
-                <a:spcPts val="0"/>
-              </a:spcAft>
-              <a:buNone/>
-              <a:defRPr sz="1150" b="0">
-                <a:solidFill>
-                  <a:srgbClr val="303437"/>
-                </a:solidFill>
-                <a:latin typeface="Noto Sans"/>
-              </a:defRPr>
-            </a:pPr>
-            <a:r>
-              <a:rPr sz="1150" b="0" lang="ja-JP" altLang="en-US">
-                <a:solidFill>
-                  <a:srgbClr val="626669"/>
-                </a:solidFill>
-                <a:latin typeface="Noto Sans"/>
-                <a:ea typeface="Noto Sans CJK JP"/>
-                <a:cs typeface="Noto Sans"/>
-              </a:rPr>
-              <a:t>Yanyang Li, Jianqiao Zhao, Duo Zheng, Zi-Yuan Hu, Zhi Chen, Xiaohui Su, Yongfeng Huang, Shijia Huang, Dahua Lin, Michael R. Lyu, Liwei Wang · 2023 · EMNLP System Demonstrations, pp.186–217</a:t>
-            </a:r>
-          </a:p>
-        </p:txBody>
-      </p:sp>
-      <p:sp>
-        <p:nvSpPr>
-          <p:cNvPr id="6" name="TextBox 5"/>
-          <p:cNvSpPr txBox="1"/>
-          <p:nvPr/>
-        </p:nvSpPr>
-        <p:spPr>
-          <a:xfrm>
-            <a:off x="548640" y="2120011"/>
-            <a:ext cx="8046720" cy="490727"/>
-          </a:xfrm>
-          <a:prstGeom prst="rect">
-            <a:avLst/>
-          </a:prstGeom>
-          <a:noFill/>
-        </p:spPr>
-        <p:txBody>
-          <a:bodyPr wrap="square" lIns="0" rIns="0" tIns="0" bIns="0">
-            <a:noAutofit/>
-          </a:bodyPr>
-          <a:lstStyle/>
-          <a:p>
-            <a:pPr algn="l">
-              <a:lnSpc>
-                <a:spcPts val="1823"/>
-              </a:lnSpc>
-              <a:spcBef>
-                <a:spcPts val="0"/>
-              </a:spcBef>
-              <a:spcAft>
-                <a:spcPts val="0"/>
-              </a:spcAft>
-              <a:buNone/>
-              <a:defRPr sz="1600" b="0">
-                <a:solidFill>
-                  <a:srgbClr val="303437"/>
-                </a:solidFill>
-                <a:latin typeface="Noto Sans"/>
-              </a:defRPr>
-            </a:pPr>
-            <a:r>
-              <a:rPr sz="1600" b="0" lang="ja-JP" altLang="en-US">
-                <a:solidFill>
-                  <a:srgbClr val="303437"/>
-                </a:solidFill>
-                <a:latin typeface="Noto Sans"/>
-                <a:ea typeface="Noto Sans CJK JP"/>
-                <a:cs typeface="Noto Sans"/>
-              </a:rPr>
-              <a:t>中国語モデルの31課題を統一評価し、OCNLI由来の自然言語推論を多肢選択として採用する。</a:t>
-            </a:r>
-          </a:p>
-        </p:txBody>
-      </p:sp>
-      <p:sp>
-        <p:nvSpPr>
-          <p:cNvPr id="7" name="TextBox 6"/>
-          <p:cNvSpPr txBox="1"/>
-          <p:nvPr/>
-        </p:nvSpPr>
-        <p:spPr>
-          <a:xfrm>
-            <a:off x="548640" y="2661539"/>
-            <a:ext cx="8046720" cy="179450"/>
-          </a:xfrm>
-          <a:prstGeom prst="rect">
-            <a:avLst/>
-          </a:prstGeom>
-          <a:noFill/>
-        </p:spPr>
-        <p:txBody>
-          <a:bodyPr wrap="square" lIns="0" rIns="0" tIns="0" bIns="0">
-            <a:noAutofit/>
-          </a:bodyPr>
-          <a:lstStyle/>
-          <a:p>
-            <a:pPr algn="l">
-              <a:lnSpc>
-                <a:spcPts val="1197"/>
-              </a:lnSpc>
-              <a:spcBef>
-                <a:spcPts val="0"/>
-              </a:spcBef>
-              <a:spcAft>
-                <a:spcPts val="0"/>
-              </a:spcAft>
-              <a:buNone/>
-              <a:defRPr sz="1050" b="0">
-                <a:solidFill>
-                  <a:srgbClr val="303437"/>
-                </a:solidFill>
-                <a:latin typeface="Noto Sans"/>
-              </a:defRPr>
-            </a:pPr>
-            <a:r>
-              <a:rPr sz="1050" b="0" lang="ja-JP" altLang="en-US">
-                <a:solidFill>
-                  <a:srgbClr val="626669"/>
-                </a:solidFill>
-                <a:latin typeface="Noto Sans"/>
-                <a:ea typeface="Noto Sans CJK JP"/>
-                <a:cs typeface="Noto Sans"/>
-                <a:hlinkClick r:id="rId2"/>
-              </a:rPr>
-              <a:t>https://aclanthology.org/2023.emnlp-demo.17/</a:t>
-            </a:r>
-          </a:p>
-        </p:txBody>
-      </p:sp>
-      <p:sp>
-        <p:nvSpPr>
-          <p:cNvPr id="8" name="TextBox 7"/>
-          <p:cNvSpPr txBox="1"/>
-          <p:nvPr/>
-        </p:nvSpPr>
-        <p:spPr>
-          <a:xfrm>
-            <a:off x="548640" y="3060446"/>
-            <a:ext cx="8046720" cy="280797"/>
-          </a:xfrm>
-          <a:prstGeom prst="rect">
-            <a:avLst/>
-          </a:prstGeom>
-          <a:noFill/>
-        </p:spPr>
-        <p:txBody>
-          <a:bodyPr wrap="square" lIns="0" rIns="0" tIns="0" bIns="0">
-            <a:noAutofit/>
-          </a:bodyPr>
-          <a:lstStyle/>
-          <a:p>
-            <a:pPr algn="l">
-              <a:lnSpc>
-                <a:spcPts val="1995"/>
-              </a:lnSpc>
-              <a:spcBef>
-                <a:spcPts val="0"/>
-              </a:spcBef>
-              <a:spcAft>
-                <a:spcPts val="0"/>
-              </a:spcAft>
-              <a:buNone/>
-              <a:defRPr sz="1750" b="0">
-                <a:solidFill>
-                  <a:srgbClr val="303437"/>
-                </a:solidFill>
-                <a:latin typeface="Noto Sans"/>
-              </a:defRPr>
-            </a:pPr>
-            <a:r>
-              <a:rPr sz="1750" b="1" lang="ja-JP" altLang="en-US">
-                <a:solidFill>
-                  <a:srgbClr val="303437"/>
-                </a:solidFill>
-                <a:latin typeface="Noto Sans"/>
-                <a:ea typeface="Noto Sans CJK JP"/>
-                <a:cs typeface="Noto Sans"/>
-              </a:rPr>
-              <a:t>CLEVA Scenarios — HELM v0.4.0</a:t>
-            </a:r>
-          </a:p>
-        </p:txBody>
-      </p:sp>
-      <p:sp>
-        <p:nvSpPr>
-          <p:cNvPr id="9" name="TextBox 8"/>
-          <p:cNvSpPr txBox="1"/>
-          <p:nvPr/>
-        </p:nvSpPr>
-        <p:spPr>
-          <a:xfrm>
-            <a:off x="548640" y="3379343"/>
-            <a:ext cx="8046720" cy="193929"/>
-          </a:xfrm>
-          <a:prstGeom prst="rect">
-            <a:avLst/>
-          </a:prstGeom>
-          <a:noFill/>
-        </p:spPr>
-        <p:txBody>
-          <a:bodyPr wrap="square" lIns="0" rIns="0" tIns="0" bIns="0">
-            <a:noAutofit/>
-          </a:bodyPr>
-          <a:lstStyle/>
-          <a:p>
-            <a:pPr algn="l">
-              <a:lnSpc>
-                <a:spcPts val="1311"/>
-              </a:lnSpc>
-              <a:spcBef>
-                <a:spcPts val="0"/>
-              </a:spcBef>
-              <a:spcAft>
-                <a:spcPts val="0"/>
-              </a:spcAft>
-              <a:buNone/>
-              <a:defRPr sz="1150" b="0">
-                <a:solidFill>
-                  <a:srgbClr val="303437"/>
-                </a:solidFill>
-                <a:latin typeface="Noto Sans"/>
-              </a:defRPr>
-            </a:pPr>
-            <a:r>
-              <a:rPr sz="1150" b="0" lang="ja-JP" altLang="en-US">
-                <a:solidFill>
-                  <a:srgbClr val="626669"/>
-                </a:solidFill>
-                <a:latin typeface="Noto Sans"/>
-                <a:ea typeface="Noto Sans CJK JP"/>
-                <a:cs typeface="Noto Sans"/>
-              </a:rPr>
-              <a:t>Stanford CRFM · 2023-11-17固定公開版</a:t>
+              <a:t>Stanford CRFM (n.d.). HELM。参照2026-10-19。</a:t>
             </a:r>
           </a:p>
         </p:txBody>
@@ -32261,7 +28662,7 @@
                           <a:ea typeface="Noto Sans CJK JP"/>
                           <a:cs typeface="Noto Sans"/>
                         </a:rPr>
-                        <a:t>配布ラベル</a:t>
+                        <a:t>ラベル</a:t>
                       </a:r>
                     </a:p>
                   </a:txBody>
@@ -32717,7 +29118,7 @@
                 <a:ea typeface="Noto Sans CJK JP"/>
                 <a:cs typeface="Noto Sans"/>
               </a:rPr>
-              <a:t>3種類のラベルが元の課題の出力。OCNLIの原票には、A/B/Cの選択肢は付いていない。</a:t>
+              <a:t>モデルは前提と仮説を読み、この3種類のいずれかを予測する。</a:t>
             </a:r>
           </a:p>
         </p:txBody>
@@ -33404,7 +29805,7 @@
                 <a:ea typeface="Noto Sans CJK JP"/>
                 <a:cs typeface="Noto Sans"/>
               </a:rPr>
-              <a:t>配布正解：含意（entailment）</a:t>
+              <a:t>正解：含意（entailment）</a:t>
             </a:r>
           </a:p>
         </p:txBody>
@@ -33458,22 +29859,19 @@
                 <a:ea typeface="Noto Sans CJK JP"/>
                 <a:cs typeface="Noto Sans"/>
               </a:rPr>
-              <a:t>[1] Hu et al. OCNLI公開dev、CC BY-NC 2.0。前提の出所は各文体資料。 dev row 1162 / id 1162 / phone</a:t>
-            </a:r>
-          </a:p>
-          <a:p>
-            <a:pPr>
-              <a:lnSpc>
-                <a:spcPts val="940"/>
-              </a:lnSpc>
-              <a:buNone/>
-              <a:defRPr sz="810" b="0">
-                <a:solidFill>
-                  <a:srgbClr val="303437"/>
-                </a:solidFill>
-                <a:latin typeface="Noto Sans"/>
-              </a:defRPr>
-            </a:pPr>
+              <a:t>[1] Hu et al. (n.d.). OCNLI public development data. CC BY-NC 2.0.</a:t>
+            </a:r>
+            <a:r>
+              <a:rPr sz="810" b="0" lang="ja-JP" altLang="en-US">
+                <a:solidFill>
+                  <a:srgbClr val="626669"/>
+                </a:solidFill>
+                <a:latin typeface="Noto Sans"/>
+                <a:ea typeface="Noto Sans CJK JP"/>
+                <a:cs typeface="Noto Sans"/>
+              </a:rPr>
+              <a:t>  </a:t>
+            </a:r>
             <a:r>
               <a:rPr sz="810" b="0" lang="ja-JP" altLang="en-US">
                 <a:solidFill>
@@ -33603,7 +30001,7 @@
                 <a:ea typeface="Noto Sans CJK JP"/>
                 <a:cs typeface="Noto Sans"/>
               </a:rPr>
-              <a:t>値段を繰り返す発話を、かごを販売できる状況として解釈する。CLEVAの公開論文例と同じ原票。</a:t>
+              <a:t>値段を繰り返す発話を、かごを販売できる状況として解釈する。短い電話会話の断片から、発話の場面を読み取る例である。</a:t>
             </a:r>
           </a:p>
           <a:p>
@@ -33633,37 +30031,7 @@
                 <a:ea typeface="Noto Sans CJK JP"/>
                 <a:cs typeface="Noto Sans"/>
               </a:rPr>
-              <a:t>前提は短い電話会話の断片。仮説は同じ語を写すだけではなく、値段を伝える発話の意味を表現している。</a:t>
-            </a:r>
-          </a:p>
-          <a:p>
-            <a:pPr marL="457200" indent="-355600">
-              <a:lnSpc>
-                <a:spcPts val="2499"/>
-              </a:lnSpc>
-              <a:spcAft>
-                <a:spcPts val="0"/>
-              </a:spcAft>
-              <a:buSzPct val="63333"/>
-              <a:buFont typeface="Noto Sans CJK JP"/>
-              <a:buChar char="●"/>
-              <a:defRPr sz="2100" b="0">
-                <a:solidFill>
-                  <a:srgbClr val="303437"/>
-                </a:solidFill>
-                <a:latin typeface="Noto Sans"/>
-              </a:defRPr>
-            </a:pPr>
-            <a:r>
-              <a:rPr sz="2100" b="0" lang="ja-JP" altLang="en-US">
-                <a:solidFill>
-                  <a:srgbClr val="303437"/>
-                </a:solidFill>
-                <a:latin typeface="Noto Sans"/>
-                <a:ea typeface="Noto Sans CJK JP"/>
-                <a:cs typeface="Noto Sans"/>
-              </a:rPr>
-              <a:t>本編3例と追加10例は、ラベル公開済みのdevから選んだ異なるペア。5文体、3ラベル、作成順の異なる仮説を含む。</a:t>
+              <a:t>仮説は前提と同じ語を写すだけではなく、値段を伝える発話の意味を表現している。</a:t>
             </a:r>
           </a:p>
         </p:txBody>
@@ -33789,57 +30157,6 @@
                 <a:hlinkClick r:id="rId2"/>
               </a:rPr>
               <a:t>https://aclanthology.org/2020.findings-emnlp.314/</a:t>
-            </a:r>
-          </a:p>
-          <a:p>
-            <a:pPr>
-              <a:lnSpc>
-                <a:spcPts val="940"/>
-              </a:lnSpc>
-              <a:spcAft>
-                <a:spcPts val="140"/>
-              </a:spcAft>
-              <a:buNone/>
-              <a:defRPr sz="810" b="0">
-                <a:solidFill>
-                  <a:srgbClr val="303437"/>
-                </a:solidFill>
-                <a:latin typeface="Noto Sans"/>
-              </a:defRPr>
-            </a:pPr>
-            <a:r>
-              <a:rPr sz="810" b="0" lang="ja-JP" altLang="en-US">
-                <a:solidFill>
-                  <a:srgbClr val="626669"/>
-                </a:solidFill>
-                <a:latin typeface="Noto Sans"/>
-                <a:ea typeface="Noto Sans CJK JP"/>
-                <a:cs typeface="Noto Sans"/>
-              </a:rPr>
-              <a:t>[2] Hu et al. OCNLI公開dev、CC BY-NC 2.0。前提の出所は各文体資料。</a:t>
-            </a:r>
-            <a:r>
-              <a:rPr sz="810" b="0" lang="ja-JP" altLang="en-US">
-                <a:solidFill>
-                  <a:srgbClr val="626669"/>
-                </a:solidFill>
-                <a:latin typeface="Noto Sans"/>
-                <a:ea typeface="Noto Sans CJK JP"/>
-                <a:cs typeface="Noto Sans"/>
-              </a:rPr>
-              <a:t>  </a:t>
-            </a:r>
-            <a:r>
-              <a:rPr sz="810" b="0" lang="ja-JP" altLang="en-US">
-                <a:solidFill>
-                  <a:srgbClr val="626669"/>
-                </a:solidFill>
-                <a:latin typeface="Noto Sans"/>
-                <a:ea typeface="Noto Sans CJK JP"/>
-                <a:cs typeface="Noto Sans"/>
-                <a:hlinkClick r:id="rId3"/>
-              </a:rPr>
-              <a:t>https://github.com/CLUEbenchmark/OCNLI/blob/main/data/ocnli/dev.json</a:t>
             </a:r>
           </a:p>
         </p:txBody>
@@ -34449,7 +30766,7 @@
                 <a:ea typeface="Noto Sans CJK JP"/>
                 <a:cs typeface="Noto Sans"/>
               </a:rPr>
-              <a:t>配布正解：矛盾（contradiction）</a:t>
+              <a:t>正解：矛盾（contradiction）</a:t>
             </a:r>
           </a:p>
         </p:txBody>
@@ -34503,22 +30820,19 @@
                 <a:ea typeface="Noto Sans CJK JP"/>
                 <a:cs typeface="Noto Sans"/>
               </a:rPr>
-              <a:t>[1] Hu et al. OCNLI公開dev、CC BY-NC 2.0。前提の出所は各文体資料。 dev row 2627 / id 2627 / lit</a:t>
-            </a:r>
-          </a:p>
-          <a:p>
-            <a:pPr>
-              <a:lnSpc>
-                <a:spcPts val="940"/>
-              </a:lnSpc>
-              <a:buNone/>
-              <a:defRPr sz="810" b="0">
-                <a:solidFill>
-                  <a:srgbClr val="303437"/>
-                </a:solidFill>
-                <a:latin typeface="Noto Sans"/>
-              </a:defRPr>
-            </a:pPr>
+              <a:t>[1] Hu et al. (n.d.). OCNLI public development data. CC BY-NC 2.0.</a:t>
+            </a:r>
+            <a:r>
+              <a:rPr sz="810" b="0" lang="ja-JP" altLang="en-US">
+                <a:solidFill>
+                  <a:srgbClr val="626669"/>
+                </a:solidFill>
+                <a:latin typeface="Noto Sans"/>
+                <a:ea typeface="Noto Sans CJK JP"/>
+                <a:cs typeface="Noto Sans"/>
+              </a:rPr>
+              <a:t>  </a:t>
+            </a:r>
             <a:r>
               <a:rPr sz="810" b="0" lang="ja-JP" altLang="en-US">
                 <a:solidFill>

--- a/slides/datasets-in-10-minutes-ocnli.pptx
+++ b/slides/datasets-in-10-minutes-ocnli.pptx
@@ -32,8 +32,6 @@
     <p:sldId id="280" r:id="rId30"/>
     <p:sldId id="281" r:id="rId31"/>
     <p:sldId id="282" r:id="rId32"/>
-    <p:sldId id="283" r:id="rId33"/>
-    <p:sldId id="284" r:id="rId34"/>
     <p:sldId id="286" r:id="rId36"/>
     <p:sldId id="306" r:id="rId56"/>
     <p:sldId id="287" r:id="rId37"/>
@@ -55,7 +53,6 @@
     <p:sldId id="309" r:id="rId59"/>
     <p:sldId id="310" r:id="rId60"/>
     <p:sldId id="311" r:id="rId61"/>
-    <p:sldId id="312" r:id="rId62"/>
   </p:sldIdLst>
   <p:sldSz cx="9144000" cy="5143500" type="screen16x9"/>
   <p:notesSz cx="6858000" cy="9144000"/>
@@ -15161,7 +15158,7 @@
                 <a:ea typeface="Noto Sans CJK JP"/>
                 <a:cs typeface="Noto Sans"/>
               </a:rPr>
-              <a:t>入手方法とCLEVAでの利用</a:t>
+              <a:t>入手方法と利用条件</a:t>
             </a:r>
           </a:p>
         </p:txBody>
@@ -15209,7 +15206,7 @@
                 <a:ea typeface="Noto Sans CJK JP"/>
                 <a:cs typeface="Noto Sans"/>
               </a:rPr>
-              <a:t>4. 入手方法とCLEVAでの利用</a:t>
+              <a:t>4. 入手方法と利用条件</a:t>
             </a:r>
           </a:p>
         </p:txBody>
@@ -15275,7 +15272,7 @@
                 <a:ea typeface="Noto Sans CJK JP"/>
                 <a:cs typeface="Noto Sans"/>
               </a:rPr>
-              <a:t>CLEVAはOCNLIを、多肢選択の推論課題に採用</a:t>
+              <a:t>現在の入手先と、引用文の利用条件</a:t>
             </a:r>
           </a:p>
         </p:txBody>
@@ -15304,91 +15301,91 @@
           <a:p>
             <a:pPr marL="457200" indent="-355600">
               <a:lnSpc>
-                <a:spcPts val="2499"/>
+                <a:spcPts val="2379"/>
               </a:lnSpc>
               <a:spcAft>
                 <a:spcPts val="700"/>
               </a:spcAft>
-              <a:buSzPct val="63333"/>
+              <a:buSzPct val="66500"/>
               <a:buFont typeface="Noto Sans CJK JP"/>
               <a:buChar char="●"/>
-              <a:defRPr sz="2100" b="0">
-                <a:solidFill>
-                  <a:srgbClr val="303437"/>
-                </a:solidFill>
-                <a:latin typeface="Noto Sans"/>
-              </a:defRPr>
-            </a:pPr>
-            <a:r>
-              <a:rPr sz="2100" b="0" lang="ja-JP" altLang="en-US">
-                <a:solidFill>
-                  <a:srgbClr val="303437"/>
-                </a:solidFill>
-                <a:latin typeface="Noto Sans"/>
-                <a:ea typeface="Noto Sans CJK JP"/>
-                <a:cs typeface="Noto Sans"/>
-              </a:rPr>
-              <a:t>2023年のCLEVAは、OCNLIの文ペアを多肢選択形式にして、自然言語推論を正答率で評価する。</a:t>
+              <a:defRPr sz="2000" b="0">
+                <a:solidFill>
+                  <a:srgbClr val="303437"/>
+                </a:solidFill>
+                <a:latin typeface="Noto Sans"/>
+              </a:defRPr>
+            </a:pPr>
+            <a:r>
+              <a:rPr sz="2000" b="0" lang="ja-JP" altLang="en-US">
+                <a:solidFill>
+                  <a:srgbClr val="303437"/>
+                </a:solidFill>
+                <a:latin typeface="Noto Sans"/>
+                <a:ea typeface="Noto Sans CJK JP"/>
+                <a:cs typeface="Noto Sans"/>
+              </a:rPr>
+              <a:t>公式リポジトリは50k・30k・10k・3kの学習用データと、共通の開発用・正解非公開のテスト用データを公開する。CLUEの公開ZIPは50k版を収録する。</a:t>
             </a:r>
           </a:p>
           <a:p>
             <a:pPr marL="457200" indent="-355600">
               <a:lnSpc>
-                <a:spcPts val="2499"/>
+                <a:spcPts val="2379"/>
               </a:lnSpc>
               <a:spcAft>
                 <a:spcPts val="700"/>
               </a:spcAft>
-              <a:buSzPct val="63333"/>
+              <a:buSzPct val="66500"/>
               <a:buFont typeface="Noto Sans CJK JP"/>
               <a:buChar char="●"/>
-              <a:defRPr sz="2100" b="0">
-                <a:solidFill>
-                  <a:srgbClr val="303437"/>
-                </a:solidFill>
-                <a:latin typeface="Noto Sans"/>
-              </a:defRPr>
-            </a:pPr>
-            <a:r>
-              <a:rPr sz="2100" b="0" lang="ja-JP" altLang="en-US">
-                <a:solidFill>
-                  <a:srgbClr val="303437"/>
-                </a:solidFill>
-                <a:latin typeface="Noto Sans"/>
-                <a:ea typeface="Noto Sans CJK JP"/>
-                <a:cs typeface="Noto Sans"/>
-              </a:rPr>
-              <a:t>公開論文には、本編の実例1と同じ「篮子嘛,一块钱…」と「这个篮子是可以卖的。」を使った設問が掲載されている。</a:t>
+              <a:defRPr sz="2000" b="0">
+                <a:solidFill>
+                  <a:srgbClr val="303437"/>
+                </a:solidFill>
+                <a:latin typeface="Noto Sans"/>
+              </a:defRPr>
+            </a:pPr>
+            <a:r>
+              <a:rPr sz="2000" b="0" lang="ja-JP" altLang="en-US">
+                <a:solidFill>
+                  <a:srgbClr val="303437"/>
+                </a:solidFill>
+                <a:latin typeface="Noto Sans"/>
+                <a:ea typeface="Noto Sans CJK JP"/>
+                <a:cs typeface="Noto Sans"/>
+              </a:rPr>
+              <a:t>OCNLIはCC BY-NC 2.0を掲示する。帰属を示し、非商用の条件を守る。ニュースの前提はLCMCからELRAの許可を得て採用したと記される。</a:t>
             </a:r>
           </a:p>
           <a:p>
             <a:pPr marL="457200" indent="-355600">
               <a:lnSpc>
-                <a:spcPts val="2499"/>
-              </a:lnSpc>
-              <a:spcAft>
-                <a:spcPts val="0"/>
-              </a:spcAft>
-              <a:buSzPct val="63333"/>
+                <a:spcPts val="2379"/>
+              </a:lnSpc>
+              <a:spcAft>
+                <a:spcPts val="0"/>
+              </a:spcAft>
+              <a:buSzPct val="66500"/>
               <a:buFont typeface="Noto Sans CJK JP"/>
               <a:buChar char="●"/>
-              <a:defRPr sz="2100" b="0">
-                <a:solidFill>
-                  <a:srgbClr val="303437"/>
-                </a:solidFill>
-                <a:latin typeface="Noto Sans"/>
-              </a:defRPr>
-            </a:pPr>
-            <a:r>
-              <a:rPr sz="2100" b="0" lang="ja-JP" altLang="en-US">
-                <a:solidFill>
-                  <a:srgbClr val="303437"/>
-                </a:solidFill>
-                <a:latin typeface="Noto Sans"/>
-                <a:ea typeface="Noto Sans CJK JP"/>
-                <a:cs typeface="Noto Sans"/>
-              </a:rPr>
-              <a:t>CLEVAで使われた全問題や抽出範囲は、公開説明からは確認できない。</a:t>
+              <a:defRPr sz="2000" b="0">
+                <a:solidFill>
+                  <a:srgbClr val="303437"/>
+                </a:solidFill>
+                <a:latin typeface="Noto Sans"/>
+              </a:defRPr>
+            </a:pPr>
+            <a:r>
+              <a:rPr sz="2000" b="0" lang="ja-JP" altLang="en-US">
+                <a:solidFill>
+                  <a:srgbClr val="303437"/>
+                </a:solidFill>
+                <a:latin typeface="Noto Sans"/>
+                <a:ea typeface="Noto Sans CJK JP"/>
+                <a:cs typeface="Noto Sans"/>
+              </a:rPr>
+              <a:t>前提には政府報告、ニュース、小説、番組・電話会話が含まれる。引用には、データセットと原資料それぞれの出所も関わる。</a:t>
             </a:r>
           </a:p>
         </p:txBody>
@@ -15436,7 +15433,7 @@
                 <a:ea typeface="Noto Sans CJK JP"/>
                 <a:cs typeface="Noto Sans"/>
               </a:rPr>
-              <a:t>4. 入手方法とCLEVAでの利用</a:t>
+              <a:t>4. 入手方法と利用条件</a:t>
             </a:r>
           </a:p>
         </p:txBody>
@@ -15449,7 +15446,7 @@
         </p:nvSpPr>
         <p:spPr>
           <a:xfrm>
-            <a:off x="502920" y="4517136"/>
+            <a:off x="502920" y="4700016"/>
             <a:ext cx="8183879" cy="530352"/>
           </a:xfrm>
           <a:prstGeom prst="rect">
@@ -15490,7 +15487,7 @@
                 <a:ea typeface="Noto Sans CJK JP"/>
                 <a:cs typeface="Noto Sans"/>
               </a:rPr>
-              <a:t>[1] Li et al. (2023). CLEVA: Chinese Language Models EVAluation Platform. EMNLP System Demonstrations.</a:t>
+              <a:t>[1] Hu et al. (n.d.). OCNLI official repository.</a:t>
             </a:r>
             <a:r>
               <a:rPr sz="810" b="0" lang="ja-JP" altLang="en-US">
@@ -15513,61 +15510,7 @@
                 <a:cs typeface="Noto Sans"/>
                 <a:hlinkClick r:id="rId2"/>
               </a:rPr>
-              <a:t>https://aclanthology.org/2023.emnlp-demo.17/</a:t>
-            </a:r>
-          </a:p>
-          <a:p>
-            <a:pPr>
-              <a:lnSpc>
-                <a:spcPts val="940"/>
-              </a:lnSpc>
-              <a:spcAft>
-                <a:spcPts val="140"/>
-              </a:spcAft>
-              <a:buNone/>
-              <a:defRPr sz="810" b="0">
-                <a:solidFill>
-                  <a:srgbClr val="303437"/>
-                </a:solidFill>
-                <a:latin typeface="Noto Sans"/>
-              </a:defRPr>
-            </a:pPr>
-            <a:r>
-              <a:rPr sz="810" b="0" lang="ja-JP" altLang="en-US">
-                <a:solidFill>
-                  <a:srgbClr val="626669"/>
-                </a:solidFill>
-                <a:latin typeface="Noto Sans"/>
-                <a:ea typeface="Noto Sans CJK JP"/>
-                <a:cs typeface="Noto Sans"/>
-              </a:rPr>
-              <a:t>[2] Stanford CRFM (n.d.). CLEVACommonsenseReasoningScenario. HELM.</a:t>
-            </a:r>
-          </a:p>
-          <a:p>
-            <a:pPr>
-              <a:lnSpc>
-                <a:spcPts val="940"/>
-              </a:lnSpc>
-              <a:buNone/>
-              <a:defRPr sz="810" b="0">
-                <a:solidFill>
-                  <a:srgbClr val="303437"/>
-                </a:solidFill>
-                <a:latin typeface="Noto Sans"/>
-              </a:defRPr>
-            </a:pPr>
-            <a:r>
-              <a:rPr sz="810" b="0" lang="ja-JP" altLang="en-US">
-                <a:solidFill>
-                  <a:srgbClr val="626669"/>
-                </a:solidFill>
-                <a:latin typeface="Noto Sans"/>
-                <a:ea typeface="Noto Sans CJK JP"/>
-                <a:cs typeface="Noto Sans"/>
-                <a:hlinkClick r:id="rId3"/>
-              </a:rPr>
-              <a:t>https://github.com/stanford-crfm/helm/blob/v0.4.0/src/helm/benchmark/scenarios/cleva_scenario.py</a:t>
+              <a:t>https://github.com/CLUEbenchmark/OCNLI</a:t>
             </a:r>
           </a:p>
         </p:txBody>
@@ -15633,7 +15576,7 @@
                 <a:ea typeface="Noto Sans CJK JP"/>
                 <a:cs typeface="Noto Sans"/>
               </a:rPr>
-              <a:t>CLEVAの公開例：三つの選択肢へ変換</a:t>
+              <a:t>JSONから、前提・仮説・ラベルを読む</a:t>
             </a:r>
           </a:p>
         </p:txBody>
@@ -15681,129 +15624,21 @@
                 <a:ea typeface="Noto Sans CJK JP"/>
                 <a:cs typeface="Noto Sans"/>
               </a:rPr>
-              <a:t>4. 入手方法とCLEVAでの利用</a:t>
+              <a:t>4. 入手方法と利用条件</a:t>
             </a:r>
           </a:p>
         </p:txBody>
       </p:sp>
       <p:sp>
         <p:nvSpPr>
-          <p:cNvPr id="4" name="TextBox 3"/>
-          <p:cNvSpPr txBox="1"/>
-          <p:nvPr/>
-        </p:nvSpPr>
-        <p:spPr>
-          <a:xfrm>
-            <a:off x="548640" y="1353312"/>
-            <a:ext cx="3886200" cy="219456"/>
-          </a:xfrm>
-          <a:prstGeom prst="rect">
-            <a:avLst/>
-          </a:prstGeom>
-          <a:noFill/>
-        </p:spPr>
-        <p:txBody>
-          <a:bodyPr wrap="square" lIns="0" rIns="0" tIns="0" bIns="0">
-            <a:noAutofit/>
-          </a:bodyPr>
-          <a:lstStyle/>
-          <a:p>
-            <a:pPr algn="l">
-              <a:lnSpc>
-                <a:spcPts val="1404"/>
-              </a:lnSpc>
-              <a:spcBef>
-                <a:spcPts val="0"/>
-              </a:spcBef>
-              <a:spcAft>
-                <a:spcPts val="0"/>
-              </a:spcAft>
-              <a:buNone/>
-              <a:defRPr sz="1200" b="0">
-                <a:solidFill>
-                  <a:srgbClr val="303437"/>
-                </a:solidFill>
-                <a:latin typeface="Noto Sans"/>
-              </a:defRPr>
-            </a:pPr>
-            <a:r>
-              <a:rPr sz="1200" b="0" lang="ja-JP" altLang="en-US">
-                <a:solidFill>
-                  <a:srgbClr val="626669"/>
-                </a:solidFill>
-                <a:latin typeface="Noto Sans"/>
-                <a:ea typeface="Noto Sans CJK JP"/>
-                <a:cs typeface="Noto Sans"/>
-              </a:rPr>
-              <a:t>論文の原文・全選択肢</a:t>
-            </a:r>
-          </a:p>
-        </p:txBody>
-      </p:sp>
-      <p:sp>
-        <p:nvSpPr>
-          <p:cNvPr id="5" name="TextBox 4"/>
-          <p:cNvSpPr txBox="1"/>
-          <p:nvPr/>
-        </p:nvSpPr>
-        <p:spPr>
-          <a:xfrm>
-            <a:off x="4709160" y="1353312"/>
-            <a:ext cx="3886200" cy="219456"/>
-          </a:xfrm>
-          <a:prstGeom prst="rect">
-            <a:avLst/>
-          </a:prstGeom>
-          <a:noFill/>
-        </p:spPr>
-        <p:txBody>
-          <a:bodyPr wrap="square" lIns="0" rIns="0" tIns="0" bIns="0">
-            <a:noAutofit/>
-          </a:bodyPr>
-          <a:lstStyle/>
-          <a:p>
-            <a:pPr algn="l">
-              <a:lnSpc>
-                <a:spcPts val="1404"/>
-              </a:lnSpc>
-              <a:spcBef>
-                <a:spcPts val="0"/>
-              </a:spcBef>
-              <a:spcAft>
-                <a:spcPts val="0"/>
-              </a:spcAft>
-              <a:buNone/>
-              <a:defRPr sz="1200" b="0">
-                <a:solidFill>
-                  <a:srgbClr val="303437"/>
-                </a:solidFill>
-                <a:latin typeface="Noto Sans"/>
-              </a:defRPr>
-            </a:pPr>
-            <a:r>
-              <a:rPr sz="1200" b="0" lang="ja-JP" altLang="en-US">
-                <a:solidFill>
-                  <a:srgbClr val="626669"/>
-                </a:solidFill>
-                <a:latin typeface="Noto Sans"/>
-                <a:ea typeface="Noto Sans CJK JP"/>
-                <a:cs typeface="Noto Sans"/>
-              </a:rPr>
-              <a:t>日本語訳</a:t>
-            </a:r>
-          </a:p>
-        </p:txBody>
-      </p:sp>
-      <p:sp>
-        <p:nvSpPr>
-          <p:cNvPr id="6" name="quote-frame"/>
+          <p:cNvPr id="4" name="code-frame"/>
           <p:cNvSpPr/>
           <p:nvPr/>
         </p:nvSpPr>
         <p:spPr>
           <a:xfrm>
-            <a:off x="548640" y="1691640"/>
-            <a:ext cx="3886200" cy="1735666"/>
+            <a:off x="548640" y="1508760"/>
+            <a:ext cx="8046720" cy="1600199"/>
           </a:xfrm>
           <a:prstGeom prst="rect">
             <a:avLst/>
@@ -15831,375 +15666,206 @@
           </a:fontRef>
         </p:style>
         <p:txBody>
-          <a:bodyPr rtlCol="0" anchor="t" wrap="square" lIns="177800" rIns="177800" tIns="78739" bIns="127000">
-            <a:noAutofit/>
-          </a:bodyPr>
+          <a:bodyPr rtlCol="0" anchor="t" wrap="none" lIns="152400" rIns="152400" tIns="45296" bIns="127000"/>
           <a:lstStyle/>
           <a:p>
             <a:pPr algn="l">
               <a:lnSpc>
-                <a:spcPts val="2082"/>
-              </a:lnSpc>
-              <a:spcBef>
-                <a:spcPts val="0"/>
-              </a:spcBef>
-              <a:spcAft>
-                <a:spcPts val="0"/>
-              </a:spcAft>
-              <a:buNone/>
-              <a:defRPr sz="1750" b="0">
-                <a:solidFill>
-                  <a:srgbClr val="303437"/>
-                </a:solidFill>
-                <a:latin typeface="Noto Sans"/>
-              </a:defRPr>
-            </a:pPr>
-            <a:r>
-              <a:rPr sz="1750" b="0" lang="ja-JP" altLang="en-US">
-                <a:solidFill>
-                  <a:srgbClr val="303437"/>
-                </a:solidFill>
-                <a:latin typeface="Noto Sans"/>
-                <a:ea typeface="Noto Sans CJK JP"/>
-                <a:cs typeface="Noto Sans"/>
-              </a:rPr>
-              <a:t>是否可以从“篮子嘛,一块钱,一块钱啊.”中推断</a:t>
+                <a:spcPts val="1904"/>
+              </a:lnSpc>
+              <a:spcBef>
+                <a:spcPts val="0"/>
+              </a:spcBef>
+              <a:spcAft>
+                <a:spcPts val="0"/>
+              </a:spcAft>
+              <a:buNone/>
+              <a:defRPr sz="1700" b="0">
+                <a:solidFill>
+                  <a:srgbClr val="303437"/>
+                </a:solidFill>
+                <a:latin typeface="Noto Sans"/>
+              </a:defRPr>
+            </a:pPr>
+            <a:r>
+              <a:rPr sz="1600" b="0" lang="ja-JP" altLang="en-US">
+                <a:solidFill>
+                  <a:srgbClr val="303437"/>
+                </a:solidFill>
+                <a:latin typeface="Liberation Mono"/>
+                <a:ea typeface="Noto Sans CJK JP"/>
+                <a:cs typeface="Liberation Mono"/>
+              </a:rPr>
+              <a:t>import json</a:t>
             </a:r>
           </a:p>
           <a:p>
             <a:pPr algn="l">
               <a:lnSpc>
-                <a:spcPts val="2082"/>
-              </a:lnSpc>
-              <a:spcBef>
-                <a:spcPts val="0"/>
-              </a:spcBef>
-              <a:spcAft>
-                <a:spcPts val="0"/>
-              </a:spcAft>
-              <a:buNone/>
-              <a:defRPr sz="1750" b="0">
-                <a:solidFill>
-                  <a:srgbClr val="303437"/>
-                </a:solidFill>
-                <a:latin typeface="Noto Sans"/>
-              </a:defRPr>
-            </a:pPr>
-            <a:r>
-              <a:rPr sz="1750" b="0" lang="ja-JP" altLang="en-US">
-                <a:solidFill>
-                  <a:srgbClr val="303437"/>
-                </a:solidFill>
-                <a:latin typeface="Noto Sans"/>
-                <a:ea typeface="Noto Sans CJK JP"/>
-                <a:cs typeface="Noto Sans"/>
-              </a:rPr>
-              <a:t>出“这个篮子是可以卖的。”？</a:t>
+                <a:spcPts val="1904"/>
+              </a:lnSpc>
+              <a:spcBef>
+                <a:spcPts val="0"/>
+              </a:spcBef>
+              <a:spcAft>
+                <a:spcPts val="0"/>
+              </a:spcAft>
+              <a:buNone/>
+              <a:defRPr sz="1700" b="0">
+                <a:solidFill>
+                  <a:srgbClr val="303437"/>
+                </a:solidFill>
+                <a:latin typeface="Noto Sans"/>
+              </a:defRPr>
+            </a:pPr>
+            <a:r>
+              <a:rPr sz="1600" b="0" lang="ja-JP" altLang="en-US">
+                <a:solidFill>
+                  <a:srgbClr val="303437"/>
+                </a:solidFill>
+                <a:latin typeface="Liberation Mono"/>
+                <a:ea typeface="Noto Sans CJK JP"/>
+                <a:cs typeface="Liberation Mono"/>
+              </a:rPr>
+              <a:t>with open('dev.json', encoding='utf-8') as f:</a:t>
             </a:r>
           </a:p>
           <a:p>
             <a:pPr algn="l">
               <a:lnSpc>
-                <a:spcPts val="2082"/>
-              </a:lnSpc>
-              <a:spcBef>
-                <a:spcPts val="0"/>
-              </a:spcBef>
-              <a:spcAft>
-                <a:spcPts val="0"/>
-              </a:spcAft>
-              <a:buNone/>
-              <a:defRPr sz="1750" b="0">
-                <a:solidFill>
-                  <a:srgbClr val="303437"/>
-                </a:solidFill>
-                <a:latin typeface="Noto Sans"/>
-              </a:defRPr>
-            </a:pPr>
-            <a:r>
-              <a:rPr sz="1750" b="0" lang="ja-JP" altLang="en-US">
-                <a:solidFill>
-                  <a:srgbClr val="303437"/>
-                </a:solidFill>
-                <a:latin typeface="Noto Sans"/>
-                <a:ea typeface="Noto Sans CJK JP"/>
-                <a:cs typeface="Noto Sans"/>
-              </a:rPr>
-              <a:t>A. 总是可以</a:t>
+                <a:spcPts val="1904"/>
+              </a:lnSpc>
+              <a:spcBef>
+                <a:spcPts val="0"/>
+              </a:spcBef>
+              <a:spcAft>
+                <a:spcPts val="0"/>
+              </a:spcAft>
+              <a:buNone/>
+              <a:defRPr sz="1700" b="0">
+                <a:solidFill>
+                  <a:srgbClr val="303437"/>
+                </a:solidFill>
+                <a:latin typeface="Noto Sans"/>
+              </a:defRPr>
+            </a:pPr>
+            <a:r>
+              <a:rPr sz="1600" b="0" lang="ja-JP" altLang="en-US">
+                <a:solidFill>
+                  <a:srgbClr val="303437"/>
+                </a:solidFill>
+                <a:latin typeface="Liberation Mono"/>
+                <a:ea typeface="Noto Sans CJK JP"/>
+                <a:cs typeface="Liberation Mono"/>
+              </a:rPr>
+              <a:t>    pair = json.loads(next(f))</a:t>
             </a:r>
           </a:p>
           <a:p>
             <a:pPr algn="l">
               <a:lnSpc>
-                <a:spcPts val="2082"/>
-              </a:lnSpc>
-              <a:spcBef>
-                <a:spcPts val="0"/>
-              </a:spcBef>
-              <a:spcAft>
-                <a:spcPts val="0"/>
-              </a:spcAft>
-              <a:buNone/>
-              <a:defRPr sz="1750" b="0">
-                <a:solidFill>
-                  <a:srgbClr val="303437"/>
-                </a:solidFill>
-                <a:latin typeface="Noto Sans"/>
-              </a:defRPr>
-            </a:pPr>
-            <a:r>
-              <a:rPr sz="1750" b="0" lang="ja-JP" altLang="en-US">
-                <a:solidFill>
-                  <a:srgbClr val="303437"/>
-                </a:solidFill>
-                <a:latin typeface="Noto Sans"/>
-                <a:ea typeface="Noto Sans CJK JP"/>
-                <a:cs typeface="Noto Sans"/>
-              </a:rPr>
-              <a:t>B. 有时可以</a:t>
+                <a:spcPts val="1904"/>
+              </a:lnSpc>
+              <a:spcBef>
+                <a:spcPts val="0"/>
+              </a:spcBef>
+              <a:spcAft>
+                <a:spcPts val="0"/>
+              </a:spcAft>
+              <a:buNone/>
+              <a:defRPr sz="1700" b="0">
+                <a:solidFill>
+                  <a:srgbClr val="303437"/>
+                </a:solidFill>
+                <a:latin typeface="Noto Sans"/>
+              </a:defRPr>
+            </a:pPr>
+            <a:r>
+              <a:rPr sz="1600" b="0" lang="ja-JP" altLang="en-US">
+                <a:solidFill>
+                  <a:srgbClr val="303437"/>
+                </a:solidFill>
+                <a:latin typeface="Liberation Mono"/>
+                <a:ea typeface="Noto Sans CJK JP"/>
+                <a:cs typeface="Liberation Mono"/>
+              </a:rPr>
+              <a:t>print(pair['sentence1'])</a:t>
             </a:r>
           </a:p>
           <a:p>
             <a:pPr algn="l">
               <a:lnSpc>
-                <a:spcPts val="2082"/>
-              </a:lnSpc>
-              <a:spcBef>
-                <a:spcPts val="0"/>
-              </a:spcBef>
-              <a:spcAft>
-                <a:spcPts val="0"/>
-              </a:spcAft>
-              <a:buNone/>
-              <a:defRPr sz="1750" b="0">
-                <a:solidFill>
-                  <a:srgbClr val="303437"/>
-                </a:solidFill>
-                <a:latin typeface="Noto Sans"/>
-              </a:defRPr>
-            </a:pPr>
-            <a:r>
-              <a:rPr sz="1750" b="0" lang="ja-JP" altLang="en-US">
-                <a:solidFill>
-                  <a:srgbClr val="303437"/>
-                </a:solidFill>
-                <a:latin typeface="Noto Sans"/>
-                <a:ea typeface="Noto Sans CJK JP"/>
-                <a:cs typeface="Noto Sans"/>
-              </a:rPr>
-              <a:t>C. 不可以</a:t>
+                <a:spcPts val="1904"/>
+              </a:lnSpc>
+              <a:spcBef>
+                <a:spcPts val="0"/>
+              </a:spcBef>
+              <a:spcAft>
+                <a:spcPts val="0"/>
+              </a:spcAft>
+              <a:buNone/>
+              <a:defRPr sz="1700" b="0">
+                <a:solidFill>
+                  <a:srgbClr val="303437"/>
+                </a:solidFill>
+                <a:latin typeface="Noto Sans"/>
+              </a:defRPr>
+            </a:pPr>
+            <a:r>
+              <a:rPr sz="1600" b="0" lang="ja-JP" altLang="en-US">
+                <a:solidFill>
+                  <a:srgbClr val="303437"/>
+                </a:solidFill>
+                <a:latin typeface="Liberation Mono"/>
+                <a:ea typeface="Noto Sans CJK JP"/>
+                <a:cs typeface="Liberation Mono"/>
+              </a:rPr>
+              <a:t>print(pair['sentence2'])</a:t>
+            </a:r>
+          </a:p>
+          <a:p>
+            <a:pPr algn="l">
+              <a:lnSpc>
+                <a:spcPts val="1904"/>
+              </a:lnSpc>
+              <a:spcBef>
+                <a:spcPts val="0"/>
+              </a:spcBef>
+              <a:spcAft>
+                <a:spcPts val="0"/>
+              </a:spcAft>
+              <a:buNone/>
+              <a:defRPr sz="1700" b="0">
+                <a:solidFill>
+                  <a:srgbClr val="303437"/>
+                </a:solidFill>
+                <a:latin typeface="Noto Sans"/>
+              </a:defRPr>
+            </a:pPr>
+            <a:r>
+              <a:rPr sz="1600" b="0" lang="ja-JP" altLang="en-US">
+                <a:solidFill>
+                  <a:srgbClr val="303437"/>
+                </a:solidFill>
+                <a:latin typeface="Liberation Mono"/>
+                <a:ea typeface="Noto Sans CJK JP"/>
+                <a:cs typeface="Liberation Mono"/>
+              </a:rPr>
+              <a:t>print(pair['label'])</a:t>
             </a:r>
           </a:p>
         </p:txBody>
       </p:sp>
       <p:sp>
         <p:nvSpPr>
-          <p:cNvPr id="7" name="quote-frame"/>
-          <p:cNvSpPr/>
-          <p:nvPr/>
-        </p:nvSpPr>
-        <p:spPr>
-          <a:xfrm>
-            <a:off x="4709160" y="1691640"/>
-            <a:ext cx="3886200" cy="1989666"/>
-          </a:xfrm>
-          <a:prstGeom prst="rect">
-            <a:avLst/>
-          </a:prstGeom>
-          <a:solidFill>
-            <a:srgbClr val="EBEDEB"/>
-          </a:solidFill>
-          <a:ln>
-            <a:noFill/>
-          </a:ln>
-          <a:effectLst/>
-        </p:spPr>
-        <p:style>
-          <a:lnRef idx="1">
-            <a:schemeClr val="accent1"/>
-          </a:lnRef>
-          <a:fillRef idx="3">
-            <a:schemeClr val="accent1"/>
-          </a:fillRef>
-          <a:effectRef idx="0">
-            <a:schemeClr val="accent1"/>
-          </a:effectRef>
-          <a:fontRef idx="minor">
-            <a:schemeClr val="lt1"/>
-          </a:fontRef>
-        </p:style>
-        <p:txBody>
-          <a:bodyPr rtlCol="0" anchor="t" wrap="square" lIns="177800" rIns="177800" tIns="70273" bIns="127000">
-            <a:noAutofit/>
-          </a:bodyPr>
-          <a:lstStyle/>
-          <a:p>
-            <a:pPr algn="l">
-              <a:lnSpc>
-                <a:spcPts val="2082"/>
-              </a:lnSpc>
-              <a:spcBef>
-                <a:spcPts val="0"/>
-              </a:spcBef>
-              <a:spcAft>
-                <a:spcPts val="0"/>
-              </a:spcAft>
-              <a:buNone/>
-              <a:defRPr sz="1750" b="0">
-                <a:solidFill>
-                  <a:srgbClr val="303437"/>
-                </a:solidFill>
-                <a:latin typeface="Noto Sans"/>
-              </a:defRPr>
-            </a:pPr>
-            <a:r>
-              <a:rPr sz="1750" b="0" lang="ja-JP" altLang="en-US">
-                <a:solidFill>
-                  <a:srgbClr val="303437"/>
-                </a:solidFill>
-                <a:latin typeface="Noto Sans"/>
-                <a:ea typeface="Noto Sans CJK JP"/>
-                <a:cs typeface="Noto Sans"/>
-              </a:rPr>
-              <a:t>「かごね、1元、1元だよ。」から</a:t>
-            </a:r>
-          </a:p>
-          <a:p>
-            <a:pPr algn="l">
-              <a:lnSpc>
-                <a:spcPts val="2082"/>
-              </a:lnSpc>
-              <a:spcBef>
-                <a:spcPts val="0"/>
-              </a:spcBef>
-              <a:spcAft>
-                <a:spcPts val="0"/>
-              </a:spcAft>
-              <a:buNone/>
-              <a:defRPr sz="1750" b="0">
-                <a:solidFill>
-                  <a:srgbClr val="303437"/>
-                </a:solidFill>
-                <a:latin typeface="Noto Sans"/>
-              </a:defRPr>
-            </a:pPr>
-            <a:r>
-              <a:rPr sz="1750" b="0" lang="ja-JP" altLang="en-US">
-                <a:solidFill>
-                  <a:srgbClr val="303437"/>
-                </a:solidFill>
-                <a:latin typeface="Noto Sans"/>
-                <a:ea typeface="Noto Sans CJK JP"/>
-                <a:cs typeface="Noto Sans"/>
-              </a:rPr>
-              <a:t>「このかごは売ることができる。」と推論できるか。</a:t>
-            </a:r>
-          </a:p>
-          <a:p>
-            <a:pPr algn="l">
-              <a:lnSpc>
-                <a:spcPts val="2082"/>
-              </a:lnSpc>
-              <a:spcBef>
-                <a:spcPts val="0"/>
-              </a:spcBef>
-              <a:spcAft>
-                <a:spcPts val="0"/>
-              </a:spcAft>
-              <a:buNone/>
-              <a:defRPr sz="1750" b="0">
-                <a:solidFill>
-                  <a:srgbClr val="303437"/>
-                </a:solidFill>
-                <a:latin typeface="Noto Sans"/>
-              </a:defRPr>
-            </a:pPr>
-            <a:r>
-              <a:rPr sz="1750" b="0" lang="ja-JP" altLang="en-US">
-                <a:solidFill>
-                  <a:srgbClr val="303437"/>
-                </a:solidFill>
-                <a:latin typeface="Noto Sans"/>
-                <a:ea typeface="Noto Sans CJK JP"/>
-                <a:cs typeface="Noto Sans"/>
-              </a:rPr>
-              <a:t>A. 常にできる</a:t>
-            </a:r>
-          </a:p>
-          <a:p>
-            <a:pPr algn="l">
-              <a:lnSpc>
-                <a:spcPts val="2082"/>
-              </a:lnSpc>
-              <a:spcBef>
-                <a:spcPts val="0"/>
-              </a:spcBef>
-              <a:spcAft>
-                <a:spcPts val="0"/>
-              </a:spcAft>
-              <a:buNone/>
-              <a:defRPr sz="1750" b="0">
-                <a:solidFill>
-                  <a:srgbClr val="303437"/>
-                </a:solidFill>
-                <a:latin typeface="Noto Sans"/>
-              </a:defRPr>
-            </a:pPr>
-            <a:r>
-              <a:rPr sz="1750" b="0" lang="ja-JP" altLang="en-US">
-                <a:solidFill>
-                  <a:srgbClr val="303437"/>
-                </a:solidFill>
-                <a:latin typeface="Noto Sans"/>
-                <a:ea typeface="Noto Sans CJK JP"/>
-                <a:cs typeface="Noto Sans"/>
-              </a:rPr>
-              <a:t>B. 場合によってはできる</a:t>
-            </a:r>
-          </a:p>
-          <a:p>
-            <a:pPr algn="l">
-              <a:lnSpc>
-                <a:spcPts val="2082"/>
-              </a:lnSpc>
-              <a:spcBef>
-                <a:spcPts val="0"/>
-              </a:spcBef>
-              <a:spcAft>
-                <a:spcPts val="0"/>
-              </a:spcAft>
-              <a:buNone/>
-              <a:defRPr sz="1750" b="0">
-                <a:solidFill>
-                  <a:srgbClr val="303437"/>
-                </a:solidFill>
-                <a:latin typeface="Noto Sans"/>
-              </a:defRPr>
-            </a:pPr>
-            <a:r>
-              <a:rPr sz="1750" b="0" lang="ja-JP" altLang="en-US">
-                <a:solidFill>
-                  <a:srgbClr val="303437"/>
-                </a:solidFill>
-                <a:latin typeface="Noto Sans"/>
-                <a:ea typeface="Noto Sans CJK JP"/>
-                <a:cs typeface="Noto Sans"/>
-              </a:rPr>
-              <a:t>C. できない</a:t>
-            </a:r>
-          </a:p>
-        </p:txBody>
-      </p:sp>
-      <p:sp>
-        <p:nvSpPr>
-          <p:cNvPr id="8" name="answer"/>
+          <p:cNvPr id="5" name="TextBox 4"/>
           <p:cNvSpPr txBox="1"/>
           <p:nvPr/>
         </p:nvSpPr>
         <p:spPr>
           <a:xfrm>
-            <a:off x="548640" y="3770206"/>
-            <a:ext cx="8046720" cy="393192"/>
+            <a:off x="594360" y="3261361"/>
+            <a:ext cx="7955279" cy="546100"/>
           </a:xfrm>
           <a:prstGeom prst="rect">
             <a:avLst/>
@@ -16214,39 +15880,39 @@
           <a:p>
             <a:pPr algn="l">
               <a:lnSpc>
-                <a:spcPts val="2457"/>
-              </a:lnSpc>
-              <a:spcBef>
-                <a:spcPts val="0"/>
-              </a:spcBef>
-              <a:spcAft>
-                <a:spcPts val="0"/>
-              </a:spcAft>
-              <a:buNone/>
-              <a:defRPr sz="2100" b="0">
-                <a:solidFill>
-                  <a:srgbClr val="303437"/>
-                </a:solidFill>
-                <a:latin typeface="Noto Sans"/>
-              </a:defRPr>
-            </a:pPr>
-            <a:r>
-              <a:rPr sz="2100" b="1" lang="ja-JP" altLang="en-US">
-                <a:solidFill>
-                  <a:srgbClr val="B13731"/>
-                </a:solidFill>
-                <a:latin typeface="Noto Sans"/>
-                <a:ea typeface="Noto Sans CJK JP"/>
-                <a:cs typeface="Noto Sans"/>
-              </a:rPr>
-              <a:t>公開例の正解：A（总是可以／常にできる）</a:t>
+                <a:spcPts val="1989"/>
+              </a:lnSpc>
+              <a:spcBef>
+                <a:spcPts val="0"/>
+              </a:spcBef>
+              <a:spcAft>
+                <a:spcPts val="0"/>
+              </a:spcAft>
+              <a:buNone/>
+              <a:defRPr sz="1900" b="0">
+                <a:solidFill>
+                  <a:srgbClr val="303437"/>
+                </a:solidFill>
+                <a:latin typeface="Noto Sans"/>
+              </a:defRPr>
+            </a:pPr>
+            <a:r>
+              <a:rPr sz="1700" b="0" lang="ja-JP" altLang="en-US">
+                <a:solidFill>
+                  <a:srgbClr val="303437"/>
+                </a:solidFill>
+                <a:latin typeface="Noto Sans"/>
+                <a:ea typeface="Noto Sans CJK JP"/>
+                <a:cs typeface="Noto Sans"/>
+              </a:rPr>
+              <a:t>1行が1組の文ペア。sentence1が前提、sentence2が仮説、labelが正解を表す。</a:t>
             </a:r>
           </a:p>
         </p:txBody>
       </p:sp>
       <p:sp>
         <p:nvSpPr>
-          <p:cNvPr id="9" name="sources"/>
+          <p:cNvPr id="6" name="sources"/>
           <p:cNvSpPr txBox="1"/>
           <p:nvPr/>
         </p:nvSpPr>
@@ -16293,7 +15959,7 @@
                 <a:ea typeface="Noto Sans CJK JP"/>
                 <a:cs typeface="Noto Sans"/>
               </a:rPr>
-              <a:t>[1] Li et al. (2023). CLEVA: Chinese Language Models EVAluation Platform. EMNLP System Demonstrations.</a:t>
+              <a:t>[1] Hu et al. (n.d.). OCNLI public development data. CC BY-NC 2.0.</a:t>
             </a:r>
             <a:r>
               <a:rPr sz="810" b="0" lang="ja-JP" altLang="en-US">
@@ -16314,9 +15980,9 @@
                 <a:latin typeface="Noto Sans"/>
                 <a:ea typeface="Noto Sans CJK JP"/>
                 <a:cs typeface="Noto Sans"/>
-                <a:hlinkClick r:id="rId2"/>
-              </a:rPr>
-              <a:t>https://aclanthology.org/2023.emnlp-demo.17/</a:t>
+                <a:hlinkClick r:id="rId3"/>
+              </a:rPr>
+              <a:t>https://github.com/CLUEbenchmark/OCNLI/blob/main/data/ocnli/dev.json</a:t>
             </a:r>
           </a:p>
         </p:txBody>
@@ -16525,7 +16191,7 @@
                 <a:ea typeface="Noto Sans CJK JP"/>
                 <a:cs typeface="Noto Sans"/>
               </a:rPr>
-              <a:t>入手方法とCLEVAでの利用</a:t>
+              <a:t>入手方法と利用条件</a:t>
             </a:r>
           </a:p>
         </p:txBody>
@@ -16639,7 +16305,7 @@
                 <a:ea typeface="Noto Sans CJK JP"/>
                 <a:cs typeface="Noto Sans"/>
               </a:rPr>
-              <a:t>現在の入手先と、引用文の利用条件</a:t>
+              <a:t>中国語の文と、そこから分かることを結び付ける</a:t>
             </a:r>
           </a:p>
         </p:txBody>
@@ -16692,7 +16358,7 @@
                 <a:ea typeface="Noto Sans CJK JP"/>
                 <a:cs typeface="Noto Sans"/>
               </a:rPr>
-              <a:t>公式リポジトリは50k・30k・10k・3kの学習用データと、共通の開発用・正解非公開のテスト用データを公開する。CLUEの公開ZIPは50k版を収録する。</a:t>
+              <a:t>OCNLIは、中国語の5文体から集めた前提と、人が書いた仮説の関係を、含意・矛盾・中立で判定する。</a:t>
             </a:r>
           </a:p>
           <a:p>
@@ -16722,7 +16388,7 @@
                 <a:ea typeface="Noto Sans CJK JP"/>
                 <a:cs typeface="Noto Sans"/>
               </a:rPr>
-              <a:t>OCNLIはCC BY-NC 2.0を掲示する。帰属を示し、非商用の条件を守る。ニュースの前提はLCMCからELRAの許可を得て採用したと記される。</a:t>
+              <a:t>複数の仮説を書かせ、否定語の使用に制約を設けることで、単純な言い換え以外の推論も引き出した。</a:t>
             </a:r>
           </a:p>
           <a:p>
@@ -16752,7 +16418,7 @@
                 <a:ea typeface="Noto Sans CJK JP"/>
                 <a:cs typeface="Noto Sans"/>
               </a:rPr>
-              <a:t>前提には政府報告、ニュース、小説、番組・電話会話が含まれる。引用には、データセットと原資料それぞれの出所も関わる。</a:t>
+              <a:t>正解付きの学習用・開発用データを使って学習・評価できる。学習用と開発用で前提が重なる50k版と、その重なりを除いた30k版が提供されている。</a:t>
             </a:r>
           </a:p>
         </p:txBody>
@@ -16800,7 +16466,7 @@
                 <a:ea typeface="Noto Sans CJK JP"/>
                 <a:cs typeface="Noto Sans"/>
               </a:rPr>
-              <a:t>4. 入手方法とCLEVAでの利用</a:t>
+              <a:t>4. 入手方法と利用条件</a:t>
             </a:r>
           </a:p>
         </p:txBody>
@@ -16854,7 +16520,7 @@
                 <a:ea typeface="Noto Sans CJK JP"/>
                 <a:cs typeface="Noto Sans"/>
               </a:rPr>
-              <a:t>[1] Hu et al. (n.d.). OCNLI official repository.</a:t>
+              <a:t>[1] Hu et al. (2020). OCNLI: Original Chinese Natural Language Inference. Findings of EMNLP.</a:t>
             </a:r>
             <a:r>
               <a:rPr sz="810" b="0" lang="ja-JP" altLang="en-US">
@@ -16877,7 +16543,7 @@
                 <a:cs typeface="Noto Sans"/>
                 <a:hlinkClick r:id="rId2"/>
               </a:rPr>
-              <a:t>https://github.com/CLUEbenchmark/OCNLI</a:t>
+              <a:t>https://aclanthology.org/2020.findings-emnlp.314/</a:t>
             </a:r>
           </a:p>
         </p:txBody>
@@ -16912,38 +16578,38 @@
         </p:nvSpPr>
         <p:spPr>
           <a:xfrm>
-            <a:off x="468172" y="650138"/>
-            <a:ext cx="8206740" cy="616305"/>
+            <a:off x="548640" y="2484835"/>
+            <a:ext cx="8046720" cy="686816"/>
           </a:xfrm>
         </p:spPr>
         <p:txBody>
-          <a:bodyPr wrap="square" lIns="0" rIns="0" tIns="0" bIns="0">
+          <a:bodyPr wrap="square" lIns="0" rIns="0" tIns="0" bIns="101600" anchor="ctr">
             <a:noAutofit/>
           </a:bodyPr>
           <a:lstStyle/>
           <a:p>
-            <a:pPr algn="l">
+            <a:pPr algn="ctr">
               <a:lnSpc>
                 <a:spcPct val="110000"/>
               </a:lnSpc>
               <a:buNone/>
-              <a:defRPr sz="2800" b="0">
-                <a:solidFill>
-                  <a:srgbClr val="303437"/>
-                </a:solidFill>
-                <a:latin typeface="Noto Sans"/>
-              </a:defRPr>
-            </a:pPr>
-            <a:r>
-              <a:rPr sz="2800" b="1" lang="ja-JP" altLang="en-US">
-                <a:solidFill>
-                  <a:srgbClr val="303437"/>
-                </a:solidFill>
-                <a:latin typeface="Noto Sans"/>
-                <a:ea typeface="Noto Sans CJK JP"/>
-                <a:cs typeface="Noto Sans"/>
-              </a:rPr>
-              <a:t>JSONから、前提・仮説・ラベルを読む</a:t>
+              <a:defRPr sz="3600" b="0">
+                <a:solidFill>
+                  <a:srgbClr val="303437"/>
+                </a:solidFill>
+                <a:latin typeface="Noto Sans"/>
+              </a:defRPr>
+            </a:pPr>
+            <a:r>
+              <a:rPr sz="3600" b="1" lang="ja-JP" altLang="en-US">
+                <a:solidFill>
+                  <a:srgbClr val="303437"/>
+                </a:solidFill>
+                <a:latin typeface="Noto Sans"/>
+                <a:ea typeface="Noto Sans CJK JP"/>
+                <a:cs typeface="Noto Sans"/>
+              </a:rPr>
+              <a:t>Appendix</a:t>
             </a:r>
           </a:p>
         </p:txBody>
@@ -16991,365 +16657,7 @@
                 <a:ea typeface="Noto Sans CJK JP"/>
                 <a:cs typeface="Noto Sans"/>
               </a:rPr>
-              <a:t>4. 入手方法とCLEVAでの利用</a:t>
-            </a:r>
-          </a:p>
-        </p:txBody>
-      </p:sp>
-      <p:sp>
-        <p:nvSpPr>
-          <p:cNvPr id="4" name="code-frame"/>
-          <p:cNvSpPr/>
-          <p:nvPr/>
-        </p:nvSpPr>
-        <p:spPr>
-          <a:xfrm>
-            <a:off x="548640" y="1508760"/>
-            <a:ext cx="8046720" cy="1600199"/>
-          </a:xfrm>
-          <a:prstGeom prst="rect">
-            <a:avLst/>
-          </a:prstGeom>
-          <a:solidFill>
-            <a:srgbClr val="EBEDEB"/>
-          </a:solidFill>
-          <a:ln>
-            <a:noFill/>
-          </a:ln>
-          <a:effectLst/>
-        </p:spPr>
-        <p:style>
-          <a:lnRef idx="1">
-            <a:schemeClr val="accent1"/>
-          </a:lnRef>
-          <a:fillRef idx="3">
-            <a:schemeClr val="accent1"/>
-          </a:fillRef>
-          <a:effectRef idx="0">
-            <a:schemeClr val="accent1"/>
-          </a:effectRef>
-          <a:fontRef idx="minor">
-            <a:schemeClr val="lt1"/>
-          </a:fontRef>
-        </p:style>
-        <p:txBody>
-          <a:bodyPr rtlCol="0" anchor="t" wrap="none" lIns="152400" rIns="152400" tIns="45296" bIns="127000"/>
-          <a:lstStyle/>
-          <a:p>
-            <a:pPr algn="l">
-              <a:lnSpc>
-                <a:spcPts val="1904"/>
-              </a:lnSpc>
-              <a:spcBef>
-                <a:spcPts val="0"/>
-              </a:spcBef>
-              <a:spcAft>
-                <a:spcPts val="0"/>
-              </a:spcAft>
-              <a:buNone/>
-              <a:defRPr sz="1700" b="0">
-                <a:solidFill>
-                  <a:srgbClr val="303437"/>
-                </a:solidFill>
-                <a:latin typeface="Noto Sans"/>
-              </a:defRPr>
-            </a:pPr>
-            <a:r>
-              <a:rPr sz="1600" b="0" lang="ja-JP" altLang="en-US">
-                <a:solidFill>
-                  <a:srgbClr val="303437"/>
-                </a:solidFill>
-                <a:latin typeface="Liberation Mono"/>
-                <a:ea typeface="Noto Sans CJK JP"/>
-                <a:cs typeface="Liberation Mono"/>
-              </a:rPr>
-              <a:t>import json</a:t>
-            </a:r>
-          </a:p>
-          <a:p>
-            <a:pPr algn="l">
-              <a:lnSpc>
-                <a:spcPts val="1904"/>
-              </a:lnSpc>
-              <a:spcBef>
-                <a:spcPts val="0"/>
-              </a:spcBef>
-              <a:spcAft>
-                <a:spcPts val="0"/>
-              </a:spcAft>
-              <a:buNone/>
-              <a:defRPr sz="1700" b="0">
-                <a:solidFill>
-                  <a:srgbClr val="303437"/>
-                </a:solidFill>
-                <a:latin typeface="Noto Sans"/>
-              </a:defRPr>
-            </a:pPr>
-            <a:r>
-              <a:rPr sz="1600" b="0" lang="ja-JP" altLang="en-US">
-                <a:solidFill>
-                  <a:srgbClr val="303437"/>
-                </a:solidFill>
-                <a:latin typeface="Liberation Mono"/>
-                <a:ea typeface="Noto Sans CJK JP"/>
-                <a:cs typeface="Liberation Mono"/>
-              </a:rPr>
-              <a:t>with open('dev.json', encoding='utf-8') as f:</a:t>
-            </a:r>
-          </a:p>
-          <a:p>
-            <a:pPr algn="l">
-              <a:lnSpc>
-                <a:spcPts val="1904"/>
-              </a:lnSpc>
-              <a:spcBef>
-                <a:spcPts val="0"/>
-              </a:spcBef>
-              <a:spcAft>
-                <a:spcPts val="0"/>
-              </a:spcAft>
-              <a:buNone/>
-              <a:defRPr sz="1700" b="0">
-                <a:solidFill>
-                  <a:srgbClr val="303437"/>
-                </a:solidFill>
-                <a:latin typeface="Noto Sans"/>
-              </a:defRPr>
-            </a:pPr>
-            <a:r>
-              <a:rPr sz="1600" b="0" lang="ja-JP" altLang="en-US">
-                <a:solidFill>
-                  <a:srgbClr val="303437"/>
-                </a:solidFill>
-                <a:latin typeface="Liberation Mono"/>
-                <a:ea typeface="Noto Sans CJK JP"/>
-                <a:cs typeface="Liberation Mono"/>
-              </a:rPr>
-              <a:t>    pair = json.loads(next(f))</a:t>
-            </a:r>
-          </a:p>
-          <a:p>
-            <a:pPr algn="l">
-              <a:lnSpc>
-                <a:spcPts val="1904"/>
-              </a:lnSpc>
-              <a:spcBef>
-                <a:spcPts val="0"/>
-              </a:spcBef>
-              <a:spcAft>
-                <a:spcPts val="0"/>
-              </a:spcAft>
-              <a:buNone/>
-              <a:defRPr sz="1700" b="0">
-                <a:solidFill>
-                  <a:srgbClr val="303437"/>
-                </a:solidFill>
-                <a:latin typeface="Noto Sans"/>
-              </a:defRPr>
-            </a:pPr>
-            <a:r>
-              <a:rPr sz="1600" b="0" lang="ja-JP" altLang="en-US">
-                <a:solidFill>
-                  <a:srgbClr val="303437"/>
-                </a:solidFill>
-                <a:latin typeface="Liberation Mono"/>
-                <a:ea typeface="Noto Sans CJK JP"/>
-                <a:cs typeface="Liberation Mono"/>
-              </a:rPr>
-              <a:t>print(pair['sentence1'])</a:t>
-            </a:r>
-          </a:p>
-          <a:p>
-            <a:pPr algn="l">
-              <a:lnSpc>
-                <a:spcPts val="1904"/>
-              </a:lnSpc>
-              <a:spcBef>
-                <a:spcPts val="0"/>
-              </a:spcBef>
-              <a:spcAft>
-                <a:spcPts val="0"/>
-              </a:spcAft>
-              <a:buNone/>
-              <a:defRPr sz="1700" b="0">
-                <a:solidFill>
-                  <a:srgbClr val="303437"/>
-                </a:solidFill>
-                <a:latin typeface="Noto Sans"/>
-              </a:defRPr>
-            </a:pPr>
-            <a:r>
-              <a:rPr sz="1600" b="0" lang="ja-JP" altLang="en-US">
-                <a:solidFill>
-                  <a:srgbClr val="303437"/>
-                </a:solidFill>
-                <a:latin typeface="Liberation Mono"/>
-                <a:ea typeface="Noto Sans CJK JP"/>
-                <a:cs typeface="Liberation Mono"/>
-              </a:rPr>
-              <a:t>print(pair['sentence2'])</a:t>
-            </a:r>
-          </a:p>
-          <a:p>
-            <a:pPr algn="l">
-              <a:lnSpc>
-                <a:spcPts val="1904"/>
-              </a:lnSpc>
-              <a:spcBef>
-                <a:spcPts val="0"/>
-              </a:spcBef>
-              <a:spcAft>
-                <a:spcPts val="0"/>
-              </a:spcAft>
-              <a:buNone/>
-              <a:defRPr sz="1700" b="0">
-                <a:solidFill>
-                  <a:srgbClr val="303437"/>
-                </a:solidFill>
-                <a:latin typeface="Noto Sans"/>
-              </a:defRPr>
-            </a:pPr>
-            <a:r>
-              <a:rPr sz="1600" b="0" lang="ja-JP" altLang="en-US">
-                <a:solidFill>
-                  <a:srgbClr val="303437"/>
-                </a:solidFill>
-                <a:latin typeface="Liberation Mono"/>
-                <a:ea typeface="Noto Sans CJK JP"/>
-                <a:cs typeface="Liberation Mono"/>
-              </a:rPr>
-              <a:t>print(pair['label'])</a:t>
-            </a:r>
-          </a:p>
-        </p:txBody>
-      </p:sp>
-      <p:sp>
-        <p:nvSpPr>
-          <p:cNvPr id="5" name="TextBox 4"/>
-          <p:cNvSpPr txBox="1"/>
-          <p:nvPr/>
-        </p:nvSpPr>
-        <p:spPr>
-          <a:xfrm>
-            <a:off x="594360" y="3261361"/>
-            <a:ext cx="7955279" cy="546100"/>
-          </a:xfrm>
-          <a:prstGeom prst="rect">
-            <a:avLst/>
-          </a:prstGeom>
-          <a:noFill/>
-        </p:spPr>
-        <p:txBody>
-          <a:bodyPr wrap="square" lIns="0" rIns="0" tIns="0" bIns="0">
-            <a:noAutofit/>
-          </a:bodyPr>
-          <a:lstStyle/>
-          <a:p>
-            <a:pPr algn="l">
-              <a:lnSpc>
-                <a:spcPts val="1989"/>
-              </a:lnSpc>
-              <a:spcBef>
-                <a:spcPts val="0"/>
-              </a:spcBef>
-              <a:spcAft>
-                <a:spcPts val="0"/>
-              </a:spcAft>
-              <a:buNone/>
-              <a:defRPr sz="1900" b="0">
-                <a:solidFill>
-                  <a:srgbClr val="303437"/>
-                </a:solidFill>
-                <a:latin typeface="Noto Sans"/>
-              </a:defRPr>
-            </a:pPr>
-            <a:r>
-              <a:rPr sz="1700" b="0" lang="ja-JP" altLang="en-US">
-                <a:solidFill>
-                  <a:srgbClr val="303437"/>
-                </a:solidFill>
-                <a:latin typeface="Noto Sans"/>
-                <a:ea typeface="Noto Sans CJK JP"/>
-                <a:cs typeface="Noto Sans"/>
-              </a:rPr>
-              <a:t>1行が1組の文ペア。sentence1が前提、sentence2が仮説、labelが正解を表す。</a:t>
-            </a:r>
-          </a:p>
-        </p:txBody>
-      </p:sp>
-      <p:sp>
-        <p:nvSpPr>
-          <p:cNvPr id="6" name="sources"/>
-          <p:cNvSpPr txBox="1"/>
-          <p:nvPr/>
-        </p:nvSpPr>
-        <p:spPr>
-          <a:xfrm>
-            <a:off x="502920" y="4700016"/>
-            <a:ext cx="8183879" cy="530352"/>
-          </a:xfrm>
-          <a:prstGeom prst="rect">
-            <a:avLst/>
-          </a:prstGeom>
-          <a:noFill/>
-        </p:spPr>
-        <p:txBody>
-          <a:bodyPr wrap="square" lIns="0" rIns="0" tIns="0" bIns="0">
-            <a:noAutofit/>
-          </a:bodyPr>
-          <a:lstStyle/>
-          <a:p>
-            <a:pPr algn="l">
-              <a:lnSpc>
-                <a:spcPts val="940"/>
-              </a:lnSpc>
-              <a:spcBef>
-                <a:spcPts val="0"/>
-              </a:spcBef>
-              <a:spcAft>
-                <a:spcPts val="140"/>
-              </a:spcAft>
-              <a:buNone/>
-              <a:defRPr sz="810" b="0">
-                <a:solidFill>
-                  <a:srgbClr val="303437"/>
-                </a:solidFill>
-                <a:latin typeface="Noto Sans"/>
-              </a:defRPr>
-            </a:pPr>
-            <a:r>
-              <a:rPr sz="810" b="0" lang="ja-JP" altLang="en-US">
-                <a:solidFill>
-                  <a:srgbClr val="626669"/>
-                </a:solidFill>
-                <a:latin typeface="Noto Sans"/>
-                <a:ea typeface="Noto Sans CJK JP"/>
-                <a:cs typeface="Noto Sans"/>
-              </a:rPr>
-              <a:t>[1] Hu et al. (n.d.). OCNLI public development data. CC BY-NC 2.0.</a:t>
-            </a:r>
-            <a:r>
-              <a:rPr sz="810" b="0" lang="ja-JP" altLang="en-US">
-                <a:solidFill>
-                  <a:srgbClr val="626669"/>
-                </a:solidFill>
-                <a:latin typeface="Noto Sans"/>
-                <a:ea typeface="Noto Sans CJK JP"/>
-                <a:cs typeface="Noto Sans"/>
-              </a:rPr>
-              <a:t>  </a:t>
-            </a:r>
-            <a:r>
-              <a:rPr sz="810" b="0" lang="ja-JP" altLang="en-US">
-                <a:solidFill>
-                  <a:srgbClr val="626669"/>
-                </a:solidFill>
-                <a:latin typeface="Noto Sans"/>
-                <a:ea typeface="Noto Sans CJK JP"/>
-                <a:cs typeface="Noto Sans"/>
-                <a:hlinkClick r:id="rId3"/>
-              </a:rPr>
-              <a:t>https://github.com/CLUEbenchmark/OCNLI/blob/main/data/ocnli/dev.json</a:t>
+              <a:t>Appendix</a:t>
             </a:r>
           </a:p>
         </p:txBody>
@@ -17415,7 +16723,7 @@
                 <a:ea typeface="Noto Sans CJK JP"/>
                 <a:cs typeface="Noto Sans"/>
               </a:rPr>
-              <a:t>中国語の文と、そこから分かることを結び付ける</a:t>
+              <a:t/>
             </a:r>
           </a:p>
         </p:txBody>
@@ -17432,103 +16740,73 @@
         </p:nvSpPr>
         <p:spPr>
           <a:xfrm>
-            <a:off x="594360" y="1463040"/>
-            <a:ext cx="7955279" cy="3044952"/>
+            <a:off x="640080" y="1972511"/>
+            <a:ext cx="7863840" cy="1744980"/>
           </a:xfrm>
         </p:spPr>
         <p:txBody>
-          <a:bodyPr wrap="square" tIns="91440" bIns="91440">
+          <a:bodyPr lIns="0" rIns="0" tIns="0" bIns="0">
             <a:noAutofit/>
           </a:bodyPr>
           <a:lstStyle/>
           <a:p>
-            <a:pPr marL="457200" indent="-355600">
-              <a:lnSpc>
-                <a:spcPts val="2379"/>
-              </a:lnSpc>
-              <a:spcAft>
-                <a:spcPts val="700"/>
-              </a:spcAft>
-              <a:buSzPct val="66500"/>
+            <a:pPr marL="457200" indent="-457200">
+              <a:lnSpc>
+                <a:spcPts val="3660"/>
+              </a:lnSpc>
+              <a:spcAft>
+                <a:spcPts val="1200"/>
+              </a:spcAft>
+              <a:buSzPct val="100000"/>
               <a:buFont typeface="Noto Sans CJK JP"/>
-              <a:buChar char="●"/>
-              <a:defRPr sz="2000" b="0">
-                <a:solidFill>
-                  <a:srgbClr val="303437"/>
-                </a:solidFill>
-                <a:latin typeface="Noto Sans"/>
-              </a:defRPr>
-            </a:pPr>
-            <a:r>
-              <a:rPr sz="2000" b="0" lang="ja-JP" altLang="en-US">
-                <a:solidFill>
-                  <a:srgbClr val="303437"/>
-                </a:solidFill>
-                <a:latin typeface="Noto Sans"/>
-                <a:ea typeface="Noto Sans CJK JP"/>
-                <a:cs typeface="Noto Sans"/>
-              </a:rPr>
-              <a:t>OCNLIは、中国語の5文体から集めた前提と、人が書いた仮説の関係を、含意・矛盾・中立で判定する。</a:t>
-            </a:r>
-          </a:p>
-          <a:p>
-            <a:pPr marL="457200" indent="-355600">
-              <a:lnSpc>
-                <a:spcPts val="2379"/>
-              </a:lnSpc>
-              <a:spcAft>
-                <a:spcPts val="700"/>
-              </a:spcAft>
-              <a:buSzPct val="66500"/>
+              <a:buAutoNum type="arabicPeriod" startAt="1"/>
+              <a:defRPr sz="3000" b="1">
+                <a:solidFill>
+                  <a:srgbClr val="303437"/>
+                </a:solidFill>
+                <a:latin typeface="Noto Sans"/>
+              </a:defRPr>
+            </a:pPr>
+            <a:r>
+              <a:rPr sz="3000" b="1" lang="ja-JP" altLang="en-US">
+                <a:solidFill>
+                  <a:srgbClr val="303437"/>
+                </a:solidFill>
+                <a:latin typeface="Noto Sans"/>
+                <a:ea typeface="Noto Sans CJK JP"/>
+                <a:cs typeface="Noto Sans"/>
+              </a:rPr>
+              <a:t>文体と推論の追加例</a:t>
+            </a:r>
+          </a:p>
+          <a:p>
+            <a:pPr marL="457200" indent="-457200">
+              <a:lnSpc>
+                <a:spcPts val="3660"/>
+              </a:lnSpc>
+              <a:spcAft>
+                <a:spcPts val="1200"/>
+              </a:spcAft>
+              <a:buSzPct val="100000"/>
               <a:buFont typeface="Noto Sans CJK JP"/>
-              <a:buChar char="●"/>
-              <a:defRPr sz="2000" b="0">
-                <a:solidFill>
-                  <a:srgbClr val="303437"/>
-                </a:solidFill>
-                <a:latin typeface="Noto Sans"/>
-              </a:defRPr>
-            </a:pPr>
-            <a:r>
-              <a:rPr sz="2000" b="0" lang="ja-JP" altLang="en-US">
-                <a:solidFill>
-                  <a:srgbClr val="303437"/>
-                </a:solidFill>
-                <a:latin typeface="Noto Sans"/>
-                <a:ea typeface="Noto Sans CJK JP"/>
-                <a:cs typeface="Noto Sans"/>
-              </a:rPr>
-              <a:t>複数の仮説を書かせ、否定語の使用に制約を設けることで、単純な言い換え以外の推論も引き出した。</a:t>
-            </a:r>
-          </a:p>
-          <a:p>
-            <a:pPr marL="457200" indent="-355600">
-              <a:lnSpc>
-                <a:spcPts val="2379"/>
-              </a:lnSpc>
-              <a:spcAft>
-                <a:spcPts val="0"/>
-              </a:spcAft>
-              <a:buSzPct val="66500"/>
-              <a:buFont typeface="Noto Sans CJK JP"/>
-              <a:buChar char="●"/>
-              <a:defRPr sz="2000" b="0">
-                <a:solidFill>
-                  <a:srgbClr val="303437"/>
-                </a:solidFill>
-                <a:latin typeface="Noto Sans"/>
-              </a:defRPr>
-            </a:pPr>
-            <a:r>
-              <a:rPr sz="2000" b="0" lang="ja-JP" altLang="en-US">
-                <a:solidFill>
-                  <a:srgbClr val="303437"/>
-                </a:solidFill>
-                <a:latin typeface="Noto Sans"/>
-                <a:ea typeface="Noto Sans CJK JP"/>
-                <a:cs typeface="Noto Sans"/>
-              </a:rPr>
-              <a:t>正解付きの学習用・開発用データを使って学習・評価できる。前提を共有する50k版と、前提が重ならない30k版が提供されている。</a:t>
+              <a:buAutoNum type="arabicPeriod" startAt="2"/>
+              <a:defRPr sz="3000" b="1">
+                <a:solidFill>
+                  <a:srgbClr val="303437"/>
+                </a:solidFill>
+                <a:latin typeface="Noto Sans"/>
+              </a:defRPr>
+            </a:pPr>
+            <a:r>
+              <a:rPr sz="3000" b="1" lang="ja-JP" altLang="en-US">
+                <a:solidFill>
+                  <a:srgbClr val="303437"/>
+                </a:solidFill>
+                <a:latin typeface="Noto Sans"/>
+                <a:ea typeface="Noto Sans CJK JP"/>
+                <a:cs typeface="Noto Sans"/>
+              </a:rPr>
+              <a:t>学習データと参考文献</a:t>
             </a:r>
           </a:p>
         </p:txBody>
@@ -17576,84 +16854,7 @@
                 <a:ea typeface="Noto Sans CJK JP"/>
                 <a:cs typeface="Noto Sans"/>
               </a:rPr>
-              <a:t>4. 入手方法とCLEVAでの利用</a:t>
-            </a:r>
-          </a:p>
-        </p:txBody>
-      </p:sp>
-      <p:sp>
-        <p:nvSpPr>
-          <p:cNvPr id="5" name="sources"/>
-          <p:cNvSpPr txBox="1"/>
-          <p:nvPr/>
-        </p:nvSpPr>
-        <p:spPr>
-          <a:xfrm>
-            <a:off x="502920" y="4700016"/>
-            <a:ext cx="8183879" cy="530352"/>
-          </a:xfrm>
-          <a:prstGeom prst="rect">
-            <a:avLst/>
-          </a:prstGeom>
-          <a:noFill/>
-        </p:spPr>
-        <p:txBody>
-          <a:bodyPr wrap="square" lIns="0" rIns="0" tIns="0" bIns="0">
-            <a:noAutofit/>
-          </a:bodyPr>
-          <a:lstStyle/>
-          <a:p>
-            <a:pPr algn="l">
-              <a:lnSpc>
-                <a:spcPts val="940"/>
-              </a:lnSpc>
-              <a:spcBef>
-                <a:spcPts val="0"/>
-              </a:spcBef>
-              <a:spcAft>
-                <a:spcPts val="140"/>
-              </a:spcAft>
-              <a:buNone/>
-              <a:defRPr sz="810" b="0">
-                <a:solidFill>
-                  <a:srgbClr val="303437"/>
-                </a:solidFill>
-                <a:latin typeface="Noto Sans"/>
-              </a:defRPr>
-            </a:pPr>
-            <a:r>
-              <a:rPr sz="810" b="0" lang="ja-JP" altLang="en-US">
-                <a:solidFill>
-                  <a:srgbClr val="626669"/>
-                </a:solidFill>
-                <a:latin typeface="Noto Sans"/>
-                <a:ea typeface="Noto Sans CJK JP"/>
-                <a:cs typeface="Noto Sans"/>
-              </a:rPr>
-              <a:t>[1] Hu et al. (2020). OCNLI: Original Chinese Natural Language Inference. Findings of EMNLP.</a:t>
-            </a:r>
-            <a:r>
-              <a:rPr sz="810" b="0" lang="ja-JP" altLang="en-US">
-                <a:solidFill>
-                  <a:srgbClr val="626669"/>
-                </a:solidFill>
-                <a:latin typeface="Noto Sans"/>
-                <a:ea typeface="Noto Sans CJK JP"/>
-                <a:cs typeface="Noto Sans"/>
-              </a:rPr>
-              <a:t>  </a:t>
-            </a:r>
-            <a:r>
-              <a:rPr sz="810" b="0" lang="ja-JP" altLang="en-US">
-                <a:solidFill>
-                  <a:srgbClr val="626669"/>
-                </a:solidFill>
-                <a:latin typeface="Noto Sans"/>
-                <a:ea typeface="Noto Sans CJK JP"/>
-                <a:cs typeface="Noto Sans"/>
-                <a:hlinkClick r:id="rId2"/>
-              </a:rPr>
-              <a:t>https://aclanthology.org/2020.findings-emnlp.314/</a:t>
+              <a:t>Appendix: 目次</a:t>
             </a:r>
           </a:p>
         </p:txBody>
@@ -17688,12 +16889,12 @@
         </p:nvSpPr>
         <p:spPr>
           <a:xfrm>
-            <a:off x="548640" y="2484835"/>
-            <a:ext cx="8046720" cy="686816"/>
+            <a:off x="548640" y="2506875"/>
+            <a:ext cx="8046720" cy="585216"/>
           </a:xfrm>
         </p:spPr>
         <p:txBody>
-          <a:bodyPr wrap="square" lIns="0" rIns="0" tIns="0" bIns="101600" anchor="ctr">
+          <a:bodyPr wrap="square" lIns="0" rIns="0" tIns="0" bIns="0" anchor="ctr">
             <a:noAutofit/>
           </a:bodyPr>
           <a:lstStyle/>
@@ -17719,7 +16920,7 @@
                 <a:ea typeface="Noto Sans CJK JP"/>
                 <a:cs typeface="Noto Sans"/>
               </a:rPr>
-              <a:t>Appendix</a:t>
+              <a:t>文体と推論の追加例</a:t>
             </a:r>
           </a:p>
         </p:txBody>
@@ -17767,7 +16968,7 @@
                 <a:ea typeface="Noto Sans CJK JP"/>
                 <a:cs typeface="Noto Sans"/>
               </a:rPr>
-              <a:t>Appendix</a:t>
+              <a:t>Appendix: 1. 文体と推論の追加例</a:t>
             </a:r>
           </a:p>
         </p:txBody>
@@ -17781,317 +16982,6 @@
 </file>
 
 <file path=ppt/slides/slide34.xml><?xml version="1.0" encoding="utf-8"?>
-<p:sld xmlns:a="http://schemas.openxmlformats.org/drawingml/2006/main" xmlns:p="http://schemas.openxmlformats.org/presentationml/2006/main" xmlns:r="http://schemas.openxmlformats.org/officeDocument/2006/relationships">
-  <p:cSld>
-    <p:spTree>
-      <p:nvGrpSpPr>
-        <p:cNvPr id="1" name=""/>
-        <p:cNvGrpSpPr/>
-        <p:nvPr/>
-      </p:nvGrpSpPr>
-      <p:grpSpPr/>
-      <p:sp>
-        <p:nvSpPr>
-          <p:cNvPr id="2" name="Title 1"/>
-          <p:cNvSpPr>
-            <a:spLocks noGrp="1"/>
-          </p:cNvSpPr>
-          <p:nvPr>
-            <p:ph type="title"/>
-          </p:nvPr>
-        </p:nvSpPr>
-        <p:spPr>
-          <a:xfrm>
-            <a:off x="468172" y="650138"/>
-            <a:ext cx="8206740" cy="616305"/>
-          </a:xfrm>
-        </p:spPr>
-        <p:txBody>
-          <a:bodyPr wrap="square" lIns="0" rIns="0" tIns="0" bIns="0">
-            <a:noAutofit/>
-          </a:bodyPr>
-          <a:lstStyle/>
-          <a:p>
-            <a:pPr algn="l">
-              <a:lnSpc>
-                <a:spcPct val="110000"/>
-              </a:lnSpc>
-              <a:buNone/>
-              <a:defRPr sz="2800" b="0">
-                <a:solidFill>
-                  <a:srgbClr val="303437"/>
-                </a:solidFill>
-                <a:latin typeface="Noto Sans"/>
-              </a:defRPr>
-            </a:pPr>
-            <a:r>
-              <a:rPr sz="2800" b="1" lang="ja-JP" altLang="en-US">
-                <a:solidFill>
-                  <a:srgbClr val="303437"/>
-                </a:solidFill>
-                <a:latin typeface="Noto Sans"/>
-                <a:ea typeface="Noto Sans CJK JP"/>
-                <a:cs typeface="Noto Sans"/>
-              </a:rPr>
-              <a:t/>
-            </a:r>
-          </a:p>
-        </p:txBody>
-      </p:sp>
-      <p:sp>
-        <p:nvSpPr>
-          <p:cNvPr id="3" name="Text Placeholder 2"/>
-          <p:cNvSpPr>
-            <a:spLocks noGrp="1"/>
-          </p:cNvSpPr>
-          <p:nvPr>
-            <p:ph type="body" idx="1"/>
-          </p:nvPr>
-        </p:nvSpPr>
-        <p:spPr>
-          <a:xfrm>
-            <a:off x="640080" y="1972511"/>
-            <a:ext cx="7863840" cy="1744980"/>
-          </a:xfrm>
-        </p:spPr>
-        <p:txBody>
-          <a:bodyPr lIns="0" rIns="0" tIns="0" bIns="0">
-            <a:noAutofit/>
-          </a:bodyPr>
-          <a:lstStyle/>
-          <a:p>
-            <a:pPr marL="457200" indent="-457200">
-              <a:lnSpc>
-                <a:spcPts val="3660"/>
-              </a:lnSpc>
-              <a:spcAft>
-                <a:spcPts val="1200"/>
-              </a:spcAft>
-              <a:buSzPct val="100000"/>
-              <a:buFont typeface="Noto Sans CJK JP"/>
-              <a:buAutoNum type="arabicPeriod" startAt="1"/>
-              <a:defRPr sz="3000" b="1">
-                <a:solidFill>
-                  <a:srgbClr val="303437"/>
-                </a:solidFill>
-                <a:latin typeface="Noto Sans"/>
-              </a:defRPr>
-            </a:pPr>
-            <a:r>
-              <a:rPr sz="3000" b="1" lang="ja-JP" altLang="en-US">
-                <a:solidFill>
-                  <a:srgbClr val="303437"/>
-                </a:solidFill>
-                <a:latin typeface="Noto Sans"/>
-                <a:ea typeface="Noto Sans CJK JP"/>
-                <a:cs typeface="Noto Sans"/>
-              </a:rPr>
-              <a:t>文体と推論の追加例</a:t>
-            </a:r>
-          </a:p>
-          <a:p>
-            <a:pPr marL="457200" indent="-457200">
-              <a:lnSpc>
-                <a:spcPts val="3660"/>
-              </a:lnSpc>
-              <a:spcAft>
-                <a:spcPts val="1200"/>
-              </a:spcAft>
-              <a:buSzPct val="100000"/>
-              <a:buFont typeface="Noto Sans CJK JP"/>
-              <a:buAutoNum type="arabicPeriod" startAt="2"/>
-              <a:defRPr sz="3000" b="1">
-                <a:solidFill>
-                  <a:srgbClr val="303437"/>
-                </a:solidFill>
-                <a:latin typeface="Noto Sans"/>
-              </a:defRPr>
-            </a:pPr>
-            <a:r>
-              <a:rPr sz="3000" b="1" lang="ja-JP" altLang="en-US">
-                <a:solidFill>
-                  <a:srgbClr val="303437"/>
-                </a:solidFill>
-                <a:latin typeface="Noto Sans"/>
-                <a:ea typeface="Noto Sans CJK JP"/>
-                <a:cs typeface="Noto Sans"/>
-              </a:rPr>
-              <a:t>学習データと参考文献</a:t>
-            </a:r>
-          </a:p>
-        </p:txBody>
-      </p:sp>
-      <p:sp>
-        <p:nvSpPr>
-          <p:cNvPr id="4" name="Title 3"/>
-          <p:cNvSpPr>
-            <a:spLocks noGrp="1"/>
-          </p:cNvSpPr>
-          <p:nvPr>
-            <p:ph type="title" idx="2"/>
-          </p:nvPr>
-        </p:nvSpPr>
-        <p:spPr>
-          <a:xfrm>
-            <a:off x="75895" y="0"/>
-            <a:ext cx="8115300" cy="480060"/>
-          </a:xfrm>
-        </p:spPr>
-        <p:txBody>
-          <a:bodyPr wrap="square" lIns="0" rIns="0" tIns="0" bIns="0" anchor="ctr">
-            <a:noAutofit/>
-          </a:bodyPr>
-          <a:lstStyle/>
-          <a:p>
-            <a:pPr algn="l">
-              <a:lnSpc>
-                <a:spcPct val="110000"/>
-              </a:lnSpc>
-              <a:buNone/>
-              <a:defRPr sz="1400" b="0">
-                <a:solidFill>
-                  <a:srgbClr val="303437"/>
-                </a:solidFill>
-                <a:latin typeface="Noto Sans"/>
-              </a:defRPr>
-            </a:pPr>
-            <a:r>
-              <a:rPr sz="1400" b="1" lang="ja-JP" altLang="en-US">
-                <a:solidFill>
-                  <a:srgbClr val="FFFEF8"/>
-                </a:solidFill>
-                <a:latin typeface="Noto Sans"/>
-                <a:ea typeface="Noto Sans CJK JP"/>
-                <a:cs typeface="Noto Sans"/>
-              </a:rPr>
-              <a:t>Appendix: 目次</a:t>
-            </a:r>
-          </a:p>
-        </p:txBody>
-      </p:sp>
-    </p:spTree>
-  </p:cSld>
-  <p:clrMapOvr>
-    <a:masterClrMapping/>
-  </p:clrMapOvr>
-</p:sld>
-</file>
-
-<file path=ppt/slides/slide35.xml><?xml version="1.0" encoding="utf-8"?>
-<p:sld xmlns:a="http://schemas.openxmlformats.org/drawingml/2006/main" xmlns:p="http://schemas.openxmlformats.org/presentationml/2006/main" xmlns:r="http://schemas.openxmlformats.org/officeDocument/2006/relationships">
-  <p:cSld>
-    <p:spTree>
-      <p:nvGrpSpPr>
-        <p:cNvPr id="1" name=""/>
-        <p:cNvGrpSpPr/>
-        <p:nvPr/>
-      </p:nvGrpSpPr>
-      <p:grpSpPr/>
-      <p:sp>
-        <p:nvSpPr>
-          <p:cNvPr id="2" name="Title 1"/>
-          <p:cNvSpPr>
-            <a:spLocks noGrp="1"/>
-          </p:cNvSpPr>
-          <p:nvPr>
-            <p:ph type="title"/>
-          </p:nvPr>
-        </p:nvSpPr>
-        <p:spPr>
-          <a:xfrm>
-            <a:off x="548640" y="2506875"/>
-            <a:ext cx="8046720" cy="585216"/>
-          </a:xfrm>
-        </p:spPr>
-        <p:txBody>
-          <a:bodyPr wrap="square" lIns="0" rIns="0" tIns="0" bIns="0" anchor="ctr">
-            <a:noAutofit/>
-          </a:bodyPr>
-          <a:lstStyle/>
-          <a:p>
-            <a:pPr algn="ctr">
-              <a:lnSpc>
-                <a:spcPct val="110000"/>
-              </a:lnSpc>
-              <a:buNone/>
-              <a:defRPr sz="3600" b="0">
-                <a:solidFill>
-                  <a:srgbClr val="303437"/>
-                </a:solidFill>
-                <a:latin typeface="Noto Sans"/>
-              </a:defRPr>
-            </a:pPr>
-            <a:r>
-              <a:rPr sz="3600" b="1" lang="ja-JP" altLang="en-US">
-                <a:solidFill>
-                  <a:srgbClr val="303437"/>
-                </a:solidFill>
-                <a:latin typeface="Noto Sans"/>
-                <a:ea typeface="Noto Sans CJK JP"/>
-                <a:cs typeface="Noto Sans"/>
-              </a:rPr>
-              <a:t>文体と推論の追加例</a:t>
-            </a:r>
-          </a:p>
-        </p:txBody>
-      </p:sp>
-      <p:sp>
-        <p:nvSpPr>
-          <p:cNvPr id="3" name="Title 2"/>
-          <p:cNvSpPr>
-            <a:spLocks noGrp="1"/>
-          </p:cNvSpPr>
-          <p:nvPr>
-            <p:ph type="title" idx="2"/>
-          </p:nvPr>
-        </p:nvSpPr>
-        <p:spPr>
-          <a:xfrm>
-            <a:off x="75895" y="0"/>
-            <a:ext cx="8115300" cy="480060"/>
-          </a:xfrm>
-        </p:spPr>
-        <p:txBody>
-          <a:bodyPr wrap="square" lIns="0" rIns="0" tIns="0" bIns="0" anchor="ctr">
-            <a:noAutofit/>
-          </a:bodyPr>
-          <a:lstStyle/>
-          <a:p>
-            <a:pPr algn="l">
-              <a:lnSpc>
-                <a:spcPct val="110000"/>
-              </a:lnSpc>
-              <a:buNone/>
-              <a:defRPr sz="1400" b="0">
-                <a:solidFill>
-                  <a:srgbClr val="303437"/>
-                </a:solidFill>
-                <a:latin typeface="Noto Sans"/>
-              </a:defRPr>
-            </a:pPr>
-            <a:r>
-              <a:rPr sz="1400" b="1" lang="ja-JP" altLang="en-US">
-                <a:solidFill>
-                  <a:srgbClr val="FFFEF8"/>
-                </a:solidFill>
-                <a:latin typeface="Noto Sans"/>
-                <a:ea typeface="Noto Sans CJK JP"/>
-                <a:cs typeface="Noto Sans"/>
-              </a:rPr>
-              <a:t>Appendix: 1. 文体と推論の追加例</a:t>
-            </a:r>
-          </a:p>
-        </p:txBody>
-      </p:sp>
-    </p:spTree>
-  </p:cSld>
-  <p:clrMapOvr>
-    <a:masterClrMapping/>
-  </p:clrMapOvr>
-</p:sld>
-</file>
-
-<file path=ppt/slides/slide36.xml><?xml version="1.0" encoding="utf-8"?>
 <p:sld xmlns:a="http://schemas.openxmlformats.org/drawingml/2006/main" xmlns:p="http://schemas.openxmlformats.org/presentationml/2006/main" xmlns:r="http://schemas.openxmlformats.org/officeDocument/2006/relationships">
   <p:cSld>
     <p:spTree>
@@ -18778,7 +17668,7 @@
 </p:sld>
 </file>
 
-<file path=ppt/slides/slide37.xml><?xml version="1.0" encoding="utf-8"?>
+<file path=ppt/slides/slide35.xml><?xml version="1.0" encoding="utf-8"?>
 <p:sld xmlns:a="http://schemas.openxmlformats.org/drawingml/2006/main" xmlns:p="http://schemas.openxmlformats.org/presentationml/2006/main" xmlns:r="http://schemas.openxmlformats.org/officeDocument/2006/relationships">
   <p:cSld>
     <p:spTree>
@@ -19465,7 +18355,7 @@
 </p:sld>
 </file>
 
-<file path=ppt/slides/slide38.xml><?xml version="1.0" encoding="utf-8"?>
+<file path=ppt/slides/slide36.xml><?xml version="1.0" encoding="utf-8"?>
 <p:sld xmlns:a="http://schemas.openxmlformats.org/drawingml/2006/main" xmlns:p="http://schemas.openxmlformats.org/presentationml/2006/main" xmlns:r="http://schemas.openxmlformats.org/officeDocument/2006/relationships">
   <p:cSld>
     <p:spTree>
@@ -20152,7 +19042,7 @@
 </p:sld>
 </file>
 
-<file path=ppt/slides/slide39.xml><?xml version="1.0" encoding="utf-8"?>
+<file path=ppt/slides/slide37.xml><?xml version="1.0" encoding="utf-8"?>
 <p:sld xmlns:a="http://schemas.openxmlformats.org/drawingml/2006/main" xmlns:p="http://schemas.openxmlformats.org/presentationml/2006/main" xmlns:r="http://schemas.openxmlformats.org/officeDocument/2006/relationships">
   <p:cSld>
     <p:spTree>
@@ -20839,121 +19729,7 @@
 </p:sld>
 </file>
 
-<file path=ppt/slides/slide4.xml><?xml version="1.0" encoding="utf-8"?>
-<p:sld xmlns:a="http://schemas.openxmlformats.org/drawingml/2006/main" xmlns:p="http://schemas.openxmlformats.org/presentationml/2006/main" xmlns:r="http://schemas.openxmlformats.org/officeDocument/2006/relationships">
-  <p:cSld>
-    <p:spTree>
-      <p:nvGrpSpPr>
-        <p:cNvPr id="1" name=""/>
-        <p:cNvGrpSpPr/>
-        <p:nvPr/>
-      </p:nvGrpSpPr>
-      <p:grpSpPr/>
-      <p:sp>
-        <p:nvSpPr>
-          <p:cNvPr id="2" name="Title 1"/>
-          <p:cNvSpPr>
-            <a:spLocks noGrp="1"/>
-          </p:cNvSpPr>
-          <p:nvPr>
-            <p:ph type="title"/>
-          </p:nvPr>
-        </p:nvSpPr>
-        <p:spPr>
-          <a:xfrm>
-            <a:off x="548640" y="2506875"/>
-            <a:ext cx="8046720" cy="585216"/>
-          </a:xfrm>
-        </p:spPr>
-        <p:txBody>
-          <a:bodyPr wrap="square" lIns="0" rIns="0" tIns="0" bIns="0" anchor="ctr">
-            <a:noAutofit/>
-          </a:bodyPr>
-          <a:lstStyle/>
-          <a:p>
-            <a:pPr algn="ctr">
-              <a:lnSpc>
-                <a:spcPct val="110000"/>
-              </a:lnSpc>
-              <a:buNone/>
-              <a:defRPr sz="3600" b="0">
-                <a:solidFill>
-                  <a:srgbClr val="303437"/>
-                </a:solidFill>
-                <a:latin typeface="Noto Sans"/>
-              </a:defRPr>
-            </a:pPr>
-            <a:r>
-              <a:rPr sz="3600" b="1" lang="ja-JP" altLang="en-US">
-                <a:solidFill>
-                  <a:srgbClr val="303437"/>
-                </a:solidFill>
-                <a:latin typeface="Noto Sans"/>
-                <a:ea typeface="Noto Sans CJK JP"/>
-                <a:cs typeface="Noto Sans"/>
-              </a:rPr>
-              <a:t>二つの文の関係を判定する</a:t>
-            </a:r>
-          </a:p>
-        </p:txBody>
-      </p:sp>
-      <p:sp>
-        <p:nvSpPr>
-          <p:cNvPr id="3" name="Title 2"/>
-          <p:cNvSpPr>
-            <a:spLocks noGrp="1"/>
-          </p:cNvSpPr>
-          <p:nvPr>
-            <p:ph type="title" idx="2"/>
-          </p:nvPr>
-        </p:nvSpPr>
-        <p:spPr>
-          <a:xfrm>
-            <a:off x="75895" y="0"/>
-            <a:ext cx="8115300" cy="480060"/>
-          </a:xfrm>
-        </p:spPr>
-        <p:txBody>
-          <a:bodyPr wrap="square" lIns="0" rIns="0" tIns="0" bIns="0" anchor="ctr">
-            <a:noAutofit/>
-          </a:bodyPr>
-          <a:lstStyle/>
-          <a:p>
-            <a:pPr algn="l">
-              <a:lnSpc>
-                <a:spcPct val="110000"/>
-              </a:lnSpc>
-              <a:buNone/>
-              <a:defRPr sz="1400" b="0">
-                <a:solidFill>
-                  <a:srgbClr val="303437"/>
-                </a:solidFill>
-                <a:latin typeface="Noto Sans"/>
-              </a:defRPr>
-            </a:pPr>
-            <a:r>
-              <a:rPr sz="1400" b="1" lang="ja-JP" altLang="en-US">
-                <a:solidFill>
-                  <a:srgbClr val="FFFEF8"/>
-                </a:solidFill>
-                <a:latin typeface="Noto Sans"/>
-                <a:ea typeface="Noto Sans CJK JP"/>
-                <a:cs typeface="Noto Sans"/>
-              </a:rPr>
-              <a:t>1. 二つの文の関係を判定する</a:t>
-            </a:r>
-          </a:p>
-        </p:txBody>
-      </p:sp>
-    </p:spTree>
-  </p:cSld>
-  <p:clrMapOvr>
-    <a:masterClrMapping/>
-  </p:clrMapOvr>
-</p:sld>
-</file>
-
-<file path=ppt/slides/slide40.xml><?xml version="1.0" encoding="utf-8"?>
+<file path=ppt/slides/slide38.xml><?xml version="1.0" encoding="utf-8"?>
 <p:sld xmlns:a="http://schemas.openxmlformats.org/drawingml/2006/main" xmlns:p="http://schemas.openxmlformats.org/presentationml/2006/main" xmlns:r="http://schemas.openxmlformats.org/officeDocument/2006/relationships">
   <p:cSld>
     <p:spTree>
@@ -21640,7 +20416,7 @@
 </p:sld>
 </file>
 
-<file path=ppt/slides/slide41.xml><?xml version="1.0" encoding="utf-8"?>
+<file path=ppt/slides/slide39.xml><?xml version="1.0" encoding="utf-8"?>
 <p:sld xmlns:a="http://schemas.openxmlformats.org/drawingml/2006/main" xmlns:p="http://schemas.openxmlformats.org/presentationml/2006/main" xmlns:r="http://schemas.openxmlformats.org/officeDocument/2006/relationships">
   <p:cSld>
     <p:spTree>
@@ -22327,7 +21103,121 @@
 </p:sld>
 </file>
 
-<file path=ppt/slides/slide42.xml><?xml version="1.0" encoding="utf-8"?>
+<file path=ppt/slides/slide4.xml><?xml version="1.0" encoding="utf-8"?>
+<p:sld xmlns:a="http://schemas.openxmlformats.org/drawingml/2006/main" xmlns:p="http://schemas.openxmlformats.org/presentationml/2006/main" xmlns:r="http://schemas.openxmlformats.org/officeDocument/2006/relationships">
+  <p:cSld>
+    <p:spTree>
+      <p:nvGrpSpPr>
+        <p:cNvPr id="1" name=""/>
+        <p:cNvGrpSpPr/>
+        <p:nvPr/>
+      </p:nvGrpSpPr>
+      <p:grpSpPr/>
+      <p:sp>
+        <p:nvSpPr>
+          <p:cNvPr id="2" name="Title 1"/>
+          <p:cNvSpPr>
+            <a:spLocks noGrp="1"/>
+          </p:cNvSpPr>
+          <p:nvPr>
+            <p:ph type="title"/>
+          </p:nvPr>
+        </p:nvSpPr>
+        <p:spPr>
+          <a:xfrm>
+            <a:off x="548640" y="2506875"/>
+            <a:ext cx="8046720" cy="585216"/>
+          </a:xfrm>
+        </p:spPr>
+        <p:txBody>
+          <a:bodyPr wrap="square" lIns="0" rIns="0" tIns="0" bIns="0" anchor="ctr">
+            <a:noAutofit/>
+          </a:bodyPr>
+          <a:lstStyle/>
+          <a:p>
+            <a:pPr algn="ctr">
+              <a:lnSpc>
+                <a:spcPct val="110000"/>
+              </a:lnSpc>
+              <a:buNone/>
+              <a:defRPr sz="3600" b="0">
+                <a:solidFill>
+                  <a:srgbClr val="303437"/>
+                </a:solidFill>
+                <a:latin typeface="Noto Sans"/>
+              </a:defRPr>
+            </a:pPr>
+            <a:r>
+              <a:rPr sz="3600" b="1" lang="ja-JP" altLang="en-US">
+                <a:solidFill>
+                  <a:srgbClr val="303437"/>
+                </a:solidFill>
+                <a:latin typeface="Noto Sans"/>
+                <a:ea typeface="Noto Sans CJK JP"/>
+                <a:cs typeface="Noto Sans"/>
+              </a:rPr>
+              <a:t>二つの文の関係を判定する</a:t>
+            </a:r>
+          </a:p>
+        </p:txBody>
+      </p:sp>
+      <p:sp>
+        <p:nvSpPr>
+          <p:cNvPr id="3" name="Title 2"/>
+          <p:cNvSpPr>
+            <a:spLocks noGrp="1"/>
+          </p:cNvSpPr>
+          <p:nvPr>
+            <p:ph type="title" idx="2"/>
+          </p:nvPr>
+        </p:nvSpPr>
+        <p:spPr>
+          <a:xfrm>
+            <a:off x="75895" y="0"/>
+            <a:ext cx="8115300" cy="480060"/>
+          </a:xfrm>
+        </p:spPr>
+        <p:txBody>
+          <a:bodyPr wrap="square" lIns="0" rIns="0" tIns="0" bIns="0" anchor="ctr">
+            <a:noAutofit/>
+          </a:bodyPr>
+          <a:lstStyle/>
+          <a:p>
+            <a:pPr algn="l">
+              <a:lnSpc>
+                <a:spcPct val="110000"/>
+              </a:lnSpc>
+              <a:buNone/>
+              <a:defRPr sz="1400" b="0">
+                <a:solidFill>
+                  <a:srgbClr val="303437"/>
+                </a:solidFill>
+                <a:latin typeface="Noto Sans"/>
+              </a:defRPr>
+            </a:pPr>
+            <a:r>
+              <a:rPr sz="1400" b="1" lang="ja-JP" altLang="en-US">
+                <a:solidFill>
+                  <a:srgbClr val="FFFEF8"/>
+                </a:solidFill>
+                <a:latin typeface="Noto Sans"/>
+                <a:ea typeface="Noto Sans CJK JP"/>
+                <a:cs typeface="Noto Sans"/>
+              </a:rPr>
+              <a:t>1. 二つの文の関係を判定する</a:t>
+            </a:r>
+          </a:p>
+        </p:txBody>
+      </p:sp>
+    </p:spTree>
+  </p:cSld>
+  <p:clrMapOvr>
+    <a:masterClrMapping/>
+  </p:clrMapOvr>
+</p:sld>
+</file>
+
+<file path=ppt/slides/slide40.xml><?xml version="1.0" encoding="utf-8"?>
 <p:sld xmlns:a="http://schemas.openxmlformats.org/drawingml/2006/main" xmlns:p="http://schemas.openxmlformats.org/presentationml/2006/main" xmlns:r="http://schemas.openxmlformats.org/officeDocument/2006/relationships">
   <p:cSld>
     <p:spTree>
@@ -23014,7 +21904,7 @@
 </p:sld>
 </file>
 
-<file path=ppt/slides/slide43.xml><?xml version="1.0" encoding="utf-8"?>
+<file path=ppt/slides/slide41.xml><?xml version="1.0" encoding="utf-8"?>
 <p:sld xmlns:a="http://schemas.openxmlformats.org/drawingml/2006/main" xmlns:p="http://schemas.openxmlformats.org/presentationml/2006/main" xmlns:r="http://schemas.openxmlformats.org/officeDocument/2006/relationships">
   <p:cSld>
     <p:spTree>
@@ -23701,7 +22591,7 @@
 </p:sld>
 </file>
 
-<file path=ppt/slides/slide44.xml><?xml version="1.0" encoding="utf-8"?>
+<file path=ppt/slides/slide42.xml><?xml version="1.0" encoding="utf-8"?>
 <p:sld xmlns:a="http://schemas.openxmlformats.org/drawingml/2006/main" xmlns:p="http://schemas.openxmlformats.org/presentationml/2006/main" xmlns:r="http://schemas.openxmlformats.org/officeDocument/2006/relationships">
   <p:cSld>
     <p:spTree>
@@ -24388,7 +23278,7 @@
 </p:sld>
 </file>
 
-<file path=ppt/slides/slide45.xml><?xml version="1.0" encoding="utf-8"?>
+<file path=ppt/slides/slide43.xml><?xml version="1.0" encoding="utf-8"?>
 <p:sld xmlns:a="http://schemas.openxmlformats.org/drawingml/2006/main" xmlns:p="http://schemas.openxmlformats.org/presentationml/2006/main" xmlns:r="http://schemas.openxmlformats.org/officeDocument/2006/relationships">
   <p:cSld>
     <p:spTree>
@@ -25075,7 +23965,7 @@
 </p:sld>
 </file>
 
-<file path=ppt/slides/slide46.xml><?xml version="1.0" encoding="utf-8"?>
+<file path=ppt/slides/slide44.xml><?xml version="1.0" encoding="utf-8"?>
 <p:sld xmlns:a="http://schemas.openxmlformats.org/drawingml/2006/main" xmlns:p="http://schemas.openxmlformats.org/presentationml/2006/main" xmlns:r="http://schemas.openxmlformats.org/officeDocument/2006/relationships">
   <p:cSld>
     <p:spTree>
@@ -25189,7 +24079,7 @@
 </p:sld>
 </file>
 
-<file path=ppt/slides/slide47.xml><?xml version="1.0" encoding="utf-8"?>
+<file path=ppt/slides/slide45.xml><?xml version="1.0" encoding="utf-8"?>
 <p:sld xmlns:a="http://schemas.openxmlformats.org/drawingml/2006/main" xmlns:p="http://schemas.openxmlformats.org/presentationml/2006/main" xmlns:r="http://schemas.openxmlformats.org/officeDocument/2006/relationships">
   <p:cSld>
     <p:spTree>
@@ -26255,6 +25145,858 @@
 </p:sld>
 </file>
 
+<file path=ppt/slides/slide46.xml><?xml version="1.0" encoding="utf-8"?>
+<p:sld xmlns:a="http://schemas.openxmlformats.org/drawingml/2006/main" xmlns:p="http://schemas.openxmlformats.org/presentationml/2006/main" xmlns:r="http://schemas.openxmlformats.org/officeDocument/2006/relationships">
+  <p:cSld>
+    <p:spTree>
+      <p:nvGrpSpPr>
+        <p:cNvPr id="1" name=""/>
+        <p:cNvGrpSpPr/>
+        <p:nvPr/>
+      </p:nvGrpSpPr>
+      <p:grpSpPr/>
+      <p:sp>
+        <p:nvSpPr>
+          <p:cNvPr id="2" name="Title 1"/>
+          <p:cNvSpPr>
+            <a:spLocks noGrp="1"/>
+          </p:cNvSpPr>
+          <p:nvPr>
+            <p:ph type="title"/>
+          </p:nvPr>
+        </p:nvSpPr>
+        <p:spPr>
+          <a:xfrm>
+            <a:off x="468172" y="650138"/>
+            <a:ext cx="8206740" cy="616305"/>
+          </a:xfrm>
+        </p:spPr>
+        <p:txBody>
+          <a:bodyPr wrap="square" lIns="0" rIns="0" tIns="0" bIns="0">
+            <a:noAutofit/>
+          </a:bodyPr>
+          <a:lstStyle/>
+          <a:p>
+            <a:pPr algn="l">
+              <a:lnSpc>
+                <a:spcPct val="110000"/>
+              </a:lnSpc>
+              <a:buNone/>
+              <a:defRPr sz="2800" b="0">
+                <a:solidFill>
+                  <a:srgbClr val="303437"/>
+                </a:solidFill>
+                <a:latin typeface="Noto Sans"/>
+              </a:defRPr>
+            </a:pPr>
+            <a:r>
+              <a:rPr sz="2800" b="1" lang="ja-JP" altLang="en-US">
+                <a:solidFill>
+                  <a:srgbClr val="303437"/>
+                </a:solidFill>
+                <a:latin typeface="Noto Sans"/>
+                <a:ea typeface="Noto Sans CJK JP"/>
+                <a:cs typeface="Noto Sans"/>
+              </a:rPr>
+              <a:t>言語・論理・評価を結び付けた共同研究</a:t>
+            </a:r>
+          </a:p>
+        </p:txBody>
+      </p:sp>
+      <p:sp>
+        <p:nvSpPr>
+          <p:cNvPr id="3" name="Text Placeholder 2"/>
+          <p:cNvSpPr>
+            <a:spLocks noGrp="1"/>
+          </p:cNvSpPr>
+          <p:nvPr>
+            <p:ph type="body" idx="1"/>
+          </p:nvPr>
+        </p:nvSpPr>
+        <p:spPr>
+          <a:xfrm>
+            <a:off x="594360" y="1463040"/>
+            <a:ext cx="7955279" cy="3044952"/>
+          </a:xfrm>
+        </p:spPr>
+        <p:txBody>
+          <a:bodyPr wrap="square" tIns="91440" bIns="91440">
+            <a:noAutofit/>
+          </a:bodyPr>
+          <a:lstStyle/>
+          <a:p>
+            <a:pPr marL="457200" indent="-355600">
+              <a:lnSpc>
+                <a:spcPts val="2618"/>
+              </a:lnSpc>
+              <a:spcAft>
+                <a:spcPts val="700"/>
+              </a:spcAft>
+              <a:buSzPct val="60455"/>
+              <a:buFont typeface="Noto Sans CJK JP"/>
+              <a:buChar char="●"/>
+              <a:defRPr sz="2200" b="0">
+                <a:solidFill>
+                  <a:srgbClr val="303437"/>
+                </a:solidFill>
+                <a:latin typeface="Noto Sans"/>
+              </a:defRPr>
+            </a:pPr>
+            <a:r>
+              <a:rPr sz="2200" b="0" lang="ja-JP" altLang="en-US">
+                <a:solidFill>
+                  <a:srgbClr val="303437"/>
+                </a:solidFill>
+                <a:latin typeface="Noto Sans"/>
+                <a:ea typeface="Noto Sans CJK JP"/>
+                <a:cs typeface="Noto Sans"/>
+              </a:rPr>
+              <a:t>Hai Hu、Kyle Richardson、Liang Xu、Lu Li、Sandra Kübler、Lawrence S. Mossによる、Indiana University・Allen Institute for AI・CLUEの共同研究。</a:t>
+            </a:r>
+          </a:p>
+          <a:p>
+            <a:pPr marL="457200" indent="-355600">
+              <a:lnSpc>
+                <a:spcPts val="2618"/>
+              </a:lnSpc>
+              <a:spcAft>
+                <a:spcPts val="700"/>
+              </a:spcAft>
+              <a:buSzPct val="60455"/>
+              <a:buFont typeface="Noto Sans CJK JP"/>
+              <a:buChar char="●"/>
+              <a:defRPr sz="2200" b="0">
+                <a:solidFill>
+                  <a:srgbClr val="303437"/>
+                </a:solidFill>
+                <a:latin typeface="Noto Sans"/>
+              </a:defRPr>
+            </a:pPr>
+            <a:r>
+              <a:rPr sz="2200" b="0" lang="ja-JP" altLang="en-US">
+                <a:solidFill>
+                  <a:srgbClr val="303437"/>
+                </a:solidFill>
+                <a:latin typeface="Noto Sans"/>
+                <a:ea typeface="Noto Sans CJK JP"/>
+                <a:cs typeface="Noto Sans"/>
+              </a:rPr>
+              <a:t>Findings of EMNLP 2020で発表された。翻訳へ依存せず、母語話者の推論と再注釈を中国語の基準として整備した。</a:t>
+            </a:r>
+          </a:p>
+          <a:p>
+            <a:pPr marL="457200" indent="-355600">
+              <a:lnSpc>
+                <a:spcPts val="2618"/>
+              </a:lnSpc>
+              <a:spcAft>
+                <a:spcPts val="0"/>
+              </a:spcAft>
+              <a:buSzPct val="60455"/>
+              <a:buFont typeface="Noto Sans CJK JP"/>
+              <a:buChar char="●"/>
+              <a:defRPr sz="2200" b="0">
+                <a:solidFill>
+                  <a:srgbClr val="303437"/>
+                </a:solidFill>
+                <a:latin typeface="Noto Sans"/>
+              </a:defRPr>
+            </a:pPr>
+            <a:r>
+              <a:rPr sz="2200" b="0" lang="ja-JP" altLang="en-US">
+                <a:solidFill>
+                  <a:srgbClr val="303437"/>
+                </a:solidFill>
+                <a:latin typeface="Noto Sans"/>
+                <a:ea typeface="Noto Sans CJK JP"/>
+                <a:cs typeface="Noto Sans"/>
+              </a:rPr>
+              <a:t>教師ありモデルの成績だけでなく、仮説のみの語彙的な手掛かりや、翻訳学習データからの転移を分析した。</a:t>
+            </a:r>
+          </a:p>
+        </p:txBody>
+      </p:sp>
+      <p:sp>
+        <p:nvSpPr>
+          <p:cNvPr id="4" name="Title 3"/>
+          <p:cNvSpPr>
+            <a:spLocks noGrp="1"/>
+          </p:cNvSpPr>
+          <p:nvPr>
+            <p:ph type="title" idx="2"/>
+          </p:nvPr>
+        </p:nvSpPr>
+        <p:spPr>
+          <a:xfrm>
+            <a:off x="75895" y="0"/>
+            <a:ext cx="8115300" cy="480060"/>
+          </a:xfrm>
+        </p:spPr>
+        <p:txBody>
+          <a:bodyPr wrap="square" lIns="0" rIns="0" tIns="0" bIns="0" anchor="ctr">
+            <a:noAutofit/>
+          </a:bodyPr>
+          <a:lstStyle/>
+          <a:p>
+            <a:pPr algn="l">
+              <a:lnSpc>
+                <a:spcPct val="110000"/>
+              </a:lnSpc>
+              <a:buNone/>
+              <a:defRPr sz="1400" b="0">
+                <a:solidFill>
+                  <a:srgbClr val="303437"/>
+                </a:solidFill>
+                <a:latin typeface="Noto Sans"/>
+              </a:defRPr>
+            </a:pPr>
+            <a:r>
+              <a:rPr sz="1400" b="1" lang="ja-JP" altLang="en-US">
+                <a:solidFill>
+                  <a:srgbClr val="FFFEF8"/>
+                </a:solidFill>
+                <a:latin typeface="Noto Sans"/>
+                <a:ea typeface="Noto Sans CJK JP"/>
+                <a:cs typeface="Noto Sans"/>
+              </a:rPr>
+              <a:t>Appendix: 2. 学習データと参考文献</a:t>
+            </a:r>
+          </a:p>
+        </p:txBody>
+      </p:sp>
+      <p:sp>
+        <p:nvSpPr>
+          <p:cNvPr id="5" name="sources"/>
+          <p:cNvSpPr txBox="1"/>
+          <p:nvPr/>
+        </p:nvSpPr>
+        <p:spPr>
+          <a:xfrm>
+            <a:off x="502920" y="4700016"/>
+            <a:ext cx="8183879" cy="530352"/>
+          </a:xfrm>
+          <a:prstGeom prst="rect">
+            <a:avLst/>
+          </a:prstGeom>
+          <a:noFill/>
+        </p:spPr>
+        <p:txBody>
+          <a:bodyPr wrap="square" lIns="0" rIns="0" tIns="0" bIns="0">
+            <a:noAutofit/>
+          </a:bodyPr>
+          <a:lstStyle/>
+          <a:p>
+            <a:pPr algn="l">
+              <a:lnSpc>
+                <a:spcPts val="940"/>
+              </a:lnSpc>
+              <a:spcBef>
+                <a:spcPts val="0"/>
+              </a:spcBef>
+              <a:spcAft>
+                <a:spcPts val="140"/>
+              </a:spcAft>
+              <a:buNone/>
+              <a:defRPr sz="810" b="0">
+                <a:solidFill>
+                  <a:srgbClr val="303437"/>
+                </a:solidFill>
+                <a:latin typeface="Noto Sans"/>
+              </a:defRPr>
+            </a:pPr>
+            <a:r>
+              <a:rPr sz="810" b="0" lang="ja-JP" altLang="en-US">
+                <a:solidFill>
+                  <a:srgbClr val="626669"/>
+                </a:solidFill>
+                <a:latin typeface="Noto Sans"/>
+                <a:ea typeface="Noto Sans CJK JP"/>
+                <a:cs typeface="Noto Sans"/>
+              </a:rPr>
+              <a:t>[1] Hu et al. (2020). OCNLI: Original Chinese Natural Language Inference. Findings of EMNLP.</a:t>
+            </a:r>
+            <a:r>
+              <a:rPr sz="810" b="0" lang="ja-JP" altLang="en-US">
+                <a:solidFill>
+                  <a:srgbClr val="626669"/>
+                </a:solidFill>
+                <a:latin typeface="Noto Sans"/>
+                <a:ea typeface="Noto Sans CJK JP"/>
+                <a:cs typeface="Noto Sans"/>
+              </a:rPr>
+              <a:t>  </a:t>
+            </a:r>
+            <a:r>
+              <a:rPr sz="810" b="0" lang="ja-JP" altLang="en-US">
+                <a:solidFill>
+                  <a:srgbClr val="626669"/>
+                </a:solidFill>
+                <a:latin typeface="Noto Sans"/>
+                <a:ea typeface="Noto Sans CJK JP"/>
+                <a:cs typeface="Noto Sans"/>
+                <a:hlinkClick r:id="rId2"/>
+              </a:rPr>
+              <a:t>https://aclanthology.org/2020.findings-emnlp.314/</a:t>
+            </a:r>
+          </a:p>
+        </p:txBody>
+      </p:sp>
+    </p:spTree>
+  </p:cSld>
+  <p:clrMapOvr>
+    <a:masterClrMapping/>
+  </p:clrMapOvr>
+</p:sld>
+</file>
+
+<file path=ppt/slides/slide47.xml><?xml version="1.0" encoding="utf-8"?>
+<p:sld xmlns:a="http://schemas.openxmlformats.org/drawingml/2006/main" xmlns:p="http://schemas.openxmlformats.org/presentationml/2006/main" xmlns:r="http://schemas.openxmlformats.org/officeDocument/2006/relationships">
+  <p:cSld>
+    <p:spTree>
+      <p:nvGrpSpPr>
+        <p:cNvPr id="1" name=""/>
+        <p:cNvGrpSpPr/>
+        <p:nvPr/>
+      </p:nvGrpSpPr>
+      <p:grpSpPr/>
+      <p:sp>
+        <p:nvSpPr>
+          <p:cNvPr id="2" name="Title 1"/>
+          <p:cNvSpPr>
+            <a:spLocks noGrp="1"/>
+          </p:cNvSpPr>
+          <p:nvPr>
+            <p:ph type="title"/>
+          </p:nvPr>
+        </p:nvSpPr>
+        <p:spPr>
+          <a:xfrm>
+            <a:off x="468172" y="650138"/>
+            <a:ext cx="8206740" cy="616305"/>
+          </a:xfrm>
+        </p:spPr>
+        <p:txBody>
+          <a:bodyPr wrap="square" lIns="0" rIns="0" tIns="0" bIns="0">
+            <a:noAutofit/>
+          </a:bodyPr>
+          <a:lstStyle/>
+          <a:p>
+            <a:pPr algn="l">
+              <a:lnSpc>
+                <a:spcPct val="110000"/>
+              </a:lnSpc>
+              <a:buNone/>
+              <a:defRPr sz="2800" b="0">
+                <a:solidFill>
+                  <a:srgbClr val="303437"/>
+                </a:solidFill>
+                <a:latin typeface="Noto Sans"/>
+              </a:defRPr>
+            </a:pPr>
+            <a:r>
+              <a:rPr sz="2800" b="1" lang="ja-JP" altLang="en-US">
+                <a:solidFill>
+                  <a:srgbClr val="303437"/>
+                </a:solidFill>
+                <a:latin typeface="Noto Sans"/>
+                <a:ea typeface="Noto Sans CJK JP"/>
+                <a:cs typeface="Noto Sans"/>
+              </a:rPr>
+              <a:t>参考文献</a:t>
+            </a:r>
+          </a:p>
+        </p:txBody>
+      </p:sp>
+      <p:sp>
+        <p:nvSpPr>
+          <p:cNvPr id="3" name="Title 2"/>
+          <p:cNvSpPr>
+            <a:spLocks noGrp="1"/>
+          </p:cNvSpPr>
+          <p:nvPr>
+            <p:ph type="title" idx="2"/>
+          </p:nvPr>
+        </p:nvSpPr>
+        <p:spPr>
+          <a:xfrm>
+            <a:off x="75895" y="0"/>
+            <a:ext cx="8115300" cy="480060"/>
+          </a:xfrm>
+        </p:spPr>
+        <p:txBody>
+          <a:bodyPr wrap="square" lIns="0" rIns="0" tIns="0" bIns="0" anchor="ctr">
+            <a:noAutofit/>
+          </a:bodyPr>
+          <a:lstStyle/>
+          <a:p>
+            <a:pPr algn="l">
+              <a:lnSpc>
+                <a:spcPct val="110000"/>
+              </a:lnSpc>
+              <a:buNone/>
+              <a:defRPr sz="1400" b="0">
+                <a:solidFill>
+                  <a:srgbClr val="303437"/>
+                </a:solidFill>
+                <a:latin typeface="Noto Sans"/>
+              </a:defRPr>
+            </a:pPr>
+            <a:r>
+              <a:rPr sz="1400" b="1" lang="ja-JP" altLang="en-US">
+                <a:solidFill>
+                  <a:srgbClr val="FFFEF8"/>
+                </a:solidFill>
+                <a:latin typeface="Noto Sans"/>
+                <a:ea typeface="Noto Sans CJK JP"/>
+                <a:cs typeface="Noto Sans"/>
+              </a:rPr>
+              <a:t>Appendix: 2. 学習データと参考文献</a:t>
+            </a:r>
+          </a:p>
+        </p:txBody>
+      </p:sp>
+      <p:sp>
+        <p:nvSpPr>
+          <p:cNvPr id="4" name="TextBox 3"/>
+          <p:cNvSpPr txBox="1"/>
+          <p:nvPr/>
+        </p:nvSpPr>
+        <p:spPr>
+          <a:xfrm>
+            <a:off x="548640" y="1389888"/>
+            <a:ext cx="8046720" cy="280797"/>
+          </a:xfrm>
+          <a:prstGeom prst="rect">
+            <a:avLst/>
+          </a:prstGeom>
+          <a:noFill/>
+        </p:spPr>
+        <p:txBody>
+          <a:bodyPr wrap="square" lIns="0" rIns="0" tIns="0" bIns="0">
+            <a:noAutofit/>
+          </a:bodyPr>
+          <a:lstStyle/>
+          <a:p>
+            <a:pPr algn="l">
+              <a:lnSpc>
+                <a:spcPts val="1995"/>
+              </a:lnSpc>
+              <a:spcBef>
+                <a:spcPts val="0"/>
+              </a:spcBef>
+              <a:spcAft>
+                <a:spcPts val="0"/>
+              </a:spcAft>
+              <a:buNone/>
+              <a:defRPr sz="1750" b="0">
+                <a:solidFill>
+                  <a:srgbClr val="303437"/>
+                </a:solidFill>
+                <a:latin typeface="Noto Sans"/>
+              </a:defRPr>
+            </a:pPr>
+            <a:r>
+              <a:rPr sz="1750" b="1" lang="ja-JP" altLang="en-US">
+                <a:solidFill>
+                  <a:srgbClr val="303437"/>
+                </a:solidFill>
+                <a:latin typeface="Noto Sans"/>
+                <a:ea typeface="Noto Sans CJK JP"/>
+                <a:cs typeface="Noto Sans"/>
+              </a:rPr>
+              <a:t>OCNLI: Original Chinese Natural Language Inference</a:t>
+            </a:r>
+          </a:p>
+        </p:txBody>
+      </p:sp>
+      <p:sp>
+        <p:nvSpPr>
+          <p:cNvPr id="5" name="TextBox 4"/>
+          <p:cNvSpPr txBox="1"/>
+          <p:nvPr/>
+        </p:nvSpPr>
+        <p:spPr>
+          <a:xfrm>
+            <a:off x="548640" y="1708785"/>
+            <a:ext cx="8046720" cy="360426"/>
+          </a:xfrm>
+          <a:prstGeom prst="rect">
+            <a:avLst/>
+          </a:prstGeom>
+          <a:noFill/>
+        </p:spPr>
+        <p:txBody>
+          <a:bodyPr wrap="square" lIns="0" rIns="0" tIns="0" bIns="0">
+            <a:noAutofit/>
+          </a:bodyPr>
+          <a:lstStyle/>
+          <a:p>
+            <a:pPr algn="l">
+              <a:lnSpc>
+                <a:spcPts val="1311"/>
+              </a:lnSpc>
+              <a:spcBef>
+                <a:spcPts val="0"/>
+              </a:spcBef>
+              <a:spcAft>
+                <a:spcPts val="0"/>
+              </a:spcAft>
+              <a:buNone/>
+              <a:defRPr sz="1150" b="0">
+                <a:solidFill>
+                  <a:srgbClr val="303437"/>
+                </a:solidFill>
+                <a:latin typeface="Noto Sans"/>
+              </a:defRPr>
+            </a:pPr>
+            <a:r>
+              <a:rPr sz="1150" b="0" lang="ja-JP" altLang="en-US">
+                <a:solidFill>
+                  <a:srgbClr val="626669"/>
+                </a:solidFill>
+                <a:latin typeface="Noto Sans"/>
+                <a:ea typeface="Noto Sans CJK JP"/>
+                <a:cs typeface="Noto Sans"/>
+              </a:rPr>
+              <a:t>Hai Hu, Kyle Richardson, Liang Xu, Lu Li, Sandra Kübler, Lawrence S. Moss · 2020 · Findings of EMNLP, pp.3512–3526</a:t>
+            </a:r>
+          </a:p>
+        </p:txBody>
+      </p:sp>
+      <p:sp>
+        <p:nvSpPr>
+          <p:cNvPr id="6" name="TextBox 5"/>
+          <p:cNvSpPr txBox="1"/>
+          <p:nvPr/>
+        </p:nvSpPr>
+        <p:spPr>
+          <a:xfrm>
+            <a:off x="548640" y="2120011"/>
+            <a:ext cx="8046720" cy="490727"/>
+          </a:xfrm>
+          <a:prstGeom prst="rect">
+            <a:avLst/>
+          </a:prstGeom>
+          <a:noFill/>
+        </p:spPr>
+        <p:txBody>
+          <a:bodyPr wrap="square" lIns="0" rIns="0" tIns="0" bIns="0">
+            <a:noAutofit/>
+          </a:bodyPr>
+          <a:lstStyle/>
+          <a:p>
+            <a:pPr algn="l">
+              <a:lnSpc>
+                <a:spcPts val="1823"/>
+              </a:lnSpc>
+              <a:spcBef>
+                <a:spcPts val="0"/>
+              </a:spcBef>
+              <a:spcAft>
+                <a:spcPts val="0"/>
+              </a:spcAft>
+              <a:buNone/>
+              <a:defRPr sz="1600" b="0">
+                <a:solidFill>
+                  <a:srgbClr val="303437"/>
+                </a:solidFill>
+                <a:latin typeface="Noto Sans"/>
+              </a:defRPr>
+            </a:pPr>
+            <a:r>
+              <a:rPr sz="1600" b="0" lang="ja-JP" altLang="en-US">
+                <a:solidFill>
+                  <a:srgbClr val="303437"/>
+                </a:solidFill>
+                <a:latin typeface="Noto Sans"/>
+                <a:ea typeface="Noto Sans CJK JP"/>
+                <a:cs typeface="Noto Sans"/>
+              </a:rPr>
+              <a:t>中国語の前提と仮説を収集し、多数決による検証、モデル成績、注釈の手掛かりを分析する。</a:t>
+            </a:r>
+          </a:p>
+        </p:txBody>
+      </p:sp>
+      <p:sp>
+        <p:nvSpPr>
+          <p:cNvPr id="7" name="TextBox 6"/>
+          <p:cNvSpPr txBox="1"/>
+          <p:nvPr/>
+        </p:nvSpPr>
+        <p:spPr>
+          <a:xfrm>
+            <a:off x="548640" y="2661539"/>
+            <a:ext cx="8046720" cy="179450"/>
+          </a:xfrm>
+          <a:prstGeom prst="rect">
+            <a:avLst/>
+          </a:prstGeom>
+          <a:noFill/>
+        </p:spPr>
+        <p:txBody>
+          <a:bodyPr wrap="square" lIns="0" rIns="0" tIns="0" bIns="0">
+            <a:noAutofit/>
+          </a:bodyPr>
+          <a:lstStyle/>
+          <a:p>
+            <a:pPr algn="l">
+              <a:lnSpc>
+                <a:spcPts val="1197"/>
+              </a:lnSpc>
+              <a:spcBef>
+                <a:spcPts val="0"/>
+              </a:spcBef>
+              <a:spcAft>
+                <a:spcPts val="0"/>
+              </a:spcAft>
+              <a:buNone/>
+              <a:defRPr sz="1050" b="0">
+                <a:solidFill>
+                  <a:srgbClr val="303437"/>
+                </a:solidFill>
+                <a:latin typeface="Noto Sans"/>
+              </a:defRPr>
+            </a:pPr>
+            <a:r>
+              <a:rPr sz="1050" b="0" lang="ja-JP" altLang="en-US">
+                <a:solidFill>
+                  <a:srgbClr val="626669"/>
+                </a:solidFill>
+                <a:latin typeface="Noto Sans"/>
+                <a:ea typeface="Noto Sans CJK JP"/>
+                <a:cs typeface="Noto Sans"/>
+                <a:hlinkClick r:id="rId2"/>
+              </a:rPr>
+              <a:t>https://aclanthology.org/2020.findings-emnlp.314/</a:t>
+            </a:r>
+          </a:p>
+        </p:txBody>
+      </p:sp>
+      <p:sp>
+        <p:nvSpPr>
+          <p:cNvPr id="8" name="TextBox 7"/>
+          <p:cNvSpPr txBox="1"/>
+          <p:nvPr/>
+        </p:nvSpPr>
+        <p:spPr>
+          <a:xfrm>
+            <a:off x="548640" y="3060446"/>
+            <a:ext cx="8046720" cy="280797"/>
+          </a:xfrm>
+          <a:prstGeom prst="rect">
+            <a:avLst/>
+          </a:prstGeom>
+          <a:noFill/>
+        </p:spPr>
+        <p:txBody>
+          <a:bodyPr wrap="square" lIns="0" rIns="0" tIns="0" bIns="0">
+            <a:noAutofit/>
+          </a:bodyPr>
+          <a:lstStyle/>
+          <a:p>
+            <a:pPr algn="l">
+              <a:lnSpc>
+                <a:spcPts val="1995"/>
+              </a:lnSpc>
+              <a:spcBef>
+                <a:spcPts val="0"/>
+              </a:spcBef>
+              <a:spcAft>
+                <a:spcPts val="0"/>
+              </a:spcAft>
+              <a:buNone/>
+              <a:defRPr sz="1750" b="0">
+                <a:solidFill>
+                  <a:srgbClr val="303437"/>
+                </a:solidFill>
+                <a:latin typeface="Noto Sans"/>
+              </a:defRPr>
+            </a:pPr>
+            <a:r>
+              <a:rPr sz="1750" b="1" lang="ja-JP" altLang="en-US">
+                <a:solidFill>
+                  <a:srgbClr val="303437"/>
+                </a:solidFill>
+                <a:latin typeface="Noto Sans"/>
+                <a:ea typeface="Noto Sans CJK JP"/>
+                <a:cs typeface="Noto Sans"/>
+              </a:rPr>
+              <a:t>OCNLI — Original Chinese Natural Language Inference</a:t>
+            </a:r>
+          </a:p>
+        </p:txBody>
+      </p:sp>
+      <p:sp>
+        <p:nvSpPr>
+          <p:cNvPr id="9" name="TextBox 8"/>
+          <p:cNvSpPr txBox="1"/>
+          <p:nvPr/>
+        </p:nvSpPr>
+        <p:spPr>
+          <a:xfrm>
+            <a:off x="548640" y="3379343"/>
+            <a:ext cx="8046720" cy="193929"/>
+          </a:xfrm>
+          <a:prstGeom prst="rect">
+            <a:avLst/>
+          </a:prstGeom>
+          <a:noFill/>
+        </p:spPr>
+        <p:txBody>
+          <a:bodyPr wrap="square" lIns="0" rIns="0" tIns="0" bIns="0">
+            <a:noAutofit/>
+          </a:bodyPr>
+          <a:lstStyle/>
+          <a:p>
+            <a:pPr algn="l">
+              <a:lnSpc>
+                <a:spcPts val="1311"/>
+              </a:lnSpc>
+              <a:spcBef>
+                <a:spcPts val="0"/>
+              </a:spcBef>
+              <a:spcAft>
+                <a:spcPts val="0"/>
+              </a:spcAft>
+              <a:buNone/>
+              <a:defRPr sz="1150" b="0">
+                <a:solidFill>
+                  <a:srgbClr val="303437"/>
+                </a:solidFill>
+                <a:latin typeface="Noto Sans"/>
+              </a:defRPr>
+            </a:pPr>
+            <a:r>
+              <a:rPr sz="1150" b="0" lang="ja-JP" altLang="en-US">
+                <a:solidFill>
+                  <a:srgbClr val="626669"/>
+                </a:solidFill>
+                <a:latin typeface="Noto Sans"/>
+                <a:ea typeface="Noto Sans CJK JP"/>
+                <a:cs typeface="Noto Sans"/>
+              </a:rPr>
+              <a:t>CLUEbenchmark / Hu et al. (n.d.). 公式リポジトリ。参照2026-10-19。</a:t>
+            </a:r>
+          </a:p>
+        </p:txBody>
+      </p:sp>
+      <p:sp>
+        <p:nvSpPr>
+          <p:cNvPr id="10" name="TextBox 9"/>
+          <p:cNvSpPr txBox="1"/>
+          <p:nvPr/>
+        </p:nvSpPr>
+        <p:spPr>
+          <a:xfrm>
+            <a:off x="548640" y="3624072"/>
+            <a:ext cx="8046720" cy="490727"/>
+          </a:xfrm>
+          <a:prstGeom prst="rect">
+            <a:avLst/>
+          </a:prstGeom>
+          <a:noFill/>
+        </p:spPr>
+        <p:txBody>
+          <a:bodyPr wrap="square" lIns="0" rIns="0" tIns="0" bIns="0">
+            <a:noAutofit/>
+          </a:bodyPr>
+          <a:lstStyle/>
+          <a:p>
+            <a:pPr algn="l">
+              <a:lnSpc>
+                <a:spcPts val="1823"/>
+              </a:lnSpc>
+              <a:spcBef>
+                <a:spcPts val="0"/>
+              </a:spcBef>
+              <a:spcAft>
+                <a:spcPts val="0"/>
+              </a:spcAft>
+              <a:buNone/>
+              <a:defRPr sz="1600" b="0">
+                <a:solidFill>
+                  <a:srgbClr val="303437"/>
+                </a:solidFill>
+                <a:latin typeface="Noto Sans"/>
+              </a:defRPr>
+            </a:pPr>
+            <a:r>
+              <a:rPr sz="1600" b="0" lang="ja-JP" altLang="en-US">
+                <a:solidFill>
+                  <a:srgbClr val="303437"/>
+                </a:solidFill>
+                <a:latin typeface="Noto Sans"/>
+                <a:ea typeface="Noto Sans CJK JP"/>
+                <a:cs typeface="Noto Sans"/>
+              </a:rPr>
+              <a:t>学習用4規模、共通dev・入力のみのtest、形式・baseline・CC BY-NC 2.0の条件を公開する。</a:t>
+            </a:r>
+          </a:p>
+        </p:txBody>
+      </p:sp>
+      <p:sp>
+        <p:nvSpPr>
+          <p:cNvPr id="11" name="TextBox 10"/>
+          <p:cNvSpPr txBox="1"/>
+          <p:nvPr/>
+        </p:nvSpPr>
+        <p:spPr>
+          <a:xfrm>
+            <a:off x="548640" y="4165600"/>
+            <a:ext cx="8046720" cy="179450"/>
+          </a:xfrm>
+          <a:prstGeom prst="rect">
+            <a:avLst/>
+          </a:prstGeom>
+          <a:noFill/>
+        </p:spPr>
+        <p:txBody>
+          <a:bodyPr wrap="square" lIns="0" rIns="0" tIns="0" bIns="0">
+            <a:noAutofit/>
+          </a:bodyPr>
+          <a:lstStyle/>
+          <a:p>
+            <a:pPr algn="l">
+              <a:lnSpc>
+                <a:spcPts val="1197"/>
+              </a:lnSpc>
+              <a:spcBef>
+                <a:spcPts val="0"/>
+              </a:spcBef>
+              <a:spcAft>
+                <a:spcPts val="0"/>
+              </a:spcAft>
+              <a:buNone/>
+              <a:defRPr sz="1050" b="0">
+                <a:solidFill>
+                  <a:srgbClr val="303437"/>
+                </a:solidFill>
+                <a:latin typeface="Noto Sans"/>
+              </a:defRPr>
+            </a:pPr>
+            <a:r>
+              <a:rPr sz="1050" b="0" lang="ja-JP" altLang="en-US">
+                <a:solidFill>
+                  <a:srgbClr val="626669"/>
+                </a:solidFill>
+                <a:latin typeface="Noto Sans"/>
+                <a:ea typeface="Noto Sans CJK JP"/>
+                <a:cs typeface="Noto Sans"/>
+                <a:hlinkClick r:id="rId3"/>
+              </a:rPr>
+              <a:t>https://github.com/CLUEbenchmark/OCNLI</a:t>
+            </a:r>
+          </a:p>
+        </p:txBody>
+      </p:sp>
+    </p:spTree>
+  </p:cSld>
+  <p:clrMapOvr>
+    <a:masterClrMapping/>
+  </p:clrMapOvr>
+</p:sld>
+</file>
+
 <file path=ppt/slides/slide48.xml><?xml version="1.0" encoding="utf-8"?>
 <p:sld xmlns:a="http://schemas.openxmlformats.org/drawingml/2006/main" xmlns:p="http://schemas.openxmlformats.org/presentationml/2006/main" xmlns:r="http://schemas.openxmlformats.org/officeDocument/2006/relationships">
   <p:cSld>
@@ -26308,310 +26050,6 @@
                 <a:ea typeface="Noto Sans CJK JP"/>
                 <a:cs typeface="Noto Sans"/>
               </a:rPr>
-              <a:t>言語・論理・評価を結び付けた共同研究</a:t>
-            </a:r>
-          </a:p>
-        </p:txBody>
-      </p:sp>
-      <p:sp>
-        <p:nvSpPr>
-          <p:cNvPr id="3" name="Text Placeholder 2"/>
-          <p:cNvSpPr>
-            <a:spLocks noGrp="1"/>
-          </p:cNvSpPr>
-          <p:nvPr>
-            <p:ph type="body" idx="1"/>
-          </p:nvPr>
-        </p:nvSpPr>
-        <p:spPr>
-          <a:xfrm>
-            <a:off x="594360" y="1463040"/>
-            <a:ext cx="7955279" cy="3044952"/>
-          </a:xfrm>
-        </p:spPr>
-        <p:txBody>
-          <a:bodyPr wrap="square" tIns="91440" bIns="91440">
-            <a:noAutofit/>
-          </a:bodyPr>
-          <a:lstStyle/>
-          <a:p>
-            <a:pPr marL="457200" indent="-355600">
-              <a:lnSpc>
-                <a:spcPts val="2618"/>
-              </a:lnSpc>
-              <a:spcAft>
-                <a:spcPts val="700"/>
-              </a:spcAft>
-              <a:buSzPct val="60455"/>
-              <a:buFont typeface="Noto Sans CJK JP"/>
-              <a:buChar char="●"/>
-              <a:defRPr sz="2200" b="0">
-                <a:solidFill>
-                  <a:srgbClr val="303437"/>
-                </a:solidFill>
-                <a:latin typeface="Noto Sans"/>
-              </a:defRPr>
-            </a:pPr>
-            <a:r>
-              <a:rPr sz="2200" b="0" lang="ja-JP" altLang="en-US">
-                <a:solidFill>
-                  <a:srgbClr val="303437"/>
-                </a:solidFill>
-                <a:latin typeface="Noto Sans"/>
-                <a:ea typeface="Noto Sans CJK JP"/>
-                <a:cs typeface="Noto Sans"/>
-              </a:rPr>
-              <a:t>Hai Hu、Kyle Richardson、Liang Xu、Lu Li、Sandra Kübler、Lawrence S. Mossによる、Indiana University・Allen Institute for AI・CLUEの共同研究。</a:t>
-            </a:r>
-          </a:p>
-          <a:p>
-            <a:pPr marL="457200" indent="-355600">
-              <a:lnSpc>
-                <a:spcPts val="2618"/>
-              </a:lnSpc>
-              <a:spcAft>
-                <a:spcPts val="700"/>
-              </a:spcAft>
-              <a:buSzPct val="60455"/>
-              <a:buFont typeface="Noto Sans CJK JP"/>
-              <a:buChar char="●"/>
-              <a:defRPr sz="2200" b="0">
-                <a:solidFill>
-                  <a:srgbClr val="303437"/>
-                </a:solidFill>
-                <a:latin typeface="Noto Sans"/>
-              </a:defRPr>
-            </a:pPr>
-            <a:r>
-              <a:rPr sz="2200" b="0" lang="ja-JP" altLang="en-US">
-                <a:solidFill>
-                  <a:srgbClr val="303437"/>
-                </a:solidFill>
-                <a:latin typeface="Noto Sans"/>
-                <a:ea typeface="Noto Sans CJK JP"/>
-                <a:cs typeface="Noto Sans"/>
-              </a:rPr>
-              <a:t>Findings of EMNLP 2020で発表された。翻訳へ依存せず、母語話者の推論と再注釈を中国語の基準として整備した。</a:t>
-            </a:r>
-          </a:p>
-          <a:p>
-            <a:pPr marL="457200" indent="-355600">
-              <a:lnSpc>
-                <a:spcPts val="2618"/>
-              </a:lnSpc>
-              <a:spcAft>
-                <a:spcPts val="0"/>
-              </a:spcAft>
-              <a:buSzPct val="60455"/>
-              <a:buFont typeface="Noto Sans CJK JP"/>
-              <a:buChar char="●"/>
-              <a:defRPr sz="2200" b="0">
-                <a:solidFill>
-                  <a:srgbClr val="303437"/>
-                </a:solidFill>
-                <a:latin typeface="Noto Sans"/>
-              </a:defRPr>
-            </a:pPr>
-            <a:r>
-              <a:rPr sz="2200" b="0" lang="ja-JP" altLang="en-US">
-                <a:solidFill>
-                  <a:srgbClr val="303437"/>
-                </a:solidFill>
-                <a:latin typeface="Noto Sans"/>
-                <a:ea typeface="Noto Sans CJK JP"/>
-                <a:cs typeface="Noto Sans"/>
-              </a:rPr>
-              <a:t>教師ありモデルの成績だけでなく、仮説のみの語彙的な手掛かりや、翻訳学習データからの転移を分析した。</a:t>
-            </a:r>
-          </a:p>
-        </p:txBody>
-      </p:sp>
-      <p:sp>
-        <p:nvSpPr>
-          <p:cNvPr id="4" name="Title 3"/>
-          <p:cNvSpPr>
-            <a:spLocks noGrp="1"/>
-          </p:cNvSpPr>
-          <p:nvPr>
-            <p:ph type="title" idx="2"/>
-          </p:nvPr>
-        </p:nvSpPr>
-        <p:spPr>
-          <a:xfrm>
-            <a:off x="75895" y="0"/>
-            <a:ext cx="8115300" cy="480060"/>
-          </a:xfrm>
-        </p:spPr>
-        <p:txBody>
-          <a:bodyPr wrap="square" lIns="0" rIns="0" tIns="0" bIns="0" anchor="ctr">
-            <a:noAutofit/>
-          </a:bodyPr>
-          <a:lstStyle/>
-          <a:p>
-            <a:pPr algn="l">
-              <a:lnSpc>
-                <a:spcPct val="110000"/>
-              </a:lnSpc>
-              <a:buNone/>
-              <a:defRPr sz="1400" b="0">
-                <a:solidFill>
-                  <a:srgbClr val="303437"/>
-                </a:solidFill>
-                <a:latin typeface="Noto Sans"/>
-              </a:defRPr>
-            </a:pPr>
-            <a:r>
-              <a:rPr sz="1400" b="1" lang="ja-JP" altLang="en-US">
-                <a:solidFill>
-                  <a:srgbClr val="FFFEF8"/>
-                </a:solidFill>
-                <a:latin typeface="Noto Sans"/>
-                <a:ea typeface="Noto Sans CJK JP"/>
-                <a:cs typeface="Noto Sans"/>
-              </a:rPr>
-              <a:t>Appendix: 2. 学習データと参考文献</a:t>
-            </a:r>
-          </a:p>
-        </p:txBody>
-      </p:sp>
-      <p:sp>
-        <p:nvSpPr>
-          <p:cNvPr id="5" name="sources"/>
-          <p:cNvSpPr txBox="1"/>
-          <p:nvPr/>
-        </p:nvSpPr>
-        <p:spPr>
-          <a:xfrm>
-            <a:off x="502920" y="4700016"/>
-            <a:ext cx="8183879" cy="530352"/>
-          </a:xfrm>
-          <a:prstGeom prst="rect">
-            <a:avLst/>
-          </a:prstGeom>
-          <a:noFill/>
-        </p:spPr>
-        <p:txBody>
-          <a:bodyPr wrap="square" lIns="0" rIns="0" tIns="0" bIns="0">
-            <a:noAutofit/>
-          </a:bodyPr>
-          <a:lstStyle/>
-          <a:p>
-            <a:pPr algn="l">
-              <a:lnSpc>
-                <a:spcPts val="940"/>
-              </a:lnSpc>
-              <a:spcBef>
-                <a:spcPts val="0"/>
-              </a:spcBef>
-              <a:spcAft>
-                <a:spcPts val="140"/>
-              </a:spcAft>
-              <a:buNone/>
-              <a:defRPr sz="810" b="0">
-                <a:solidFill>
-                  <a:srgbClr val="303437"/>
-                </a:solidFill>
-                <a:latin typeface="Noto Sans"/>
-              </a:defRPr>
-            </a:pPr>
-            <a:r>
-              <a:rPr sz="810" b="0" lang="ja-JP" altLang="en-US">
-                <a:solidFill>
-                  <a:srgbClr val="626669"/>
-                </a:solidFill>
-                <a:latin typeface="Noto Sans"/>
-                <a:ea typeface="Noto Sans CJK JP"/>
-                <a:cs typeface="Noto Sans"/>
-              </a:rPr>
-              <a:t>[1] Hu et al. (2020). OCNLI: Original Chinese Natural Language Inference. Findings of EMNLP.</a:t>
-            </a:r>
-            <a:r>
-              <a:rPr sz="810" b="0" lang="ja-JP" altLang="en-US">
-                <a:solidFill>
-                  <a:srgbClr val="626669"/>
-                </a:solidFill>
-                <a:latin typeface="Noto Sans"/>
-                <a:ea typeface="Noto Sans CJK JP"/>
-                <a:cs typeface="Noto Sans"/>
-              </a:rPr>
-              <a:t>  </a:t>
-            </a:r>
-            <a:r>
-              <a:rPr sz="810" b="0" lang="ja-JP" altLang="en-US">
-                <a:solidFill>
-                  <a:srgbClr val="626669"/>
-                </a:solidFill>
-                <a:latin typeface="Noto Sans"/>
-                <a:ea typeface="Noto Sans CJK JP"/>
-                <a:cs typeface="Noto Sans"/>
-                <a:hlinkClick r:id="rId2"/>
-              </a:rPr>
-              <a:t>https://aclanthology.org/2020.findings-emnlp.314/</a:t>
-            </a:r>
-          </a:p>
-        </p:txBody>
-      </p:sp>
-    </p:spTree>
-  </p:cSld>
-  <p:clrMapOvr>
-    <a:masterClrMapping/>
-  </p:clrMapOvr>
-</p:sld>
-</file>
-
-<file path=ppt/slides/slide49.xml><?xml version="1.0" encoding="utf-8"?>
-<p:sld xmlns:a="http://schemas.openxmlformats.org/drawingml/2006/main" xmlns:p="http://schemas.openxmlformats.org/presentationml/2006/main" xmlns:r="http://schemas.openxmlformats.org/officeDocument/2006/relationships">
-  <p:cSld>
-    <p:spTree>
-      <p:nvGrpSpPr>
-        <p:cNvPr id="1" name=""/>
-        <p:cNvGrpSpPr/>
-        <p:nvPr/>
-      </p:nvGrpSpPr>
-      <p:grpSpPr/>
-      <p:sp>
-        <p:nvSpPr>
-          <p:cNvPr id="2" name="Title 1"/>
-          <p:cNvSpPr>
-            <a:spLocks noGrp="1"/>
-          </p:cNvSpPr>
-          <p:nvPr>
-            <p:ph type="title"/>
-          </p:nvPr>
-        </p:nvSpPr>
-        <p:spPr>
-          <a:xfrm>
-            <a:off x="468172" y="650138"/>
-            <a:ext cx="8206740" cy="616305"/>
-          </a:xfrm>
-        </p:spPr>
-        <p:txBody>
-          <a:bodyPr wrap="square" lIns="0" rIns="0" tIns="0" bIns="0">
-            <a:noAutofit/>
-          </a:bodyPr>
-          <a:lstStyle/>
-          <a:p>
-            <a:pPr algn="l">
-              <a:lnSpc>
-                <a:spcPct val="110000"/>
-              </a:lnSpc>
-              <a:buNone/>
-              <a:defRPr sz="2800" b="0">
-                <a:solidFill>
-                  <a:srgbClr val="303437"/>
-                </a:solidFill>
-                <a:latin typeface="Noto Sans"/>
-              </a:defRPr>
-            </a:pPr>
-            <a:r>
-              <a:rPr sz="2800" b="1" lang="ja-JP" altLang="en-US">
-                <a:solidFill>
-                  <a:srgbClr val="303437"/>
-                </a:solidFill>
-                <a:latin typeface="Noto Sans"/>
-                <a:ea typeface="Noto Sans CJK JP"/>
-                <a:cs typeface="Noto Sans"/>
-              </a:rPr>
               <a:t>参考文献</a:t>
             </a:r>
           </a:p>
@@ -26674,6 +26112,223 @@
         <p:spPr>
           <a:xfrm>
             <a:off x="548640" y="1389888"/>
+            <a:ext cx="8046720" cy="534162"/>
+          </a:xfrm>
+          <a:prstGeom prst="rect">
+            <a:avLst/>
+          </a:prstGeom>
+          <a:noFill/>
+        </p:spPr>
+        <p:txBody>
+          <a:bodyPr wrap="square" lIns="0" rIns="0" tIns="0" bIns="0">
+            <a:noAutofit/>
+          </a:bodyPr>
+          <a:lstStyle/>
+          <a:p>
+            <a:pPr algn="l">
+              <a:lnSpc>
+                <a:spcPts val="1995"/>
+              </a:lnSpc>
+              <a:spcBef>
+                <a:spcPts val="0"/>
+              </a:spcBef>
+              <a:spcAft>
+                <a:spcPts val="0"/>
+              </a:spcAft>
+              <a:buNone/>
+              <a:defRPr sz="1750" b="0">
+                <a:solidFill>
+                  <a:srgbClr val="303437"/>
+                </a:solidFill>
+                <a:latin typeface="Noto Sans"/>
+              </a:defRPr>
+            </a:pPr>
+            <a:r>
+              <a:rPr sz="1750" b="1" lang="ja-JP" altLang="en-US">
+                <a:solidFill>
+                  <a:srgbClr val="303437"/>
+                </a:solidFill>
+                <a:latin typeface="Noto Sans"/>
+                <a:ea typeface="Noto Sans CJK JP"/>
+                <a:cs typeface="Noto Sans"/>
+              </a:rPr>
+              <a:t>A Broad-Coverage Challenge Corpus for Sentence Understanding through Inference</a:t>
+            </a:r>
+          </a:p>
+        </p:txBody>
+      </p:sp>
+      <p:sp>
+        <p:nvSpPr>
+          <p:cNvPr id="5" name="TextBox 4"/>
+          <p:cNvSpPr txBox="1"/>
+          <p:nvPr/>
+        </p:nvSpPr>
+        <p:spPr>
+          <a:xfrm>
+            <a:off x="548640" y="1962150"/>
+            <a:ext cx="8046720" cy="193929"/>
+          </a:xfrm>
+          <a:prstGeom prst="rect">
+            <a:avLst/>
+          </a:prstGeom>
+          <a:noFill/>
+        </p:spPr>
+        <p:txBody>
+          <a:bodyPr wrap="square" lIns="0" rIns="0" tIns="0" bIns="0">
+            <a:noAutofit/>
+          </a:bodyPr>
+          <a:lstStyle/>
+          <a:p>
+            <a:pPr algn="l">
+              <a:lnSpc>
+                <a:spcPts val="1311"/>
+              </a:lnSpc>
+              <a:spcBef>
+                <a:spcPts val="0"/>
+              </a:spcBef>
+              <a:spcAft>
+                <a:spcPts val="0"/>
+              </a:spcAft>
+              <a:buNone/>
+              <a:defRPr sz="1150" b="0">
+                <a:solidFill>
+                  <a:srgbClr val="303437"/>
+                </a:solidFill>
+                <a:latin typeface="Noto Sans"/>
+              </a:defRPr>
+            </a:pPr>
+            <a:r>
+              <a:rPr sz="1150" b="0" lang="ja-JP" altLang="en-US">
+                <a:solidFill>
+                  <a:srgbClr val="626669"/>
+                </a:solidFill>
+                <a:latin typeface="Noto Sans"/>
+                <a:ea typeface="Noto Sans CJK JP"/>
+                <a:cs typeface="Noto Sans"/>
+              </a:rPr>
+              <a:t>Adina Williams, Nikita Nangia, Samuel R. Bowman · 2018 · NAACL-HLT, pp.1112–1122</a:t>
+            </a:r>
+          </a:p>
+        </p:txBody>
+      </p:sp>
+      <p:sp>
+        <p:nvSpPr>
+          <p:cNvPr id="6" name="TextBox 5"/>
+          <p:cNvSpPr txBox="1"/>
+          <p:nvPr/>
+        </p:nvSpPr>
+        <p:spPr>
+          <a:xfrm>
+            <a:off x="548640" y="2206879"/>
+            <a:ext cx="8046720" cy="259080"/>
+          </a:xfrm>
+          <a:prstGeom prst="rect">
+            <a:avLst/>
+          </a:prstGeom>
+          <a:noFill/>
+        </p:spPr>
+        <p:txBody>
+          <a:bodyPr wrap="square" lIns="0" rIns="0" tIns="0" bIns="0">
+            <a:noAutofit/>
+          </a:bodyPr>
+          <a:lstStyle/>
+          <a:p>
+            <a:pPr algn="l">
+              <a:lnSpc>
+                <a:spcPts val="1823"/>
+              </a:lnSpc>
+              <a:spcBef>
+                <a:spcPts val="0"/>
+              </a:spcBef>
+              <a:spcAft>
+                <a:spcPts val="0"/>
+              </a:spcAft>
+              <a:buNone/>
+              <a:defRPr sz="1600" b="0">
+                <a:solidFill>
+                  <a:srgbClr val="303437"/>
+                </a:solidFill>
+                <a:latin typeface="Noto Sans"/>
+              </a:defRPr>
+            </a:pPr>
+            <a:r>
+              <a:rPr sz="1600" b="0" lang="ja-JP" altLang="en-US">
+                <a:solidFill>
+                  <a:srgbClr val="303437"/>
+                </a:solidFill>
+                <a:latin typeface="Noto Sans"/>
+                <a:ea typeface="Noto Sans CJK JP"/>
+                <a:cs typeface="Noto Sans"/>
+              </a:rPr>
+              <a:t>複数文体の英語を前提に、仮説の作成と再注釈で構築したMultiNLIを報告する。</a:t>
+            </a:r>
+          </a:p>
+        </p:txBody>
+      </p:sp>
+      <p:sp>
+        <p:nvSpPr>
+          <p:cNvPr id="7" name="TextBox 6"/>
+          <p:cNvSpPr txBox="1"/>
+          <p:nvPr/>
+        </p:nvSpPr>
+        <p:spPr>
+          <a:xfrm>
+            <a:off x="548640" y="2516759"/>
+            <a:ext cx="8046720" cy="179450"/>
+          </a:xfrm>
+          <a:prstGeom prst="rect">
+            <a:avLst/>
+          </a:prstGeom>
+          <a:noFill/>
+        </p:spPr>
+        <p:txBody>
+          <a:bodyPr wrap="square" lIns="0" rIns="0" tIns="0" bIns="0">
+            <a:noAutofit/>
+          </a:bodyPr>
+          <a:lstStyle/>
+          <a:p>
+            <a:pPr algn="l">
+              <a:lnSpc>
+                <a:spcPts val="1197"/>
+              </a:lnSpc>
+              <a:spcBef>
+                <a:spcPts val="0"/>
+              </a:spcBef>
+              <a:spcAft>
+                <a:spcPts val="0"/>
+              </a:spcAft>
+              <a:buNone/>
+              <a:defRPr sz="1050" b="0">
+                <a:solidFill>
+                  <a:srgbClr val="303437"/>
+                </a:solidFill>
+                <a:latin typeface="Noto Sans"/>
+              </a:defRPr>
+            </a:pPr>
+            <a:r>
+              <a:rPr sz="1050" b="0" lang="ja-JP" altLang="en-US">
+                <a:solidFill>
+                  <a:srgbClr val="626669"/>
+                </a:solidFill>
+                <a:latin typeface="Noto Sans"/>
+                <a:ea typeface="Noto Sans CJK JP"/>
+                <a:cs typeface="Noto Sans"/>
+                <a:hlinkClick r:id="rId2"/>
+              </a:rPr>
+              <a:t>https://aclanthology.org/N18-1101/</a:t>
+            </a:r>
+          </a:p>
+        </p:txBody>
+      </p:sp>
+      <p:sp>
+        <p:nvSpPr>
+          <p:cNvPr id="8" name="TextBox 7"/>
+          <p:cNvSpPr txBox="1"/>
+          <p:nvPr/>
+        </p:nvSpPr>
+        <p:spPr>
+          <a:xfrm>
+            <a:off x="548640" y="2915666"/>
             <a:ext cx="8046720" cy="280797"/>
           </a:xfrm>
           <a:prstGeom prst="rect">
@@ -26714,20 +26369,20 @@
                 <a:ea typeface="Noto Sans CJK JP"/>
                 <a:cs typeface="Noto Sans"/>
               </a:rPr>
-              <a:t>OCNLI: Original Chinese Natural Language Inference</a:t>
+              <a:t>XNLI: Evaluating Cross-lingual Sentence Representations</a:t>
             </a:r>
           </a:p>
         </p:txBody>
       </p:sp>
       <p:sp>
         <p:nvSpPr>
-          <p:cNvPr id="5" name="TextBox 4"/>
+          <p:cNvPr id="9" name="TextBox 8"/>
           <p:cNvSpPr txBox="1"/>
           <p:nvPr/>
         </p:nvSpPr>
         <p:spPr>
           <a:xfrm>
-            <a:off x="548640" y="1708785"/>
+            <a:off x="548640" y="3234563"/>
             <a:ext cx="8046720" cy="360426"/>
           </a:xfrm>
           <a:prstGeom prst="rect">
@@ -26768,21 +26423,21 @@
                 <a:ea typeface="Noto Sans CJK JP"/>
                 <a:cs typeface="Noto Sans"/>
               </a:rPr>
-              <a:t>Hai Hu, Kyle Richardson, Liang Xu, Lu Li, Sandra Kübler, Lawrence S. Moss · 2020 · Findings of EMNLP, pp.3512–3526</a:t>
+              <a:t>Alexis Conneau, Ruty Rinott, Guillaume Lample, Adina Williams, Samuel R. Bowman, Holger Schwenk, Veselin Stoyanov · 2018 · EMNLP, pp.2475–2485</a:t>
             </a:r>
           </a:p>
         </p:txBody>
       </p:sp>
       <p:sp>
         <p:nvSpPr>
-          <p:cNvPr id="6" name="TextBox 5"/>
+          <p:cNvPr id="10" name="TextBox 9"/>
           <p:cNvSpPr txBox="1"/>
           <p:nvPr/>
         </p:nvSpPr>
         <p:spPr>
           <a:xfrm>
-            <a:off x="548640" y="2120011"/>
-            <a:ext cx="8046720" cy="490727"/>
+            <a:off x="548640" y="3645789"/>
+            <a:ext cx="8046720" cy="259080"/>
           </a:xfrm>
           <a:prstGeom prst="rect">
             <a:avLst/>
@@ -26822,20 +26477,20 @@
                 <a:ea typeface="Noto Sans CJK JP"/>
                 <a:cs typeface="Noto Sans"/>
               </a:rPr>
-              <a:t>中国語の前提と仮説を収集し、多数決による検証、モデル成績、注釈の手掛かりを分析する。</a:t>
+              <a:t>英語の推論問題を15言語へ展開し、言語をまたぐ文表現の評価に用いる。</a:t>
             </a:r>
           </a:p>
         </p:txBody>
       </p:sp>
       <p:sp>
         <p:nvSpPr>
-          <p:cNvPr id="7" name="TextBox 6"/>
+          <p:cNvPr id="11" name="TextBox 10"/>
           <p:cNvSpPr txBox="1"/>
           <p:nvPr/>
         </p:nvSpPr>
         <p:spPr>
           <a:xfrm>
-            <a:off x="548640" y="2661539"/>
+            <a:off x="548640" y="3955669"/>
             <a:ext cx="8046720" cy="179450"/>
           </a:xfrm>
           <a:prstGeom prst="rect">
@@ -26875,226 +26530,9 @@
                 <a:latin typeface="Noto Sans"/>
                 <a:ea typeface="Noto Sans CJK JP"/>
                 <a:cs typeface="Noto Sans"/>
-                <a:hlinkClick r:id="rId2"/>
-              </a:rPr>
-              <a:t>https://aclanthology.org/2020.findings-emnlp.314/</a:t>
-            </a:r>
-          </a:p>
-        </p:txBody>
-      </p:sp>
-      <p:sp>
-        <p:nvSpPr>
-          <p:cNvPr id="8" name="TextBox 7"/>
-          <p:cNvSpPr txBox="1"/>
-          <p:nvPr/>
-        </p:nvSpPr>
-        <p:spPr>
-          <a:xfrm>
-            <a:off x="548640" y="3060446"/>
-            <a:ext cx="8046720" cy="280797"/>
-          </a:xfrm>
-          <a:prstGeom prst="rect">
-            <a:avLst/>
-          </a:prstGeom>
-          <a:noFill/>
-        </p:spPr>
-        <p:txBody>
-          <a:bodyPr wrap="square" lIns="0" rIns="0" tIns="0" bIns="0">
-            <a:noAutofit/>
-          </a:bodyPr>
-          <a:lstStyle/>
-          <a:p>
-            <a:pPr algn="l">
-              <a:lnSpc>
-                <a:spcPts val="1995"/>
-              </a:lnSpc>
-              <a:spcBef>
-                <a:spcPts val="0"/>
-              </a:spcBef>
-              <a:spcAft>
-                <a:spcPts val="0"/>
-              </a:spcAft>
-              <a:buNone/>
-              <a:defRPr sz="1750" b="0">
-                <a:solidFill>
-                  <a:srgbClr val="303437"/>
-                </a:solidFill>
-                <a:latin typeface="Noto Sans"/>
-              </a:defRPr>
-            </a:pPr>
-            <a:r>
-              <a:rPr sz="1750" b="1" lang="ja-JP" altLang="en-US">
-                <a:solidFill>
-                  <a:srgbClr val="303437"/>
-                </a:solidFill>
-                <a:latin typeface="Noto Sans"/>
-                <a:ea typeface="Noto Sans CJK JP"/>
-                <a:cs typeface="Noto Sans"/>
-              </a:rPr>
-              <a:t>OCNLI — Original Chinese Natural Language Inference</a:t>
-            </a:r>
-          </a:p>
-        </p:txBody>
-      </p:sp>
-      <p:sp>
-        <p:nvSpPr>
-          <p:cNvPr id="9" name="TextBox 8"/>
-          <p:cNvSpPr txBox="1"/>
-          <p:nvPr/>
-        </p:nvSpPr>
-        <p:spPr>
-          <a:xfrm>
-            <a:off x="548640" y="3379343"/>
-            <a:ext cx="8046720" cy="193929"/>
-          </a:xfrm>
-          <a:prstGeom prst="rect">
-            <a:avLst/>
-          </a:prstGeom>
-          <a:noFill/>
-        </p:spPr>
-        <p:txBody>
-          <a:bodyPr wrap="square" lIns="0" rIns="0" tIns="0" bIns="0">
-            <a:noAutofit/>
-          </a:bodyPr>
-          <a:lstStyle/>
-          <a:p>
-            <a:pPr algn="l">
-              <a:lnSpc>
-                <a:spcPts val="1311"/>
-              </a:lnSpc>
-              <a:spcBef>
-                <a:spcPts val="0"/>
-              </a:spcBef>
-              <a:spcAft>
-                <a:spcPts val="0"/>
-              </a:spcAft>
-              <a:buNone/>
-              <a:defRPr sz="1150" b="0">
-                <a:solidFill>
-                  <a:srgbClr val="303437"/>
-                </a:solidFill>
-                <a:latin typeface="Noto Sans"/>
-              </a:defRPr>
-            </a:pPr>
-            <a:r>
-              <a:rPr sz="1150" b="0" lang="ja-JP" altLang="en-US">
-                <a:solidFill>
-                  <a:srgbClr val="626669"/>
-                </a:solidFill>
-                <a:latin typeface="Noto Sans"/>
-                <a:ea typeface="Noto Sans CJK JP"/>
-                <a:cs typeface="Noto Sans"/>
-              </a:rPr>
-              <a:t>CLUEbenchmark / Hu et al. (n.d.). 公式リポジトリ。参照2026-10-19。</a:t>
-            </a:r>
-          </a:p>
-        </p:txBody>
-      </p:sp>
-      <p:sp>
-        <p:nvSpPr>
-          <p:cNvPr id="10" name="TextBox 9"/>
-          <p:cNvSpPr txBox="1"/>
-          <p:nvPr/>
-        </p:nvSpPr>
-        <p:spPr>
-          <a:xfrm>
-            <a:off x="548640" y="3624072"/>
-            <a:ext cx="8046720" cy="490727"/>
-          </a:xfrm>
-          <a:prstGeom prst="rect">
-            <a:avLst/>
-          </a:prstGeom>
-          <a:noFill/>
-        </p:spPr>
-        <p:txBody>
-          <a:bodyPr wrap="square" lIns="0" rIns="0" tIns="0" bIns="0">
-            <a:noAutofit/>
-          </a:bodyPr>
-          <a:lstStyle/>
-          <a:p>
-            <a:pPr algn="l">
-              <a:lnSpc>
-                <a:spcPts val="1823"/>
-              </a:lnSpc>
-              <a:spcBef>
-                <a:spcPts val="0"/>
-              </a:spcBef>
-              <a:spcAft>
-                <a:spcPts val="0"/>
-              </a:spcAft>
-              <a:buNone/>
-              <a:defRPr sz="1600" b="0">
-                <a:solidFill>
-                  <a:srgbClr val="303437"/>
-                </a:solidFill>
-                <a:latin typeface="Noto Sans"/>
-              </a:defRPr>
-            </a:pPr>
-            <a:r>
-              <a:rPr sz="1600" b="0" lang="ja-JP" altLang="en-US">
-                <a:solidFill>
-                  <a:srgbClr val="303437"/>
-                </a:solidFill>
-                <a:latin typeface="Noto Sans"/>
-                <a:ea typeface="Noto Sans CJK JP"/>
-                <a:cs typeface="Noto Sans"/>
-              </a:rPr>
-              <a:t>学習用4規模、共通dev・入力のみのtest、形式・baseline・CC BY-NC 2.0の条件を公開する。</a:t>
-            </a:r>
-          </a:p>
-        </p:txBody>
-      </p:sp>
-      <p:sp>
-        <p:nvSpPr>
-          <p:cNvPr id="11" name="TextBox 10"/>
-          <p:cNvSpPr txBox="1"/>
-          <p:nvPr/>
-        </p:nvSpPr>
-        <p:spPr>
-          <a:xfrm>
-            <a:off x="548640" y="4165600"/>
-            <a:ext cx="8046720" cy="179450"/>
-          </a:xfrm>
-          <a:prstGeom prst="rect">
-            <a:avLst/>
-          </a:prstGeom>
-          <a:noFill/>
-        </p:spPr>
-        <p:txBody>
-          <a:bodyPr wrap="square" lIns="0" rIns="0" tIns="0" bIns="0">
-            <a:noAutofit/>
-          </a:bodyPr>
-          <a:lstStyle/>
-          <a:p>
-            <a:pPr algn="l">
-              <a:lnSpc>
-                <a:spcPts val="1197"/>
-              </a:lnSpc>
-              <a:spcBef>
-                <a:spcPts val="0"/>
-              </a:spcBef>
-              <a:spcAft>
-                <a:spcPts val="0"/>
-              </a:spcAft>
-              <a:buNone/>
-              <a:defRPr sz="1050" b="0">
-                <a:solidFill>
-                  <a:srgbClr val="303437"/>
-                </a:solidFill>
-                <a:latin typeface="Noto Sans"/>
-              </a:defRPr>
-            </a:pPr>
-            <a:r>
-              <a:rPr sz="1050" b="0" lang="ja-JP" altLang="en-US">
-                <a:solidFill>
-                  <a:srgbClr val="626669"/>
-                </a:solidFill>
-                <a:latin typeface="Noto Sans"/>
-                <a:ea typeface="Noto Sans CJK JP"/>
-                <a:cs typeface="Noto Sans"/>
                 <a:hlinkClick r:id="rId3"/>
               </a:rPr>
-              <a:t>https://github.com/CLUEbenchmark/OCNLI</a:t>
+              <a:t>https://aclanthology.org/D18-1269/</a:t>
             </a:r>
           </a:p>
         </p:txBody>
@@ -27399,1102 +26837,6 @@
                 <a:hlinkClick r:id="rId2"/>
               </a:rPr>
               <a:t>https://aclanthology.org/2020.findings-emnlp.314/</a:t>
-            </a:r>
-          </a:p>
-        </p:txBody>
-      </p:sp>
-    </p:spTree>
-  </p:cSld>
-  <p:clrMapOvr>
-    <a:masterClrMapping/>
-  </p:clrMapOvr>
-</p:sld>
-</file>
-
-<file path=ppt/slides/slide50.xml><?xml version="1.0" encoding="utf-8"?>
-<p:sld xmlns:a="http://schemas.openxmlformats.org/drawingml/2006/main" xmlns:p="http://schemas.openxmlformats.org/presentationml/2006/main" xmlns:r="http://schemas.openxmlformats.org/officeDocument/2006/relationships">
-  <p:cSld>
-    <p:spTree>
-      <p:nvGrpSpPr>
-        <p:cNvPr id="1" name=""/>
-        <p:cNvGrpSpPr/>
-        <p:nvPr/>
-      </p:nvGrpSpPr>
-      <p:grpSpPr/>
-      <p:sp>
-        <p:nvSpPr>
-          <p:cNvPr id="2" name="Title 1"/>
-          <p:cNvSpPr>
-            <a:spLocks noGrp="1"/>
-          </p:cNvSpPr>
-          <p:nvPr>
-            <p:ph type="title"/>
-          </p:nvPr>
-        </p:nvSpPr>
-        <p:spPr>
-          <a:xfrm>
-            <a:off x="468172" y="650138"/>
-            <a:ext cx="8206740" cy="616305"/>
-          </a:xfrm>
-        </p:spPr>
-        <p:txBody>
-          <a:bodyPr wrap="square" lIns="0" rIns="0" tIns="0" bIns="0">
-            <a:noAutofit/>
-          </a:bodyPr>
-          <a:lstStyle/>
-          <a:p>
-            <a:pPr algn="l">
-              <a:lnSpc>
-                <a:spcPct val="110000"/>
-              </a:lnSpc>
-              <a:buNone/>
-              <a:defRPr sz="2800" b="0">
-                <a:solidFill>
-                  <a:srgbClr val="303437"/>
-                </a:solidFill>
-                <a:latin typeface="Noto Sans"/>
-              </a:defRPr>
-            </a:pPr>
-            <a:r>
-              <a:rPr sz="2800" b="1" lang="ja-JP" altLang="en-US">
-                <a:solidFill>
-                  <a:srgbClr val="303437"/>
-                </a:solidFill>
-                <a:latin typeface="Noto Sans"/>
-                <a:ea typeface="Noto Sans CJK JP"/>
-                <a:cs typeface="Noto Sans"/>
-              </a:rPr>
-              <a:t>参考文献</a:t>
-            </a:r>
-          </a:p>
-        </p:txBody>
-      </p:sp>
-      <p:sp>
-        <p:nvSpPr>
-          <p:cNvPr id="3" name="Title 2"/>
-          <p:cNvSpPr>
-            <a:spLocks noGrp="1"/>
-          </p:cNvSpPr>
-          <p:nvPr>
-            <p:ph type="title" idx="2"/>
-          </p:nvPr>
-        </p:nvSpPr>
-        <p:spPr>
-          <a:xfrm>
-            <a:off x="75895" y="0"/>
-            <a:ext cx="8115300" cy="480060"/>
-          </a:xfrm>
-        </p:spPr>
-        <p:txBody>
-          <a:bodyPr wrap="square" lIns="0" rIns="0" tIns="0" bIns="0" anchor="ctr">
-            <a:noAutofit/>
-          </a:bodyPr>
-          <a:lstStyle/>
-          <a:p>
-            <a:pPr algn="l">
-              <a:lnSpc>
-                <a:spcPct val="110000"/>
-              </a:lnSpc>
-              <a:buNone/>
-              <a:defRPr sz="1400" b="0">
-                <a:solidFill>
-                  <a:srgbClr val="303437"/>
-                </a:solidFill>
-                <a:latin typeface="Noto Sans"/>
-              </a:defRPr>
-            </a:pPr>
-            <a:r>
-              <a:rPr sz="1400" b="1" lang="ja-JP" altLang="en-US">
-                <a:solidFill>
-                  <a:srgbClr val="FFFEF8"/>
-                </a:solidFill>
-                <a:latin typeface="Noto Sans"/>
-                <a:ea typeface="Noto Sans CJK JP"/>
-                <a:cs typeface="Noto Sans"/>
-              </a:rPr>
-              <a:t>Appendix: 2. 学習データと参考文献</a:t>
-            </a:r>
-          </a:p>
-        </p:txBody>
-      </p:sp>
-      <p:sp>
-        <p:nvSpPr>
-          <p:cNvPr id="4" name="TextBox 3"/>
-          <p:cNvSpPr txBox="1"/>
-          <p:nvPr/>
-        </p:nvSpPr>
-        <p:spPr>
-          <a:xfrm>
-            <a:off x="548640" y="1389888"/>
-            <a:ext cx="8046720" cy="534162"/>
-          </a:xfrm>
-          <a:prstGeom prst="rect">
-            <a:avLst/>
-          </a:prstGeom>
-          <a:noFill/>
-        </p:spPr>
-        <p:txBody>
-          <a:bodyPr wrap="square" lIns="0" rIns="0" tIns="0" bIns="0">
-            <a:noAutofit/>
-          </a:bodyPr>
-          <a:lstStyle/>
-          <a:p>
-            <a:pPr algn="l">
-              <a:lnSpc>
-                <a:spcPts val="1995"/>
-              </a:lnSpc>
-              <a:spcBef>
-                <a:spcPts val="0"/>
-              </a:spcBef>
-              <a:spcAft>
-                <a:spcPts val="0"/>
-              </a:spcAft>
-              <a:buNone/>
-              <a:defRPr sz="1750" b="0">
-                <a:solidFill>
-                  <a:srgbClr val="303437"/>
-                </a:solidFill>
-                <a:latin typeface="Noto Sans"/>
-              </a:defRPr>
-            </a:pPr>
-            <a:r>
-              <a:rPr sz="1750" b="1" lang="ja-JP" altLang="en-US">
-                <a:solidFill>
-                  <a:srgbClr val="303437"/>
-                </a:solidFill>
-                <a:latin typeface="Noto Sans"/>
-                <a:ea typeface="Noto Sans CJK JP"/>
-                <a:cs typeface="Noto Sans"/>
-              </a:rPr>
-              <a:t>A Broad-Coverage Challenge Corpus for Sentence Understanding through Inference</a:t>
-            </a:r>
-          </a:p>
-        </p:txBody>
-      </p:sp>
-      <p:sp>
-        <p:nvSpPr>
-          <p:cNvPr id="5" name="TextBox 4"/>
-          <p:cNvSpPr txBox="1"/>
-          <p:nvPr/>
-        </p:nvSpPr>
-        <p:spPr>
-          <a:xfrm>
-            <a:off x="548640" y="1962150"/>
-            <a:ext cx="8046720" cy="193929"/>
-          </a:xfrm>
-          <a:prstGeom prst="rect">
-            <a:avLst/>
-          </a:prstGeom>
-          <a:noFill/>
-        </p:spPr>
-        <p:txBody>
-          <a:bodyPr wrap="square" lIns="0" rIns="0" tIns="0" bIns="0">
-            <a:noAutofit/>
-          </a:bodyPr>
-          <a:lstStyle/>
-          <a:p>
-            <a:pPr algn="l">
-              <a:lnSpc>
-                <a:spcPts val="1311"/>
-              </a:lnSpc>
-              <a:spcBef>
-                <a:spcPts val="0"/>
-              </a:spcBef>
-              <a:spcAft>
-                <a:spcPts val="0"/>
-              </a:spcAft>
-              <a:buNone/>
-              <a:defRPr sz="1150" b="0">
-                <a:solidFill>
-                  <a:srgbClr val="303437"/>
-                </a:solidFill>
-                <a:latin typeface="Noto Sans"/>
-              </a:defRPr>
-            </a:pPr>
-            <a:r>
-              <a:rPr sz="1150" b="0" lang="ja-JP" altLang="en-US">
-                <a:solidFill>
-                  <a:srgbClr val="626669"/>
-                </a:solidFill>
-                <a:latin typeface="Noto Sans"/>
-                <a:ea typeface="Noto Sans CJK JP"/>
-                <a:cs typeface="Noto Sans"/>
-              </a:rPr>
-              <a:t>Adina Williams, Nikita Nangia, Samuel R. Bowman · 2018 · NAACL-HLT, pp.1112–1122</a:t>
-            </a:r>
-          </a:p>
-        </p:txBody>
-      </p:sp>
-      <p:sp>
-        <p:nvSpPr>
-          <p:cNvPr id="6" name="TextBox 5"/>
-          <p:cNvSpPr txBox="1"/>
-          <p:nvPr/>
-        </p:nvSpPr>
-        <p:spPr>
-          <a:xfrm>
-            <a:off x="548640" y="2206879"/>
-            <a:ext cx="8046720" cy="259080"/>
-          </a:xfrm>
-          <a:prstGeom prst="rect">
-            <a:avLst/>
-          </a:prstGeom>
-          <a:noFill/>
-        </p:spPr>
-        <p:txBody>
-          <a:bodyPr wrap="square" lIns="0" rIns="0" tIns="0" bIns="0">
-            <a:noAutofit/>
-          </a:bodyPr>
-          <a:lstStyle/>
-          <a:p>
-            <a:pPr algn="l">
-              <a:lnSpc>
-                <a:spcPts val="1823"/>
-              </a:lnSpc>
-              <a:spcBef>
-                <a:spcPts val="0"/>
-              </a:spcBef>
-              <a:spcAft>
-                <a:spcPts val="0"/>
-              </a:spcAft>
-              <a:buNone/>
-              <a:defRPr sz="1600" b="0">
-                <a:solidFill>
-                  <a:srgbClr val="303437"/>
-                </a:solidFill>
-                <a:latin typeface="Noto Sans"/>
-              </a:defRPr>
-            </a:pPr>
-            <a:r>
-              <a:rPr sz="1600" b="0" lang="ja-JP" altLang="en-US">
-                <a:solidFill>
-                  <a:srgbClr val="303437"/>
-                </a:solidFill>
-                <a:latin typeface="Noto Sans"/>
-                <a:ea typeface="Noto Sans CJK JP"/>
-                <a:cs typeface="Noto Sans"/>
-              </a:rPr>
-              <a:t>複数文体の英語を前提に、仮説の作成と再注釈で構築したMultiNLIを報告する。</a:t>
-            </a:r>
-          </a:p>
-        </p:txBody>
-      </p:sp>
-      <p:sp>
-        <p:nvSpPr>
-          <p:cNvPr id="7" name="TextBox 6"/>
-          <p:cNvSpPr txBox="1"/>
-          <p:nvPr/>
-        </p:nvSpPr>
-        <p:spPr>
-          <a:xfrm>
-            <a:off x="548640" y="2516759"/>
-            <a:ext cx="8046720" cy="179450"/>
-          </a:xfrm>
-          <a:prstGeom prst="rect">
-            <a:avLst/>
-          </a:prstGeom>
-          <a:noFill/>
-        </p:spPr>
-        <p:txBody>
-          <a:bodyPr wrap="square" lIns="0" rIns="0" tIns="0" bIns="0">
-            <a:noAutofit/>
-          </a:bodyPr>
-          <a:lstStyle/>
-          <a:p>
-            <a:pPr algn="l">
-              <a:lnSpc>
-                <a:spcPts val="1197"/>
-              </a:lnSpc>
-              <a:spcBef>
-                <a:spcPts val="0"/>
-              </a:spcBef>
-              <a:spcAft>
-                <a:spcPts val="0"/>
-              </a:spcAft>
-              <a:buNone/>
-              <a:defRPr sz="1050" b="0">
-                <a:solidFill>
-                  <a:srgbClr val="303437"/>
-                </a:solidFill>
-                <a:latin typeface="Noto Sans"/>
-              </a:defRPr>
-            </a:pPr>
-            <a:r>
-              <a:rPr sz="1050" b="0" lang="ja-JP" altLang="en-US">
-                <a:solidFill>
-                  <a:srgbClr val="626669"/>
-                </a:solidFill>
-                <a:latin typeface="Noto Sans"/>
-                <a:ea typeface="Noto Sans CJK JP"/>
-                <a:cs typeface="Noto Sans"/>
-                <a:hlinkClick r:id="rId2"/>
-              </a:rPr>
-              <a:t>https://aclanthology.org/N18-1101/</a:t>
-            </a:r>
-          </a:p>
-        </p:txBody>
-      </p:sp>
-      <p:sp>
-        <p:nvSpPr>
-          <p:cNvPr id="8" name="TextBox 7"/>
-          <p:cNvSpPr txBox="1"/>
-          <p:nvPr/>
-        </p:nvSpPr>
-        <p:spPr>
-          <a:xfrm>
-            <a:off x="548640" y="2915666"/>
-            <a:ext cx="8046720" cy="280797"/>
-          </a:xfrm>
-          <a:prstGeom prst="rect">
-            <a:avLst/>
-          </a:prstGeom>
-          <a:noFill/>
-        </p:spPr>
-        <p:txBody>
-          <a:bodyPr wrap="square" lIns="0" rIns="0" tIns="0" bIns="0">
-            <a:noAutofit/>
-          </a:bodyPr>
-          <a:lstStyle/>
-          <a:p>
-            <a:pPr algn="l">
-              <a:lnSpc>
-                <a:spcPts val="1995"/>
-              </a:lnSpc>
-              <a:spcBef>
-                <a:spcPts val="0"/>
-              </a:spcBef>
-              <a:spcAft>
-                <a:spcPts val="0"/>
-              </a:spcAft>
-              <a:buNone/>
-              <a:defRPr sz="1750" b="0">
-                <a:solidFill>
-                  <a:srgbClr val="303437"/>
-                </a:solidFill>
-                <a:latin typeface="Noto Sans"/>
-              </a:defRPr>
-            </a:pPr>
-            <a:r>
-              <a:rPr sz="1750" b="1" lang="ja-JP" altLang="en-US">
-                <a:solidFill>
-                  <a:srgbClr val="303437"/>
-                </a:solidFill>
-                <a:latin typeface="Noto Sans"/>
-                <a:ea typeface="Noto Sans CJK JP"/>
-                <a:cs typeface="Noto Sans"/>
-              </a:rPr>
-              <a:t>XNLI: Evaluating Cross-lingual Sentence Representations</a:t>
-            </a:r>
-          </a:p>
-        </p:txBody>
-      </p:sp>
-      <p:sp>
-        <p:nvSpPr>
-          <p:cNvPr id="9" name="TextBox 8"/>
-          <p:cNvSpPr txBox="1"/>
-          <p:nvPr/>
-        </p:nvSpPr>
-        <p:spPr>
-          <a:xfrm>
-            <a:off x="548640" y="3234563"/>
-            <a:ext cx="8046720" cy="360426"/>
-          </a:xfrm>
-          <a:prstGeom prst="rect">
-            <a:avLst/>
-          </a:prstGeom>
-          <a:noFill/>
-        </p:spPr>
-        <p:txBody>
-          <a:bodyPr wrap="square" lIns="0" rIns="0" tIns="0" bIns="0">
-            <a:noAutofit/>
-          </a:bodyPr>
-          <a:lstStyle/>
-          <a:p>
-            <a:pPr algn="l">
-              <a:lnSpc>
-                <a:spcPts val="1311"/>
-              </a:lnSpc>
-              <a:spcBef>
-                <a:spcPts val="0"/>
-              </a:spcBef>
-              <a:spcAft>
-                <a:spcPts val="0"/>
-              </a:spcAft>
-              <a:buNone/>
-              <a:defRPr sz="1150" b="0">
-                <a:solidFill>
-                  <a:srgbClr val="303437"/>
-                </a:solidFill>
-                <a:latin typeface="Noto Sans"/>
-              </a:defRPr>
-            </a:pPr>
-            <a:r>
-              <a:rPr sz="1150" b="0" lang="ja-JP" altLang="en-US">
-                <a:solidFill>
-                  <a:srgbClr val="626669"/>
-                </a:solidFill>
-                <a:latin typeface="Noto Sans"/>
-                <a:ea typeface="Noto Sans CJK JP"/>
-                <a:cs typeface="Noto Sans"/>
-              </a:rPr>
-              <a:t>Alexis Conneau, Ruty Rinott, Guillaume Lample, Adina Williams, Samuel R. Bowman, Holger Schwenk, Veselin Stoyanov · 2018 · EMNLP, pp.2475–2485</a:t>
-            </a:r>
-          </a:p>
-        </p:txBody>
-      </p:sp>
-      <p:sp>
-        <p:nvSpPr>
-          <p:cNvPr id="10" name="TextBox 9"/>
-          <p:cNvSpPr txBox="1"/>
-          <p:nvPr/>
-        </p:nvSpPr>
-        <p:spPr>
-          <a:xfrm>
-            <a:off x="548640" y="3645789"/>
-            <a:ext cx="8046720" cy="259080"/>
-          </a:xfrm>
-          <a:prstGeom prst="rect">
-            <a:avLst/>
-          </a:prstGeom>
-          <a:noFill/>
-        </p:spPr>
-        <p:txBody>
-          <a:bodyPr wrap="square" lIns="0" rIns="0" tIns="0" bIns="0">
-            <a:noAutofit/>
-          </a:bodyPr>
-          <a:lstStyle/>
-          <a:p>
-            <a:pPr algn="l">
-              <a:lnSpc>
-                <a:spcPts val="1823"/>
-              </a:lnSpc>
-              <a:spcBef>
-                <a:spcPts val="0"/>
-              </a:spcBef>
-              <a:spcAft>
-                <a:spcPts val="0"/>
-              </a:spcAft>
-              <a:buNone/>
-              <a:defRPr sz="1600" b="0">
-                <a:solidFill>
-                  <a:srgbClr val="303437"/>
-                </a:solidFill>
-                <a:latin typeface="Noto Sans"/>
-              </a:defRPr>
-            </a:pPr>
-            <a:r>
-              <a:rPr sz="1600" b="0" lang="ja-JP" altLang="en-US">
-                <a:solidFill>
-                  <a:srgbClr val="303437"/>
-                </a:solidFill>
-                <a:latin typeface="Noto Sans"/>
-                <a:ea typeface="Noto Sans CJK JP"/>
-                <a:cs typeface="Noto Sans"/>
-              </a:rPr>
-              <a:t>英語の推論問題を15言語へ展開し、言語をまたぐ文表現の評価に用いる。</a:t>
-            </a:r>
-          </a:p>
-        </p:txBody>
-      </p:sp>
-      <p:sp>
-        <p:nvSpPr>
-          <p:cNvPr id="11" name="TextBox 10"/>
-          <p:cNvSpPr txBox="1"/>
-          <p:nvPr/>
-        </p:nvSpPr>
-        <p:spPr>
-          <a:xfrm>
-            <a:off x="548640" y="3955669"/>
-            <a:ext cx="8046720" cy="179450"/>
-          </a:xfrm>
-          <a:prstGeom prst="rect">
-            <a:avLst/>
-          </a:prstGeom>
-          <a:noFill/>
-        </p:spPr>
-        <p:txBody>
-          <a:bodyPr wrap="square" lIns="0" rIns="0" tIns="0" bIns="0">
-            <a:noAutofit/>
-          </a:bodyPr>
-          <a:lstStyle/>
-          <a:p>
-            <a:pPr algn="l">
-              <a:lnSpc>
-                <a:spcPts val="1197"/>
-              </a:lnSpc>
-              <a:spcBef>
-                <a:spcPts val="0"/>
-              </a:spcBef>
-              <a:spcAft>
-                <a:spcPts val="0"/>
-              </a:spcAft>
-              <a:buNone/>
-              <a:defRPr sz="1050" b="0">
-                <a:solidFill>
-                  <a:srgbClr val="303437"/>
-                </a:solidFill>
-                <a:latin typeface="Noto Sans"/>
-              </a:defRPr>
-            </a:pPr>
-            <a:r>
-              <a:rPr sz="1050" b="0" lang="ja-JP" altLang="en-US">
-                <a:solidFill>
-                  <a:srgbClr val="626669"/>
-                </a:solidFill>
-                <a:latin typeface="Noto Sans"/>
-                <a:ea typeface="Noto Sans CJK JP"/>
-                <a:cs typeface="Noto Sans"/>
-                <a:hlinkClick r:id="rId3"/>
-              </a:rPr>
-              <a:t>https://aclanthology.org/D18-1269/</a:t>
-            </a:r>
-          </a:p>
-        </p:txBody>
-      </p:sp>
-    </p:spTree>
-  </p:cSld>
-  <p:clrMapOvr>
-    <a:masterClrMapping/>
-  </p:clrMapOvr>
-</p:sld>
-</file>
-
-<file path=ppt/slides/slide51.xml><?xml version="1.0" encoding="utf-8"?>
-<p:sld xmlns:a="http://schemas.openxmlformats.org/drawingml/2006/main" xmlns:p="http://schemas.openxmlformats.org/presentationml/2006/main" xmlns:r="http://schemas.openxmlformats.org/officeDocument/2006/relationships">
-  <p:cSld>
-    <p:spTree>
-      <p:nvGrpSpPr>
-        <p:cNvPr id="1" name=""/>
-        <p:cNvGrpSpPr/>
-        <p:nvPr/>
-      </p:nvGrpSpPr>
-      <p:grpSpPr/>
-      <p:sp>
-        <p:nvSpPr>
-          <p:cNvPr id="2" name="Title 1"/>
-          <p:cNvSpPr>
-            <a:spLocks noGrp="1"/>
-          </p:cNvSpPr>
-          <p:nvPr>
-            <p:ph type="title"/>
-          </p:nvPr>
-        </p:nvSpPr>
-        <p:spPr>
-          <a:xfrm>
-            <a:off x="468172" y="650138"/>
-            <a:ext cx="8206740" cy="616305"/>
-          </a:xfrm>
-        </p:spPr>
-        <p:txBody>
-          <a:bodyPr wrap="square" lIns="0" rIns="0" tIns="0" bIns="0">
-            <a:noAutofit/>
-          </a:bodyPr>
-          <a:lstStyle/>
-          <a:p>
-            <a:pPr algn="l">
-              <a:lnSpc>
-                <a:spcPct val="110000"/>
-              </a:lnSpc>
-              <a:buNone/>
-              <a:defRPr sz="2800" b="0">
-                <a:solidFill>
-                  <a:srgbClr val="303437"/>
-                </a:solidFill>
-                <a:latin typeface="Noto Sans"/>
-              </a:defRPr>
-            </a:pPr>
-            <a:r>
-              <a:rPr sz="2800" b="1" lang="ja-JP" altLang="en-US">
-                <a:solidFill>
-                  <a:srgbClr val="303437"/>
-                </a:solidFill>
-                <a:latin typeface="Noto Sans"/>
-                <a:ea typeface="Noto Sans CJK JP"/>
-                <a:cs typeface="Noto Sans"/>
-              </a:rPr>
-              <a:t>参考文献</a:t>
-            </a:r>
-          </a:p>
-        </p:txBody>
-      </p:sp>
-      <p:sp>
-        <p:nvSpPr>
-          <p:cNvPr id="3" name="Title 2"/>
-          <p:cNvSpPr>
-            <a:spLocks noGrp="1"/>
-          </p:cNvSpPr>
-          <p:nvPr>
-            <p:ph type="title" idx="2"/>
-          </p:nvPr>
-        </p:nvSpPr>
-        <p:spPr>
-          <a:xfrm>
-            <a:off x="75895" y="0"/>
-            <a:ext cx="8115300" cy="480060"/>
-          </a:xfrm>
-        </p:spPr>
-        <p:txBody>
-          <a:bodyPr wrap="square" lIns="0" rIns="0" tIns="0" bIns="0" anchor="ctr">
-            <a:noAutofit/>
-          </a:bodyPr>
-          <a:lstStyle/>
-          <a:p>
-            <a:pPr algn="l">
-              <a:lnSpc>
-                <a:spcPct val="110000"/>
-              </a:lnSpc>
-              <a:buNone/>
-              <a:defRPr sz="1400" b="0">
-                <a:solidFill>
-                  <a:srgbClr val="303437"/>
-                </a:solidFill>
-                <a:latin typeface="Noto Sans"/>
-              </a:defRPr>
-            </a:pPr>
-            <a:r>
-              <a:rPr sz="1400" b="1" lang="ja-JP" altLang="en-US">
-                <a:solidFill>
-                  <a:srgbClr val="FFFEF8"/>
-                </a:solidFill>
-                <a:latin typeface="Noto Sans"/>
-                <a:ea typeface="Noto Sans CJK JP"/>
-                <a:cs typeface="Noto Sans"/>
-              </a:rPr>
-              <a:t>Appendix: 2. 学習データと参考文献</a:t>
-            </a:r>
-          </a:p>
-        </p:txBody>
-      </p:sp>
-      <p:sp>
-        <p:nvSpPr>
-          <p:cNvPr id="4" name="TextBox 3"/>
-          <p:cNvSpPr txBox="1"/>
-          <p:nvPr/>
-        </p:nvSpPr>
-        <p:spPr>
-          <a:xfrm>
-            <a:off x="548640" y="1389888"/>
-            <a:ext cx="8046720" cy="280797"/>
-          </a:xfrm>
-          <a:prstGeom prst="rect">
-            <a:avLst/>
-          </a:prstGeom>
-          <a:noFill/>
-        </p:spPr>
-        <p:txBody>
-          <a:bodyPr wrap="square" lIns="0" rIns="0" tIns="0" bIns="0">
-            <a:noAutofit/>
-          </a:bodyPr>
-          <a:lstStyle/>
-          <a:p>
-            <a:pPr algn="l">
-              <a:lnSpc>
-                <a:spcPts val="1995"/>
-              </a:lnSpc>
-              <a:spcBef>
-                <a:spcPts val="0"/>
-              </a:spcBef>
-              <a:spcAft>
-                <a:spcPts val="0"/>
-              </a:spcAft>
-              <a:buNone/>
-              <a:defRPr sz="1750" b="0">
-                <a:solidFill>
-                  <a:srgbClr val="303437"/>
-                </a:solidFill>
-                <a:latin typeface="Noto Sans"/>
-              </a:defRPr>
-            </a:pPr>
-            <a:r>
-              <a:rPr sz="1750" b="1" lang="ja-JP" altLang="en-US">
-                <a:solidFill>
-                  <a:srgbClr val="303437"/>
-                </a:solidFill>
-                <a:latin typeface="Noto Sans"/>
-                <a:ea typeface="Noto Sans CJK JP"/>
-                <a:cs typeface="Noto Sans"/>
-              </a:rPr>
-              <a:t>CLEVA: Chinese Language Models EVAluation Platform</a:t>
-            </a:r>
-          </a:p>
-        </p:txBody>
-      </p:sp>
-      <p:sp>
-        <p:nvSpPr>
-          <p:cNvPr id="5" name="TextBox 4"/>
-          <p:cNvSpPr txBox="1"/>
-          <p:nvPr/>
-        </p:nvSpPr>
-        <p:spPr>
-          <a:xfrm>
-            <a:off x="548640" y="1708785"/>
-            <a:ext cx="8046720" cy="360426"/>
-          </a:xfrm>
-          <a:prstGeom prst="rect">
-            <a:avLst/>
-          </a:prstGeom>
-          <a:noFill/>
-        </p:spPr>
-        <p:txBody>
-          <a:bodyPr wrap="square" lIns="0" rIns="0" tIns="0" bIns="0">
-            <a:noAutofit/>
-          </a:bodyPr>
-          <a:lstStyle/>
-          <a:p>
-            <a:pPr algn="l">
-              <a:lnSpc>
-                <a:spcPts val="1311"/>
-              </a:lnSpc>
-              <a:spcBef>
-                <a:spcPts val="0"/>
-              </a:spcBef>
-              <a:spcAft>
-                <a:spcPts val="0"/>
-              </a:spcAft>
-              <a:buNone/>
-              <a:defRPr sz="1150" b="0">
-                <a:solidFill>
-                  <a:srgbClr val="303437"/>
-                </a:solidFill>
-                <a:latin typeface="Noto Sans"/>
-              </a:defRPr>
-            </a:pPr>
-            <a:r>
-              <a:rPr sz="1150" b="0" lang="ja-JP" altLang="en-US">
-                <a:solidFill>
-                  <a:srgbClr val="626669"/>
-                </a:solidFill>
-                <a:latin typeface="Noto Sans"/>
-                <a:ea typeface="Noto Sans CJK JP"/>
-                <a:cs typeface="Noto Sans"/>
-              </a:rPr>
-              <a:t>Yanyang Li, Jianqiao Zhao, Duo Zheng, Zi-Yuan Hu, Zhi Chen, Xiaohui Su, Yongfeng Huang, Shijia Huang, Dahua Lin, Michael R. Lyu, Liwei Wang · 2023 · EMNLP System Demonstrations, pp.186–217</a:t>
-            </a:r>
-          </a:p>
-        </p:txBody>
-      </p:sp>
-      <p:sp>
-        <p:nvSpPr>
-          <p:cNvPr id="6" name="TextBox 5"/>
-          <p:cNvSpPr txBox="1"/>
-          <p:nvPr/>
-        </p:nvSpPr>
-        <p:spPr>
-          <a:xfrm>
-            <a:off x="548640" y="2120011"/>
-            <a:ext cx="8046720" cy="490727"/>
-          </a:xfrm>
-          <a:prstGeom prst="rect">
-            <a:avLst/>
-          </a:prstGeom>
-          <a:noFill/>
-        </p:spPr>
-        <p:txBody>
-          <a:bodyPr wrap="square" lIns="0" rIns="0" tIns="0" bIns="0">
-            <a:noAutofit/>
-          </a:bodyPr>
-          <a:lstStyle/>
-          <a:p>
-            <a:pPr algn="l">
-              <a:lnSpc>
-                <a:spcPts val="1823"/>
-              </a:lnSpc>
-              <a:spcBef>
-                <a:spcPts val="0"/>
-              </a:spcBef>
-              <a:spcAft>
-                <a:spcPts val="0"/>
-              </a:spcAft>
-              <a:buNone/>
-              <a:defRPr sz="1600" b="0">
-                <a:solidFill>
-                  <a:srgbClr val="303437"/>
-                </a:solidFill>
-                <a:latin typeface="Noto Sans"/>
-              </a:defRPr>
-            </a:pPr>
-            <a:r>
-              <a:rPr sz="1600" b="0" lang="ja-JP" altLang="en-US">
-                <a:solidFill>
-                  <a:srgbClr val="303437"/>
-                </a:solidFill>
-                <a:latin typeface="Noto Sans"/>
-                <a:ea typeface="Noto Sans CJK JP"/>
-                <a:cs typeface="Noto Sans"/>
-              </a:rPr>
-              <a:t>中国語モデルの31課題を統一評価し、OCNLI由来の自然言語推論を多肢選択として採用する。</a:t>
-            </a:r>
-          </a:p>
-        </p:txBody>
-      </p:sp>
-      <p:sp>
-        <p:nvSpPr>
-          <p:cNvPr id="7" name="TextBox 6"/>
-          <p:cNvSpPr txBox="1"/>
-          <p:nvPr/>
-        </p:nvSpPr>
-        <p:spPr>
-          <a:xfrm>
-            <a:off x="548640" y="2661539"/>
-            <a:ext cx="8046720" cy="179450"/>
-          </a:xfrm>
-          <a:prstGeom prst="rect">
-            <a:avLst/>
-          </a:prstGeom>
-          <a:noFill/>
-        </p:spPr>
-        <p:txBody>
-          <a:bodyPr wrap="square" lIns="0" rIns="0" tIns="0" bIns="0">
-            <a:noAutofit/>
-          </a:bodyPr>
-          <a:lstStyle/>
-          <a:p>
-            <a:pPr algn="l">
-              <a:lnSpc>
-                <a:spcPts val="1197"/>
-              </a:lnSpc>
-              <a:spcBef>
-                <a:spcPts val="0"/>
-              </a:spcBef>
-              <a:spcAft>
-                <a:spcPts val="0"/>
-              </a:spcAft>
-              <a:buNone/>
-              <a:defRPr sz="1050" b="0">
-                <a:solidFill>
-                  <a:srgbClr val="303437"/>
-                </a:solidFill>
-                <a:latin typeface="Noto Sans"/>
-              </a:defRPr>
-            </a:pPr>
-            <a:r>
-              <a:rPr sz="1050" b="0" lang="ja-JP" altLang="en-US">
-                <a:solidFill>
-                  <a:srgbClr val="626669"/>
-                </a:solidFill>
-                <a:latin typeface="Noto Sans"/>
-                <a:ea typeface="Noto Sans CJK JP"/>
-                <a:cs typeface="Noto Sans"/>
-                <a:hlinkClick r:id="rId2"/>
-              </a:rPr>
-              <a:t>https://aclanthology.org/2023.emnlp-demo.17/</a:t>
-            </a:r>
-          </a:p>
-        </p:txBody>
-      </p:sp>
-      <p:sp>
-        <p:nvSpPr>
-          <p:cNvPr id="8" name="TextBox 7"/>
-          <p:cNvSpPr txBox="1"/>
-          <p:nvPr/>
-        </p:nvSpPr>
-        <p:spPr>
-          <a:xfrm>
-            <a:off x="548640" y="3060446"/>
-            <a:ext cx="8046720" cy="280797"/>
-          </a:xfrm>
-          <a:prstGeom prst="rect">
-            <a:avLst/>
-          </a:prstGeom>
-          <a:noFill/>
-        </p:spPr>
-        <p:txBody>
-          <a:bodyPr wrap="square" lIns="0" rIns="0" tIns="0" bIns="0">
-            <a:noAutofit/>
-          </a:bodyPr>
-          <a:lstStyle/>
-          <a:p>
-            <a:pPr algn="l">
-              <a:lnSpc>
-                <a:spcPts val="1995"/>
-              </a:lnSpc>
-              <a:spcBef>
-                <a:spcPts val="0"/>
-              </a:spcBef>
-              <a:spcAft>
-                <a:spcPts val="0"/>
-              </a:spcAft>
-              <a:buNone/>
-              <a:defRPr sz="1750" b="0">
-                <a:solidFill>
-                  <a:srgbClr val="303437"/>
-                </a:solidFill>
-                <a:latin typeface="Noto Sans"/>
-              </a:defRPr>
-            </a:pPr>
-            <a:r>
-              <a:rPr sz="1750" b="1" lang="ja-JP" altLang="en-US">
-                <a:solidFill>
-                  <a:srgbClr val="303437"/>
-                </a:solidFill>
-                <a:latin typeface="Noto Sans"/>
-                <a:ea typeface="Noto Sans CJK JP"/>
-                <a:cs typeface="Noto Sans"/>
-              </a:rPr>
-              <a:t>CLEVA Scenarios — HELM v0.4.0</a:t>
-            </a:r>
-          </a:p>
-        </p:txBody>
-      </p:sp>
-      <p:sp>
-        <p:nvSpPr>
-          <p:cNvPr id="9" name="TextBox 8"/>
-          <p:cNvSpPr txBox="1"/>
-          <p:nvPr/>
-        </p:nvSpPr>
-        <p:spPr>
-          <a:xfrm>
-            <a:off x="548640" y="3379343"/>
-            <a:ext cx="8046720" cy="193929"/>
-          </a:xfrm>
-          <a:prstGeom prst="rect">
-            <a:avLst/>
-          </a:prstGeom>
-          <a:noFill/>
-        </p:spPr>
-        <p:txBody>
-          <a:bodyPr wrap="square" lIns="0" rIns="0" tIns="0" bIns="0">
-            <a:noAutofit/>
-          </a:bodyPr>
-          <a:lstStyle/>
-          <a:p>
-            <a:pPr algn="l">
-              <a:lnSpc>
-                <a:spcPts val="1311"/>
-              </a:lnSpc>
-              <a:spcBef>
-                <a:spcPts val="0"/>
-              </a:spcBef>
-              <a:spcAft>
-                <a:spcPts val="0"/>
-              </a:spcAft>
-              <a:buNone/>
-              <a:defRPr sz="1150" b="0">
-                <a:solidFill>
-                  <a:srgbClr val="303437"/>
-                </a:solidFill>
-                <a:latin typeface="Noto Sans"/>
-              </a:defRPr>
-            </a:pPr>
-            <a:r>
-              <a:rPr sz="1150" b="0" lang="ja-JP" altLang="en-US">
-                <a:solidFill>
-                  <a:srgbClr val="626669"/>
-                </a:solidFill>
-                <a:latin typeface="Noto Sans"/>
-                <a:ea typeface="Noto Sans CJK JP"/>
-                <a:cs typeface="Noto Sans"/>
-              </a:rPr>
-              <a:t>Stanford CRFM (n.d.). HELM。参照2026-10-19。</a:t>
-            </a:r>
-          </a:p>
-        </p:txBody>
-      </p:sp>
-      <p:sp>
-        <p:nvSpPr>
-          <p:cNvPr id="10" name="TextBox 9"/>
-          <p:cNvSpPr txBox="1"/>
-          <p:nvPr/>
-        </p:nvSpPr>
-        <p:spPr>
-          <a:xfrm>
-            <a:off x="548640" y="3624072"/>
-            <a:ext cx="8046720" cy="490727"/>
-          </a:xfrm>
-          <a:prstGeom prst="rect">
-            <a:avLst/>
-          </a:prstGeom>
-          <a:noFill/>
-        </p:spPr>
-        <p:txBody>
-          <a:bodyPr wrap="square" lIns="0" rIns="0" tIns="0" bIns="0">
-            <a:noAutofit/>
-          </a:bodyPr>
-          <a:lstStyle/>
-          <a:p>
-            <a:pPr algn="l">
-              <a:lnSpc>
-                <a:spcPts val="1823"/>
-              </a:lnSpc>
-              <a:spcBef>
-                <a:spcPts val="0"/>
-              </a:spcBef>
-              <a:spcAft>
-                <a:spcPts val="0"/>
-              </a:spcAft>
-              <a:buNone/>
-              <a:defRPr sz="1600" b="0">
-                <a:solidFill>
-                  <a:srgbClr val="303437"/>
-                </a:solidFill>
-                <a:latin typeface="Noto Sans"/>
-              </a:defRPr>
-            </a:pPr>
-            <a:r>
-              <a:rPr sz="1600" b="0" lang="ja-JP" altLang="en-US">
-                <a:solidFill>
-                  <a:srgbClr val="303437"/>
-                </a:solidFill>
-                <a:latin typeface="Noto Sans"/>
-                <a:ea typeface="Noto Sans CJK JP"/>
-                <a:cs typeface="Noto Sans"/>
-              </a:rPr>
-              <a:t>CLEVAのデータとテンプレートを読み、入力・選択肢・正解をHELMのInstanceへ変換する。</a:t>
-            </a:r>
-          </a:p>
-        </p:txBody>
-      </p:sp>
-      <p:sp>
-        <p:nvSpPr>
-          <p:cNvPr id="11" name="TextBox 10"/>
-          <p:cNvSpPr txBox="1"/>
-          <p:nvPr/>
-        </p:nvSpPr>
-        <p:spPr>
-          <a:xfrm>
-            <a:off x="548640" y="4165600"/>
-            <a:ext cx="8046720" cy="179450"/>
-          </a:xfrm>
-          <a:prstGeom prst="rect">
-            <a:avLst/>
-          </a:prstGeom>
-          <a:noFill/>
-        </p:spPr>
-        <p:txBody>
-          <a:bodyPr wrap="square" lIns="0" rIns="0" tIns="0" bIns="0">
-            <a:noAutofit/>
-          </a:bodyPr>
-          <a:lstStyle/>
-          <a:p>
-            <a:pPr algn="l">
-              <a:lnSpc>
-                <a:spcPts val="1197"/>
-              </a:lnSpc>
-              <a:spcBef>
-                <a:spcPts val="0"/>
-              </a:spcBef>
-              <a:spcAft>
-                <a:spcPts val="0"/>
-              </a:spcAft>
-              <a:buNone/>
-              <a:defRPr sz="1050" b="0">
-                <a:solidFill>
-                  <a:srgbClr val="303437"/>
-                </a:solidFill>
-                <a:latin typeface="Noto Sans"/>
-              </a:defRPr>
-            </a:pPr>
-            <a:r>
-              <a:rPr sz="1050" b="0" lang="ja-JP" altLang="en-US">
-                <a:solidFill>
-                  <a:srgbClr val="626669"/>
-                </a:solidFill>
-                <a:latin typeface="Noto Sans"/>
-                <a:ea typeface="Noto Sans CJK JP"/>
-                <a:cs typeface="Noto Sans"/>
-                <a:hlinkClick r:id="rId3"/>
-              </a:rPr>
-              <a:t>https://github.com/stanford-crfm/helm/blob/v0.4.0/src/helm/benchmark/scenarios/cleva_scenario.py</a:t>
             </a:r>
           </a:p>
         </p:txBody>
